--- a/iaq-deck/template/IAQ-Master-Template-Examples.pptx
+++ b/iaq-deck/template/IAQ-Master-Template-Examples.pptx
@@ -40,45 +40,51 @@
     <p:sldId id="288" r:id="rId39"/>
     <p:sldId id="289" r:id="rId40"/>
     <p:sldId id="290" r:id="rId41"/>
+    <p:sldId id="291" r:id="rId42"/>
+    <p:sldId id="292" r:id="rId43"/>
+    <p:sldId id="293" r:id="rId44"/>
+    <p:sldId id="294" r:id="rId45"/>
+    <p:sldId id="295" r:id="rId46"/>
+    <p:sldId id="296" r:id="rId47"/>
   </p:sldIdLst>
   <p:sldSz cx="12192000" cy="6858000" type="screen4x3"/>
   <p:notesSz cx="6858000" cy="9144000"/>
   <p:embeddedFontLst>
     <p:embeddedFont>
       <p:font typeface="League Spartan" pitchFamily="34" charset="0"/>
-      <p:regular r:id="rId42"/>
+      <p:regular r:id="rId48"/>
     </p:embeddedFont>
     <p:embeddedFont>
       <p:font typeface="League Spartan Medium" pitchFamily="34" charset="0"/>
-      <p:regular r:id="rId43"/>
+      <p:regular r:id="rId49"/>
     </p:embeddedFont>
     <p:embeddedFont>
       <p:font typeface="League Spartan SemiBold" pitchFamily="34" charset="0"/>
-      <p:regular r:id="rId44"/>
+      <p:regular r:id="rId50"/>
     </p:embeddedFont>
     <p:embeddedFont>
       <p:font typeface="Poppins Medium" pitchFamily="34" charset="0"/>
-      <p:regular r:id="rId45"/>
+      <p:regular r:id="rId51"/>
     </p:embeddedFont>
     <p:embeddedFont>
       <p:font typeface="Poppins SemiBold" pitchFamily="34" charset="0"/>
-      <p:regular r:id="rId46"/>
+      <p:regular r:id="rId52"/>
     </p:embeddedFont>
     <p:embeddedFont>
       <p:font typeface="Poppins" pitchFamily="34" charset="0"/>
-      <p:bold r:id="rId47"/>
+      <p:bold r:id="rId53"/>
     </p:embeddedFont>
     <p:embeddedFont>
       <p:font typeface="Urbanist" pitchFamily="34" charset="0"/>
-      <p:regular r:id="rId48"/>
+      <p:regular r:id="rId54"/>
     </p:embeddedFont>
     <p:embeddedFont>
       <p:font typeface="Urbanist Medium" pitchFamily="34" charset="0"/>
-      <p:regular r:id="rId49"/>
+      <p:regular r:id="rId55"/>
     </p:embeddedFont>
     <p:embeddedFont>
       <p:font typeface="Urbanist SemiBold" pitchFamily="34" charset="0"/>
-      <p:regular r:id="rId50"/>
+      <p:regular r:id="rId56"/>
     </p:embeddedFont>
   </p:embeddedFontLst>
   <p:defaultTextStyle>
@@ -5250,6 +5256,339 @@
         </p:nvSpPr>
         <p:spPr>
           <a:xfrm>
+            <a:off x="6178550" y="4079875"/>
+            <a:ext cx="292100" cy="76200"/>
+          </a:xfrm>
+          <a:prstGeom prst="rect">
+            <a:avLst/>
+          </a:prstGeom>
+          <a:noFill/>
+        </p:spPr>
+        <p:txBody>
+          <a:bodyPr wrap="none" lIns="0" rIns="0" tIns="0" bIns="0" anchor="ctr">
+            <a:noAutofit/>
+          </a:bodyPr>
+          <a:lstStyle/>
+          <a:p>
+            <a:pPr algn="l"/>
+            <a:r>
+              <a:rPr sz="650" b="0" i="0" spc="91">
+                <a:solidFill>
+                  <a:srgbClr val="EC2326"/>
+                </a:solidFill>
+                <a:latin typeface="League Spartan SemiBold"/>
+                <a:ea typeface="League Spartan SemiBold"/>
+                <a:cs typeface="League Spartan SemiBold"/>
+              </a:rPr>
+              <a:t>18</a:t>
+            </a:r>
+          </a:p>
+        </p:txBody>
+      </p:sp>
+      <p:sp>
+        <p:nvSpPr>
+          <p:cNvPr id="60" name="TextBox 59"/>
+          <p:cNvSpPr txBox="1"/>
+          <p:nvPr/>
+        </p:nvSpPr>
+        <p:spPr>
+          <a:xfrm>
+            <a:off x="6572250" y="4022725"/>
+            <a:ext cx="1587500" cy="152400"/>
+          </a:xfrm>
+          <a:prstGeom prst="rect">
+            <a:avLst/>
+          </a:prstGeom>
+          <a:noFill/>
+        </p:spPr>
+        <p:txBody>
+          <a:bodyPr wrap="none" lIns="0" rIns="0" tIns="0" bIns="0" anchor="ctr">
+            <a:noAutofit/>
+          </a:bodyPr>
+          <a:lstStyle/>
+          <a:p>
+            <a:pPr algn="l"/>
+            <a:r>
+              <a:rPr sz="850" b="0" i="0" spc="-17">
+                <a:solidFill>
+                  <a:srgbClr val="101A2B"/>
+                </a:solidFill>
+                <a:latin typeface="Poppins SemiBold"/>
+                <a:ea typeface="Poppins SemiBold"/>
+                <a:cs typeface="Poppins SemiBold"/>
+              </a:rPr>
+              <a:t>Agenda</a:t>
+            </a:r>
+          </a:p>
+        </p:txBody>
+      </p:sp>
+      <p:sp>
+        <p:nvSpPr>
+          <p:cNvPr id="61" name="TextBox 60"/>
+          <p:cNvSpPr txBox="1"/>
+          <p:nvPr/>
+        </p:nvSpPr>
+        <p:spPr>
+          <a:xfrm>
+            <a:off x="8261350" y="4048125"/>
+            <a:ext cx="3321050" cy="114300"/>
+          </a:xfrm>
+          <a:prstGeom prst="rect">
+            <a:avLst/>
+          </a:prstGeom>
+          <a:noFill/>
+        </p:spPr>
+        <p:txBody>
+          <a:bodyPr wrap="none" lIns="0" rIns="0" tIns="0" bIns="0" anchor="ctr">
+            <a:noAutofit/>
+          </a:bodyPr>
+          <a:lstStyle/>
+          <a:p>
+            <a:pPr algn="l"/>
+            <a:r>
+              <a:rPr sz="720" b="0" i="0">
+                <a:solidFill>
+                  <a:srgbClr val="64707A"/>
+                </a:solidFill>
+                <a:latin typeface="Urbanist"/>
+                <a:ea typeface="Urbanist"/>
+                <a:cs typeface="Urbanist"/>
+              </a:rPr>
+              <a:t>What the deck covers, before it covers it.</a:t>
+            </a:r>
+          </a:p>
+        </p:txBody>
+      </p:sp>
+      <p:sp>
+        <p:nvSpPr>
+          <p:cNvPr id="62" name="TextBox 61"/>
+          <p:cNvSpPr txBox="1"/>
+          <p:nvPr/>
+        </p:nvSpPr>
+        <p:spPr>
+          <a:xfrm>
+            <a:off x="609600" y="4362850"/>
+            <a:ext cx="292100" cy="76200"/>
+          </a:xfrm>
+          <a:prstGeom prst="rect">
+            <a:avLst/>
+          </a:prstGeom>
+          <a:noFill/>
+        </p:spPr>
+        <p:txBody>
+          <a:bodyPr wrap="none" lIns="0" rIns="0" tIns="0" bIns="0" anchor="ctr">
+            <a:noAutofit/>
+          </a:bodyPr>
+          <a:lstStyle/>
+          <a:p>
+            <a:pPr algn="l"/>
+            <a:r>
+              <a:rPr sz="650" b="0" i="0" spc="91">
+                <a:solidFill>
+                  <a:srgbClr val="EC2326"/>
+                </a:solidFill>
+                <a:latin typeface="League Spartan SemiBold"/>
+                <a:ea typeface="League Spartan SemiBold"/>
+                <a:cs typeface="League Spartan SemiBold"/>
+              </a:rPr>
+              <a:t>19</a:t>
+            </a:r>
+          </a:p>
+        </p:txBody>
+      </p:sp>
+      <p:sp>
+        <p:nvSpPr>
+          <p:cNvPr id="63" name="TextBox 62"/>
+          <p:cNvSpPr txBox="1"/>
+          <p:nvPr/>
+        </p:nvSpPr>
+        <p:spPr>
+          <a:xfrm>
+            <a:off x="1003300" y="4305700"/>
+            <a:ext cx="1587500" cy="152400"/>
+          </a:xfrm>
+          <a:prstGeom prst="rect">
+            <a:avLst/>
+          </a:prstGeom>
+          <a:noFill/>
+        </p:spPr>
+        <p:txBody>
+          <a:bodyPr wrap="none" lIns="0" rIns="0" tIns="0" bIns="0" anchor="ctr">
+            <a:noAutofit/>
+          </a:bodyPr>
+          <a:lstStyle/>
+          <a:p>
+            <a:pPr algn="l"/>
+            <a:r>
+              <a:rPr sz="850" b="0" i="0" spc="-17">
+                <a:solidFill>
+                  <a:srgbClr val="101A2B"/>
+                </a:solidFill>
+                <a:latin typeface="Poppins SemiBold"/>
+                <a:ea typeface="Poppins SemiBold"/>
+                <a:cs typeface="Poppins SemiBold"/>
+              </a:rPr>
+              <a:t>Quote</a:t>
+            </a:r>
+          </a:p>
+        </p:txBody>
+      </p:sp>
+      <p:sp>
+        <p:nvSpPr>
+          <p:cNvPr id="64" name="TextBox 63"/>
+          <p:cNvSpPr txBox="1"/>
+          <p:nvPr/>
+        </p:nvSpPr>
+        <p:spPr>
+          <a:xfrm>
+            <a:off x="2692400" y="4331100"/>
+            <a:ext cx="3321050" cy="114300"/>
+          </a:xfrm>
+          <a:prstGeom prst="rect">
+            <a:avLst/>
+          </a:prstGeom>
+          <a:noFill/>
+        </p:spPr>
+        <p:txBody>
+          <a:bodyPr wrap="none" lIns="0" rIns="0" tIns="0" bIns="0" anchor="ctr">
+            <a:noAutofit/>
+          </a:bodyPr>
+          <a:lstStyle/>
+          <a:p>
+            <a:pPr algn="l"/>
+            <a:r>
+              <a:rPr sz="720" b="0" i="0">
+                <a:solidFill>
+                  <a:srgbClr val="64707A"/>
+                </a:solidFill>
+                <a:latin typeface="Urbanist"/>
+                <a:ea typeface="Urbanist"/>
+                <a:cs typeface="Urbanist"/>
+              </a:rPr>
+              <a:t>Let a client, or the board, say it instead of you.</a:t>
+            </a:r>
+          </a:p>
+        </p:txBody>
+      </p:sp>
+      <p:sp>
+        <p:nvSpPr>
+          <p:cNvPr id="65" name="TextBox 64"/>
+          <p:cNvSpPr txBox="1"/>
+          <p:nvPr/>
+        </p:nvSpPr>
+        <p:spPr>
+          <a:xfrm>
+            <a:off x="6178550" y="4362850"/>
+            <a:ext cx="292100" cy="76200"/>
+          </a:xfrm>
+          <a:prstGeom prst="rect">
+            <a:avLst/>
+          </a:prstGeom>
+          <a:noFill/>
+        </p:spPr>
+        <p:txBody>
+          <a:bodyPr wrap="none" lIns="0" rIns="0" tIns="0" bIns="0" anchor="ctr">
+            <a:noAutofit/>
+          </a:bodyPr>
+          <a:lstStyle/>
+          <a:p>
+            <a:pPr algn="l"/>
+            <a:r>
+              <a:rPr sz="650" b="0" i="0" spc="91">
+                <a:solidFill>
+                  <a:srgbClr val="EC2326"/>
+                </a:solidFill>
+                <a:latin typeface="League Spartan SemiBold"/>
+                <a:ea typeface="League Spartan SemiBold"/>
+                <a:cs typeface="League Spartan SemiBold"/>
+              </a:rPr>
+              <a:t>20</a:t>
+            </a:r>
+          </a:p>
+        </p:txBody>
+      </p:sp>
+      <p:sp>
+        <p:nvSpPr>
+          <p:cNvPr id="66" name="TextBox 65"/>
+          <p:cNvSpPr txBox="1"/>
+          <p:nvPr/>
+        </p:nvSpPr>
+        <p:spPr>
+          <a:xfrm>
+            <a:off x="6572250" y="4305700"/>
+            <a:ext cx="1587500" cy="152400"/>
+          </a:xfrm>
+          <a:prstGeom prst="rect">
+            <a:avLst/>
+          </a:prstGeom>
+          <a:noFill/>
+        </p:spPr>
+        <p:txBody>
+          <a:bodyPr wrap="none" lIns="0" rIns="0" tIns="0" bIns="0" anchor="ctr">
+            <a:noAutofit/>
+          </a:bodyPr>
+          <a:lstStyle/>
+          <a:p>
+            <a:pPr algn="l"/>
+            <a:r>
+              <a:rPr sz="850" b="0" i="0" spc="-17">
+                <a:solidFill>
+                  <a:srgbClr val="101A2B"/>
+                </a:solidFill>
+                <a:latin typeface="Poppins SemiBold"/>
+                <a:ea typeface="Poppins SemiBold"/>
+                <a:cs typeface="Poppins SemiBold"/>
+              </a:rPr>
+              <a:t>Before and after</a:t>
+            </a:r>
+          </a:p>
+        </p:txBody>
+      </p:sp>
+      <p:sp>
+        <p:nvSpPr>
+          <p:cNvPr id="67" name="TextBox 66"/>
+          <p:cNvSpPr txBox="1"/>
+          <p:nvPr/>
+        </p:nvSpPr>
+        <p:spPr>
+          <a:xfrm>
+            <a:off x="8261350" y="4331100"/>
+            <a:ext cx="3321050" cy="114300"/>
+          </a:xfrm>
+          <a:prstGeom prst="rect">
+            <a:avLst/>
+          </a:prstGeom>
+          <a:noFill/>
+        </p:spPr>
+        <p:txBody>
+          <a:bodyPr wrap="none" lIns="0" rIns="0" tIns="0" bIns="0" anchor="ctr">
+            <a:noAutofit/>
+          </a:bodyPr>
+          <a:lstStyle/>
+          <a:p>
+            <a:pPr algn="l"/>
+            <a:r>
+              <a:rPr sz="720" b="0" i="0">
+                <a:solidFill>
+                  <a:srgbClr val="64707A"/>
+                </a:solidFill>
+                <a:latin typeface="Urbanist"/>
+                <a:ea typeface="Urbanist"/>
+                <a:cs typeface="Urbanist"/>
+              </a:rPr>
+              <a:t>Two states of the same thing, side by side.</a:t>
+            </a:r>
+          </a:p>
+        </p:txBody>
+      </p:sp>
+      <p:sp>
+        <p:nvSpPr>
+          <p:cNvPr id="68" name="TextBox 67"/>
+          <p:cNvSpPr txBox="1"/>
+          <p:nvPr/>
+        </p:nvSpPr>
+        <p:spPr>
+          <a:xfrm>
             <a:off x="609600" y="6445250"/>
             <a:ext cx="138112" cy="76200"/>
           </a:xfrm>
@@ -5281,7 +5620,7 @@
       </p:sp>
       <p:sp>
         <p:nvSpPr>
-          <p:cNvPr id="60" name="TextBox 59"/>
+          <p:cNvPr id="69" name="TextBox 68"/>
           <p:cNvSpPr txBox="1"/>
           <p:nvPr/>
         </p:nvSpPr>
@@ -43372,6 +43711,4296 @@
 </p:sld>
 </file>
 
+<file path=ppt/slides/slide36.xml><?xml version="1.0" encoding="utf-8"?>
+<p:sld xmlns:a="http://schemas.openxmlformats.org/drawingml/2006/main" xmlns:p="http://schemas.openxmlformats.org/presentationml/2006/main" xmlns:r="http://schemas.openxmlformats.org/officeDocument/2006/relationships">
+  <p:cSld>
+    <p:spTree>
+      <p:nvGrpSpPr>
+        <p:cNvPr id="1" name=""/>
+        <p:cNvGrpSpPr/>
+        <p:nvPr/>
+      </p:nvGrpSpPr>
+      <p:grpSpPr/>
+      <p:sp>
+        <p:nvSpPr>
+          <p:cNvPr id="2" name="Rectangle 1"/>
+          <p:cNvSpPr/>
+          <p:nvPr/>
+        </p:nvSpPr>
+        <p:spPr>
+          <a:xfrm>
+            <a:off x="0" y="0"/>
+            <a:ext cx="12192000" cy="6858000"/>
+          </a:xfrm>
+          <a:prstGeom prst="rect">
+            <a:avLst/>
+          </a:prstGeom>
+          <a:solidFill>
+            <a:srgbClr val="F6F7F9"/>
+          </a:solidFill>
+          <a:ln>
+            <a:noFill/>
+          </a:ln>
+          <a:effectLst/>
+        </p:spPr>
+        <p:txBody>
+          <a:bodyPr rtlCol="0" anchor="ctr"/>
+          <a:lstStyle/>
+          <a:p>
+            <a:pPr algn="ctr"/>
+          </a:p>
+        </p:txBody>
+      </p:sp>
+      <p:sp>
+        <p:nvSpPr>
+          <p:cNvPr id="3" name="Rectangle 2"/>
+          <p:cNvSpPr/>
+          <p:nvPr/>
+        </p:nvSpPr>
+        <p:spPr>
+          <a:xfrm>
+            <a:off x="609600" y="381000"/>
+            <a:ext cx="235350" cy="165100"/>
+          </a:xfrm>
+          <a:prstGeom prst="rect">
+            <a:avLst/>
+          </a:prstGeom>
+          <a:solidFill>
+            <a:srgbClr val="EC2326"/>
+          </a:solidFill>
+          <a:ln>
+            <a:noFill/>
+          </a:ln>
+          <a:effectLst/>
+        </p:spPr>
+        <p:txBody>
+          <a:bodyPr rtlCol="0" anchor="ctr"/>
+          <a:lstStyle/>
+          <a:p>
+            <a:pPr algn="ctr"/>
+          </a:p>
+        </p:txBody>
+      </p:sp>
+      <p:sp>
+        <p:nvSpPr>
+          <p:cNvPr id="4" name="TextBox 3"/>
+          <p:cNvSpPr txBox="1"/>
+          <p:nvPr/>
+        </p:nvSpPr>
+        <p:spPr>
+          <a:xfrm>
+            <a:off x="609600" y="425450"/>
+            <a:ext cx="235350" cy="82550"/>
+          </a:xfrm>
+          <a:prstGeom prst="rect">
+            <a:avLst/>
+          </a:prstGeom>
+          <a:noFill/>
+        </p:spPr>
+        <p:txBody>
+          <a:bodyPr wrap="none" lIns="69850" rIns="69850" tIns="0" bIns="0" anchor="ctr">
+            <a:noAutofit/>
+          </a:bodyPr>
+          <a:lstStyle/>
+          <a:p>
+            <a:pPr algn="l"/>
+            <a:r>
+              <a:rPr sz="700" b="0" i="0" spc="70">
+                <a:solidFill>
+                  <a:srgbClr val="FFFFFF"/>
+                </a:solidFill>
+                <a:latin typeface="League Spartan SemiBold"/>
+                <a:ea typeface="League Spartan SemiBold"/>
+                <a:cs typeface="League Spartan SemiBold"/>
+              </a:rPr>
+              <a:t>18</a:t>
+            </a:r>
+          </a:p>
+        </p:txBody>
+      </p:sp>
+      <p:sp>
+        <p:nvSpPr>
+          <p:cNvPr id="5" name="TextBox 4"/>
+          <p:cNvSpPr txBox="1"/>
+          <p:nvPr/>
+        </p:nvSpPr>
+        <p:spPr>
+          <a:xfrm>
+            <a:off x="946550" y="414338"/>
+            <a:ext cx="1541564" cy="88900"/>
+          </a:xfrm>
+          <a:prstGeom prst="rect">
+            <a:avLst/>
+          </a:prstGeom>
+          <a:noFill/>
+        </p:spPr>
+        <p:txBody>
+          <a:bodyPr wrap="none" lIns="0" rIns="0" tIns="0" bIns="0" anchor="ctr">
+            <a:noAutofit/>
+          </a:bodyPr>
+          <a:lstStyle/>
+          <a:p>
+            <a:pPr algn="l"/>
+            <a:r>
+              <a:rPr sz="780" b="0" i="0" spc="186">
+                <a:solidFill>
+                  <a:srgbClr val="101A2B"/>
+                </a:solidFill>
+                <a:latin typeface="League Spartan SemiBold"/>
+                <a:ea typeface="League Spartan SemiBold"/>
+                <a:cs typeface="League Spartan SemiBold"/>
+              </a:rPr>
+              <a:t>PART 01 · THE COMPANY</a:t>
+            </a:r>
+          </a:p>
+        </p:txBody>
+      </p:sp>
+      <p:pic>
+        <p:nvPicPr>
+          <p:cNvPr id="6" name="Picture 5" descr="iaq-logo-tag.png"/>
+          <p:cNvPicPr>
+            <a:picLocks noChangeAspect="1"/>
+          </p:cNvPicPr>
+          <p:nvPr/>
+        </p:nvPicPr>
+        <p:blipFill>
+          <a:blip r:embed="rId2"/>
+          <a:stretch>
+            <a:fillRect/>
+          </a:stretch>
+        </p:blipFill>
+        <p:spPr>
+          <a:xfrm>
+            <a:off x="10947400" y="304800"/>
+            <a:ext cx="635000" cy="317500"/>
+          </a:xfrm>
+          <a:prstGeom prst="rect">
+            <a:avLst/>
+          </a:prstGeom>
+        </p:spPr>
+      </p:pic>
+      <p:sp>
+        <p:nvSpPr>
+          <p:cNvPr id="7" name="Rectangle 6"/>
+          <p:cNvSpPr/>
+          <p:nvPr/>
+        </p:nvSpPr>
+        <p:spPr>
+          <a:xfrm>
+            <a:off x="609600" y="1438872"/>
+            <a:ext cx="10972800" cy="6350"/>
+          </a:xfrm>
+          <a:prstGeom prst="rect">
+            <a:avLst/>
+          </a:prstGeom>
+          <a:solidFill>
+            <a:srgbClr val="D5DBE2"/>
+          </a:solidFill>
+          <a:ln>
+            <a:noFill/>
+          </a:ln>
+          <a:effectLst/>
+        </p:spPr>
+        <p:txBody>
+          <a:bodyPr rtlCol="0" anchor="ctr"/>
+          <a:lstStyle/>
+          <a:p>
+            <a:pPr algn="ctr"/>
+          </a:p>
+        </p:txBody>
+      </p:sp>
+      <p:sp>
+        <p:nvSpPr>
+          <p:cNvPr id="8" name="TextBox 7"/>
+          <p:cNvSpPr txBox="1"/>
+          <p:nvPr/>
+        </p:nvSpPr>
+        <p:spPr>
+          <a:xfrm>
+            <a:off x="609600" y="768350"/>
+            <a:ext cx="10972800" cy="304800"/>
+          </a:xfrm>
+          <a:prstGeom prst="rect">
+            <a:avLst/>
+          </a:prstGeom>
+          <a:noFill/>
+        </p:spPr>
+        <p:txBody>
+          <a:bodyPr wrap="none" lIns="0" rIns="0" tIns="0" bIns="0" anchor="ctr">
+            <a:noAutofit/>
+          </a:bodyPr>
+          <a:lstStyle/>
+          <a:p>
+            <a:pPr algn="l"/>
+            <a:r>
+              <a:rPr sz="1700" b="0" i="0" spc="-34">
+                <a:solidFill>
+                  <a:srgbClr val="EC2326"/>
+                </a:solidFill>
+                <a:latin typeface="Poppins SemiBold"/>
+                <a:ea typeface="Poppins SemiBold"/>
+                <a:cs typeface="Poppins SemiBold"/>
+              </a:rPr>
+              <a:t>What follows</a:t>
+            </a:r>
+          </a:p>
+        </p:txBody>
+      </p:sp>
+      <p:sp>
+        <p:nvSpPr>
+          <p:cNvPr id="9" name="TextBox 8"/>
+          <p:cNvSpPr txBox="1"/>
+          <p:nvPr/>
+        </p:nvSpPr>
+        <p:spPr>
+          <a:xfrm>
+            <a:off x="609600" y="1118197"/>
+            <a:ext cx="6985000" cy="146050"/>
+          </a:xfrm>
+          <a:prstGeom prst="rect">
+            <a:avLst/>
+          </a:prstGeom>
+          <a:noFill/>
+        </p:spPr>
+        <p:txBody>
+          <a:bodyPr wrap="none" lIns="0" rIns="0" tIns="0" bIns="0" anchor="ctr">
+            <a:noAutofit/>
+          </a:bodyPr>
+          <a:lstStyle/>
+          <a:p>
+            <a:pPr algn="l"/>
+            <a:r>
+              <a:rPr sz="950" b="0" i="0">
+                <a:solidFill>
+                  <a:srgbClr val="64707A"/>
+                </a:solidFill>
+                <a:latin typeface="Urbanist"/>
+                <a:ea typeface="Urbanist"/>
+                <a:cs typeface="Urbanist"/>
+              </a:rPr>
+              <a:t>Three parts, and what each one answers.</a:t>
+            </a:r>
+          </a:p>
+        </p:txBody>
+      </p:sp>
+      <p:sp>
+        <p:nvSpPr>
+          <p:cNvPr id="10" name="TextBox 9"/>
+          <p:cNvSpPr txBox="1"/>
+          <p:nvPr/>
+        </p:nvSpPr>
+        <p:spPr>
+          <a:xfrm>
+            <a:off x="609600" y="1631950"/>
+            <a:ext cx="3547466" cy="463550"/>
+          </a:xfrm>
+          <a:prstGeom prst="rect">
+            <a:avLst/>
+          </a:prstGeom>
+          <a:noFill/>
+        </p:spPr>
+        <p:txBody>
+          <a:bodyPr wrap="none" lIns="0" rIns="0" tIns="0" bIns="0" anchor="ctr">
+            <a:noAutofit/>
+          </a:bodyPr>
+          <a:lstStyle/>
+          <a:p>
+            <a:pPr algn="l"/>
+            <a:r>
+              <a:rPr sz="2600" b="1" i="0" spc="-104">
+                <a:solidFill>
+                  <a:srgbClr val="EC2326"/>
+                </a:solidFill>
+                <a:latin typeface="Poppins"/>
+                <a:ea typeface="Poppins"/>
+                <a:cs typeface="Poppins"/>
+              </a:rPr>
+              <a:t>01</a:t>
+            </a:r>
+          </a:p>
+        </p:txBody>
+      </p:sp>
+      <p:sp>
+        <p:nvSpPr>
+          <p:cNvPr id="11" name="Rectangle 10"/>
+          <p:cNvSpPr/>
+          <p:nvPr/>
+        </p:nvSpPr>
+        <p:spPr>
+          <a:xfrm>
+            <a:off x="609600" y="2397722"/>
+            <a:ext cx="3547466" cy="12700"/>
+          </a:xfrm>
+          <a:prstGeom prst="rect">
+            <a:avLst/>
+          </a:prstGeom>
+          <a:solidFill>
+            <a:srgbClr val="EC2326"/>
+          </a:solidFill>
+          <a:ln>
+            <a:noFill/>
+          </a:ln>
+          <a:effectLst/>
+        </p:spPr>
+        <p:txBody>
+          <a:bodyPr rtlCol="0" anchor="ctr"/>
+          <a:lstStyle/>
+          <a:p>
+            <a:pPr algn="ctr"/>
+          </a:p>
+        </p:txBody>
+      </p:sp>
+      <p:sp>
+        <p:nvSpPr>
+          <p:cNvPr id="12" name="TextBox 11"/>
+          <p:cNvSpPr txBox="1"/>
+          <p:nvPr/>
+        </p:nvSpPr>
+        <p:spPr>
+          <a:xfrm>
+            <a:off x="609600" y="2114550"/>
+            <a:ext cx="3547466" cy="209550"/>
+          </a:xfrm>
+          <a:prstGeom prst="rect">
+            <a:avLst/>
+          </a:prstGeom>
+          <a:noFill/>
+        </p:spPr>
+        <p:txBody>
+          <a:bodyPr wrap="none" lIns="0" rIns="0" tIns="0" bIns="0" anchor="ctr">
+            <a:noAutofit/>
+          </a:bodyPr>
+          <a:lstStyle/>
+          <a:p>
+            <a:pPr algn="l"/>
+            <a:r>
+              <a:rPr sz="1200" b="0" i="0" spc="-24">
+                <a:solidFill>
+                  <a:srgbClr val="101A2B"/>
+                </a:solidFill>
+                <a:latin typeface="Poppins SemiBold"/>
+                <a:ea typeface="Poppins SemiBold"/>
+                <a:cs typeface="Poppins SemiBold"/>
+              </a:rPr>
+              <a:t>The Company</a:t>
+            </a:r>
+          </a:p>
+        </p:txBody>
+      </p:sp>
+      <p:sp>
+        <p:nvSpPr>
+          <p:cNvPr id="13" name="TextBox 12"/>
+          <p:cNvSpPr txBox="1"/>
+          <p:nvPr/>
+        </p:nvSpPr>
+        <p:spPr>
+          <a:xfrm>
+            <a:off x="609600" y="2562822"/>
+            <a:ext cx="279400" cy="76200"/>
+          </a:xfrm>
+          <a:prstGeom prst="rect">
+            <a:avLst/>
+          </a:prstGeom>
+          <a:noFill/>
+        </p:spPr>
+        <p:txBody>
+          <a:bodyPr wrap="none" lIns="0" rIns="0" tIns="0" bIns="0" anchor="ctr">
+            <a:noAutofit/>
+          </a:bodyPr>
+          <a:lstStyle/>
+          <a:p>
+            <a:pPr algn="l"/>
+            <a:r>
+              <a:rPr sz="620" b="0" i="0" spc="100">
+                <a:solidFill>
+                  <a:srgbClr val="EC2326"/>
+                </a:solidFill>
+                <a:latin typeface="League Spartan SemiBold"/>
+                <a:ea typeface="League Spartan SemiBold"/>
+                <a:cs typeface="League Spartan SemiBold"/>
+              </a:rPr>
+              <a:t>01.1</a:t>
+            </a:r>
+          </a:p>
+        </p:txBody>
+      </p:sp>
+      <p:sp>
+        <p:nvSpPr>
+          <p:cNvPr id="14" name="TextBox 13"/>
+          <p:cNvSpPr txBox="1"/>
+          <p:nvPr/>
+        </p:nvSpPr>
+        <p:spPr>
+          <a:xfrm>
+            <a:off x="977900" y="2518372"/>
+            <a:ext cx="3179166" cy="127000"/>
+          </a:xfrm>
+          <a:prstGeom prst="rect">
+            <a:avLst/>
+          </a:prstGeom>
+          <a:noFill/>
+        </p:spPr>
+        <p:txBody>
+          <a:bodyPr wrap="none" lIns="0" rIns="0" tIns="0" bIns="0" anchor="ctr">
+            <a:noAutofit/>
+          </a:bodyPr>
+          <a:lstStyle/>
+          <a:p>
+            <a:pPr algn="l"/>
+            <a:r>
+              <a:rPr sz="850" b="0" i="0">
+                <a:solidFill>
+                  <a:srgbClr val="1E2A3D"/>
+                </a:solidFill>
+                <a:latin typeface="Urbanist Medium"/>
+                <a:ea typeface="Urbanist Medium"/>
+                <a:cs typeface="Urbanist Medium"/>
+              </a:rPr>
+              <a:t>Who we are and what we build</a:t>
+            </a:r>
+          </a:p>
+        </p:txBody>
+      </p:sp>
+      <p:sp>
+        <p:nvSpPr>
+          <p:cNvPr id="15" name="TextBox 14"/>
+          <p:cNvSpPr txBox="1"/>
+          <p:nvPr/>
+        </p:nvSpPr>
+        <p:spPr>
+          <a:xfrm>
+            <a:off x="609600" y="2779319"/>
+            <a:ext cx="279400" cy="76200"/>
+          </a:xfrm>
+          <a:prstGeom prst="rect">
+            <a:avLst/>
+          </a:prstGeom>
+          <a:noFill/>
+        </p:spPr>
+        <p:txBody>
+          <a:bodyPr wrap="none" lIns="0" rIns="0" tIns="0" bIns="0" anchor="ctr">
+            <a:noAutofit/>
+          </a:bodyPr>
+          <a:lstStyle/>
+          <a:p>
+            <a:pPr algn="l"/>
+            <a:r>
+              <a:rPr sz="620" b="0" i="0" spc="100">
+                <a:solidFill>
+                  <a:srgbClr val="EC2326"/>
+                </a:solidFill>
+                <a:latin typeface="League Spartan SemiBold"/>
+                <a:ea typeface="League Spartan SemiBold"/>
+                <a:cs typeface="League Spartan SemiBold"/>
+              </a:rPr>
+              <a:t>01.2</a:t>
+            </a:r>
+          </a:p>
+        </p:txBody>
+      </p:sp>
+      <p:sp>
+        <p:nvSpPr>
+          <p:cNvPr id="16" name="TextBox 15"/>
+          <p:cNvSpPr txBox="1"/>
+          <p:nvPr/>
+        </p:nvSpPr>
+        <p:spPr>
+          <a:xfrm>
+            <a:off x="977900" y="2734869"/>
+            <a:ext cx="3179166" cy="127000"/>
+          </a:xfrm>
+          <a:prstGeom prst="rect">
+            <a:avLst/>
+          </a:prstGeom>
+          <a:noFill/>
+        </p:spPr>
+        <p:txBody>
+          <a:bodyPr wrap="none" lIns="0" rIns="0" tIns="0" bIns="0" anchor="ctr">
+            <a:noAutofit/>
+          </a:bodyPr>
+          <a:lstStyle/>
+          <a:p>
+            <a:pPr algn="l"/>
+            <a:r>
+              <a:rPr sz="850" b="0" i="0">
+                <a:solidFill>
+                  <a:srgbClr val="1E2A3D"/>
+                </a:solidFill>
+                <a:latin typeface="Urbanist Medium"/>
+                <a:ea typeface="Urbanist Medium"/>
+                <a:cs typeface="Urbanist Medium"/>
+              </a:rPr>
+              <a:t>The numbers behind it</a:t>
+            </a:r>
+          </a:p>
+        </p:txBody>
+      </p:sp>
+      <p:sp>
+        <p:nvSpPr>
+          <p:cNvPr id="17" name="TextBox 16"/>
+          <p:cNvSpPr txBox="1"/>
+          <p:nvPr/>
+        </p:nvSpPr>
+        <p:spPr>
+          <a:xfrm>
+            <a:off x="609600" y="2995809"/>
+            <a:ext cx="279400" cy="76200"/>
+          </a:xfrm>
+          <a:prstGeom prst="rect">
+            <a:avLst/>
+          </a:prstGeom>
+          <a:noFill/>
+        </p:spPr>
+        <p:txBody>
+          <a:bodyPr wrap="none" lIns="0" rIns="0" tIns="0" bIns="0" anchor="ctr">
+            <a:noAutofit/>
+          </a:bodyPr>
+          <a:lstStyle/>
+          <a:p>
+            <a:pPr algn="l"/>
+            <a:r>
+              <a:rPr sz="620" b="0" i="0" spc="100">
+                <a:solidFill>
+                  <a:srgbClr val="EC2326"/>
+                </a:solidFill>
+                <a:latin typeface="League Spartan SemiBold"/>
+                <a:ea typeface="League Spartan SemiBold"/>
+                <a:cs typeface="League Spartan SemiBold"/>
+              </a:rPr>
+              <a:t>01.3</a:t>
+            </a:r>
+          </a:p>
+        </p:txBody>
+      </p:sp>
+      <p:sp>
+        <p:nvSpPr>
+          <p:cNvPr id="18" name="TextBox 17"/>
+          <p:cNvSpPr txBox="1"/>
+          <p:nvPr/>
+        </p:nvSpPr>
+        <p:spPr>
+          <a:xfrm>
+            <a:off x="977900" y="2951359"/>
+            <a:ext cx="3179166" cy="127000"/>
+          </a:xfrm>
+          <a:prstGeom prst="rect">
+            <a:avLst/>
+          </a:prstGeom>
+          <a:noFill/>
+        </p:spPr>
+        <p:txBody>
+          <a:bodyPr wrap="none" lIns="0" rIns="0" tIns="0" bIns="0" anchor="ctr">
+            <a:noAutofit/>
+          </a:bodyPr>
+          <a:lstStyle/>
+          <a:p>
+            <a:pPr algn="l"/>
+            <a:r>
+              <a:rPr sz="850" b="0" i="0">
+                <a:solidFill>
+                  <a:srgbClr val="1E2A3D"/>
+                </a:solidFill>
+                <a:latin typeface="Urbanist Medium"/>
+                <a:ea typeface="Urbanist Medium"/>
+                <a:cs typeface="Urbanist Medium"/>
+              </a:rPr>
+              <a:t>Thirty-one years of milestones</a:t>
+            </a:r>
+          </a:p>
+        </p:txBody>
+      </p:sp>
+      <p:sp>
+        <p:nvSpPr>
+          <p:cNvPr id="19" name="TextBox 18"/>
+          <p:cNvSpPr txBox="1"/>
+          <p:nvPr/>
+        </p:nvSpPr>
+        <p:spPr>
+          <a:xfrm>
+            <a:off x="609600" y="3212306"/>
+            <a:ext cx="279400" cy="76200"/>
+          </a:xfrm>
+          <a:prstGeom prst="rect">
+            <a:avLst/>
+          </a:prstGeom>
+          <a:noFill/>
+        </p:spPr>
+        <p:txBody>
+          <a:bodyPr wrap="none" lIns="0" rIns="0" tIns="0" bIns="0" anchor="ctr">
+            <a:noAutofit/>
+          </a:bodyPr>
+          <a:lstStyle/>
+          <a:p>
+            <a:pPr algn="l"/>
+            <a:r>
+              <a:rPr sz="620" b="0" i="0" spc="100">
+                <a:solidFill>
+                  <a:srgbClr val="EC2326"/>
+                </a:solidFill>
+                <a:latin typeface="League Spartan SemiBold"/>
+                <a:ea typeface="League Spartan SemiBold"/>
+                <a:cs typeface="League Spartan SemiBold"/>
+              </a:rPr>
+              <a:t>01.4</a:t>
+            </a:r>
+          </a:p>
+        </p:txBody>
+      </p:sp>
+      <p:sp>
+        <p:nvSpPr>
+          <p:cNvPr id="20" name="TextBox 19"/>
+          <p:cNvSpPr txBox="1"/>
+          <p:nvPr/>
+        </p:nvSpPr>
+        <p:spPr>
+          <a:xfrm>
+            <a:off x="977900" y="3167856"/>
+            <a:ext cx="3179166" cy="127000"/>
+          </a:xfrm>
+          <a:prstGeom prst="rect">
+            <a:avLst/>
+          </a:prstGeom>
+          <a:noFill/>
+        </p:spPr>
+        <p:txBody>
+          <a:bodyPr wrap="none" lIns="0" rIns="0" tIns="0" bIns="0" anchor="ctr">
+            <a:noAutofit/>
+          </a:bodyPr>
+          <a:lstStyle/>
+          <a:p>
+            <a:pPr algn="l"/>
+            <a:r>
+              <a:rPr sz="850" b="0" i="0">
+                <a:solidFill>
+                  <a:srgbClr val="1E2A3D"/>
+                </a:solidFill>
+                <a:latin typeface="Urbanist Medium"/>
+                <a:ea typeface="Urbanist Medium"/>
+                <a:cs typeface="Urbanist Medium"/>
+              </a:rPr>
+              <a:t>Where we work</a:t>
+            </a:r>
+          </a:p>
+        </p:txBody>
+      </p:sp>
+      <p:sp>
+        <p:nvSpPr>
+          <p:cNvPr id="21" name="TextBox 20"/>
+          <p:cNvSpPr txBox="1"/>
+          <p:nvPr/>
+        </p:nvSpPr>
+        <p:spPr>
+          <a:xfrm>
+            <a:off x="4322166" y="1631950"/>
+            <a:ext cx="3547567" cy="463550"/>
+          </a:xfrm>
+          <a:prstGeom prst="rect">
+            <a:avLst/>
+          </a:prstGeom>
+          <a:noFill/>
+        </p:spPr>
+        <p:txBody>
+          <a:bodyPr wrap="none" lIns="0" rIns="0" tIns="0" bIns="0" anchor="ctr">
+            <a:noAutofit/>
+          </a:bodyPr>
+          <a:lstStyle/>
+          <a:p>
+            <a:pPr algn="l"/>
+            <a:r>
+              <a:rPr sz="2600" b="1" i="0" spc="-104">
+                <a:solidFill>
+                  <a:srgbClr val="EC2326"/>
+                </a:solidFill>
+                <a:latin typeface="Poppins"/>
+                <a:ea typeface="Poppins"/>
+                <a:cs typeface="Poppins"/>
+              </a:rPr>
+              <a:t>02</a:t>
+            </a:r>
+          </a:p>
+        </p:txBody>
+      </p:sp>
+      <p:sp>
+        <p:nvSpPr>
+          <p:cNvPr id="22" name="Rectangle 21"/>
+          <p:cNvSpPr/>
+          <p:nvPr/>
+        </p:nvSpPr>
+        <p:spPr>
+          <a:xfrm>
+            <a:off x="4322166" y="2397722"/>
+            <a:ext cx="3547567" cy="12700"/>
+          </a:xfrm>
+          <a:prstGeom prst="rect">
+            <a:avLst/>
+          </a:prstGeom>
+          <a:solidFill>
+            <a:srgbClr val="EC2326"/>
+          </a:solidFill>
+          <a:ln>
+            <a:noFill/>
+          </a:ln>
+          <a:effectLst/>
+        </p:spPr>
+        <p:txBody>
+          <a:bodyPr rtlCol="0" anchor="ctr"/>
+          <a:lstStyle/>
+          <a:p>
+            <a:pPr algn="ctr"/>
+          </a:p>
+        </p:txBody>
+      </p:sp>
+      <p:sp>
+        <p:nvSpPr>
+          <p:cNvPr id="23" name="TextBox 22"/>
+          <p:cNvSpPr txBox="1"/>
+          <p:nvPr/>
+        </p:nvSpPr>
+        <p:spPr>
+          <a:xfrm>
+            <a:off x="4322166" y="2114550"/>
+            <a:ext cx="3547567" cy="209550"/>
+          </a:xfrm>
+          <a:prstGeom prst="rect">
+            <a:avLst/>
+          </a:prstGeom>
+          <a:noFill/>
+        </p:spPr>
+        <p:txBody>
+          <a:bodyPr wrap="none" lIns="0" rIns="0" tIns="0" bIns="0" anchor="ctr">
+            <a:noAutofit/>
+          </a:bodyPr>
+          <a:lstStyle/>
+          <a:p>
+            <a:pPr algn="l"/>
+            <a:r>
+              <a:rPr sz="1200" b="0" i="0" spc="-24">
+                <a:solidFill>
+                  <a:srgbClr val="101A2B"/>
+                </a:solidFill>
+                <a:latin typeface="Poppins SemiBold"/>
+                <a:ea typeface="Poppins SemiBold"/>
+                <a:cs typeface="Poppins SemiBold"/>
+              </a:rPr>
+              <a:t>Project References</a:t>
+            </a:r>
+          </a:p>
+        </p:txBody>
+      </p:sp>
+      <p:sp>
+        <p:nvSpPr>
+          <p:cNvPr id="24" name="TextBox 23"/>
+          <p:cNvSpPr txBox="1"/>
+          <p:nvPr/>
+        </p:nvSpPr>
+        <p:spPr>
+          <a:xfrm>
+            <a:off x="4322166" y="2562822"/>
+            <a:ext cx="279400" cy="76200"/>
+          </a:xfrm>
+          <a:prstGeom prst="rect">
+            <a:avLst/>
+          </a:prstGeom>
+          <a:noFill/>
+        </p:spPr>
+        <p:txBody>
+          <a:bodyPr wrap="none" lIns="0" rIns="0" tIns="0" bIns="0" anchor="ctr">
+            <a:noAutofit/>
+          </a:bodyPr>
+          <a:lstStyle/>
+          <a:p>
+            <a:pPr algn="l"/>
+            <a:r>
+              <a:rPr sz="620" b="0" i="0" spc="100">
+                <a:solidFill>
+                  <a:srgbClr val="EC2326"/>
+                </a:solidFill>
+                <a:latin typeface="League Spartan SemiBold"/>
+                <a:ea typeface="League Spartan SemiBold"/>
+                <a:cs typeface="League Spartan SemiBold"/>
+              </a:rPr>
+              <a:t>02.1</a:t>
+            </a:r>
+          </a:p>
+        </p:txBody>
+      </p:sp>
+      <p:sp>
+        <p:nvSpPr>
+          <p:cNvPr id="25" name="TextBox 24"/>
+          <p:cNvSpPr txBox="1"/>
+          <p:nvPr/>
+        </p:nvSpPr>
+        <p:spPr>
+          <a:xfrm>
+            <a:off x="4690466" y="2518372"/>
+            <a:ext cx="3179267" cy="127000"/>
+          </a:xfrm>
+          <a:prstGeom prst="rect">
+            <a:avLst/>
+          </a:prstGeom>
+          <a:noFill/>
+        </p:spPr>
+        <p:txBody>
+          <a:bodyPr wrap="none" lIns="0" rIns="0" tIns="0" bIns="0" anchor="ctr">
+            <a:noAutofit/>
+          </a:bodyPr>
+          <a:lstStyle/>
+          <a:p>
+            <a:pPr algn="l"/>
+            <a:r>
+              <a:rPr sz="850" b="0" i="0">
+                <a:solidFill>
+                  <a:srgbClr val="1E2A3D"/>
+                </a:solidFill>
+                <a:latin typeface="Urbanist Medium"/>
+                <a:ea typeface="Urbanist Medium"/>
+                <a:cs typeface="Urbanist Medium"/>
+              </a:rPr>
+              <a:t>How the portfolio breaks down</a:t>
+            </a:r>
+          </a:p>
+        </p:txBody>
+      </p:sp>
+      <p:sp>
+        <p:nvSpPr>
+          <p:cNvPr id="26" name="TextBox 25"/>
+          <p:cNvSpPr txBox="1"/>
+          <p:nvPr/>
+        </p:nvSpPr>
+        <p:spPr>
+          <a:xfrm>
+            <a:off x="4322166" y="2779319"/>
+            <a:ext cx="279400" cy="76200"/>
+          </a:xfrm>
+          <a:prstGeom prst="rect">
+            <a:avLst/>
+          </a:prstGeom>
+          <a:noFill/>
+        </p:spPr>
+        <p:txBody>
+          <a:bodyPr wrap="none" lIns="0" rIns="0" tIns="0" bIns="0" anchor="ctr">
+            <a:noAutofit/>
+          </a:bodyPr>
+          <a:lstStyle/>
+          <a:p>
+            <a:pPr algn="l"/>
+            <a:r>
+              <a:rPr sz="620" b="0" i="0" spc="100">
+                <a:solidFill>
+                  <a:srgbClr val="EC2326"/>
+                </a:solidFill>
+                <a:latin typeface="League Spartan SemiBold"/>
+                <a:ea typeface="League Spartan SemiBold"/>
+                <a:cs typeface="League Spartan SemiBold"/>
+              </a:rPr>
+              <a:t>02.2</a:t>
+            </a:r>
+          </a:p>
+        </p:txBody>
+      </p:sp>
+      <p:sp>
+        <p:nvSpPr>
+          <p:cNvPr id="27" name="TextBox 26"/>
+          <p:cNvSpPr txBox="1"/>
+          <p:nvPr/>
+        </p:nvSpPr>
+        <p:spPr>
+          <a:xfrm>
+            <a:off x="4690466" y="2734869"/>
+            <a:ext cx="3179267" cy="127000"/>
+          </a:xfrm>
+          <a:prstGeom prst="rect">
+            <a:avLst/>
+          </a:prstGeom>
+          <a:noFill/>
+        </p:spPr>
+        <p:txBody>
+          <a:bodyPr wrap="none" lIns="0" rIns="0" tIns="0" bIns="0" anchor="ctr">
+            <a:noAutofit/>
+          </a:bodyPr>
+          <a:lstStyle/>
+          <a:p>
+            <a:pPr algn="l"/>
+            <a:r>
+              <a:rPr sz="850" b="0" i="0">
+                <a:solidFill>
+                  <a:srgbClr val="1E2A3D"/>
+                </a:solidFill>
+                <a:latin typeface="Urbanist Medium"/>
+                <a:ea typeface="Urbanist Medium"/>
+                <a:cs typeface="Urbanist Medium"/>
+              </a:rPr>
+              <a:t>Semiconductor and display</a:t>
+            </a:r>
+          </a:p>
+        </p:txBody>
+      </p:sp>
+      <p:sp>
+        <p:nvSpPr>
+          <p:cNvPr id="28" name="TextBox 27"/>
+          <p:cNvSpPr txBox="1"/>
+          <p:nvPr/>
+        </p:nvSpPr>
+        <p:spPr>
+          <a:xfrm>
+            <a:off x="4322166" y="2995809"/>
+            <a:ext cx="279400" cy="76200"/>
+          </a:xfrm>
+          <a:prstGeom prst="rect">
+            <a:avLst/>
+          </a:prstGeom>
+          <a:noFill/>
+        </p:spPr>
+        <p:txBody>
+          <a:bodyPr wrap="none" lIns="0" rIns="0" tIns="0" bIns="0" anchor="ctr">
+            <a:noAutofit/>
+          </a:bodyPr>
+          <a:lstStyle/>
+          <a:p>
+            <a:pPr algn="l"/>
+            <a:r>
+              <a:rPr sz="620" b="0" i="0" spc="100">
+                <a:solidFill>
+                  <a:srgbClr val="EC2326"/>
+                </a:solidFill>
+                <a:latin typeface="League Spartan SemiBold"/>
+                <a:ea typeface="League Spartan SemiBold"/>
+                <a:cs typeface="League Spartan SemiBold"/>
+              </a:rPr>
+              <a:t>02.3</a:t>
+            </a:r>
+          </a:p>
+        </p:txBody>
+      </p:sp>
+      <p:sp>
+        <p:nvSpPr>
+          <p:cNvPr id="29" name="TextBox 28"/>
+          <p:cNvSpPr txBox="1"/>
+          <p:nvPr/>
+        </p:nvSpPr>
+        <p:spPr>
+          <a:xfrm>
+            <a:off x="4690466" y="2951359"/>
+            <a:ext cx="3179267" cy="127000"/>
+          </a:xfrm>
+          <a:prstGeom prst="rect">
+            <a:avLst/>
+          </a:prstGeom>
+          <a:noFill/>
+        </p:spPr>
+        <p:txBody>
+          <a:bodyPr wrap="none" lIns="0" rIns="0" tIns="0" bIns="0" anchor="ctr">
+            <a:noAutofit/>
+          </a:bodyPr>
+          <a:lstStyle/>
+          <a:p>
+            <a:pPr algn="l"/>
+            <a:r>
+              <a:rPr sz="850" b="0" i="0">
+                <a:solidFill>
+                  <a:srgbClr val="1E2A3D"/>
+                </a:solidFill>
+                <a:latin typeface="Urbanist Medium"/>
+                <a:ea typeface="Urbanist Medium"/>
+                <a:cs typeface="Urbanist Medium"/>
+              </a:rPr>
+              <a:t>Data centre and EV battery</a:t>
+            </a:r>
+          </a:p>
+        </p:txBody>
+      </p:sp>
+      <p:sp>
+        <p:nvSpPr>
+          <p:cNvPr id="30" name="TextBox 29"/>
+          <p:cNvSpPr txBox="1"/>
+          <p:nvPr/>
+        </p:nvSpPr>
+        <p:spPr>
+          <a:xfrm>
+            <a:off x="4322166" y="3212306"/>
+            <a:ext cx="279400" cy="76200"/>
+          </a:xfrm>
+          <a:prstGeom prst="rect">
+            <a:avLst/>
+          </a:prstGeom>
+          <a:noFill/>
+        </p:spPr>
+        <p:txBody>
+          <a:bodyPr wrap="none" lIns="0" rIns="0" tIns="0" bIns="0" anchor="ctr">
+            <a:noAutofit/>
+          </a:bodyPr>
+          <a:lstStyle/>
+          <a:p>
+            <a:pPr algn="l"/>
+            <a:r>
+              <a:rPr sz="620" b="0" i="0" spc="100">
+                <a:solidFill>
+                  <a:srgbClr val="EC2326"/>
+                </a:solidFill>
+                <a:latin typeface="League Spartan SemiBold"/>
+                <a:ea typeface="League Spartan SemiBold"/>
+                <a:cs typeface="League Spartan SemiBold"/>
+              </a:rPr>
+              <a:t>02.4</a:t>
+            </a:r>
+          </a:p>
+        </p:txBody>
+      </p:sp>
+      <p:sp>
+        <p:nvSpPr>
+          <p:cNvPr id="31" name="TextBox 30"/>
+          <p:cNvSpPr txBox="1"/>
+          <p:nvPr/>
+        </p:nvSpPr>
+        <p:spPr>
+          <a:xfrm>
+            <a:off x="4690466" y="3167856"/>
+            <a:ext cx="3179267" cy="127000"/>
+          </a:xfrm>
+          <a:prstGeom prst="rect">
+            <a:avLst/>
+          </a:prstGeom>
+          <a:noFill/>
+        </p:spPr>
+        <p:txBody>
+          <a:bodyPr wrap="none" lIns="0" rIns="0" tIns="0" bIns="0" anchor="ctr">
+            <a:noAutofit/>
+          </a:bodyPr>
+          <a:lstStyle/>
+          <a:p>
+            <a:pPr algn="l"/>
+            <a:r>
+              <a:rPr sz="850" b="0" i="0">
+                <a:solidFill>
+                  <a:srgbClr val="1E2A3D"/>
+                </a:solidFill>
+                <a:latin typeface="Urbanist Medium"/>
+                <a:ea typeface="Urbanist Medium"/>
+                <a:cs typeface="Urbanist Medium"/>
+              </a:rPr>
+              <a:t>The full reference list</a:t>
+            </a:r>
+          </a:p>
+        </p:txBody>
+      </p:sp>
+      <p:sp>
+        <p:nvSpPr>
+          <p:cNvPr id="32" name="TextBox 31"/>
+          <p:cNvSpPr txBox="1"/>
+          <p:nvPr/>
+        </p:nvSpPr>
+        <p:spPr>
+          <a:xfrm>
+            <a:off x="8034833" y="1631950"/>
+            <a:ext cx="3547567" cy="463550"/>
+          </a:xfrm>
+          <a:prstGeom prst="rect">
+            <a:avLst/>
+          </a:prstGeom>
+          <a:noFill/>
+        </p:spPr>
+        <p:txBody>
+          <a:bodyPr wrap="none" lIns="0" rIns="0" tIns="0" bIns="0" anchor="ctr">
+            <a:noAutofit/>
+          </a:bodyPr>
+          <a:lstStyle/>
+          <a:p>
+            <a:pPr algn="l"/>
+            <a:r>
+              <a:rPr sz="2600" b="1" i="0" spc="-104">
+                <a:solidFill>
+                  <a:srgbClr val="EC2326"/>
+                </a:solidFill>
+                <a:latin typeface="Poppins"/>
+                <a:ea typeface="Poppins"/>
+                <a:cs typeface="Poppins"/>
+              </a:rPr>
+              <a:t>03</a:t>
+            </a:r>
+          </a:p>
+        </p:txBody>
+      </p:sp>
+      <p:sp>
+        <p:nvSpPr>
+          <p:cNvPr id="33" name="Rectangle 32"/>
+          <p:cNvSpPr/>
+          <p:nvPr/>
+        </p:nvSpPr>
+        <p:spPr>
+          <a:xfrm>
+            <a:off x="8034833" y="2397722"/>
+            <a:ext cx="3547567" cy="12700"/>
+          </a:xfrm>
+          <a:prstGeom prst="rect">
+            <a:avLst/>
+          </a:prstGeom>
+          <a:solidFill>
+            <a:srgbClr val="EC2326"/>
+          </a:solidFill>
+          <a:ln>
+            <a:noFill/>
+          </a:ln>
+          <a:effectLst/>
+        </p:spPr>
+        <p:txBody>
+          <a:bodyPr rtlCol="0" anchor="ctr"/>
+          <a:lstStyle/>
+          <a:p>
+            <a:pPr algn="ctr"/>
+          </a:p>
+        </p:txBody>
+      </p:sp>
+      <p:sp>
+        <p:nvSpPr>
+          <p:cNvPr id="34" name="TextBox 33"/>
+          <p:cNvSpPr txBox="1"/>
+          <p:nvPr/>
+        </p:nvSpPr>
+        <p:spPr>
+          <a:xfrm>
+            <a:off x="8034833" y="2114550"/>
+            <a:ext cx="3547567" cy="209550"/>
+          </a:xfrm>
+          <a:prstGeom prst="rect">
+            <a:avLst/>
+          </a:prstGeom>
+          <a:noFill/>
+        </p:spPr>
+        <p:txBody>
+          <a:bodyPr wrap="none" lIns="0" rIns="0" tIns="0" bIns="0" anchor="ctr">
+            <a:noAutofit/>
+          </a:bodyPr>
+          <a:lstStyle/>
+          <a:p>
+            <a:pPr algn="l"/>
+            <a:r>
+              <a:rPr sz="1200" b="0" i="0" spc="-24">
+                <a:solidFill>
+                  <a:srgbClr val="101A2B"/>
+                </a:solidFill>
+                <a:latin typeface="Poppins SemiBold"/>
+                <a:ea typeface="Poppins SemiBold"/>
+                <a:cs typeface="Poppins SemiBold"/>
+              </a:rPr>
+              <a:t>Safety, Quality and ESG</a:t>
+            </a:r>
+          </a:p>
+        </p:txBody>
+      </p:sp>
+      <p:sp>
+        <p:nvSpPr>
+          <p:cNvPr id="35" name="TextBox 34"/>
+          <p:cNvSpPr txBox="1"/>
+          <p:nvPr/>
+        </p:nvSpPr>
+        <p:spPr>
+          <a:xfrm>
+            <a:off x="8034833" y="2562822"/>
+            <a:ext cx="279400" cy="76200"/>
+          </a:xfrm>
+          <a:prstGeom prst="rect">
+            <a:avLst/>
+          </a:prstGeom>
+          <a:noFill/>
+        </p:spPr>
+        <p:txBody>
+          <a:bodyPr wrap="none" lIns="0" rIns="0" tIns="0" bIns="0" anchor="ctr">
+            <a:noAutofit/>
+          </a:bodyPr>
+          <a:lstStyle/>
+          <a:p>
+            <a:pPr algn="l"/>
+            <a:r>
+              <a:rPr sz="620" b="0" i="0" spc="100">
+                <a:solidFill>
+                  <a:srgbClr val="EC2326"/>
+                </a:solidFill>
+                <a:latin typeface="League Spartan SemiBold"/>
+                <a:ea typeface="League Spartan SemiBold"/>
+                <a:cs typeface="League Spartan SemiBold"/>
+              </a:rPr>
+              <a:t>03.1</a:t>
+            </a:r>
+          </a:p>
+        </p:txBody>
+      </p:sp>
+      <p:sp>
+        <p:nvSpPr>
+          <p:cNvPr id="36" name="TextBox 35"/>
+          <p:cNvSpPr txBox="1"/>
+          <p:nvPr/>
+        </p:nvSpPr>
+        <p:spPr>
+          <a:xfrm>
+            <a:off x="8403133" y="2518372"/>
+            <a:ext cx="3179267" cy="127000"/>
+          </a:xfrm>
+          <a:prstGeom prst="rect">
+            <a:avLst/>
+          </a:prstGeom>
+          <a:noFill/>
+        </p:spPr>
+        <p:txBody>
+          <a:bodyPr wrap="none" lIns="0" rIns="0" tIns="0" bIns="0" anchor="ctr">
+            <a:noAutofit/>
+          </a:bodyPr>
+          <a:lstStyle/>
+          <a:p>
+            <a:pPr algn="l"/>
+            <a:r>
+              <a:rPr sz="850" b="0" i="0">
+                <a:solidFill>
+                  <a:srgbClr val="1E2A3D"/>
+                </a:solidFill>
+                <a:latin typeface="Urbanist Medium"/>
+                <a:ea typeface="Urbanist Medium"/>
+                <a:cs typeface="Urbanist Medium"/>
+              </a:rPr>
+              <a:t>The commitments we hold</a:t>
+            </a:r>
+          </a:p>
+        </p:txBody>
+      </p:sp>
+      <p:sp>
+        <p:nvSpPr>
+          <p:cNvPr id="37" name="TextBox 36"/>
+          <p:cNvSpPr txBox="1"/>
+          <p:nvPr/>
+        </p:nvSpPr>
+        <p:spPr>
+          <a:xfrm>
+            <a:off x="8034833" y="2779319"/>
+            <a:ext cx="279400" cy="76200"/>
+          </a:xfrm>
+          <a:prstGeom prst="rect">
+            <a:avLst/>
+          </a:prstGeom>
+          <a:noFill/>
+        </p:spPr>
+        <p:txBody>
+          <a:bodyPr wrap="none" lIns="0" rIns="0" tIns="0" bIns="0" anchor="ctr">
+            <a:noAutofit/>
+          </a:bodyPr>
+          <a:lstStyle/>
+          <a:p>
+            <a:pPr algn="l"/>
+            <a:r>
+              <a:rPr sz="620" b="0" i="0" spc="100">
+                <a:solidFill>
+                  <a:srgbClr val="EC2326"/>
+                </a:solidFill>
+                <a:latin typeface="League Spartan SemiBold"/>
+                <a:ea typeface="League Spartan SemiBold"/>
+                <a:cs typeface="League Spartan SemiBold"/>
+              </a:rPr>
+              <a:t>03.2</a:t>
+            </a:r>
+          </a:p>
+        </p:txBody>
+      </p:sp>
+      <p:sp>
+        <p:nvSpPr>
+          <p:cNvPr id="38" name="TextBox 37"/>
+          <p:cNvSpPr txBox="1"/>
+          <p:nvPr/>
+        </p:nvSpPr>
+        <p:spPr>
+          <a:xfrm>
+            <a:off x="8403133" y="2734869"/>
+            <a:ext cx="3179267" cy="127000"/>
+          </a:xfrm>
+          <a:prstGeom prst="rect">
+            <a:avLst/>
+          </a:prstGeom>
+          <a:noFill/>
+        </p:spPr>
+        <p:txBody>
+          <a:bodyPr wrap="none" lIns="0" rIns="0" tIns="0" bIns="0" anchor="ctr">
+            <a:noAutofit/>
+          </a:bodyPr>
+          <a:lstStyle/>
+          <a:p>
+            <a:pPr algn="l"/>
+            <a:r>
+              <a:rPr sz="850" b="0" i="0">
+                <a:solidFill>
+                  <a:srgbClr val="1E2A3D"/>
+                </a:solidFill>
+                <a:latin typeface="Urbanist Medium"/>
+                <a:ea typeface="Urbanist Medium"/>
+                <a:cs typeface="Urbanist Medium"/>
+              </a:rPr>
+              <a:t>Certifications and licences</a:t>
+            </a:r>
+          </a:p>
+        </p:txBody>
+      </p:sp>
+      <p:sp>
+        <p:nvSpPr>
+          <p:cNvPr id="39" name="TextBox 38"/>
+          <p:cNvSpPr txBox="1"/>
+          <p:nvPr/>
+        </p:nvSpPr>
+        <p:spPr>
+          <a:xfrm>
+            <a:off x="8034833" y="2995809"/>
+            <a:ext cx="279400" cy="76200"/>
+          </a:xfrm>
+          <a:prstGeom prst="rect">
+            <a:avLst/>
+          </a:prstGeom>
+          <a:noFill/>
+        </p:spPr>
+        <p:txBody>
+          <a:bodyPr wrap="none" lIns="0" rIns="0" tIns="0" bIns="0" anchor="ctr">
+            <a:noAutofit/>
+          </a:bodyPr>
+          <a:lstStyle/>
+          <a:p>
+            <a:pPr algn="l"/>
+            <a:r>
+              <a:rPr sz="620" b="0" i="0" spc="100">
+                <a:solidFill>
+                  <a:srgbClr val="EC2326"/>
+                </a:solidFill>
+                <a:latin typeface="League Spartan SemiBold"/>
+                <a:ea typeface="League Spartan SemiBold"/>
+                <a:cs typeface="League Spartan SemiBold"/>
+              </a:rPr>
+              <a:t>03.3</a:t>
+            </a:r>
+          </a:p>
+        </p:txBody>
+      </p:sp>
+      <p:sp>
+        <p:nvSpPr>
+          <p:cNvPr id="40" name="TextBox 39"/>
+          <p:cNvSpPr txBox="1"/>
+          <p:nvPr/>
+        </p:nvSpPr>
+        <p:spPr>
+          <a:xfrm>
+            <a:off x="8403133" y="2951359"/>
+            <a:ext cx="3179267" cy="127000"/>
+          </a:xfrm>
+          <a:prstGeom prst="rect">
+            <a:avLst/>
+          </a:prstGeom>
+          <a:noFill/>
+        </p:spPr>
+        <p:txBody>
+          <a:bodyPr wrap="none" lIns="0" rIns="0" tIns="0" bIns="0" anchor="ctr">
+            <a:noAutofit/>
+          </a:bodyPr>
+          <a:lstStyle/>
+          <a:p>
+            <a:pPr algn="l"/>
+            <a:r>
+              <a:rPr sz="850" b="0" i="0">
+                <a:solidFill>
+                  <a:srgbClr val="1E2A3D"/>
+                </a:solidFill>
+                <a:latin typeface="Urbanist Medium"/>
+                <a:ea typeface="Urbanist Medium"/>
+                <a:cs typeface="Urbanist Medium"/>
+              </a:rPr>
+              <a:t>Builder of the Year 2024</a:t>
+            </a:r>
+          </a:p>
+        </p:txBody>
+      </p:sp>
+      <p:sp>
+        <p:nvSpPr>
+          <p:cNvPr id="41" name="TextBox 40"/>
+          <p:cNvSpPr txBox="1"/>
+          <p:nvPr/>
+        </p:nvSpPr>
+        <p:spPr>
+          <a:xfrm>
+            <a:off x="8034833" y="3212306"/>
+            <a:ext cx="279400" cy="76200"/>
+          </a:xfrm>
+          <a:prstGeom prst="rect">
+            <a:avLst/>
+          </a:prstGeom>
+          <a:noFill/>
+        </p:spPr>
+        <p:txBody>
+          <a:bodyPr wrap="none" lIns="0" rIns="0" tIns="0" bIns="0" anchor="ctr">
+            <a:noAutofit/>
+          </a:bodyPr>
+          <a:lstStyle/>
+          <a:p>
+            <a:pPr algn="l"/>
+            <a:r>
+              <a:rPr sz="620" b="0" i="0" spc="100">
+                <a:solidFill>
+                  <a:srgbClr val="EC2326"/>
+                </a:solidFill>
+                <a:latin typeface="League Spartan SemiBold"/>
+                <a:ea typeface="League Spartan SemiBold"/>
+                <a:cs typeface="League Spartan SemiBold"/>
+              </a:rPr>
+              <a:t>03.4</a:t>
+            </a:r>
+          </a:p>
+        </p:txBody>
+      </p:sp>
+      <p:sp>
+        <p:nvSpPr>
+          <p:cNvPr id="42" name="TextBox 41"/>
+          <p:cNvSpPr txBox="1"/>
+          <p:nvPr/>
+        </p:nvSpPr>
+        <p:spPr>
+          <a:xfrm>
+            <a:off x="8403133" y="3167856"/>
+            <a:ext cx="3179267" cy="127000"/>
+          </a:xfrm>
+          <a:prstGeom prst="rect">
+            <a:avLst/>
+          </a:prstGeom>
+          <a:noFill/>
+        </p:spPr>
+        <p:txBody>
+          <a:bodyPr wrap="none" lIns="0" rIns="0" tIns="0" bIns="0" anchor="ctr">
+            <a:noAutofit/>
+          </a:bodyPr>
+          <a:lstStyle/>
+          <a:p>
+            <a:pPr algn="l"/>
+            <a:r>
+              <a:rPr sz="850" b="0" i="0">
+                <a:solidFill>
+                  <a:srgbClr val="1E2A3D"/>
+                </a:solidFill>
+                <a:latin typeface="Urbanist Medium"/>
+                <a:ea typeface="Urbanist Medium"/>
+                <a:cs typeface="Urbanist Medium"/>
+              </a:rPr>
+              <a:t>How we are assessed</a:t>
+            </a:r>
+          </a:p>
+        </p:txBody>
+      </p:sp>
+      <p:sp>
+        <p:nvSpPr>
+          <p:cNvPr id="43" name="TextBox 42"/>
+          <p:cNvSpPr txBox="1"/>
+          <p:nvPr/>
+        </p:nvSpPr>
+        <p:spPr>
+          <a:xfrm>
+            <a:off x="609600" y="6445250"/>
+            <a:ext cx="128289" cy="76200"/>
+          </a:xfrm>
+          <a:prstGeom prst="rect">
+            <a:avLst/>
+          </a:prstGeom>
+          <a:noFill/>
+        </p:spPr>
+        <p:txBody>
+          <a:bodyPr wrap="none" lIns="0" rIns="0" tIns="0" bIns="0" anchor="ctr">
+            <a:noAutofit/>
+          </a:bodyPr>
+          <a:lstStyle/>
+          <a:p>
+            <a:pPr algn="l"/>
+            <a:r>
+              <a:rPr sz="680" b="0" i="0" spc="148">
+                <a:solidFill>
+                  <a:srgbClr val="64707A"/>
+                </a:solidFill>
+                <a:latin typeface="League Spartan Medium"/>
+                <a:ea typeface="League Spartan Medium"/>
+                <a:cs typeface="League Spartan Medium"/>
+              </a:rPr>
+              <a:t>35</a:t>
+            </a:r>
+          </a:p>
+        </p:txBody>
+      </p:sp>
+      <p:sp>
+        <p:nvSpPr>
+          <p:cNvPr id="44" name="TextBox 43"/>
+          <p:cNvSpPr txBox="1"/>
+          <p:nvPr/>
+        </p:nvSpPr>
+        <p:spPr>
+          <a:xfrm>
+            <a:off x="11154867" y="6429375"/>
+            <a:ext cx="427438" cy="76200"/>
+          </a:xfrm>
+          <a:prstGeom prst="rect">
+            <a:avLst/>
+          </a:prstGeom>
+          <a:noFill/>
+        </p:spPr>
+        <p:txBody>
+          <a:bodyPr wrap="none" lIns="0" rIns="0" tIns="0" bIns="0" anchor="ctr">
+            <a:noAutofit/>
+          </a:bodyPr>
+          <a:lstStyle/>
+          <a:p>
+            <a:pPr algn="l"/>
+            <a:r>
+              <a:rPr sz="680" b="0" i="0" spc="148">
+                <a:solidFill>
+                  <a:srgbClr val="64707A"/>
+                </a:solidFill>
+                <a:latin typeface="League Spartan"/>
+                <a:ea typeface="League Spartan"/>
+                <a:cs typeface="League Spartan"/>
+              </a:rPr>
+              <a:t>AGENDA</a:t>
+            </a:r>
+          </a:p>
+        </p:txBody>
+      </p:sp>
+    </p:spTree>
+  </p:cSld>
+  <p:clrMapOvr>
+    <a:masterClrMapping/>
+  </p:clrMapOvr>
+</p:sld>
+</file>
+
+<file path=ppt/slides/slide37.xml><?xml version="1.0" encoding="utf-8"?>
+<p:sld xmlns:a="http://schemas.openxmlformats.org/drawingml/2006/main" xmlns:p="http://schemas.openxmlformats.org/presentationml/2006/main" xmlns:r="http://schemas.openxmlformats.org/officeDocument/2006/relationships">
+  <p:cSld>
+    <p:spTree>
+      <p:nvGrpSpPr>
+        <p:cNvPr id="1" name=""/>
+        <p:cNvGrpSpPr/>
+        <p:nvPr/>
+      </p:nvGrpSpPr>
+      <p:grpSpPr/>
+      <p:sp>
+        <p:nvSpPr>
+          <p:cNvPr id="2" name="Rectangle 1"/>
+          <p:cNvSpPr/>
+          <p:nvPr/>
+        </p:nvSpPr>
+        <p:spPr>
+          <a:xfrm>
+            <a:off x="0" y="0"/>
+            <a:ext cx="12192000" cy="6858000"/>
+          </a:xfrm>
+          <a:prstGeom prst="rect">
+            <a:avLst/>
+          </a:prstGeom>
+          <a:solidFill>
+            <a:srgbClr val="F6F7F9"/>
+          </a:solidFill>
+          <a:ln>
+            <a:noFill/>
+          </a:ln>
+          <a:effectLst/>
+        </p:spPr>
+        <p:txBody>
+          <a:bodyPr rtlCol="0" anchor="ctr"/>
+          <a:lstStyle/>
+          <a:p>
+            <a:pPr algn="ctr"/>
+          </a:p>
+        </p:txBody>
+      </p:sp>
+      <p:sp>
+        <p:nvSpPr>
+          <p:cNvPr id="3" name="Rectangle 2"/>
+          <p:cNvSpPr/>
+          <p:nvPr/>
+        </p:nvSpPr>
+        <p:spPr>
+          <a:xfrm>
+            <a:off x="609600" y="381000"/>
+            <a:ext cx="235350" cy="165100"/>
+          </a:xfrm>
+          <a:prstGeom prst="rect">
+            <a:avLst/>
+          </a:prstGeom>
+          <a:solidFill>
+            <a:srgbClr val="EC2326"/>
+          </a:solidFill>
+          <a:ln>
+            <a:noFill/>
+          </a:ln>
+          <a:effectLst/>
+        </p:spPr>
+        <p:txBody>
+          <a:bodyPr rtlCol="0" anchor="ctr"/>
+          <a:lstStyle/>
+          <a:p>
+            <a:pPr algn="ctr"/>
+          </a:p>
+        </p:txBody>
+      </p:sp>
+      <p:sp>
+        <p:nvSpPr>
+          <p:cNvPr id="4" name="TextBox 3"/>
+          <p:cNvSpPr txBox="1"/>
+          <p:nvPr/>
+        </p:nvSpPr>
+        <p:spPr>
+          <a:xfrm>
+            <a:off x="609600" y="425450"/>
+            <a:ext cx="235350" cy="82550"/>
+          </a:xfrm>
+          <a:prstGeom prst="rect">
+            <a:avLst/>
+          </a:prstGeom>
+          <a:noFill/>
+        </p:spPr>
+        <p:txBody>
+          <a:bodyPr wrap="none" lIns="69850" rIns="69850" tIns="0" bIns="0" anchor="ctr">
+            <a:noAutofit/>
+          </a:bodyPr>
+          <a:lstStyle/>
+          <a:p>
+            <a:pPr algn="l"/>
+            <a:r>
+              <a:rPr sz="700" b="0" i="0" spc="70">
+                <a:solidFill>
+                  <a:srgbClr val="FFFFFF"/>
+                </a:solidFill>
+                <a:latin typeface="League Spartan SemiBold"/>
+                <a:ea typeface="League Spartan SemiBold"/>
+                <a:cs typeface="League Spartan SemiBold"/>
+              </a:rPr>
+              <a:t>18</a:t>
+            </a:r>
+          </a:p>
+        </p:txBody>
+      </p:sp>
+      <p:sp>
+        <p:nvSpPr>
+          <p:cNvPr id="5" name="TextBox 4"/>
+          <p:cNvSpPr txBox="1"/>
+          <p:nvPr/>
+        </p:nvSpPr>
+        <p:spPr>
+          <a:xfrm>
+            <a:off x="946550" y="414338"/>
+            <a:ext cx="957859" cy="88900"/>
+          </a:xfrm>
+          <a:prstGeom prst="rect">
+            <a:avLst/>
+          </a:prstGeom>
+          <a:noFill/>
+        </p:spPr>
+        <p:txBody>
+          <a:bodyPr wrap="none" lIns="0" rIns="0" tIns="0" bIns="0" anchor="ctr">
+            <a:noAutofit/>
+          </a:bodyPr>
+          <a:lstStyle/>
+          <a:p>
+            <a:pPr algn="l"/>
+            <a:r>
+              <a:rPr sz="780" b="0" i="0" spc="186">
+                <a:solidFill>
+                  <a:srgbClr val="101A2B"/>
+                </a:solidFill>
+                <a:latin typeface="League Spartan SemiBold"/>
+                <a:ea typeface="League Spartan SemiBold"/>
+                <a:cs typeface="League Spartan SemiBold"/>
+              </a:rPr>
+              <a:t>SECTION NAME</a:t>
+            </a:r>
+          </a:p>
+        </p:txBody>
+      </p:sp>
+      <p:pic>
+        <p:nvPicPr>
+          <p:cNvPr id="6" name="Picture 5" descr="iaq-logo-tag.png"/>
+          <p:cNvPicPr>
+            <a:picLocks noChangeAspect="1"/>
+          </p:cNvPicPr>
+          <p:nvPr/>
+        </p:nvPicPr>
+        <p:blipFill>
+          <a:blip r:embed="rId2"/>
+          <a:stretch>
+            <a:fillRect/>
+          </a:stretch>
+        </p:blipFill>
+        <p:spPr>
+          <a:xfrm>
+            <a:off x="10947400" y="304800"/>
+            <a:ext cx="635000" cy="317500"/>
+          </a:xfrm>
+          <a:prstGeom prst="rect">
+            <a:avLst/>
+          </a:prstGeom>
+        </p:spPr>
+      </p:pic>
+      <p:sp>
+        <p:nvSpPr>
+          <p:cNvPr id="7" name="Rectangle 6"/>
+          <p:cNvSpPr/>
+          <p:nvPr/>
+        </p:nvSpPr>
+        <p:spPr>
+          <a:xfrm>
+            <a:off x="609600" y="1438872"/>
+            <a:ext cx="10972800" cy="6350"/>
+          </a:xfrm>
+          <a:prstGeom prst="rect">
+            <a:avLst/>
+          </a:prstGeom>
+          <a:solidFill>
+            <a:srgbClr val="D5DBE2"/>
+          </a:solidFill>
+          <a:ln>
+            <a:noFill/>
+          </a:ln>
+          <a:effectLst/>
+        </p:spPr>
+        <p:txBody>
+          <a:bodyPr rtlCol="0" anchor="ctr"/>
+          <a:lstStyle/>
+          <a:p>
+            <a:pPr algn="ctr"/>
+          </a:p>
+        </p:txBody>
+      </p:sp>
+      <p:sp>
+        <p:nvSpPr>
+          <p:cNvPr id="8" name="TextBox 7"/>
+          <p:cNvSpPr txBox="1"/>
+          <p:nvPr/>
+        </p:nvSpPr>
+        <p:spPr>
+          <a:xfrm>
+            <a:off x="609600" y="768350"/>
+            <a:ext cx="10972800" cy="304800"/>
+          </a:xfrm>
+          <a:prstGeom prst="rect">
+            <a:avLst/>
+          </a:prstGeom>
+          <a:noFill/>
+        </p:spPr>
+        <p:txBody>
+          <a:bodyPr wrap="none" lIns="0" rIns="0" tIns="0" bIns="0" anchor="ctr">
+            <a:noAutofit/>
+          </a:bodyPr>
+          <a:lstStyle/>
+          <a:p>
+            <a:pPr algn="l"/>
+            <a:r>
+              <a:rPr sz="1700" b="0" i="0" spc="-34">
+                <a:solidFill>
+                  <a:srgbClr val="64707A"/>
+                </a:solidFill>
+                <a:latin typeface="Poppins SemiBold"/>
+                <a:ea typeface="Poppins SemiBold"/>
+                <a:cs typeface="Poppins SemiBold"/>
+              </a:rPr>
+              <a:t>Page title</a:t>
+            </a:r>
+          </a:p>
+        </p:txBody>
+      </p:sp>
+      <p:sp>
+        <p:nvSpPr>
+          <p:cNvPr id="9" name="TextBox 8"/>
+          <p:cNvSpPr txBox="1"/>
+          <p:nvPr/>
+        </p:nvSpPr>
+        <p:spPr>
+          <a:xfrm>
+            <a:off x="609600" y="1118197"/>
+            <a:ext cx="6985000" cy="146050"/>
+          </a:xfrm>
+          <a:prstGeom prst="rect">
+            <a:avLst/>
+          </a:prstGeom>
+          <a:noFill/>
+        </p:spPr>
+        <p:txBody>
+          <a:bodyPr wrap="none" lIns="0" rIns="0" tIns="0" bIns="0" anchor="ctr">
+            <a:noAutofit/>
+          </a:bodyPr>
+          <a:lstStyle/>
+          <a:p>
+            <a:pPr algn="l"/>
+            <a:r>
+              <a:rPr sz="950" b="0" i="0">
+                <a:solidFill>
+                  <a:srgbClr val="64707A"/>
+                </a:solidFill>
+                <a:latin typeface="Urbanist"/>
+                <a:ea typeface="Urbanist"/>
+                <a:cs typeface="Urbanist"/>
+              </a:rPr>
+              <a:t>One line under it saying what the page is for.</a:t>
+            </a:r>
+          </a:p>
+        </p:txBody>
+      </p:sp>
+      <p:sp>
+        <p:nvSpPr>
+          <p:cNvPr id="10" name="TextBox 9"/>
+          <p:cNvSpPr txBox="1"/>
+          <p:nvPr/>
+        </p:nvSpPr>
+        <p:spPr>
+          <a:xfrm>
+            <a:off x="609600" y="1631950"/>
+            <a:ext cx="3547466" cy="463550"/>
+          </a:xfrm>
+          <a:prstGeom prst="rect">
+            <a:avLst/>
+          </a:prstGeom>
+          <a:noFill/>
+        </p:spPr>
+        <p:txBody>
+          <a:bodyPr wrap="none" lIns="0" rIns="0" tIns="0" bIns="0" anchor="ctr">
+            <a:noAutofit/>
+          </a:bodyPr>
+          <a:lstStyle/>
+          <a:p>
+            <a:pPr algn="l"/>
+            <a:r>
+              <a:rPr sz="2600" b="1" i="0" spc="-104">
+                <a:solidFill>
+                  <a:srgbClr val="64707A"/>
+                </a:solidFill>
+                <a:latin typeface="Poppins"/>
+                <a:ea typeface="Poppins"/>
+                <a:cs typeface="Poppins"/>
+              </a:rPr>
+              <a:t>01</a:t>
+            </a:r>
+          </a:p>
+        </p:txBody>
+      </p:sp>
+      <p:sp>
+        <p:nvSpPr>
+          <p:cNvPr id="11" name="Rectangle 10"/>
+          <p:cNvSpPr/>
+          <p:nvPr/>
+        </p:nvSpPr>
+        <p:spPr>
+          <a:xfrm>
+            <a:off x="609600" y="2397722"/>
+            <a:ext cx="3547466" cy="12700"/>
+          </a:xfrm>
+          <a:prstGeom prst="rect">
+            <a:avLst/>
+          </a:prstGeom>
+          <a:solidFill>
+            <a:srgbClr val="EC2326"/>
+          </a:solidFill>
+          <a:ln>
+            <a:noFill/>
+          </a:ln>
+          <a:effectLst/>
+        </p:spPr>
+        <p:txBody>
+          <a:bodyPr rtlCol="0" anchor="ctr"/>
+          <a:lstStyle/>
+          <a:p>
+            <a:pPr algn="ctr"/>
+          </a:p>
+        </p:txBody>
+      </p:sp>
+      <p:sp>
+        <p:nvSpPr>
+          <p:cNvPr id="12" name="TextBox 11"/>
+          <p:cNvSpPr txBox="1"/>
+          <p:nvPr/>
+        </p:nvSpPr>
+        <p:spPr>
+          <a:xfrm>
+            <a:off x="609600" y="2114550"/>
+            <a:ext cx="3547466" cy="209550"/>
+          </a:xfrm>
+          <a:prstGeom prst="rect">
+            <a:avLst/>
+          </a:prstGeom>
+          <a:noFill/>
+        </p:spPr>
+        <p:txBody>
+          <a:bodyPr wrap="none" lIns="0" rIns="0" tIns="0" bIns="0" anchor="ctr">
+            <a:noAutofit/>
+          </a:bodyPr>
+          <a:lstStyle/>
+          <a:p>
+            <a:pPr algn="l"/>
+            <a:r>
+              <a:rPr sz="1200" b="0" i="0" spc="-24">
+                <a:solidFill>
+                  <a:srgbClr val="64707A"/>
+                </a:solidFill>
+                <a:latin typeface="Poppins SemiBold"/>
+                <a:ea typeface="Poppins SemiBold"/>
+                <a:cs typeface="Poppins SemiBold"/>
+              </a:rPr>
+              <a:t>Part name</a:t>
+            </a:r>
+          </a:p>
+        </p:txBody>
+      </p:sp>
+      <p:sp>
+        <p:nvSpPr>
+          <p:cNvPr id="13" name="TextBox 12"/>
+          <p:cNvSpPr txBox="1"/>
+          <p:nvPr/>
+        </p:nvSpPr>
+        <p:spPr>
+          <a:xfrm>
+            <a:off x="609600" y="2562822"/>
+            <a:ext cx="279400" cy="76200"/>
+          </a:xfrm>
+          <a:prstGeom prst="rect">
+            <a:avLst/>
+          </a:prstGeom>
+          <a:noFill/>
+        </p:spPr>
+        <p:txBody>
+          <a:bodyPr wrap="none" lIns="0" rIns="0" tIns="0" bIns="0" anchor="ctr">
+            <a:noAutofit/>
+          </a:bodyPr>
+          <a:lstStyle/>
+          <a:p>
+            <a:pPr algn="l"/>
+            <a:r>
+              <a:rPr sz="620" b="0" i="0" spc="100">
+                <a:solidFill>
+                  <a:srgbClr val="64707A"/>
+                </a:solidFill>
+                <a:latin typeface="League Spartan SemiBold"/>
+                <a:ea typeface="League Spartan SemiBold"/>
+                <a:cs typeface="League Spartan SemiBold"/>
+              </a:rPr>
+              <a:t>01.1</a:t>
+            </a:r>
+          </a:p>
+        </p:txBody>
+      </p:sp>
+      <p:sp>
+        <p:nvSpPr>
+          <p:cNvPr id="14" name="TextBox 13"/>
+          <p:cNvSpPr txBox="1"/>
+          <p:nvPr/>
+        </p:nvSpPr>
+        <p:spPr>
+          <a:xfrm>
+            <a:off x="977900" y="2518372"/>
+            <a:ext cx="3179166" cy="127000"/>
+          </a:xfrm>
+          <a:prstGeom prst="rect">
+            <a:avLst/>
+          </a:prstGeom>
+          <a:noFill/>
+        </p:spPr>
+        <p:txBody>
+          <a:bodyPr wrap="none" lIns="0" rIns="0" tIns="0" bIns="0" anchor="ctr">
+            <a:noAutofit/>
+          </a:bodyPr>
+          <a:lstStyle/>
+          <a:p>
+            <a:pPr algn="l"/>
+            <a:r>
+              <a:rPr sz="850" b="0" i="0">
+                <a:solidFill>
+                  <a:srgbClr val="64707A"/>
+                </a:solidFill>
+                <a:latin typeface="Urbanist Medium"/>
+                <a:ea typeface="Urbanist Medium"/>
+                <a:cs typeface="Urbanist Medium"/>
+              </a:rPr>
+              <a:t>What this section answers</a:t>
+            </a:r>
+          </a:p>
+        </p:txBody>
+      </p:sp>
+      <p:sp>
+        <p:nvSpPr>
+          <p:cNvPr id="15" name="TextBox 14"/>
+          <p:cNvSpPr txBox="1"/>
+          <p:nvPr/>
+        </p:nvSpPr>
+        <p:spPr>
+          <a:xfrm>
+            <a:off x="609600" y="2779319"/>
+            <a:ext cx="279400" cy="76200"/>
+          </a:xfrm>
+          <a:prstGeom prst="rect">
+            <a:avLst/>
+          </a:prstGeom>
+          <a:noFill/>
+        </p:spPr>
+        <p:txBody>
+          <a:bodyPr wrap="none" lIns="0" rIns="0" tIns="0" bIns="0" anchor="ctr">
+            <a:noAutofit/>
+          </a:bodyPr>
+          <a:lstStyle/>
+          <a:p>
+            <a:pPr algn="l"/>
+            <a:r>
+              <a:rPr sz="620" b="0" i="0" spc="100">
+                <a:solidFill>
+                  <a:srgbClr val="64707A"/>
+                </a:solidFill>
+                <a:latin typeface="League Spartan SemiBold"/>
+                <a:ea typeface="League Spartan SemiBold"/>
+                <a:cs typeface="League Spartan SemiBold"/>
+              </a:rPr>
+              <a:t>01.2</a:t>
+            </a:r>
+          </a:p>
+        </p:txBody>
+      </p:sp>
+      <p:sp>
+        <p:nvSpPr>
+          <p:cNvPr id="16" name="TextBox 15"/>
+          <p:cNvSpPr txBox="1"/>
+          <p:nvPr/>
+        </p:nvSpPr>
+        <p:spPr>
+          <a:xfrm>
+            <a:off x="977900" y="2734869"/>
+            <a:ext cx="3179166" cy="127000"/>
+          </a:xfrm>
+          <a:prstGeom prst="rect">
+            <a:avLst/>
+          </a:prstGeom>
+          <a:noFill/>
+        </p:spPr>
+        <p:txBody>
+          <a:bodyPr wrap="none" lIns="0" rIns="0" tIns="0" bIns="0" anchor="ctr">
+            <a:noAutofit/>
+          </a:bodyPr>
+          <a:lstStyle/>
+          <a:p>
+            <a:pPr algn="l"/>
+            <a:r>
+              <a:rPr sz="850" b="0" i="0">
+                <a:solidFill>
+                  <a:srgbClr val="64707A"/>
+                </a:solidFill>
+                <a:latin typeface="Urbanist Medium"/>
+                <a:ea typeface="Urbanist Medium"/>
+                <a:cs typeface="Urbanist Medium"/>
+              </a:rPr>
+              <a:t>What this section answers</a:t>
+            </a:r>
+          </a:p>
+        </p:txBody>
+      </p:sp>
+      <p:sp>
+        <p:nvSpPr>
+          <p:cNvPr id="17" name="TextBox 16"/>
+          <p:cNvSpPr txBox="1"/>
+          <p:nvPr/>
+        </p:nvSpPr>
+        <p:spPr>
+          <a:xfrm>
+            <a:off x="609600" y="2995809"/>
+            <a:ext cx="279400" cy="76200"/>
+          </a:xfrm>
+          <a:prstGeom prst="rect">
+            <a:avLst/>
+          </a:prstGeom>
+          <a:noFill/>
+        </p:spPr>
+        <p:txBody>
+          <a:bodyPr wrap="none" lIns="0" rIns="0" tIns="0" bIns="0" anchor="ctr">
+            <a:noAutofit/>
+          </a:bodyPr>
+          <a:lstStyle/>
+          <a:p>
+            <a:pPr algn="l"/>
+            <a:r>
+              <a:rPr sz="620" b="0" i="0" spc="100">
+                <a:solidFill>
+                  <a:srgbClr val="64707A"/>
+                </a:solidFill>
+                <a:latin typeface="League Spartan SemiBold"/>
+                <a:ea typeface="League Spartan SemiBold"/>
+                <a:cs typeface="League Spartan SemiBold"/>
+              </a:rPr>
+              <a:t>01.3</a:t>
+            </a:r>
+          </a:p>
+        </p:txBody>
+      </p:sp>
+      <p:sp>
+        <p:nvSpPr>
+          <p:cNvPr id="18" name="TextBox 17"/>
+          <p:cNvSpPr txBox="1"/>
+          <p:nvPr/>
+        </p:nvSpPr>
+        <p:spPr>
+          <a:xfrm>
+            <a:off x="977900" y="2951359"/>
+            <a:ext cx="3179166" cy="127000"/>
+          </a:xfrm>
+          <a:prstGeom prst="rect">
+            <a:avLst/>
+          </a:prstGeom>
+          <a:noFill/>
+        </p:spPr>
+        <p:txBody>
+          <a:bodyPr wrap="none" lIns="0" rIns="0" tIns="0" bIns="0" anchor="ctr">
+            <a:noAutofit/>
+          </a:bodyPr>
+          <a:lstStyle/>
+          <a:p>
+            <a:pPr algn="l"/>
+            <a:r>
+              <a:rPr sz="850" b="0" i="0">
+                <a:solidFill>
+                  <a:srgbClr val="64707A"/>
+                </a:solidFill>
+                <a:latin typeface="Urbanist Medium"/>
+                <a:ea typeface="Urbanist Medium"/>
+                <a:cs typeface="Urbanist Medium"/>
+              </a:rPr>
+              <a:t>What this section answers</a:t>
+            </a:r>
+          </a:p>
+        </p:txBody>
+      </p:sp>
+      <p:sp>
+        <p:nvSpPr>
+          <p:cNvPr id="19" name="TextBox 18"/>
+          <p:cNvSpPr txBox="1"/>
+          <p:nvPr/>
+        </p:nvSpPr>
+        <p:spPr>
+          <a:xfrm>
+            <a:off x="609600" y="3212306"/>
+            <a:ext cx="279400" cy="76200"/>
+          </a:xfrm>
+          <a:prstGeom prst="rect">
+            <a:avLst/>
+          </a:prstGeom>
+          <a:noFill/>
+        </p:spPr>
+        <p:txBody>
+          <a:bodyPr wrap="none" lIns="0" rIns="0" tIns="0" bIns="0" anchor="ctr">
+            <a:noAutofit/>
+          </a:bodyPr>
+          <a:lstStyle/>
+          <a:p>
+            <a:pPr algn="l"/>
+            <a:r>
+              <a:rPr sz="620" b="0" i="0" spc="100">
+                <a:solidFill>
+                  <a:srgbClr val="64707A"/>
+                </a:solidFill>
+                <a:latin typeface="League Spartan SemiBold"/>
+                <a:ea typeface="League Spartan SemiBold"/>
+                <a:cs typeface="League Spartan SemiBold"/>
+              </a:rPr>
+              <a:t>01.4</a:t>
+            </a:r>
+          </a:p>
+        </p:txBody>
+      </p:sp>
+      <p:sp>
+        <p:nvSpPr>
+          <p:cNvPr id="20" name="TextBox 19"/>
+          <p:cNvSpPr txBox="1"/>
+          <p:nvPr/>
+        </p:nvSpPr>
+        <p:spPr>
+          <a:xfrm>
+            <a:off x="977900" y="3167856"/>
+            <a:ext cx="3179166" cy="127000"/>
+          </a:xfrm>
+          <a:prstGeom prst="rect">
+            <a:avLst/>
+          </a:prstGeom>
+          <a:noFill/>
+        </p:spPr>
+        <p:txBody>
+          <a:bodyPr wrap="none" lIns="0" rIns="0" tIns="0" bIns="0" anchor="ctr">
+            <a:noAutofit/>
+          </a:bodyPr>
+          <a:lstStyle/>
+          <a:p>
+            <a:pPr algn="l"/>
+            <a:r>
+              <a:rPr sz="850" b="0" i="0">
+                <a:solidFill>
+                  <a:srgbClr val="64707A"/>
+                </a:solidFill>
+                <a:latin typeface="Urbanist Medium"/>
+                <a:ea typeface="Urbanist Medium"/>
+                <a:cs typeface="Urbanist Medium"/>
+              </a:rPr>
+              <a:t>What this section answers</a:t>
+            </a:r>
+          </a:p>
+        </p:txBody>
+      </p:sp>
+      <p:sp>
+        <p:nvSpPr>
+          <p:cNvPr id="21" name="TextBox 20"/>
+          <p:cNvSpPr txBox="1"/>
+          <p:nvPr/>
+        </p:nvSpPr>
+        <p:spPr>
+          <a:xfrm>
+            <a:off x="4322166" y="1631950"/>
+            <a:ext cx="3547567" cy="463550"/>
+          </a:xfrm>
+          <a:prstGeom prst="rect">
+            <a:avLst/>
+          </a:prstGeom>
+          <a:noFill/>
+        </p:spPr>
+        <p:txBody>
+          <a:bodyPr wrap="none" lIns="0" rIns="0" tIns="0" bIns="0" anchor="ctr">
+            <a:noAutofit/>
+          </a:bodyPr>
+          <a:lstStyle/>
+          <a:p>
+            <a:pPr algn="l"/>
+            <a:r>
+              <a:rPr sz="2600" b="1" i="0" spc="-104">
+                <a:solidFill>
+                  <a:srgbClr val="64707A"/>
+                </a:solidFill>
+                <a:latin typeface="Poppins"/>
+                <a:ea typeface="Poppins"/>
+                <a:cs typeface="Poppins"/>
+              </a:rPr>
+              <a:t>02</a:t>
+            </a:r>
+          </a:p>
+        </p:txBody>
+      </p:sp>
+      <p:sp>
+        <p:nvSpPr>
+          <p:cNvPr id="22" name="Rectangle 21"/>
+          <p:cNvSpPr/>
+          <p:nvPr/>
+        </p:nvSpPr>
+        <p:spPr>
+          <a:xfrm>
+            <a:off x="4322166" y="2397722"/>
+            <a:ext cx="3547567" cy="12700"/>
+          </a:xfrm>
+          <a:prstGeom prst="rect">
+            <a:avLst/>
+          </a:prstGeom>
+          <a:solidFill>
+            <a:srgbClr val="EC2326"/>
+          </a:solidFill>
+          <a:ln>
+            <a:noFill/>
+          </a:ln>
+          <a:effectLst/>
+        </p:spPr>
+        <p:txBody>
+          <a:bodyPr rtlCol="0" anchor="ctr"/>
+          <a:lstStyle/>
+          <a:p>
+            <a:pPr algn="ctr"/>
+          </a:p>
+        </p:txBody>
+      </p:sp>
+      <p:sp>
+        <p:nvSpPr>
+          <p:cNvPr id="23" name="TextBox 22"/>
+          <p:cNvSpPr txBox="1"/>
+          <p:nvPr/>
+        </p:nvSpPr>
+        <p:spPr>
+          <a:xfrm>
+            <a:off x="4322166" y="2114550"/>
+            <a:ext cx="3547567" cy="209550"/>
+          </a:xfrm>
+          <a:prstGeom prst="rect">
+            <a:avLst/>
+          </a:prstGeom>
+          <a:noFill/>
+        </p:spPr>
+        <p:txBody>
+          <a:bodyPr wrap="none" lIns="0" rIns="0" tIns="0" bIns="0" anchor="ctr">
+            <a:noAutofit/>
+          </a:bodyPr>
+          <a:lstStyle/>
+          <a:p>
+            <a:pPr algn="l"/>
+            <a:r>
+              <a:rPr sz="1200" b="0" i="0" spc="-24">
+                <a:solidFill>
+                  <a:srgbClr val="64707A"/>
+                </a:solidFill>
+                <a:latin typeface="Poppins SemiBold"/>
+                <a:ea typeface="Poppins SemiBold"/>
+                <a:cs typeface="Poppins SemiBold"/>
+              </a:rPr>
+              <a:t>Part name</a:t>
+            </a:r>
+          </a:p>
+        </p:txBody>
+      </p:sp>
+      <p:sp>
+        <p:nvSpPr>
+          <p:cNvPr id="24" name="TextBox 23"/>
+          <p:cNvSpPr txBox="1"/>
+          <p:nvPr/>
+        </p:nvSpPr>
+        <p:spPr>
+          <a:xfrm>
+            <a:off x="4322166" y="2562822"/>
+            <a:ext cx="279400" cy="76200"/>
+          </a:xfrm>
+          <a:prstGeom prst="rect">
+            <a:avLst/>
+          </a:prstGeom>
+          <a:noFill/>
+        </p:spPr>
+        <p:txBody>
+          <a:bodyPr wrap="none" lIns="0" rIns="0" tIns="0" bIns="0" anchor="ctr">
+            <a:noAutofit/>
+          </a:bodyPr>
+          <a:lstStyle/>
+          <a:p>
+            <a:pPr algn="l"/>
+            <a:r>
+              <a:rPr sz="620" b="0" i="0" spc="100">
+                <a:solidFill>
+                  <a:srgbClr val="64707A"/>
+                </a:solidFill>
+                <a:latin typeface="League Spartan SemiBold"/>
+                <a:ea typeface="League Spartan SemiBold"/>
+                <a:cs typeface="League Spartan SemiBold"/>
+              </a:rPr>
+              <a:t>02.1</a:t>
+            </a:r>
+          </a:p>
+        </p:txBody>
+      </p:sp>
+      <p:sp>
+        <p:nvSpPr>
+          <p:cNvPr id="25" name="TextBox 24"/>
+          <p:cNvSpPr txBox="1"/>
+          <p:nvPr/>
+        </p:nvSpPr>
+        <p:spPr>
+          <a:xfrm>
+            <a:off x="4690466" y="2518372"/>
+            <a:ext cx="3179267" cy="127000"/>
+          </a:xfrm>
+          <a:prstGeom prst="rect">
+            <a:avLst/>
+          </a:prstGeom>
+          <a:noFill/>
+        </p:spPr>
+        <p:txBody>
+          <a:bodyPr wrap="none" lIns="0" rIns="0" tIns="0" bIns="0" anchor="ctr">
+            <a:noAutofit/>
+          </a:bodyPr>
+          <a:lstStyle/>
+          <a:p>
+            <a:pPr algn="l"/>
+            <a:r>
+              <a:rPr sz="850" b="0" i="0">
+                <a:solidFill>
+                  <a:srgbClr val="64707A"/>
+                </a:solidFill>
+                <a:latin typeface="Urbanist Medium"/>
+                <a:ea typeface="Urbanist Medium"/>
+                <a:cs typeface="Urbanist Medium"/>
+              </a:rPr>
+              <a:t>What this section answers</a:t>
+            </a:r>
+          </a:p>
+        </p:txBody>
+      </p:sp>
+      <p:sp>
+        <p:nvSpPr>
+          <p:cNvPr id="26" name="TextBox 25"/>
+          <p:cNvSpPr txBox="1"/>
+          <p:nvPr/>
+        </p:nvSpPr>
+        <p:spPr>
+          <a:xfrm>
+            <a:off x="4322166" y="2779319"/>
+            <a:ext cx="279400" cy="76200"/>
+          </a:xfrm>
+          <a:prstGeom prst="rect">
+            <a:avLst/>
+          </a:prstGeom>
+          <a:noFill/>
+        </p:spPr>
+        <p:txBody>
+          <a:bodyPr wrap="none" lIns="0" rIns="0" tIns="0" bIns="0" anchor="ctr">
+            <a:noAutofit/>
+          </a:bodyPr>
+          <a:lstStyle/>
+          <a:p>
+            <a:pPr algn="l"/>
+            <a:r>
+              <a:rPr sz="620" b="0" i="0" spc="100">
+                <a:solidFill>
+                  <a:srgbClr val="64707A"/>
+                </a:solidFill>
+                <a:latin typeface="League Spartan SemiBold"/>
+                <a:ea typeface="League Spartan SemiBold"/>
+                <a:cs typeface="League Spartan SemiBold"/>
+              </a:rPr>
+              <a:t>02.2</a:t>
+            </a:r>
+          </a:p>
+        </p:txBody>
+      </p:sp>
+      <p:sp>
+        <p:nvSpPr>
+          <p:cNvPr id="27" name="TextBox 26"/>
+          <p:cNvSpPr txBox="1"/>
+          <p:nvPr/>
+        </p:nvSpPr>
+        <p:spPr>
+          <a:xfrm>
+            <a:off x="4690466" y="2734869"/>
+            <a:ext cx="3179267" cy="127000"/>
+          </a:xfrm>
+          <a:prstGeom prst="rect">
+            <a:avLst/>
+          </a:prstGeom>
+          <a:noFill/>
+        </p:spPr>
+        <p:txBody>
+          <a:bodyPr wrap="none" lIns="0" rIns="0" tIns="0" bIns="0" anchor="ctr">
+            <a:noAutofit/>
+          </a:bodyPr>
+          <a:lstStyle/>
+          <a:p>
+            <a:pPr algn="l"/>
+            <a:r>
+              <a:rPr sz="850" b="0" i="0">
+                <a:solidFill>
+                  <a:srgbClr val="64707A"/>
+                </a:solidFill>
+                <a:latin typeface="Urbanist Medium"/>
+                <a:ea typeface="Urbanist Medium"/>
+                <a:cs typeface="Urbanist Medium"/>
+              </a:rPr>
+              <a:t>What this section answers</a:t>
+            </a:r>
+          </a:p>
+        </p:txBody>
+      </p:sp>
+      <p:sp>
+        <p:nvSpPr>
+          <p:cNvPr id="28" name="TextBox 27"/>
+          <p:cNvSpPr txBox="1"/>
+          <p:nvPr/>
+        </p:nvSpPr>
+        <p:spPr>
+          <a:xfrm>
+            <a:off x="4322166" y="2995809"/>
+            <a:ext cx="279400" cy="76200"/>
+          </a:xfrm>
+          <a:prstGeom prst="rect">
+            <a:avLst/>
+          </a:prstGeom>
+          <a:noFill/>
+        </p:spPr>
+        <p:txBody>
+          <a:bodyPr wrap="none" lIns="0" rIns="0" tIns="0" bIns="0" anchor="ctr">
+            <a:noAutofit/>
+          </a:bodyPr>
+          <a:lstStyle/>
+          <a:p>
+            <a:pPr algn="l"/>
+            <a:r>
+              <a:rPr sz="620" b="0" i="0" spc="100">
+                <a:solidFill>
+                  <a:srgbClr val="64707A"/>
+                </a:solidFill>
+                <a:latin typeface="League Spartan SemiBold"/>
+                <a:ea typeface="League Spartan SemiBold"/>
+                <a:cs typeface="League Spartan SemiBold"/>
+              </a:rPr>
+              <a:t>02.3</a:t>
+            </a:r>
+          </a:p>
+        </p:txBody>
+      </p:sp>
+      <p:sp>
+        <p:nvSpPr>
+          <p:cNvPr id="29" name="TextBox 28"/>
+          <p:cNvSpPr txBox="1"/>
+          <p:nvPr/>
+        </p:nvSpPr>
+        <p:spPr>
+          <a:xfrm>
+            <a:off x="4690466" y="2951359"/>
+            <a:ext cx="3179267" cy="127000"/>
+          </a:xfrm>
+          <a:prstGeom prst="rect">
+            <a:avLst/>
+          </a:prstGeom>
+          <a:noFill/>
+        </p:spPr>
+        <p:txBody>
+          <a:bodyPr wrap="none" lIns="0" rIns="0" tIns="0" bIns="0" anchor="ctr">
+            <a:noAutofit/>
+          </a:bodyPr>
+          <a:lstStyle/>
+          <a:p>
+            <a:pPr algn="l"/>
+            <a:r>
+              <a:rPr sz="850" b="0" i="0">
+                <a:solidFill>
+                  <a:srgbClr val="64707A"/>
+                </a:solidFill>
+                <a:latin typeface="Urbanist Medium"/>
+                <a:ea typeface="Urbanist Medium"/>
+                <a:cs typeface="Urbanist Medium"/>
+              </a:rPr>
+              <a:t>What this section answers</a:t>
+            </a:r>
+          </a:p>
+        </p:txBody>
+      </p:sp>
+      <p:sp>
+        <p:nvSpPr>
+          <p:cNvPr id="30" name="TextBox 29"/>
+          <p:cNvSpPr txBox="1"/>
+          <p:nvPr/>
+        </p:nvSpPr>
+        <p:spPr>
+          <a:xfrm>
+            <a:off x="4322166" y="3212306"/>
+            <a:ext cx="279400" cy="76200"/>
+          </a:xfrm>
+          <a:prstGeom prst="rect">
+            <a:avLst/>
+          </a:prstGeom>
+          <a:noFill/>
+        </p:spPr>
+        <p:txBody>
+          <a:bodyPr wrap="none" lIns="0" rIns="0" tIns="0" bIns="0" anchor="ctr">
+            <a:noAutofit/>
+          </a:bodyPr>
+          <a:lstStyle/>
+          <a:p>
+            <a:pPr algn="l"/>
+            <a:r>
+              <a:rPr sz="620" b="0" i="0" spc="100">
+                <a:solidFill>
+                  <a:srgbClr val="64707A"/>
+                </a:solidFill>
+                <a:latin typeface="League Spartan SemiBold"/>
+                <a:ea typeface="League Spartan SemiBold"/>
+                <a:cs typeface="League Spartan SemiBold"/>
+              </a:rPr>
+              <a:t>02.4</a:t>
+            </a:r>
+          </a:p>
+        </p:txBody>
+      </p:sp>
+      <p:sp>
+        <p:nvSpPr>
+          <p:cNvPr id="31" name="TextBox 30"/>
+          <p:cNvSpPr txBox="1"/>
+          <p:nvPr/>
+        </p:nvSpPr>
+        <p:spPr>
+          <a:xfrm>
+            <a:off x="4690466" y="3167856"/>
+            <a:ext cx="3179267" cy="127000"/>
+          </a:xfrm>
+          <a:prstGeom prst="rect">
+            <a:avLst/>
+          </a:prstGeom>
+          <a:noFill/>
+        </p:spPr>
+        <p:txBody>
+          <a:bodyPr wrap="none" lIns="0" rIns="0" tIns="0" bIns="0" anchor="ctr">
+            <a:noAutofit/>
+          </a:bodyPr>
+          <a:lstStyle/>
+          <a:p>
+            <a:pPr algn="l"/>
+            <a:r>
+              <a:rPr sz="850" b="0" i="0">
+                <a:solidFill>
+                  <a:srgbClr val="64707A"/>
+                </a:solidFill>
+                <a:latin typeface="Urbanist Medium"/>
+                <a:ea typeface="Urbanist Medium"/>
+                <a:cs typeface="Urbanist Medium"/>
+              </a:rPr>
+              <a:t>What this section answers</a:t>
+            </a:r>
+          </a:p>
+        </p:txBody>
+      </p:sp>
+      <p:sp>
+        <p:nvSpPr>
+          <p:cNvPr id="32" name="TextBox 31"/>
+          <p:cNvSpPr txBox="1"/>
+          <p:nvPr/>
+        </p:nvSpPr>
+        <p:spPr>
+          <a:xfrm>
+            <a:off x="8034833" y="1631950"/>
+            <a:ext cx="3547567" cy="463550"/>
+          </a:xfrm>
+          <a:prstGeom prst="rect">
+            <a:avLst/>
+          </a:prstGeom>
+          <a:noFill/>
+        </p:spPr>
+        <p:txBody>
+          <a:bodyPr wrap="none" lIns="0" rIns="0" tIns="0" bIns="0" anchor="ctr">
+            <a:noAutofit/>
+          </a:bodyPr>
+          <a:lstStyle/>
+          <a:p>
+            <a:pPr algn="l"/>
+            <a:r>
+              <a:rPr sz="2600" b="1" i="0" spc="-104">
+                <a:solidFill>
+                  <a:srgbClr val="64707A"/>
+                </a:solidFill>
+                <a:latin typeface="Poppins"/>
+                <a:ea typeface="Poppins"/>
+                <a:cs typeface="Poppins"/>
+              </a:rPr>
+              <a:t>03</a:t>
+            </a:r>
+          </a:p>
+        </p:txBody>
+      </p:sp>
+      <p:sp>
+        <p:nvSpPr>
+          <p:cNvPr id="33" name="Rectangle 32"/>
+          <p:cNvSpPr/>
+          <p:nvPr/>
+        </p:nvSpPr>
+        <p:spPr>
+          <a:xfrm>
+            <a:off x="8034833" y="2397722"/>
+            <a:ext cx="3547567" cy="12700"/>
+          </a:xfrm>
+          <a:prstGeom prst="rect">
+            <a:avLst/>
+          </a:prstGeom>
+          <a:solidFill>
+            <a:srgbClr val="EC2326"/>
+          </a:solidFill>
+          <a:ln>
+            <a:noFill/>
+          </a:ln>
+          <a:effectLst/>
+        </p:spPr>
+        <p:txBody>
+          <a:bodyPr rtlCol="0" anchor="ctr"/>
+          <a:lstStyle/>
+          <a:p>
+            <a:pPr algn="ctr"/>
+          </a:p>
+        </p:txBody>
+      </p:sp>
+      <p:sp>
+        <p:nvSpPr>
+          <p:cNvPr id="34" name="TextBox 33"/>
+          <p:cNvSpPr txBox="1"/>
+          <p:nvPr/>
+        </p:nvSpPr>
+        <p:spPr>
+          <a:xfrm>
+            <a:off x="8034833" y="2114550"/>
+            <a:ext cx="3547567" cy="209550"/>
+          </a:xfrm>
+          <a:prstGeom prst="rect">
+            <a:avLst/>
+          </a:prstGeom>
+          <a:noFill/>
+        </p:spPr>
+        <p:txBody>
+          <a:bodyPr wrap="none" lIns="0" rIns="0" tIns="0" bIns="0" anchor="ctr">
+            <a:noAutofit/>
+          </a:bodyPr>
+          <a:lstStyle/>
+          <a:p>
+            <a:pPr algn="l"/>
+            <a:r>
+              <a:rPr sz="1200" b="0" i="0" spc="-24">
+                <a:solidFill>
+                  <a:srgbClr val="64707A"/>
+                </a:solidFill>
+                <a:latin typeface="Poppins SemiBold"/>
+                <a:ea typeface="Poppins SemiBold"/>
+                <a:cs typeface="Poppins SemiBold"/>
+              </a:rPr>
+              <a:t>Part name</a:t>
+            </a:r>
+          </a:p>
+        </p:txBody>
+      </p:sp>
+      <p:sp>
+        <p:nvSpPr>
+          <p:cNvPr id="35" name="TextBox 34"/>
+          <p:cNvSpPr txBox="1"/>
+          <p:nvPr/>
+        </p:nvSpPr>
+        <p:spPr>
+          <a:xfrm>
+            <a:off x="8034833" y="2562822"/>
+            <a:ext cx="279400" cy="76200"/>
+          </a:xfrm>
+          <a:prstGeom prst="rect">
+            <a:avLst/>
+          </a:prstGeom>
+          <a:noFill/>
+        </p:spPr>
+        <p:txBody>
+          <a:bodyPr wrap="none" lIns="0" rIns="0" tIns="0" bIns="0" anchor="ctr">
+            <a:noAutofit/>
+          </a:bodyPr>
+          <a:lstStyle/>
+          <a:p>
+            <a:pPr algn="l"/>
+            <a:r>
+              <a:rPr sz="620" b="0" i="0" spc="100">
+                <a:solidFill>
+                  <a:srgbClr val="64707A"/>
+                </a:solidFill>
+                <a:latin typeface="League Spartan SemiBold"/>
+                <a:ea typeface="League Spartan SemiBold"/>
+                <a:cs typeface="League Spartan SemiBold"/>
+              </a:rPr>
+              <a:t>03.1</a:t>
+            </a:r>
+          </a:p>
+        </p:txBody>
+      </p:sp>
+      <p:sp>
+        <p:nvSpPr>
+          <p:cNvPr id="36" name="TextBox 35"/>
+          <p:cNvSpPr txBox="1"/>
+          <p:nvPr/>
+        </p:nvSpPr>
+        <p:spPr>
+          <a:xfrm>
+            <a:off x="8403133" y="2518372"/>
+            <a:ext cx="3179267" cy="127000"/>
+          </a:xfrm>
+          <a:prstGeom prst="rect">
+            <a:avLst/>
+          </a:prstGeom>
+          <a:noFill/>
+        </p:spPr>
+        <p:txBody>
+          <a:bodyPr wrap="none" lIns="0" rIns="0" tIns="0" bIns="0" anchor="ctr">
+            <a:noAutofit/>
+          </a:bodyPr>
+          <a:lstStyle/>
+          <a:p>
+            <a:pPr algn="l"/>
+            <a:r>
+              <a:rPr sz="850" b="0" i="0">
+                <a:solidFill>
+                  <a:srgbClr val="64707A"/>
+                </a:solidFill>
+                <a:latin typeface="Urbanist Medium"/>
+                <a:ea typeface="Urbanist Medium"/>
+                <a:cs typeface="Urbanist Medium"/>
+              </a:rPr>
+              <a:t>What this section answers</a:t>
+            </a:r>
+          </a:p>
+        </p:txBody>
+      </p:sp>
+      <p:sp>
+        <p:nvSpPr>
+          <p:cNvPr id="37" name="TextBox 36"/>
+          <p:cNvSpPr txBox="1"/>
+          <p:nvPr/>
+        </p:nvSpPr>
+        <p:spPr>
+          <a:xfrm>
+            <a:off x="8034833" y="2779319"/>
+            <a:ext cx="279400" cy="76200"/>
+          </a:xfrm>
+          <a:prstGeom prst="rect">
+            <a:avLst/>
+          </a:prstGeom>
+          <a:noFill/>
+        </p:spPr>
+        <p:txBody>
+          <a:bodyPr wrap="none" lIns="0" rIns="0" tIns="0" bIns="0" anchor="ctr">
+            <a:noAutofit/>
+          </a:bodyPr>
+          <a:lstStyle/>
+          <a:p>
+            <a:pPr algn="l"/>
+            <a:r>
+              <a:rPr sz="620" b="0" i="0" spc="100">
+                <a:solidFill>
+                  <a:srgbClr val="64707A"/>
+                </a:solidFill>
+                <a:latin typeface="League Spartan SemiBold"/>
+                <a:ea typeface="League Spartan SemiBold"/>
+                <a:cs typeface="League Spartan SemiBold"/>
+              </a:rPr>
+              <a:t>03.2</a:t>
+            </a:r>
+          </a:p>
+        </p:txBody>
+      </p:sp>
+      <p:sp>
+        <p:nvSpPr>
+          <p:cNvPr id="38" name="TextBox 37"/>
+          <p:cNvSpPr txBox="1"/>
+          <p:nvPr/>
+        </p:nvSpPr>
+        <p:spPr>
+          <a:xfrm>
+            <a:off x="8403133" y="2734869"/>
+            <a:ext cx="3179267" cy="127000"/>
+          </a:xfrm>
+          <a:prstGeom prst="rect">
+            <a:avLst/>
+          </a:prstGeom>
+          <a:noFill/>
+        </p:spPr>
+        <p:txBody>
+          <a:bodyPr wrap="none" lIns="0" rIns="0" tIns="0" bIns="0" anchor="ctr">
+            <a:noAutofit/>
+          </a:bodyPr>
+          <a:lstStyle/>
+          <a:p>
+            <a:pPr algn="l"/>
+            <a:r>
+              <a:rPr sz="850" b="0" i="0">
+                <a:solidFill>
+                  <a:srgbClr val="64707A"/>
+                </a:solidFill>
+                <a:latin typeface="Urbanist Medium"/>
+                <a:ea typeface="Urbanist Medium"/>
+                <a:cs typeface="Urbanist Medium"/>
+              </a:rPr>
+              <a:t>What this section answers</a:t>
+            </a:r>
+          </a:p>
+        </p:txBody>
+      </p:sp>
+      <p:sp>
+        <p:nvSpPr>
+          <p:cNvPr id="39" name="TextBox 38"/>
+          <p:cNvSpPr txBox="1"/>
+          <p:nvPr/>
+        </p:nvSpPr>
+        <p:spPr>
+          <a:xfrm>
+            <a:off x="8034833" y="2995809"/>
+            <a:ext cx="279400" cy="76200"/>
+          </a:xfrm>
+          <a:prstGeom prst="rect">
+            <a:avLst/>
+          </a:prstGeom>
+          <a:noFill/>
+        </p:spPr>
+        <p:txBody>
+          <a:bodyPr wrap="none" lIns="0" rIns="0" tIns="0" bIns="0" anchor="ctr">
+            <a:noAutofit/>
+          </a:bodyPr>
+          <a:lstStyle/>
+          <a:p>
+            <a:pPr algn="l"/>
+            <a:r>
+              <a:rPr sz="620" b="0" i="0" spc="100">
+                <a:solidFill>
+                  <a:srgbClr val="64707A"/>
+                </a:solidFill>
+                <a:latin typeface="League Spartan SemiBold"/>
+                <a:ea typeface="League Spartan SemiBold"/>
+                <a:cs typeface="League Spartan SemiBold"/>
+              </a:rPr>
+              <a:t>03.3</a:t>
+            </a:r>
+          </a:p>
+        </p:txBody>
+      </p:sp>
+      <p:sp>
+        <p:nvSpPr>
+          <p:cNvPr id="40" name="TextBox 39"/>
+          <p:cNvSpPr txBox="1"/>
+          <p:nvPr/>
+        </p:nvSpPr>
+        <p:spPr>
+          <a:xfrm>
+            <a:off x="8403133" y="2951359"/>
+            <a:ext cx="3179267" cy="127000"/>
+          </a:xfrm>
+          <a:prstGeom prst="rect">
+            <a:avLst/>
+          </a:prstGeom>
+          <a:noFill/>
+        </p:spPr>
+        <p:txBody>
+          <a:bodyPr wrap="none" lIns="0" rIns="0" tIns="0" bIns="0" anchor="ctr">
+            <a:noAutofit/>
+          </a:bodyPr>
+          <a:lstStyle/>
+          <a:p>
+            <a:pPr algn="l"/>
+            <a:r>
+              <a:rPr sz="850" b="0" i="0">
+                <a:solidFill>
+                  <a:srgbClr val="64707A"/>
+                </a:solidFill>
+                <a:latin typeface="Urbanist Medium"/>
+                <a:ea typeface="Urbanist Medium"/>
+                <a:cs typeface="Urbanist Medium"/>
+              </a:rPr>
+              <a:t>What this section answers</a:t>
+            </a:r>
+          </a:p>
+        </p:txBody>
+      </p:sp>
+      <p:sp>
+        <p:nvSpPr>
+          <p:cNvPr id="41" name="TextBox 40"/>
+          <p:cNvSpPr txBox="1"/>
+          <p:nvPr/>
+        </p:nvSpPr>
+        <p:spPr>
+          <a:xfrm>
+            <a:off x="8034833" y="3212306"/>
+            <a:ext cx="279400" cy="76200"/>
+          </a:xfrm>
+          <a:prstGeom prst="rect">
+            <a:avLst/>
+          </a:prstGeom>
+          <a:noFill/>
+        </p:spPr>
+        <p:txBody>
+          <a:bodyPr wrap="none" lIns="0" rIns="0" tIns="0" bIns="0" anchor="ctr">
+            <a:noAutofit/>
+          </a:bodyPr>
+          <a:lstStyle/>
+          <a:p>
+            <a:pPr algn="l"/>
+            <a:r>
+              <a:rPr sz="620" b="0" i="0" spc="100">
+                <a:solidFill>
+                  <a:srgbClr val="64707A"/>
+                </a:solidFill>
+                <a:latin typeface="League Spartan SemiBold"/>
+                <a:ea typeface="League Spartan SemiBold"/>
+                <a:cs typeface="League Spartan SemiBold"/>
+              </a:rPr>
+              <a:t>03.4</a:t>
+            </a:r>
+          </a:p>
+        </p:txBody>
+      </p:sp>
+      <p:sp>
+        <p:nvSpPr>
+          <p:cNvPr id="42" name="TextBox 41"/>
+          <p:cNvSpPr txBox="1"/>
+          <p:nvPr/>
+        </p:nvSpPr>
+        <p:spPr>
+          <a:xfrm>
+            <a:off x="8403133" y="3167856"/>
+            <a:ext cx="3179267" cy="127000"/>
+          </a:xfrm>
+          <a:prstGeom prst="rect">
+            <a:avLst/>
+          </a:prstGeom>
+          <a:noFill/>
+        </p:spPr>
+        <p:txBody>
+          <a:bodyPr wrap="none" lIns="0" rIns="0" tIns="0" bIns="0" anchor="ctr">
+            <a:noAutofit/>
+          </a:bodyPr>
+          <a:lstStyle/>
+          <a:p>
+            <a:pPr algn="l"/>
+            <a:r>
+              <a:rPr sz="850" b="0" i="0">
+                <a:solidFill>
+                  <a:srgbClr val="64707A"/>
+                </a:solidFill>
+                <a:latin typeface="Urbanist Medium"/>
+                <a:ea typeface="Urbanist Medium"/>
+                <a:cs typeface="Urbanist Medium"/>
+              </a:rPr>
+              <a:t>What this section answers</a:t>
+            </a:r>
+          </a:p>
+        </p:txBody>
+      </p:sp>
+      <p:sp>
+        <p:nvSpPr>
+          <p:cNvPr id="43" name="TextBox 42"/>
+          <p:cNvSpPr txBox="1"/>
+          <p:nvPr/>
+        </p:nvSpPr>
+        <p:spPr>
+          <a:xfrm>
+            <a:off x="609600" y="6445250"/>
+            <a:ext cx="130175" cy="76200"/>
+          </a:xfrm>
+          <a:prstGeom prst="rect">
+            <a:avLst/>
+          </a:prstGeom>
+          <a:noFill/>
+        </p:spPr>
+        <p:txBody>
+          <a:bodyPr wrap="none" lIns="0" rIns="0" tIns="0" bIns="0" anchor="ctr">
+            <a:noAutofit/>
+          </a:bodyPr>
+          <a:lstStyle/>
+          <a:p>
+            <a:pPr algn="l"/>
+            <a:r>
+              <a:rPr sz="680" b="0" i="0" spc="148">
+                <a:solidFill>
+                  <a:srgbClr val="64707A"/>
+                </a:solidFill>
+                <a:latin typeface="League Spartan Medium"/>
+                <a:ea typeface="League Spartan Medium"/>
+                <a:cs typeface="League Spartan Medium"/>
+              </a:rPr>
+              <a:t>36</a:t>
+            </a:r>
+          </a:p>
+        </p:txBody>
+      </p:sp>
+      <p:sp>
+        <p:nvSpPr>
+          <p:cNvPr id="44" name="TextBox 43"/>
+          <p:cNvSpPr txBox="1"/>
+          <p:nvPr/>
+        </p:nvSpPr>
+        <p:spPr>
+          <a:xfrm>
+            <a:off x="11154969" y="6429375"/>
+            <a:ext cx="427438" cy="76200"/>
+          </a:xfrm>
+          <a:prstGeom prst="rect">
+            <a:avLst/>
+          </a:prstGeom>
+          <a:noFill/>
+        </p:spPr>
+        <p:txBody>
+          <a:bodyPr wrap="none" lIns="0" rIns="0" tIns="0" bIns="0" anchor="ctr">
+            <a:noAutofit/>
+          </a:bodyPr>
+          <a:lstStyle/>
+          <a:p>
+            <a:pPr algn="l"/>
+            <a:r>
+              <a:rPr sz="680" b="0" i="0" spc="148">
+                <a:solidFill>
+                  <a:srgbClr val="64707A"/>
+                </a:solidFill>
+                <a:latin typeface="League Spartan"/>
+                <a:ea typeface="League Spartan"/>
+                <a:cs typeface="League Spartan"/>
+              </a:rPr>
+              <a:t>AGENDA</a:t>
+            </a:r>
+          </a:p>
+        </p:txBody>
+      </p:sp>
+    </p:spTree>
+  </p:cSld>
+  <p:clrMapOvr>
+    <a:masterClrMapping/>
+  </p:clrMapOvr>
+</p:sld>
+</file>
+
+<file path=ppt/slides/slide38.xml><?xml version="1.0" encoding="utf-8"?>
+<p:sld xmlns:a="http://schemas.openxmlformats.org/drawingml/2006/main" xmlns:p="http://schemas.openxmlformats.org/presentationml/2006/main" xmlns:r="http://schemas.openxmlformats.org/officeDocument/2006/relationships">
+  <p:cSld>
+    <p:spTree>
+      <p:nvGrpSpPr>
+        <p:cNvPr id="1" name=""/>
+        <p:cNvGrpSpPr/>
+        <p:nvPr/>
+      </p:nvGrpSpPr>
+      <p:grpSpPr/>
+      <p:sp>
+        <p:nvSpPr>
+          <p:cNvPr id="2" name="Rectangle 1"/>
+          <p:cNvSpPr/>
+          <p:nvPr/>
+        </p:nvSpPr>
+        <p:spPr>
+          <a:xfrm>
+            <a:off x="0" y="0"/>
+            <a:ext cx="12192000" cy="6858000"/>
+          </a:xfrm>
+          <a:prstGeom prst="rect">
+            <a:avLst/>
+          </a:prstGeom>
+          <a:solidFill>
+            <a:srgbClr val="F6F7F9"/>
+          </a:solidFill>
+          <a:ln>
+            <a:noFill/>
+          </a:ln>
+          <a:effectLst/>
+        </p:spPr>
+        <p:txBody>
+          <a:bodyPr rtlCol="0" anchor="ctr"/>
+          <a:lstStyle/>
+          <a:p>
+            <a:pPr algn="ctr"/>
+          </a:p>
+        </p:txBody>
+      </p:sp>
+      <p:sp>
+        <p:nvSpPr>
+          <p:cNvPr id="3" name="Rectangle 2"/>
+          <p:cNvSpPr/>
+          <p:nvPr/>
+        </p:nvSpPr>
+        <p:spPr>
+          <a:xfrm>
+            <a:off x="609600" y="381000"/>
+            <a:ext cx="235445" cy="165100"/>
+          </a:xfrm>
+          <a:prstGeom prst="rect">
+            <a:avLst/>
+          </a:prstGeom>
+          <a:solidFill>
+            <a:srgbClr val="EC2326"/>
+          </a:solidFill>
+          <a:ln>
+            <a:noFill/>
+          </a:ln>
+          <a:effectLst/>
+        </p:spPr>
+        <p:txBody>
+          <a:bodyPr rtlCol="0" anchor="ctr"/>
+          <a:lstStyle/>
+          <a:p>
+            <a:pPr algn="ctr"/>
+          </a:p>
+        </p:txBody>
+      </p:sp>
+      <p:sp>
+        <p:nvSpPr>
+          <p:cNvPr id="4" name="TextBox 3"/>
+          <p:cNvSpPr txBox="1"/>
+          <p:nvPr/>
+        </p:nvSpPr>
+        <p:spPr>
+          <a:xfrm>
+            <a:off x="609600" y="425450"/>
+            <a:ext cx="235445" cy="82550"/>
+          </a:xfrm>
+          <a:prstGeom prst="rect">
+            <a:avLst/>
+          </a:prstGeom>
+          <a:noFill/>
+        </p:spPr>
+        <p:txBody>
+          <a:bodyPr wrap="none" lIns="69850" rIns="69850" tIns="0" bIns="0" anchor="ctr">
+            <a:noAutofit/>
+          </a:bodyPr>
+          <a:lstStyle/>
+          <a:p>
+            <a:pPr algn="l"/>
+            <a:r>
+              <a:rPr sz="700" b="0" i="0" spc="70">
+                <a:solidFill>
+                  <a:srgbClr val="FFFFFF"/>
+                </a:solidFill>
+                <a:latin typeface="League Spartan SemiBold"/>
+                <a:ea typeface="League Spartan SemiBold"/>
+                <a:cs typeface="League Spartan SemiBold"/>
+              </a:rPr>
+              <a:t>19</a:t>
+            </a:r>
+          </a:p>
+        </p:txBody>
+      </p:sp>
+      <p:sp>
+        <p:nvSpPr>
+          <p:cNvPr id="5" name="TextBox 4"/>
+          <p:cNvSpPr txBox="1"/>
+          <p:nvPr/>
+        </p:nvSpPr>
+        <p:spPr>
+          <a:xfrm>
+            <a:off x="946645" y="414338"/>
+            <a:ext cx="2056505" cy="88900"/>
+          </a:xfrm>
+          <a:prstGeom prst="rect">
+            <a:avLst/>
+          </a:prstGeom>
+          <a:noFill/>
+        </p:spPr>
+        <p:txBody>
+          <a:bodyPr wrap="none" lIns="0" rIns="0" tIns="0" bIns="0" anchor="ctr">
+            <a:noAutofit/>
+          </a:bodyPr>
+          <a:lstStyle/>
+          <a:p>
+            <a:pPr algn="l"/>
+            <a:r>
+              <a:rPr sz="780" b="0" i="0" spc="186">
+                <a:solidFill>
+                  <a:srgbClr val="101A2B"/>
+                </a:solidFill>
+                <a:latin typeface="League Spartan SemiBold"/>
+                <a:ea typeface="League Spartan SemiBold"/>
+                <a:cs typeface="League Spartan SemiBold"/>
+              </a:rPr>
+              <a:t>PART 02 · PROJECT REFERENCES</a:t>
+            </a:r>
+          </a:p>
+        </p:txBody>
+      </p:sp>
+      <p:pic>
+        <p:nvPicPr>
+          <p:cNvPr id="6" name="Picture 5" descr="iaq-logo-tag.png"/>
+          <p:cNvPicPr>
+            <a:picLocks noChangeAspect="1"/>
+          </p:cNvPicPr>
+          <p:nvPr/>
+        </p:nvPicPr>
+        <p:blipFill>
+          <a:blip r:embed="rId2"/>
+          <a:stretch>
+            <a:fillRect/>
+          </a:stretch>
+        </p:blipFill>
+        <p:spPr>
+          <a:xfrm>
+            <a:off x="10947400" y="304800"/>
+            <a:ext cx="635000" cy="317500"/>
+          </a:xfrm>
+          <a:prstGeom prst="rect">
+            <a:avLst/>
+          </a:prstGeom>
+        </p:spPr>
+      </p:pic>
+      <p:sp>
+        <p:nvSpPr>
+          <p:cNvPr id="7" name="Rectangle 6"/>
+          <p:cNvSpPr/>
+          <p:nvPr/>
+        </p:nvSpPr>
+        <p:spPr>
+          <a:xfrm>
+            <a:off x="609600" y="1438872"/>
+            <a:ext cx="10972800" cy="6350"/>
+          </a:xfrm>
+          <a:prstGeom prst="rect">
+            <a:avLst/>
+          </a:prstGeom>
+          <a:solidFill>
+            <a:srgbClr val="D5DBE2"/>
+          </a:solidFill>
+          <a:ln>
+            <a:noFill/>
+          </a:ln>
+          <a:effectLst/>
+        </p:spPr>
+        <p:txBody>
+          <a:bodyPr rtlCol="0" anchor="ctr"/>
+          <a:lstStyle/>
+          <a:p>
+            <a:pPr algn="ctr"/>
+          </a:p>
+        </p:txBody>
+      </p:sp>
+      <p:sp>
+        <p:nvSpPr>
+          <p:cNvPr id="8" name="TextBox 7"/>
+          <p:cNvSpPr txBox="1"/>
+          <p:nvPr/>
+        </p:nvSpPr>
+        <p:spPr>
+          <a:xfrm>
+            <a:off x="609600" y="768350"/>
+            <a:ext cx="10972800" cy="304800"/>
+          </a:xfrm>
+          <a:prstGeom prst="rect">
+            <a:avLst/>
+          </a:prstGeom>
+          <a:noFill/>
+        </p:spPr>
+        <p:txBody>
+          <a:bodyPr wrap="none" lIns="0" rIns="0" tIns="0" bIns="0" anchor="ctr">
+            <a:noAutofit/>
+          </a:bodyPr>
+          <a:lstStyle/>
+          <a:p>
+            <a:pPr algn="l"/>
+            <a:r>
+              <a:rPr sz="1700" b="0" i="0" spc="-34">
+                <a:solidFill>
+                  <a:srgbClr val="EC2326"/>
+                </a:solidFill>
+                <a:latin typeface="Poppins SemiBold"/>
+                <a:ea typeface="Poppins SemiBold"/>
+                <a:cs typeface="Poppins SemiBold"/>
+              </a:rPr>
+              <a:t>In their words</a:t>
+            </a:r>
+          </a:p>
+        </p:txBody>
+      </p:sp>
+      <p:sp>
+        <p:nvSpPr>
+          <p:cNvPr id="9" name="TextBox 8"/>
+          <p:cNvSpPr txBox="1"/>
+          <p:nvPr/>
+        </p:nvSpPr>
+        <p:spPr>
+          <a:xfrm>
+            <a:off x="609600" y="1118197"/>
+            <a:ext cx="6985000" cy="146050"/>
+          </a:xfrm>
+          <a:prstGeom prst="rect">
+            <a:avLst/>
+          </a:prstGeom>
+          <a:noFill/>
+        </p:spPr>
+        <p:txBody>
+          <a:bodyPr wrap="none" lIns="0" rIns="0" tIns="0" bIns="0" anchor="ctr">
+            <a:noAutofit/>
+          </a:bodyPr>
+          <a:lstStyle/>
+          <a:p>
+            <a:pPr algn="l"/>
+            <a:r>
+              <a:rPr sz="950" b="0" i="0">
+                <a:solidFill>
+                  <a:srgbClr val="64707A"/>
+                </a:solidFill>
+                <a:latin typeface="Urbanist"/>
+                <a:ea typeface="Urbanist"/>
+                <a:cs typeface="Urbanist"/>
+              </a:rPr>
+              <a:t>What the people who hired us say about it.</a:t>
+            </a:r>
+          </a:p>
+        </p:txBody>
+      </p:sp>
+      <p:sp>
+        <p:nvSpPr>
+          <p:cNvPr id="10" name="TextBox 9"/>
+          <p:cNvSpPr txBox="1"/>
+          <p:nvPr/>
+        </p:nvSpPr>
+        <p:spPr>
+          <a:xfrm>
+            <a:off x="609600" y="2946400"/>
+            <a:ext cx="7112000" cy="806450"/>
+          </a:xfrm>
+          <a:prstGeom prst="rect">
+            <a:avLst/>
+          </a:prstGeom>
+          <a:noFill/>
+        </p:spPr>
+        <p:txBody>
+          <a:bodyPr wrap="none" lIns="0" rIns="0" tIns="0" bIns="0" anchor="ctr">
+            <a:noAutofit/>
+          </a:bodyPr>
+          <a:lstStyle/>
+          <a:p>
+            <a:pPr algn="l"/>
+            <a:r>
+              <a:rPr sz="4500" b="1" i="0">
+                <a:solidFill>
+                  <a:srgbClr val="EC2326"/>
+                </a:solidFill>
+                <a:latin typeface="Poppins"/>
+                <a:ea typeface="Poppins"/>
+                <a:cs typeface="Poppins"/>
+              </a:rPr>
+              <a:t>“</a:t>
+            </a:r>
+          </a:p>
+        </p:txBody>
+      </p:sp>
+      <p:sp>
+        <p:nvSpPr>
+          <p:cNvPr id="11" name="TextBox 10"/>
+          <p:cNvSpPr txBox="1"/>
+          <p:nvPr/>
+        </p:nvSpPr>
+        <p:spPr>
+          <a:xfrm>
+            <a:off x="609600" y="3683000"/>
+            <a:ext cx="7112000" cy="638175"/>
+          </a:xfrm>
+          <a:prstGeom prst="rect">
+            <a:avLst/>
+          </a:prstGeom>
+          <a:noFill/>
+        </p:spPr>
+        <p:txBody>
+          <a:bodyPr wrap="square" lIns="0" rIns="0" tIns="0" bIns="0" anchor="ctr">
+            <a:noAutofit/>
+          </a:bodyPr>
+          <a:lstStyle/>
+          <a:p>
+            <a:pPr algn="l">
+              <a:lnSpc>
+                <a:spcPts val="2375"/>
+              </a:lnSpc>
+            </a:pPr>
+            <a:r>
+              <a:rPr sz="1900" b="0" i="0" spc="-38">
+                <a:solidFill>
+                  <a:srgbClr val="101A2B"/>
+                </a:solidFill>
+                <a:latin typeface="Poppins SemiBold"/>
+                <a:ea typeface="Poppins SemiBold"/>
+                <a:cs typeface="Poppins SemiBold"/>
+              </a:rPr>
+              <a:t>They self-performed the packages that usually slip. That is the whole reason the fab opened on time.</a:t>
+            </a:r>
+          </a:p>
+        </p:txBody>
+      </p:sp>
+      <p:sp>
+        <p:nvSpPr>
+          <p:cNvPr id="12" name="Rectangle 11"/>
+          <p:cNvSpPr/>
+          <p:nvPr/>
+        </p:nvSpPr>
+        <p:spPr>
+          <a:xfrm>
+            <a:off x="609600" y="4483100"/>
+            <a:ext cx="7112000" cy="12700"/>
+          </a:xfrm>
+          <a:prstGeom prst="rect">
+            <a:avLst/>
+          </a:prstGeom>
+          <a:solidFill>
+            <a:srgbClr val="EC2326"/>
+          </a:solidFill>
+          <a:ln>
+            <a:noFill/>
+          </a:ln>
+          <a:effectLst/>
+        </p:spPr>
+        <p:txBody>
+          <a:bodyPr rtlCol="0" anchor="ctr"/>
+          <a:lstStyle/>
+          <a:p>
+            <a:pPr algn="ctr"/>
+          </a:p>
+        </p:txBody>
+      </p:sp>
+      <p:sp>
+        <p:nvSpPr>
+          <p:cNvPr id="13" name="TextBox 12"/>
+          <p:cNvSpPr txBox="1"/>
+          <p:nvPr/>
+        </p:nvSpPr>
+        <p:spPr>
+          <a:xfrm>
+            <a:off x="609600" y="4622800"/>
+            <a:ext cx="7112000" cy="139700"/>
+          </a:xfrm>
+          <a:prstGeom prst="rect">
+            <a:avLst/>
+          </a:prstGeom>
+          <a:noFill/>
+        </p:spPr>
+        <p:txBody>
+          <a:bodyPr wrap="none" lIns="0" rIns="0" tIns="0" bIns="0" anchor="ctr">
+            <a:noAutofit/>
+          </a:bodyPr>
+          <a:lstStyle/>
+          <a:p>
+            <a:pPr algn="l"/>
+            <a:r>
+              <a:rPr sz="900" b="0" i="0">
+                <a:solidFill>
+                  <a:srgbClr val="101A2B"/>
+                </a:solidFill>
+                <a:latin typeface="Urbanist SemiBold"/>
+                <a:ea typeface="Urbanist SemiBold"/>
+                <a:cs typeface="Urbanist SemiBold"/>
+              </a:rPr>
+              <a:t>Name of the person</a:t>
+            </a:r>
+          </a:p>
+        </p:txBody>
+      </p:sp>
+      <p:sp>
+        <p:nvSpPr>
+          <p:cNvPr id="14" name="TextBox 13"/>
+          <p:cNvSpPr txBox="1"/>
+          <p:nvPr/>
+        </p:nvSpPr>
+        <p:spPr>
+          <a:xfrm>
+            <a:off x="609600" y="4794250"/>
+            <a:ext cx="7112000" cy="76200"/>
+          </a:xfrm>
+          <a:prstGeom prst="rect">
+            <a:avLst/>
+          </a:prstGeom>
+          <a:noFill/>
+        </p:spPr>
+        <p:txBody>
+          <a:bodyPr wrap="none" lIns="0" rIns="0" tIns="0" bIns="0" anchor="ctr">
+            <a:noAutofit/>
+          </a:bodyPr>
+          <a:lstStyle/>
+          <a:p>
+            <a:pPr algn="l"/>
+            <a:r>
+              <a:rPr sz="620" b="0" i="0" spc="125">
+                <a:solidFill>
+                  <a:srgbClr val="64707A"/>
+                </a:solidFill>
+                <a:latin typeface="League Spartan SemiBold"/>
+                <a:ea typeface="League Spartan SemiBold"/>
+                <a:cs typeface="League Spartan SemiBold"/>
+              </a:rPr>
+              <a:t>ROLE · CLIENT ORGANISATION</a:t>
+            </a:r>
+          </a:p>
+        </p:txBody>
+      </p:sp>
+      <p:sp>
+        <p:nvSpPr>
+          <p:cNvPr id="15" name="Rectangle 14"/>
+          <p:cNvSpPr/>
+          <p:nvPr/>
+        </p:nvSpPr>
+        <p:spPr>
+          <a:xfrm>
+            <a:off x="8026400" y="1701800"/>
+            <a:ext cx="3556000" cy="4648200"/>
+          </a:xfrm>
+          <a:prstGeom prst="rect">
+            <a:avLst/>
+          </a:prstGeom>
+          <a:solidFill>
+            <a:srgbClr val="FFFFFF"/>
+          </a:solidFill>
+          <a:ln>
+            <a:noFill/>
+          </a:ln>
+          <a:effectLst/>
+        </p:spPr>
+        <p:txBody>
+          <a:bodyPr rtlCol="0" anchor="ctr"/>
+          <a:lstStyle/>
+          <a:p>
+            <a:pPr algn="ctr"/>
+          </a:p>
+        </p:txBody>
+      </p:sp>
+      <p:pic>
+        <p:nvPicPr>
+          <p:cNvPr id="16" name="Picture 15" descr="refs-crew.jpg"/>
+          <p:cNvPicPr>
+            <a:picLocks noChangeAspect="1"/>
+          </p:cNvPicPr>
+          <p:nvPr/>
+        </p:nvPicPr>
+        <p:blipFill>
+          <a:blip r:embed="rId3"/>
+          <a:srcRect l="5883" r="5883"/>
+          <a:stretch>
+            <a:fillRect/>
+          </a:stretch>
+        </p:blipFill>
+        <p:spPr>
+          <a:xfrm>
+            <a:off x="8026400" y="1701800"/>
+            <a:ext cx="3556000" cy="4648200"/>
+          </a:xfrm>
+          <a:prstGeom prst="rect">
+            <a:avLst/>
+          </a:prstGeom>
+        </p:spPr>
+      </p:pic>
+      <p:sp>
+        <p:nvSpPr>
+          <p:cNvPr id="17" name="TextBox 16"/>
+          <p:cNvSpPr txBox="1"/>
+          <p:nvPr/>
+        </p:nvSpPr>
+        <p:spPr>
+          <a:xfrm>
+            <a:off x="609600" y="6445250"/>
+            <a:ext cx="127692" cy="76200"/>
+          </a:xfrm>
+          <a:prstGeom prst="rect">
+            <a:avLst/>
+          </a:prstGeom>
+          <a:noFill/>
+        </p:spPr>
+        <p:txBody>
+          <a:bodyPr wrap="none" lIns="0" rIns="0" tIns="0" bIns="0" anchor="ctr">
+            <a:noAutofit/>
+          </a:bodyPr>
+          <a:lstStyle/>
+          <a:p>
+            <a:pPr algn="l"/>
+            <a:r>
+              <a:rPr sz="680" b="0" i="0" spc="148">
+                <a:solidFill>
+                  <a:srgbClr val="64707A"/>
+                </a:solidFill>
+                <a:latin typeface="League Spartan Medium"/>
+                <a:ea typeface="League Spartan Medium"/>
+                <a:cs typeface="League Spartan Medium"/>
+              </a:rPr>
+              <a:t>37</a:t>
+            </a:r>
+          </a:p>
+        </p:txBody>
+      </p:sp>
+      <p:sp>
+        <p:nvSpPr>
+          <p:cNvPr id="18" name="TextBox 17"/>
+          <p:cNvSpPr txBox="1"/>
+          <p:nvPr/>
+        </p:nvSpPr>
+        <p:spPr>
+          <a:xfrm>
+            <a:off x="11226902" y="6429375"/>
+            <a:ext cx="355498" cy="76200"/>
+          </a:xfrm>
+          <a:prstGeom prst="rect">
+            <a:avLst/>
+          </a:prstGeom>
+          <a:noFill/>
+        </p:spPr>
+        <p:txBody>
+          <a:bodyPr wrap="none" lIns="0" rIns="0" tIns="0" bIns="0" anchor="ctr">
+            <a:noAutofit/>
+          </a:bodyPr>
+          <a:lstStyle/>
+          <a:p>
+            <a:pPr algn="l"/>
+            <a:r>
+              <a:rPr sz="680" b="0" i="0" spc="148">
+                <a:solidFill>
+                  <a:srgbClr val="64707A"/>
+                </a:solidFill>
+                <a:latin typeface="League Spartan"/>
+                <a:ea typeface="League Spartan"/>
+                <a:cs typeface="League Spartan"/>
+              </a:rPr>
+              <a:t>QUOTE</a:t>
+            </a:r>
+          </a:p>
+        </p:txBody>
+      </p:sp>
+    </p:spTree>
+  </p:cSld>
+  <p:clrMapOvr>
+    <a:masterClrMapping/>
+  </p:clrMapOvr>
+</p:sld>
+</file>
+
+<file path=ppt/slides/slide39.xml><?xml version="1.0" encoding="utf-8"?>
+<p:sld xmlns:a="http://schemas.openxmlformats.org/drawingml/2006/main" xmlns:p="http://schemas.openxmlformats.org/presentationml/2006/main" xmlns:r="http://schemas.openxmlformats.org/officeDocument/2006/relationships">
+  <p:cSld>
+    <p:spTree>
+      <p:nvGrpSpPr>
+        <p:cNvPr id="1" name=""/>
+        <p:cNvGrpSpPr/>
+        <p:nvPr/>
+      </p:nvGrpSpPr>
+      <p:grpSpPr/>
+      <p:sp>
+        <p:nvSpPr>
+          <p:cNvPr id="2" name="Rectangle 1"/>
+          <p:cNvSpPr/>
+          <p:nvPr/>
+        </p:nvSpPr>
+        <p:spPr>
+          <a:xfrm>
+            <a:off x="0" y="0"/>
+            <a:ext cx="12192000" cy="6858000"/>
+          </a:xfrm>
+          <a:prstGeom prst="rect">
+            <a:avLst/>
+          </a:prstGeom>
+          <a:solidFill>
+            <a:srgbClr val="F6F7F9"/>
+          </a:solidFill>
+          <a:ln>
+            <a:noFill/>
+          </a:ln>
+          <a:effectLst/>
+        </p:spPr>
+        <p:txBody>
+          <a:bodyPr rtlCol="0" anchor="ctr"/>
+          <a:lstStyle/>
+          <a:p>
+            <a:pPr algn="ctr"/>
+          </a:p>
+        </p:txBody>
+      </p:sp>
+      <p:sp>
+        <p:nvSpPr>
+          <p:cNvPr id="3" name="Rectangle 2"/>
+          <p:cNvSpPr/>
+          <p:nvPr/>
+        </p:nvSpPr>
+        <p:spPr>
+          <a:xfrm>
+            <a:off x="609600" y="381000"/>
+            <a:ext cx="235445" cy="165100"/>
+          </a:xfrm>
+          <a:prstGeom prst="rect">
+            <a:avLst/>
+          </a:prstGeom>
+          <a:solidFill>
+            <a:srgbClr val="EC2326"/>
+          </a:solidFill>
+          <a:ln>
+            <a:noFill/>
+          </a:ln>
+          <a:effectLst/>
+        </p:spPr>
+        <p:txBody>
+          <a:bodyPr rtlCol="0" anchor="ctr"/>
+          <a:lstStyle/>
+          <a:p>
+            <a:pPr algn="ctr"/>
+          </a:p>
+        </p:txBody>
+      </p:sp>
+      <p:sp>
+        <p:nvSpPr>
+          <p:cNvPr id="4" name="TextBox 3"/>
+          <p:cNvSpPr txBox="1"/>
+          <p:nvPr/>
+        </p:nvSpPr>
+        <p:spPr>
+          <a:xfrm>
+            <a:off x="609600" y="425450"/>
+            <a:ext cx="235445" cy="82550"/>
+          </a:xfrm>
+          <a:prstGeom prst="rect">
+            <a:avLst/>
+          </a:prstGeom>
+          <a:noFill/>
+        </p:spPr>
+        <p:txBody>
+          <a:bodyPr wrap="none" lIns="69850" rIns="69850" tIns="0" bIns="0" anchor="ctr">
+            <a:noAutofit/>
+          </a:bodyPr>
+          <a:lstStyle/>
+          <a:p>
+            <a:pPr algn="l"/>
+            <a:r>
+              <a:rPr sz="700" b="0" i="0" spc="70">
+                <a:solidFill>
+                  <a:srgbClr val="FFFFFF"/>
+                </a:solidFill>
+                <a:latin typeface="League Spartan SemiBold"/>
+                <a:ea typeface="League Spartan SemiBold"/>
+                <a:cs typeface="League Spartan SemiBold"/>
+              </a:rPr>
+              <a:t>19</a:t>
+            </a:r>
+          </a:p>
+        </p:txBody>
+      </p:sp>
+      <p:sp>
+        <p:nvSpPr>
+          <p:cNvPr id="5" name="TextBox 4"/>
+          <p:cNvSpPr txBox="1"/>
+          <p:nvPr/>
+        </p:nvSpPr>
+        <p:spPr>
+          <a:xfrm>
+            <a:off x="946645" y="414338"/>
+            <a:ext cx="957859" cy="88900"/>
+          </a:xfrm>
+          <a:prstGeom prst="rect">
+            <a:avLst/>
+          </a:prstGeom>
+          <a:noFill/>
+        </p:spPr>
+        <p:txBody>
+          <a:bodyPr wrap="none" lIns="0" rIns="0" tIns="0" bIns="0" anchor="ctr">
+            <a:noAutofit/>
+          </a:bodyPr>
+          <a:lstStyle/>
+          <a:p>
+            <a:pPr algn="l"/>
+            <a:r>
+              <a:rPr sz="780" b="0" i="0" spc="186">
+                <a:solidFill>
+                  <a:srgbClr val="101A2B"/>
+                </a:solidFill>
+                <a:latin typeface="League Spartan SemiBold"/>
+                <a:ea typeface="League Spartan SemiBold"/>
+                <a:cs typeface="League Spartan SemiBold"/>
+              </a:rPr>
+              <a:t>SECTION NAME</a:t>
+            </a:r>
+          </a:p>
+        </p:txBody>
+      </p:sp>
+      <p:pic>
+        <p:nvPicPr>
+          <p:cNvPr id="6" name="Picture 5" descr="iaq-logo-tag.png"/>
+          <p:cNvPicPr>
+            <a:picLocks noChangeAspect="1"/>
+          </p:cNvPicPr>
+          <p:nvPr/>
+        </p:nvPicPr>
+        <p:blipFill>
+          <a:blip r:embed="rId2"/>
+          <a:stretch>
+            <a:fillRect/>
+          </a:stretch>
+        </p:blipFill>
+        <p:spPr>
+          <a:xfrm>
+            <a:off x="10947400" y="304800"/>
+            <a:ext cx="635000" cy="317500"/>
+          </a:xfrm>
+          <a:prstGeom prst="rect">
+            <a:avLst/>
+          </a:prstGeom>
+        </p:spPr>
+      </p:pic>
+      <p:sp>
+        <p:nvSpPr>
+          <p:cNvPr id="7" name="Rectangle 6"/>
+          <p:cNvSpPr/>
+          <p:nvPr/>
+        </p:nvSpPr>
+        <p:spPr>
+          <a:xfrm>
+            <a:off x="609600" y="1438872"/>
+            <a:ext cx="10972800" cy="6350"/>
+          </a:xfrm>
+          <a:prstGeom prst="rect">
+            <a:avLst/>
+          </a:prstGeom>
+          <a:solidFill>
+            <a:srgbClr val="D5DBE2"/>
+          </a:solidFill>
+          <a:ln>
+            <a:noFill/>
+          </a:ln>
+          <a:effectLst/>
+        </p:spPr>
+        <p:txBody>
+          <a:bodyPr rtlCol="0" anchor="ctr"/>
+          <a:lstStyle/>
+          <a:p>
+            <a:pPr algn="ctr"/>
+          </a:p>
+        </p:txBody>
+      </p:sp>
+      <p:sp>
+        <p:nvSpPr>
+          <p:cNvPr id="8" name="TextBox 7"/>
+          <p:cNvSpPr txBox="1"/>
+          <p:nvPr/>
+        </p:nvSpPr>
+        <p:spPr>
+          <a:xfrm>
+            <a:off x="609600" y="768350"/>
+            <a:ext cx="10972800" cy="304800"/>
+          </a:xfrm>
+          <a:prstGeom prst="rect">
+            <a:avLst/>
+          </a:prstGeom>
+          <a:noFill/>
+        </p:spPr>
+        <p:txBody>
+          <a:bodyPr wrap="none" lIns="0" rIns="0" tIns="0" bIns="0" anchor="ctr">
+            <a:noAutofit/>
+          </a:bodyPr>
+          <a:lstStyle/>
+          <a:p>
+            <a:pPr algn="l"/>
+            <a:r>
+              <a:rPr sz="1700" b="0" i="0" spc="-34">
+                <a:solidFill>
+                  <a:srgbClr val="64707A"/>
+                </a:solidFill>
+                <a:latin typeface="Poppins SemiBold"/>
+                <a:ea typeface="Poppins SemiBold"/>
+                <a:cs typeface="Poppins SemiBold"/>
+              </a:rPr>
+              <a:t>Page title</a:t>
+            </a:r>
+          </a:p>
+        </p:txBody>
+      </p:sp>
+      <p:sp>
+        <p:nvSpPr>
+          <p:cNvPr id="9" name="TextBox 8"/>
+          <p:cNvSpPr txBox="1"/>
+          <p:nvPr/>
+        </p:nvSpPr>
+        <p:spPr>
+          <a:xfrm>
+            <a:off x="609600" y="1118197"/>
+            <a:ext cx="6985000" cy="146050"/>
+          </a:xfrm>
+          <a:prstGeom prst="rect">
+            <a:avLst/>
+          </a:prstGeom>
+          <a:noFill/>
+        </p:spPr>
+        <p:txBody>
+          <a:bodyPr wrap="none" lIns="0" rIns="0" tIns="0" bIns="0" anchor="ctr">
+            <a:noAutofit/>
+          </a:bodyPr>
+          <a:lstStyle/>
+          <a:p>
+            <a:pPr algn="l"/>
+            <a:r>
+              <a:rPr sz="950" b="0" i="0">
+                <a:solidFill>
+                  <a:srgbClr val="64707A"/>
+                </a:solidFill>
+                <a:latin typeface="Urbanist"/>
+                <a:ea typeface="Urbanist"/>
+                <a:cs typeface="Urbanist"/>
+              </a:rPr>
+              <a:t>One line under it saying what the page is for.</a:t>
+            </a:r>
+          </a:p>
+        </p:txBody>
+      </p:sp>
+      <p:sp>
+        <p:nvSpPr>
+          <p:cNvPr id="10" name="TextBox 9"/>
+          <p:cNvSpPr txBox="1"/>
+          <p:nvPr/>
+        </p:nvSpPr>
+        <p:spPr>
+          <a:xfrm>
+            <a:off x="609600" y="2946400"/>
+            <a:ext cx="7112000" cy="806450"/>
+          </a:xfrm>
+          <a:prstGeom prst="rect">
+            <a:avLst/>
+          </a:prstGeom>
+          <a:noFill/>
+        </p:spPr>
+        <p:txBody>
+          <a:bodyPr wrap="none" lIns="0" rIns="0" tIns="0" bIns="0" anchor="ctr">
+            <a:noAutofit/>
+          </a:bodyPr>
+          <a:lstStyle/>
+          <a:p>
+            <a:pPr algn="l"/>
+            <a:r>
+              <a:rPr sz="4500" b="1" i="0">
+                <a:solidFill>
+                  <a:srgbClr val="64707A"/>
+                </a:solidFill>
+                <a:latin typeface="Poppins"/>
+                <a:ea typeface="Poppins"/>
+                <a:cs typeface="Poppins"/>
+              </a:rPr>
+              <a:t>“</a:t>
+            </a:r>
+          </a:p>
+        </p:txBody>
+      </p:sp>
+      <p:sp>
+        <p:nvSpPr>
+          <p:cNvPr id="11" name="TextBox 10"/>
+          <p:cNvSpPr txBox="1"/>
+          <p:nvPr/>
+        </p:nvSpPr>
+        <p:spPr>
+          <a:xfrm>
+            <a:off x="609600" y="3683000"/>
+            <a:ext cx="7112000" cy="638175"/>
+          </a:xfrm>
+          <a:prstGeom prst="rect">
+            <a:avLst/>
+          </a:prstGeom>
+          <a:noFill/>
+        </p:spPr>
+        <p:txBody>
+          <a:bodyPr wrap="square" lIns="0" rIns="0" tIns="0" bIns="0" anchor="ctr">
+            <a:noAutofit/>
+          </a:bodyPr>
+          <a:lstStyle/>
+          <a:p>
+            <a:pPr algn="l">
+              <a:lnSpc>
+                <a:spcPts val="2375"/>
+              </a:lnSpc>
+            </a:pPr>
+            <a:r>
+              <a:rPr sz="1900" b="0" i="0" spc="-38">
+                <a:solidFill>
+                  <a:srgbClr val="64707A"/>
+                </a:solidFill>
+                <a:latin typeface="Poppins SemiBold"/>
+                <a:ea typeface="Poppins SemiBold"/>
+                <a:cs typeface="Poppins SemiBold"/>
+              </a:rPr>
+              <a:t>The quotation, two lines at most. Cut it back until only the part worth repeating is left.</a:t>
+            </a:r>
+          </a:p>
+        </p:txBody>
+      </p:sp>
+      <p:sp>
+        <p:nvSpPr>
+          <p:cNvPr id="12" name="Rectangle 11"/>
+          <p:cNvSpPr/>
+          <p:nvPr/>
+        </p:nvSpPr>
+        <p:spPr>
+          <a:xfrm>
+            <a:off x="609600" y="4483100"/>
+            <a:ext cx="7112000" cy="12700"/>
+          </a:xfrm>
+          <a:prstGeom prst="rect">
+            <a:avLst/>
+          </a:prstGeom>
+          <a:solidFill>
+            <a:srgbClr val="EC2326"/>
+          </a:solidFill>
+          <a:ln>
+            <a:noFill/>
+          </a:ln>
+          <a:effectLst/>
+        </p:spPr>
+        <p:txBody>
+          <a:bodyPr rtlCol="0" anchor="ctr"/>
+          <a:lstStyle/>
+          <a:p>
+            <a:pPr algn="ctr"/>
+          </a:p>
+        </p:txBody>
+      </p:sp>
+      <p:sp>
+        <p:nvSpPr>
+          <p:cNvPr id="13" name="TextBox 12"/>
+          <p:cNvSpPr txBox="1"/>
+          <p:nvPr/>
+        </p:nvSpPr>
+        <p:spPr>
+          <a:xfrm>
+            <a:off x="609600" y="4622800"/>
+            <a:ext cx="7112000" cy="139700"/>
+          </a:xfrm>
+          <a:prstGeom prst="rect">
+            <a:avLst/>
+          </a:prstGeom>
+          <a:noFill/>
+        </p:spPr>
+        <p:txBody>
+          <a:bodyPr wrap="none" lIns="0" rIns="0" tIns="0" bIns="0" anchor="ctr">
+            <a:noAutofit/>
+          </a:bodyPr>
+          <a:lstStyle/>
+          <a:p>
+            <a:pPr algn="l"/>
+            <a:r>
+              <a:rPr sz="900" b="0" i="0">
+                <a:solidFill>
+                  <a:srgbClr val="64707A"/>
+                </a:solidFill>
+                <a:latin typeface="Urbanist SemiBold"/>
+                <a:ea typeface="Urbanist SemiBold"/>
+                <a:cs typeface="Urbanist SemiBold"/>
+              </a:rPr>
+              <a:t>Name of the person</a:t>
+            </a:r>
+          </a:p>
+        </p:txBody>
+      </p:sp>
+      <p:sp>
+        <p:nvSpPr>
+          <p:cNvPr id="14" name="TextBox 13"/>
+          <p:cNvSpPr txBox="1"/>
+          <p:nvPr/>
+        </p:nvSpPr>
+        <p:spPr>
+          <a:xfrm>
+            <a:off x="609600" y="4794250"/>
+            <a:ext cx="7112000" cy="76200"/>
+          </a:xfrm>
+          <a:prstGeom prst="rect">
+            <a:avLst/>
+          </a:prstGeom>
+          <a:noFill/>
+        </p:spPr>
+        <p:txBody>
+          <a:bodyPr wrap="none" lIns="0" rIns="0" tIns="0" bIns="0" anchor="ctr">
+            <a:noAutofit/>
+          </a:bodyPr>
+          <a:lstStyle/>
+          <a:p>
+            <a:pPr algn="l"/>
+            <a:r>
+              <a:rPr sz="620" b="0" i="0" spc="125">
+                <a:solidFill>
+                  <a:srgbClr val="64707A"/>
+                </a:solidFill>
+                <a:latin typeface="League Spartan SemiBold"/>
+                <a:ea typeface="League Spartan SemiBold"/>
+                <a:cs typeface="League Spartan SemiBold"/>
+              </a:rPr>
+              <a:t>ROLE · ORGANISATION</a:t>
+            </a:r>
+          </a:p>
+        </p:txBody>
+      </p:sp>
+      <p:sp>
+        <p:nvSpPr>
+          <p:cNvPr id="15" name="Rectangle 14"/>
+          <p:cNvSpPr/>
+          <p:nvPr/>
+        </p:nvSpPr>
+        <p:spPr>
+          <a:xfrm>
+            <a:off x="8026400" y="1701800"/>
+            <a:ext cx="3556000" cy="4648200"/>
+          </a:xfrm>
+          <a:prstGeom prst="rect">
+            <a:avLst/>
+          </a:prstGeom>
+          <a:solidFill>
+            <a:srgbClr val="FFFFFF"/>
+          </a:solidFill>
+          <a:ln>
+            <a:noFill/>
+          </a:ln>
+          <a:effectLst/>
+        </p:spPr>
+        <p:txBody>
+          <a:bodyPr rtlCol="0" anchor="ctr"/>
+          <a:lstStyle/>
+          <a:p>
+            <a:pPr algn="ctr"/>
+          </a:p>
+        </p:txBody>
+      </p:sp>
+      <p:pic>
+        <p:nvPicPr>
+          <p:cNvPr id="16" name="Picture 15" descr="refs-crew.jpg"/>
+          <p:cNvPicPr>
+            <a:picLocks noChangeAspect="1"/>
+          </p:cNvPicPr>
+          <p:nvPr/>
+        </p:nvPicPr>
+        <p:blipFill>
+          <a:blip r:embed="rId3"/>
+          <a:srcRect l="5883" r="5883"/>
+          <a:stretch>
+            <a:fillRect/>
+          </a:stretch>
+        </p:blipFill>
+        <p:spPr>
+          <a:xfrm>
+            <a:off x="8026400" y="1701800"/>
+            <a:ext cx="3556000" cy="4648200"/>
+          </a:xfrm>
+          <a:prstGeom prst="rect">
+            <a:avLst/>
+          </a:prstGeom>
+        </p:spPr>
+      </p:pic>
+      <p:sp>
+        <p:nvSpPr>
+          <p:cNvPr id="17" name="TextBox 16"/>
+          <p:cNvSpPr txBox="1"/>
+          <p:nvPr/>
+        </p:nvSpPr>
+        <p:spPr>
+          <a:xfrm>
+            <a:off x="609600" y="6445250"/>
+            <a:ext cx="129978" cy="76200"/>
+          </a:xfrm>
+          <a:prstGeom prst="rect">
+            <a:avLst/>
+          </a:prstGeom>
+          <a:noFill/>
+        </p:spPr>
+        <p:txBody>
+          <a:bodyPr wrap="none" lIns="0" rIns="0" tIns="0" bIns="0" anchor="ctr">
+            <a:noAutofit/>
+          </a:bodyPr>
+          <a:lstStyle/>
+          <a:p>
+            <a:pPr algn="l"/>
+            <a:r>
+              <a:rPr sz="680" b="0" i="0" spc="148">
+                <a:solidFill>
+                  <a:srgbClr val="64707A"/>
+                </a:solidFill>
+                <a:latin typeface="League Spartan Medium"/>
+                <a:ea typeface="League Spartan Medium"/>
+                <a:cs typeface="League Spartan Medium"/>
+              </a:rPr>
+              <a:t>38</a:t>
+            </a:r>
+          </a:p>
+        </p:txBody>
+      </p:sp>
+      <p:sp>
+        <p:nvSpPr>
+          <p:cNvPr id="18" name="TextBox 17"/>
+          <p:cNvSpPr txBox="1"/>
+          <p:nvPr/>
+        </p:nvSpPr>
+        <p:spPr>
+          <a:xfrm>
+            <a:off x="11226800" y="6429375"/>
+            <a:ext cx="355498" cy="76200"/>
+          </a:xfrm>
+          <a:prstGeom prst="rect">
+            <a:avLst/>
+          </a:prstGeom>
+          <a:noFill/>
+        </p:spPr>
+        <p:txBody>
+          <a:bodyPr wrap="none" lIns="0" rIns="0" tIns="0" bIns="0" anchor="ctr">
+            <a:noAutofit/>
+          </a:bodyPr>
+          <a:lstStyle/>
+          <a:p>
+            <a:pPr algn="l"/>
+            <a:r>
+              <a:rPr sz="680" b="0" i="0" spc="148">
+                <a:solidFill>
+                  <a:srgbClr val="64707A"/>
+                </a:solidFill>
+                <a:latin typeface="League Spartan"/>
+                <a:ea typeface="League Spartan"/>
+                <a:cs typeface="League Spartan"/>
+              </a:rPr>
+              <a:t>QUOTE</a:t>
+            </a:r>
+          </a:p>
+        </p:txBody>
+      </p:sp>
+    </p:spTree>
+  </p:cSld>
+  <p:clrMapOvr>
+    <a:masterClrMapping/>
+  </p:clrMapOvr>
+</p:sld>
+</file>
+
 <file path=ppt/slides/slide4.xml><?xml version="1.0" encoding="utf-8"?>
 <p:sld xmlns:a="http://schemas.openxmlformats.org/drawingml/2006/main" xmlns:p="http://schemas.openxmlformats.org/presentationml/2006/main" xmlns:r="http://schemas.openxmlformats.org/officeDocument/2006/relationships">
   <p:cSld>
@@ -43947,6 +48576,1498 @@
                 <a:cs typeface="League Spartan Medium"/>
               </a:rPr>
               <a:t>03</a:t>
+            </a:r>
+          </a:p>
+        </p:txBody>
+      </p:sp>
+    </p:spTree>
+  </p:cSld>
+  <p:clrMapOvr>
+    <a:masterClrMapping/>
+  </p:clrMapOvr>
+</p:sld>
+</file>
+
+<file path=ppt/slides/slide40.xml><?xml version="1.0" encoding="utf-8"?>
+<p:sld xmlns:a="http://schemas.openxmlformats.org/drawingml/2006/main" xmlns:p="http://schemas.openxmlformats.org/presentationml/2006/main" xmlns:r="http://schemas.openxmlformats.org/officeDocument/2006/relationships">
+  <p:cSld>
+    <p:spTree>
+      <p:nvGrpSpPr>
+        <p:cNvPr id="1" name=""/>
+        <p:cNvGrpSpPr/>
+        <p:nvPr/>
+      </p:nvGrpSpPr>
+      <p:grpSpPr/>
+      <p:sp>
+        <p:nvSpPr>
+          <p:cNvPr id="2" name="Rectangle 1"/>
+          <p:cNvSpPr/>
+          <p:nvPr/>
+        </p:nvSpPr>
+        <p:spPr>
+          <a:xfrm>
+            <a:off x="0" y="0"/>
+            <a:ext cx="12192000" cy="6858000"/>
+          </a:xfrm>
+          <a:prstGeom prst="rect">
+            <a:avLst/>
+          </a:prstGeom>
+          <a:solidFill>
+            <a:srgbClr val="F6F7F9"/>
+          </a:solidFill>
+          <a:ln>
+            <a:noFill/>
+          </a:ln>
+          <a:effectLst/>
+        </p:spPr>
+        <p:txBody>
+          <a:bodyPr rtlCol="0" anchor="ctr"/>
+          <a:lstStyle/>
+          <a:p>
+            <a:pPr algn="ctr"/>
+          </a:p>
+        </p:txBody>
+      </p:sp>
+      <p:sp>
+        <p:nvSpPr>
+          <p:cNvPr id="3" name="Rectangle 2"/>
+          <p:cNvSpPr/>
+          <p:nvPr/>
+        </p:nvSpPr>
+        <p:spPr>
+          <a:xfrm>
+            <a:off x="609600" y="381000"/>
+            <a:ext cx="259658" cy="165100"/>
+          </a:xfrm>
+          <a:prstGeom prst="rect">
+            <a:avLst/>
+          </a:prstGeom>
+          <a:solidFill>
+            <a:srgbClr val="EC2326"/>
+          </a:solidFill>
+          <a:ln>
+            <a:noFill/>
+          </a:ln>
+          <a:effectLst/>
+        </p:spPr>
+        <p:txBody>
+          <a:bodyPr rtlCol="0" anchor="ctr"/>
+          <a:lstStyle/>
+          <a:p>
+            <a:pPr algn="ctr"/>
+          </a:p>
+        </p:txBody>
+      </p:sp>
+      <p:sp>
+        <p:nvSpPr>
+          <p:cNvPr id="4" name="TextBox 3"/>
+          <p:cNvSpPr txBox="1"/>
+          <p:nvPr/>
+        </p:nvSpPr>
+        <p:spPr>
+          <a:xfrm>
+            <a:off x="609600" y="425450"/>
+            <a:ext cx="259658" cy="82550"/>
+          </a:xfrm>
+          <a:prstGeom prst="rect">
+            <a:avLst/>
+          </a:prstGeom>
+          <a:noFill/>
+        </p:spPr>
+        <p:txBody>
+          <a:bodyPr wrap="none" lIns="69850" rIns="69850" tIns="0" bIns="0" anchor="ctr">
+            <a:noAutofit/>
+          </a:bodyPr>
+          <a:lstStyle/>
+          <a:p>
+            <a:pPr algn="l"/>
+            <a:r>
+              <a:rPr sz="700" b="0" i="0" spc="70">
+                <a:solidFill>
+                  <a:srgbClr val="FFFFFF"/>
+                </a:solidFill>
+                <a:latin typeface="League Spartan SemiBold"/>
+                <a:ea typeface="League Spartan SemiBold"/>
+                <a:cs typeface="League Spartan SemiBold"/>
+              </a:rPr>
+              <a:t>20</a:t>
+            </a:r>
+          </a:p>
+        </p:txBody>
+      </p:sp>
+      <p:sp>
+        <p:nvSpPr>
+          <p:cNvPr id="5" name="TextBox 4"/>
+          <p:cNvSpPr txBox="1"/>
+          <p:nvPr/>
+        </p:nvSpPr>
+        <p:spPr>
+          <a:xfrm>
+            <a:off x="970858" y="414338"/>
+            <a:ext cx="2056505" cy="88900"/>
+          </a:xfrm>
+          <a:prstGeom prst="rect">
+            <a:avLst/>
+          </a:prstGeom>
+          <a:noFill/>
+        </p:spPr>
+        <p:txBody>
+          <a:bodyPr wrap="none" lIns="0" rIns="0" tIns="0" bIns="0" anchor="ctr">
+            <a:noAutofit/>
+          </a:bodyPr>
+          <a:lstStyle/>
+          <a:p>
+            <a:pPr algn="l"/>
+            <a:r>
+              <a:rPr sz="780" b="0" i="0" spc="186">
+                <a:solidFill>
+                  <a:srgbClr val="101A2B"/>
+                </a:solidFill>
+                <a:latin typeface="League Spartan SemiBold"/>
+                <a:ea typeface="League Spartan SemiBold"/>
+                <a:cs typeface="League Spartan SemiBold"/>
+              </a:rPr>
+              <a:t>PART 02 · PROJECT REFERENCES</a:t>
+            </a:r>
+          </a:p>
+        </p:txBody>
+      </p:sp>
+      <p:pic>
+        <p:nvPicPr>
+          <p:cNvPr id="6" name="Picture 5" descr="iaq-logo-tag.png"/>
+          <p:cNvPicPr>
+            <a:picLocks noChangeAspect="1"/>
+          </p:cNvPicPr>
+          <p:nvPr/>
+        </p:nvPicPr>
+        <p:blipFill>
+          <a:blip r:embed="rId2"/>
+          <a:stretch>
+            <a:fillRect/>
+          </a:stretch>
+        </p:blipFill>
+        <p:spPr>
+          <a:xfrm>
+            <a:off x="10947400" y="304800"/>
+            <a:ext cx="635000" cy="317500"/>
+          </a:xfrm>
+          <a:prstGeom prst="rect">
+            <a:avLst/>
+          </a:prstGeom>
+        </p:spPr>
+      </p:pic>
+      <p:sp>
+        <p:nvSpPr>
+          <p:cNvPr id="7" name="Rectangle 6"/>
+          <p:cNvSpPr/>
+          <p:nvPr/>
+        </p:nvSpPr>
+        <p:spPr>
+          <a:xfrm>
+            <a:off x="609600" y="1438872"/>
+            <a:ext cx="10972800" cy="6350"/>
+          </a:xfrm>
+          <a:prstGeom prst="rect">
+            <a:avLst/>
+          </a:prstGeom>
+          <a:solidFill>
+            <a:srgbClr val="D5DBE2"/>
+          </a:solidFill>
+          <a:ln>
+            <a:noFill/>
+          </a:ln>
+          <a:effectLst/>
+        </p:spPr>
+        <p:txBody>
+          <a:bodyPr rtlCol="0" anchor="ctr"/>
+          <a:lstStyle/>
+          <a:p>
+            <a:pPr algn="ctr"/>
+          </a:p>
+        </p:txBody>
+      </p:sp>
+      <p:sp>
+        <p:nvSpPr>
+          <p:cNvPr id="8" name="TextBox 7"/>
+          <p:cNvSpPr txBox="1"/>
+          <p:nvPr/>
+        </p:nvSpPr>
+        <p:spPr>
+          <a:xfrm>
+            <a:off x="609600" y="768350"/>
+            <a:ext cx="10972800" cy="304800"/>
+          </a:xfrm>
+          <a:prstGeom prst="rect">
+            <a:avLst/>
+          </a:prstGeom>
+          <a:noFill/>
+        </p:spPr>
+        <p:txBody>
+          <a:bodyPr wrap="none" lIns="0" rIns="0" tIns="0" bIns="0" anchor="ctr">
+            <a:noAutofit/>
+          </a:bodyPr>
+          <a:lstStyle/>
+          <a:p>
+            <a:pPr algn="l"/>
+            <a:r>
+              <a:rPr sz="1700" b="0" i="0" spc="-34">
+                <a:solidFill>
+                  <a:srgbClr val="EC2326"/>
+                </a:solidFill>
+                <a:latin typeface="Poppins SemiBold"/>
+                <a:ea typeface="Poppins SemiBold"/>
+                <a:cs typeface="Poppins SemiBold"/>
+              </a:rPr>
+              <a:t>What changed</a:t>
+            </a:r>
+          </a:p>
+        </p:txBody>
+      </p:sp>
+      <p:sp>
+        <p:nvSpPr>
+          <p:cNvPr id="9" name="TextBox 8"/>
+          <p:cNvSpPr txBox="1"/>
+          <p:nvPr/>
+        </p:nvSpPr>
+        <p:spPr>
+          <a:xfrm>
+            <a:off x="609600" y="1118197"/>
+            <a:ext cx="6985000" cy="146050"/>
+          </a:xfrm>
+          <a:prstGeom prst="rect">
+            <a:avLst/>
+          </a:prstGeom>
+          <a:noFill/>
+        </p:spPr>
+        <p:txBody>
+          <a:bodyPr wrap="none" lIns="0" rIns="0" tIns="0" bIns="0" anchor="ctr">
+            <a:noAutofit/>
+          </a:bodyPr>
+          <a:lstStyle/>
+          <a:p>
+            <a:pPr algn="l"/>
+            <a:r>
+              <a:rPr sz="950" b="0" i="0">
+                <a:solidFill>
+                  <a:srgbClr val="64707A"/>
+                </a:solidFill>
+                <a:latin typeface="Urbanist"/>
+                <a:ea typeface="Urbanist"/>
+                <a:cs typeface="Urbanist"/>
+              </a:rPr>
+              <a:t>The same hall, before handover and in production.</a:t>
+            </a:r>
+          </a:p>
+        </p:txBody>
+      </p:sp>
+      <p:sp>
+        <p:nvSpPr>
+          <p:cNvPr id="10" name="Rectangle 9"/>
+          <p:cNvSpPr/>
+          <p:nvPr/>
+        </p:nvSpPr>
+        <p:spPr>
+          <a:xfrm>
+            <a:off x="609600" y="1701800"/>
+            <a:ext cx="5403850" cy="4174630"/>
+          </a:xfrm>
+          <a:prstGeom prst="rect">
+            <a:avLst/>
+          </a:prstGeom>
+          <a:solidFill>
+            <a:srgbClr val="FFFFFF"/>
+          </a:solidFill>
+          <a:ln>
+            <a:noFill/>
+          </a:ln>
+          <a:effectLst/>
+        </p:spPr>
+        <p:txBody>
+          <a:bodyPr rtlCol="0" anchor="ctr"/>
+          <a:lstStyle/>
+          <a:p>
+            <a:pPr algn="ctr"/>
+          </a:p>
+        </p:txBody>
+      </p:sp>
+      <p:sp>
+        <p:nvSpPr>
+          <p:cNvPr id="11" name="Rectangle 10"/>
+          <p:cNvSpPr/>
+          <p:nvPr/>
+        </p:nvSpPr>
+        <p:spPr>
+          <a:xfrm>
+            <a:off x="609600" y="1701800"/>
+            <a:ext cx="567830" cy="190500"/>
+          </a:xfrm>
+          <a:prstGeom prst="rect">
+            <a:avLst/>
+          </a:prstGeom>
+          <a:solidFill>
+            <a:srgbClr val="101A2B"/>
+          </a:solidFill>
+          <a:ln>
+            <a:noFill/>
+          </a:ln>
+          <a:effectLst/>
+        </p:spPr>
+        <p:txBody>
+          <a:bodyPr rtlCol="0" anchor="ctr"/>
+          <a:lstStyle/>
+          <a:p>
+            <a:pPr algn="ctr"/>
+          </a:p>
+        </p:txBody>
+      </p:sp>
+      <p:sp>
+        <p:nvSpPr>
+          <p:cNvPr id="12" name="TextBox 11"/>
+          <p:cNvSpPr txBox="1"/>
+          <p:nvPr/>
+        </p:nvSpPr>
+        <p:spPr>
+          <a:xfrm>
+            <a:off x="609600" y="1758950"/>
+            <a:ext cx="567830" cy="76200"/>
+          </a:xfrm>
+          <a:prstGeom prst="rect">
+            <a:avLst/>
+          </a:prstGeom>
+          <a:noFill/>
+        </p:spPr>
+        <p:txBody>
+          <a:bodyPr wrap="none" lIns="101600" rIns="101600" tIns="0" bIns="0" anchor="ctr">
+            <a:noAutofit/>
+          </a:bodyPr>
+          <a:lstStyle/>
+          <a:p>
+            <a:pPr algn="l"/>
+            <a:r>
+              <a:rPr sz="620" b="0" i="0" spc="125">
+                <a:solidFill>
+                  <a:srgbClr val="FFFFFF"/>
+                </a:solidFill>
+                <a:latin typeface="League Spartan SemiBold"/>
+                <a:ea typeface="League Spartan SemiBold"/>
+                <a:cs typeface="League Spartan SemiBold"/>
+              </a:rPr>
+              <a:t>BEFORE</a:t>
+            </a:r>
+          </a:p>
+        </p:txBody>
+      </p:sp>
+      <p:pic>
+        <p:nvPicPr>
+          <p:cNvPr id="13" name="Picture 12" descr="about-facility.jpg"/>
+          <p:cNvPicPr>
+            <a:picLocks noChangeAspect="1"/>
+          </p:cNvPicPr>
+          <p:nvPr/>
+        </p:nvPicPr>
+        <p:blipFill>
+          <a:blip r:embed="rId3"/>
+          <a:srcRect l="17639" r="17639"/>
+          <a:stretch>
+            <a:fillRect/>
+          </a:stretch>
+        </p:blipFill>
+        <p:spPr>
+          <a:xfrm>
+            <a:off x="609600" y="1701800"/>
+            <a:ext cx="5403850" cy="4174630"/>
+          </a:xfrm>
+          <a:prstGeom prst="rect">
+            <a:avLst/>
+          </a:prstGeom>
+        </p:spPr>
+      </p:pic>
+      <p:sp>
+        <p:nvSpPr>
+          <p:cNvPr id="14" name="TextBox 13"/>
+          <p:cNvSpPr txBox="1"/>
+          <p:nvPr/>
+        </p:nvSpPr>
+        <p:spPr>
+          <a:xfrm>
+            <a:off x="609600" y="5971680"/>
+            <a:ext cx="5403850" cy="196850"/>
+          </a:xfrm>
+          <a:prstGeom prst="rect">
+            <a:avLst/>
+          </a:prstGeom>
+          <a:noFill/>
+        </p:spPr>
+        <p:txBody>
+          <a:bodyPr wrap="none" lIns="0" rIns="0" tIns="0" bIns="0" anchor="ctr">
+            <a:noAutofit/>
+          </a:bodyPr>
+          <a:lstStyle/>
+          <a:p>
+            <a:pPr algn="l"/>
+            <a:r>
+              <a:rPr sz="1100" b="0" i="0" spc="-22">
+                <a:solidFill>
+                  <a:srgbClr val="101A2B"/>
+                </a:solidFill>
+                <a:latin typeface="Poppins SemiBold"/>
+                <a:ea typeface="Poppins SemiBold"/>
+                <a:cs typeface="Poppins SemiBold"/>
+              </a:rPr>
+              <a:t>Shell and core</a:t>
+            </a:r>
+          </a:p>
+        </p:txBody>
+      </p:sp>
+      <p:sp>
+        <p:nvSpPr>
+          <p:cNvPr id="15" name="TextBox 14"/>
+          <p:cNvSpPr txBox="1"/>
+          <p:nvPr/>
+        </p:nvSpPr>
+        <p:spPr>
+          <a:xfrm>
+            <a:off x="609600" y="6215463"/>
+            <a:ext cx="5403850" cy="120650"/>
+          </a:xfrm>
+          <a:prstGeom prst="rect">
+            <a:avLst/>
+          </a:prstGeom>
+          <a:noFill/>
+        </p:spPr>
+        <p:txBody>
+          <a:bodyPr wrap="none" lIns="0" rIns="0" tIns="0" bIns="0" anchor="ctr">
+            <a:noAutofit/>
+          </a:bodyPr>
+          <a:lstStyle/>
+          <a:p>
+            <a:pPr algn="l"/>
+            <a:r>
+              <a:rPr sz="800" b="0" i="0">
+                <a:solidFill>
+                  <a:srgbClr val="64707A"/>
+                </a:solidFill>
+                <a:latin typeface="Urbanist"/>
+                <a:ea typeface="Urbanist"/>
+                <a:cs typeface="Urbanist"/>
+              </a:rPr>
+              <a:t>Structure complete, services roughed in, no classification yet.</a:t>
+            </a:r>
+          </a:p>
+        </p:txBody>
+      </p:sp>
+      <p:sp>
+        <p:nvSpPr>
+          <p:cNvPr id="16" name="Rectangle 15"/>
+          <p:cNvSpPr/>
+          <p:nvPr/>
+        </p:nvSpPr>
+        <p:spPr>
+          <a:xfrm>
+            <a:off x="6178550" y="1701800"/>
+            <a:ext cx="5403850" cy="4174630"/>
+          </a:xfrm>
+          <a:prstGeom prst="rect">
+            <a:avLst/>
+          </a:prstGeom>
+          <a:solidFill>
+            <a:srgbClr val="FFFFFF"/>
+          </a:solidFill>
+          <a:ln>
+            <a:noFill/>
+          </a:ln>
+          <a:effectLst/>
+        </p:spPr>
+        <p:txBody>
+          <a:bodyPr rtlCol="0" anchor="ctr"/>
+          <a:lstStyle/>
+          <a:p>
+            <a:pPr algn="ctr"/>
+          </a:p>
+        </p:txBody>
+      </p:sp>
+      <p:sp>
+        <p:nvSpPr>
+          <p:cNvPr id="17" name="Rectangle 16"/>
+          <p:cNvSpPr/>
+          <p:nvPr/>
+        </p:nvSpPr>
+        <p:spPr>
+          <a:xfrm>
+            <a:off x="6178550" y="1701800"/>
+            <a:ext cx="499370" cy="190500"/>
+          </a:xfrm>
+          <a:prstGeom prst="rect">
+            <a:avLst/>
+          </a:prstGeom>
+          <a:solidFill>
+            <a:srgbClr val="EC2326"/>
+          </a:solidFill>
+          <a:ln>
+            <a:noFill/>
+          </a:ln>
+          <a:effectLst/>
+        </p:spPr>
+        <p:txBody>
+          <a:bodyPr rtlCol="0" anchor="ctr"/>
+          <a:lstStyle/>
+          <a:p>
+            <a:pPr algn="ctr"/>
+          </a:p>
+        </p:txBody>
+      </p:sp>
+      <p:sp>
+        <p:nvSpPr>
+          <p:cNvPr id="18" name="TextBox 17"/>
+          <p:cNvSpPr txBox="1"/>
+          <p:nvPr/>
+        </p:nvSpPr>
+        <p:spPr>
+          <a:xfrm>
+            <a:off x="6178550" y="1758950"/>
+            <a:ext cx="499370" cy="76200"/>
+          </a:xfrm>
+          <a:prstGeom prst="rect">
+            <a:avLst/>
+          </a:prstGeom>
+          <a:noFill/>
+        </p:spPr>
+        <p:txBody>
+          <a:bodyPr wrap="none" lIns="101600" rIns="101600" tIns="0" bIns="0" anchor="ctr">
+            <a:noAutofit/>
+          </a:bodyPr>
+          <a:lstStyle/>
+          <a:p>
+            <a:pPr algn="l"/>
+            <a:r>
+              <a:rPr sz="620" b="0" i="0" spc="125">
+                <a:solidFill>
+                  <a:srgbClr val="FFFFFF"/>
+                </a:solidFill>
+                <a:latin typeface="League Spartan SemiBold"/>
+                <a:ea typeface="League Spartan SemiBold"/>
+                <a:cs typeface="League Spartan SemiBold"/>
+              </a:rPr>
+              <a:t>AFTER</a:t>
+            </a:r>
+          </a:p>
+        </p:txBody>
+      </p:sp>
+      <p:pic>
+        <p:nvPicPr>
+          <p:cNvPr id="19" name="Picture 18" descr="glance-cleanroom.jpg"/>
+          <p:cNvPicPr>
+            <a:picLocks noChangeAspect="1"/>
+          </p:cNvPicPr>
+          <p:nvPr/>
+        </p:nvPicPr>
+        <p:blipFill>
+          <a:blip r:embed="rId4"/>
+          <a:srcRect t="15233" b="15233"/>
+          <a:stretch>
+            <a:fillRect/>
+          </a:stretch>
+        </p:blipFill>
+        <p:spPr>
+          <a:xfrm>
+            <a:off x="6178550" y="1701800"/>
+            <a:ext cx="5403850" cy="4174630"/>
+          </a:xfrm>
+          <a:prstGeom prst="rect">
+            <a:avLst/>
+          </a:prstGeom>
+        </p:spPr>
+      </p:pic>
+      <p:sp>
+        <p:nvSpPr>
+          <p:cNvPr id="20" name="TextBox 19"/>
+          <p:cNvSpPr txBox="1"/>
+          <p:nvPr/>
+        </p:nvSpPr>
+        <p:spPr>
+          <a:xfrm>
+            <a:off x="6178550" y="5971680"/>
+            <a:ext cx="5403850" cy="196850"/>
+          </a:xfrm>
+          <a:prstGeom prst="rect">
+            <a:avLst/>
+          </a:prstGeom>
+          <a:noFill/>
+        </p:spPr>
+        <p:txBody>
+          <a:bodyPr wrap="none" lIns="0" rIns="0" tIns="0" bIns="0" anchor="ctr">
+            <a:noAutofit/>
+          </a:bodyPr>
+          <a:lstStyle/>
+          <a:p>
+            <a:pPr algn="l"/>
+            <a:r>
+              <a:rPr sz="1100" b="0" i="0" spc="-22">
+                <a:solidFill>
+                  <a:srgbClr val="101A2B"/>
+                </a:solidFill>
+                <a:latin typeface="Poppins SemiBold"/>
+                <a:ea typeface="Poppins SemiBold"/>
+                <a:cs typeface="Poppins SemiBold"/>
+              </a:rPr>
+              <a:t>ISO 5 in production</a:t>
+            </a:r>
+          </a:p>
+        </p:txBody>
+      </p:sp>
+      <p:sp>
+        <p:nvSpPr>
+          <p:cNvPr id="21" name="TextBox 20"/>
+          <p:cNvSpPr txBox="1"/>
+          <p:nvPr/>
+        </p:nvSpPr>
+        <p:spPr>
+          <a:xfrm>
+            <a:off x="6178550" y="6215463"/>
+            <a:ext cx="5403850" cy="120650"/>
+          </a:xfrm>
+          <a:prstGeom prst="rect">
+            <a:avLst/>
+          </a:prstGeom>
+          <a:noFill/>
+        </p:spPr>
+        <p:txBody>
+          <a:bodyPr wrap="none" lIns="0" rIns="0" tIns="0" bIns="0" anchor="ctr">
+            <a:noAutofit/>
+          </a:bodyPr>
+          <a:lstStyle/>
+          <a:p>
+            <a:pPr algn="l"/>
+            <a:r>
+              <a:rPr sz="800" b="0" i="0">
+                <a:solidFill>
+                  <a:srgbClr val="64707A"/>
+                </a:solidFill>
+                <a:latin typeface="Urbanist"/>
+                <a:ea typeface="Urbanist"/>
+                <a:cs typeface="Urbanist"/>
+              </a:rPr>
+              <a:t>Classified, commissioned and handed over to the client’s team.</a:t>
+            </a:r>
+          </a:p>
+        </p:txBody>
+      </p:sp>
+      <p:sp>
+        <p:nvSpPr>
+          <p:cNvPr id="22" name="TextBox 21"/>
+          <p:cNvSpPr txBox="1"/>
+          <p:nvPr/>
+        </p:nvSpPr>
+        <p:spPr>
+          <a:xfrm>
+            <a:off x="609600" y="6445250"/>
+            <a:ext cx="130073" cy="76200"/>
+          </a:xfrm>
+          <a:prstGeom prst="rect">
+            <a:avLst/>
+          </a:prstGeom>
+          <a:noFill/>
+        </p:spPr>
+        <p:txBody>
+          <a:bodyPr wrap="none" lIns="0" rIns="0" tIns="0" bIns="0" anchor="ctr">
+            <a:noAutofit/>
+          </a:bodyPr>
+          <a:lstStyle/>
+          <a:p>
+            <a:pPr algn="l"/>
+            <a:r>
+              <a:rPr sz="680" b="0" i="0" spc="148">
+                <a:solidFill>
+                  <a:srgbClr val="64707A"/>
+                </a:solidFill>
+                <a:latin typeface="League Spartan Medium"/>
+                <a:ea typeface="League Spartan Medium"/>
+                <a:cs typeface="League Spartan Medium"/>
+              </a:rPr>
+              <a:t>39</a:t>
+            </a:r>
+          </a:p>
+        </p:txBody>
+      </p:sp>
+      <p:sp>
+        <p:nvSpPr>
+          <p:cNvPr id="23" name="TextBox 22"/>
+          <p:cNvSpPr txBox="1"/>
+          <p:nvPr/>
+        </p:nvSpPr>
+        <p:spPr>
+          <a:xfrm>
+            <a:off x="10569080" y="6429375"/>
+            <a:ext cx="1013320" cy="76200"/>
+          </a:xfrm>
+          <a:prstGeom prst="rect">
+            <a:avLst/>
+          </a:prstGeom>
+          <a:noFill/>
+        </p:spPr>
+        <p:txBody>
+          <a:bodyPr wrap="none" lIns="0" rIns="0" tIns="0" bIns="0" anchor="ctr">
+            <a:noAutofit/>
+          </a:bodyPr>
+          <a:lstStyle/>
+          <a:p>
+            <a:pPr algn="l"/>
+            <a:r>
+              <a:rPr sz="680" b="0" i="0" spc="148">
+                <a:solidFill>
+                  <a:srgbClr val="64707A"/>
+                </a:solidFill>
+                <a:latin typeface="League Spartan"/>
+                <a:ea typeface="League Spartan"/>
+                <a:cs typeface="League Spartan"/>
+              </a:rPr>
+              <a:t>BEFORE AND AFTER</a:t>
+            </a:r>
+          </a:p>
+        </p:txBody>
+      </p:sp>
+    </p:spTree>
+  </p:cSld>
+  <p:clrMapOvr>
+    <a:masterClrMapping/>
+  </p:clrMapOvr>
+</p:sld>
+</file>
+
+<file path=ppt/slides/slide41.xml><?xml version="1.0" encoding="utf-8"?>
+<p:sld xmlns:a="http://schemas.openxmlformats.org/drawingml/2006/main" xmlns:p="http://schemas.openxmlformats.org/presentationml/2006/main" xmlns:r="http://schemas.openxmlformats.org/officeDocument/2006/relationships">
+  <p:cSld>
+    <p:spTree>
+      <p:nvGrpSpPr>
+        <p:cNvPr id="1" name=""/>
+        <p:cNvGrpSpPr/>
+        <p:nvPr/>
+      </p:nvGrpSpPr>
+      <p:grpSpPr/>
+      <p:sp>
+        <p:nvSpPr>
+          <p:cNvPr id="2" name="Rectangle 1"/>
+          <p:cNvSpPr/>
+          <p:nvPr/>
+        </p:nvSpPr>
+        <p:spPr>
+          <a:xfrm>
+            <a:off x="0" y="0"/>
+            <a:ext cx="12192000" cy="6858000"/>
+          </a:xfrm>
+          <a:prstGeom prst="rect">
+            <a:avLst/>
+          </a:prstGeom>
+          <a:solidFill>
+            <a:srgbClr val="F6F7F9"/>
+          </a:solidFill>
+          <a:ln>
+            <a:noFill/>
+          </a:ln>
+          <a:effectLst/>
+        </p:spPr>
+        <p:txBody>
+          <a:bodyPr rtlCol="0" anchor="ctr"/>
+          <a:lstStyle/>
+          <a:p>
+            <a:pPr algn="ctr"/>
+          </a:p>
+        </p:txBody>
+      </p:sp>
+      <p:sp>
+        <p:nvSpPr>
+          <p:cNvPr id="3" name="Rectangle 2"/>
+          <p:cNvSpPr/>
+          <p:nvPr/>
+        </p:nvSpPr>
+        <p:spPr>
+          <a:xfrm>
+            <a:off x="609600" y="381000"/>
+            <a:ext cx="259658" cy="165100"/>
+          </a:xfrm>
+          <a:prstGeom prst="rect">
+            <a:avLst/>
+          </a:prstGeom>
+          <a:solidFill>
+            <a:srgbClr val="EC2326"/>
+          </a:solidFill>
+          <a:ln>
+            <a:noFill/>
+          </a:ln>
+          <a:effectLst/>
+        </p:spPr>
+        <p:txBody>
+          <a:bodyPr rtlCol="0" anchor="ctr"/>
+          <a:lstStyle/>
+          <a:p>
+            <a:pPr algn="ctr"/>
+          </a:p>
+        </p:txBody>
+      </p:sp>
+      <p:sp>
+        <p:nvSpPr>
+          <p:cNvPr id="4" name="TextBox 3"/>
+          <p:cNvSpPr txBox="1"/>
+          <p:nvPr/>
+        </p:nvSpPr>
+        <p:spPr>
+          <a:xfrm>
+            <a:off x="609600" y="425450"/>
+            <a:ext cx="259658" cy="82550"/>
+          </a:xfrm>
+          <a:prstGeom prst="rect">
+            <a:avLst/>
+          </a:prstGeom>
+          <a:noFill/>
+        </p:spPr>
+        <p:txBody>
+          <a:bodyPr wrap="none" lIns="69850" rIns="69850" tIns="0" bIns="0" anchor="ctr">
+            <a:noAutofit/>
+          </a:bodyPr>
+          <a:lstStyle/>
+          <a:p>
+            <a:pPr algn="l"/>
+            <a:r>
+              <a:rPr sz="700" b="0" i="0" spc="70">
+                <a:solidFill>
+                  <a:srgbClr val="FFFFFF"/>
+                </a:solidFill>
+                <a:latin typeface="League Spartan SemiBold"/>
+                <a:ea typeface="League Spartan SemiBold"/>
+                <a:cs typeface="League Spartan SemiBold"/>
+              </a:rPr>
+              <a:t>20</a:t>
+            </a:r>
+          </a:p>
+        </p:txBody>
+      </p:sp>
+      <p:sp>
+        <p:nvSpPr>
+          <p:cNvPr id="5" name="TextBox 4"/>
+          <p:cNvSpPr txBox="1"/>
+          <p:nvPr/>
+        </p:nvSpPr>
+        <p:spPr>
+          <a:xfrm>
+            <a:off x="970858" y="414338"/>
+            <a:ext cx="957859" cy="88900"/>
+          </a:xfrm>
+          <a:prstGeom prst="rect">
+            <a:avLst/>
+          </a:prstGeom>
+          <a:noFill/>
+        </p:spPr>
+        <p:txBody>
+          <a:bodyPr wrap="none" lIns="0" rIns="0" tIns="0" bIns="0" anchor="ctr">
+            <a:noAutofit/>
+          </a:bodyPr>
+          <a:lstStyle/>
+          <a:p>
+            <a:pPr algn="l"/>
+            <a:r>
+              <a:rPr sz="780" b="0" i="0" spc="186">
+                <a:solidFill>
+                  <a:srgbClr val="101A2B"/>
+                </a:solidFill>
+                <a:latin typeface="League Spartan SemiBold"/>
+                <a:ea typeface="League Spartan SemiBold"/>
+                <a:cs typeface="League Spartan SemiBold"/>
+              </a:rPr>
+              <a:t>SECTION NAME</a:t>
+            </a:r>
+          </a:p>
+        </p:txBody>
+      </p:sp>
+      <p:pic>
+        <p:nvPicPr>
+          <p:cNvPr id="6" name="Picture 5" descr="iaq-logo-tag.png"/>
+          <p:cNvPicPr>
+            <a:picLocks noChangeAspect="1"/>
+          </p:cNvPicPr>
+          <p:nvPr/>
+        </p:nvPicPr>
+        <p:blipFill>
+          <a:blip r:embed="rId2"/>
+          <a:stretch>
+            <a:fillRect/>
+          </a:stretch>
+        </p:blipFill>
+        <p:spPr>
+          <a:xfrm>
+            <a:off x="10947400" y="304800"/>
+            <a:ext cx="635000" cy="317500"/>
+          </a:xfrm>
+          <a:prstGeom prst="rect">
+            <a:avLst/>
+          </a:prstGeom>
+        </p:spPr>
+      </p:pic>
+      <p:sp>
+        <p:nvSpPr>
+          <p:cNvPr id="7" name="Rectangle 6"/>
+          <p:cNvSpPr/>
+          <p:nvPr/>
+        </p:nvSpPr>
+        <p:spPr>
+          <a:xfrm>
+            <a:off x="609600" y="1438872"/>
+            <a:ext cx="10972800" cy="6350"/>
+          </a:xfrm>
+          <a:prstGeom prst="rect">
+            <a:avLst/>
+          </a:prstGeom>
+          <a:solidFill>
+            <a:srgbClr val="D5DBE2"/>
+          </a:solidFill>
+          <a:ln>
+            <a:noFill/>
+          </a:ln>
+          <a:effectLst/>
+        </p:spPr>
+        <p:txBody>
+          <a:bodyPr rtlCol="0" anchor="ctr"/>
+          <a:lstStyle/>
+          <a:p>
+            <a:pPr algn="ctr"/>
+          </a:p>
+        </p:txBody>
+      </p:sp>
+      <p:sp>
+        <p:nvSpPr>
+          <p:cNvPr id="8" name="TextBox 7"/>
+          <p:cNvSpPr txBox="1"/>
+          <p:nvPr/>
+        </p:nvSpPr>
+        <p:spPr>
+          <a:xfrm>
+            <a:off x="609600" y="768350"/>
+            <a:ext cx="10972800" cy="304800"/>
+          </a:xfrm>
+          <a:prstGeom prst="rect">
+            <a:avLst/>
+          </a:prstGeom>
+          <a:noFill/>
+        </p:spPr>
+        <p:txBody>
+          <a:bodyPr wrap="none" lIns="0" rIns="0" tIns="0" bIns="0" anchor="ctr">
+            <a:noAutofit/>
+          </a:bodyPr>
+          <a:lstStyle/>
+          <a:p>
+            <a:pPr algn="l"/>
+            <a:r>
+              <a:rPr sz="1700" b="0" i="0" spc="-34">
+                <a:solidFill>
+                  <a:srgbClr val="64707A"/>
+                </a:solidFill>
+                <a:latin typeface="Poppins SemiBold"/>
+                <a:ea typeface="Poppins SemiBold"/>
+                <a:cs typeface="Poppins SemiBold"/>
+              </a:rPr>
+              <a:t>Page title</a:t>
+            </a:r>
+          </a:p>
+        </p:txBody>
+      </p:sp>
+      <p:sp>
+        <p:nvSpPr>
+          <p:cNvPr id="9" name="TextBox 8"/>
+          <p:cNvSpPr txBox="1"/>
+          <p:nvPr/>
+        </p:nvSpPr>
+        <p:spPr>
+          <a:xfrm>
+            <a:off x="609600" y="1118197"/>
+            <a:ext cx="6985000" cy="146050"/>
+          </a:xfrm>
+          <a:prstGeom prst="rect">
+            <a:avLst/>
+          </a:prstGeom>
+          <a:noFill/>
+        </p:spPr>
+        <p:txBody>
+          <a:bodyPr wrap="none" lIns="0" rIns="0" tIns="0" bIns="0" anchor="ctr">
+            <a:noAutofit/>
+          </a:bodyPr>
+          <a:lstStyle/>
+          <a:p>
+            <a:pPr algn="l"/>
+            <a:r>
+              <a:rPr sz="950" b="0" i="0">
+                <a:solidFill>
+                  <a:srgbClr val="64707A"/>
+                </a:solidFill>
+                <a:latin typeface="Urbanist"/>
+                <a:ea typeface="Urbanist"/>
+                <a:cs typeface="Urbanist"/>
+              </a:rPr>
+              <a:t>One line under it saying what the page is for.</a:t>
+            </a:r>
+          </a:p>
+        </p:txBody>
+      </p:sp>
+      <p:sp>
+        <p:nvSpPr>
+          <p:cNvPr id="10" name="Rectangle 9"/>
+          <p:cNvSpPr/>
+          <p:nvPr/>
+        </p:nvSpPr>
+        <p:spPr>
+          <a:xfrm>
+            <a:off x="609600" y="1701800"/>
+            <a:ext cx="5403850" cy="4174630"/>
+          </a:xfrm>
+          <a:prstGeom prst="rect">
+            <a:avLst/>
+          </a:prstGeom>
+          <a:solidFill>
+            <a:srgbClr val="FFFFFF"/>
+          </a:solidFill>
+          <a:ln>
+            <a:noFill/>
+          </a:ln>
+          <a:effectLst/>
+        </p:spPr>
+        <p:txBody>
+          <a:bodyPr rtlCol="0" anchor="ctr"/>
+          <a:lstStyle/>
+          <a:p>
+            <a:pPr algn="ctr"/>
+          </a:p>
+        </p:txBody>
+      </p:sp>
+      <p:sp>
+        <p:nvSpPr>
+          <p:cNvPr id="11" name="Rectangle 10"/>
+          <p:cNvSpPr/>
+          <p:nvPr/>
+        </p:nvSpPr>
+        <p:spPr>
+          <a:xfrm>
+            <a:off x="609600" y="1701800"/>
+            <a:ext cx="567830" cy="190500"/>
+          </a:xfrm>
+          <a:prstGeom prst="rect">
+            <a:avLst/>
+          </a:prstGeom>
+          <a:solidFill>
+            <a:srgbClr val="101A2B"/>
+          </a:solidFill>
+          <a:ln>
+            <a:noFill/>
+          </a:ln>
+          <a:effectLst/>
+        </p:spPr>
+        <p:txBody>
+          <a:bodyPr rtlCol="0" anchor="ctr"/>
+          <a:lstStyle/>
+          <a:p>
+            <a:pPr algn="ctr"/>
+          </a:p>
+        </p:txBody>
+      </p:sp>
+      <p:sp>
+        <p:nvSpPr>
+          <p:cNvPr id="12" name="TextBox 11"/>
+          <p:cNvSpPr txBox="1"/>
+          <p:nvPr/>
+        </p:nvSpPr>
+        <p:spPr>
+          <a:xfrm>
+            <a:off x="609600" y="1758950"/>
+            <a:ext cx="567830" cy="76200"/>
+          </a:xfrm>
+          <a:prstGeom prst="rect">
+            <a:avLst/>
+          </a:prstGeom>
+          <a:noFill/>
+        </p:spPr>
+        <p:txBody>
+          <a:bodyPr wrap="none" lIns="101600" rIns="101600" tIns="0" bIns="0" anchor="ctr">
+            <a:noAutofit/>
+          </a:bodyPr>
+          <a:lstStyle/>
+          <a:p>
+            <a:pPr algn="l"/>
+            <a:r>
+              <a:rPr sz="620" b="0" i="0" spc="125">
+                <a:solidFill>
+                  <a:srgbClr val="FFFFFF"/>
+                </a:solidFill>
+                <a:latin typeface="League Spartan SemiBold"/>
+                <a:ea typeface="League Spartan SemiBold"/>
+                <a:cs typeface="League Spartan SemiBold"/>
+              </a:rPr>
+              <a:t>BEFORE</a:t>
+            </a:r>
+          </a:p>
+        </p:txBody>
+      </p:sp>
+      <p:pic>
+        <p:nvPicPr>
+          <p:cNvPr id="13" name="Picture 12" descr="about-facility.jpg"/>
+          <p:cNvPicPr>
+            <a:picLocks noChangeAspect="1"/>
+          </p:cNvPicPr>
+          <p:nvPr/>
+        </p:nvPicPr>
+        <p:blipFill>
+          <a:blip r:embed="rId3"/>
+          <a:srcRect l="17639" r="17639"/>
+          <a:stretch>
+            <a:fillRect/>
+          </a:stretch>
+        </p:blipFill>
+        <p:spPr>
+          <a:xfrm>
+            <a:off x="609600" y="1701800"/>
+            <a:ext cx="5403850" cy="4174630"/>
+          </a:xfrm>
+          <a:prstGeom prst="rect">
+            <a:avLst/>
+          </a:prstGeom>
+        </p:spPr>
+      </p:pic>
+      <p:sp>
+        <p:nvSpPr>
+          <p:cNvPr id="14" name="TextBox 13"/>
+          <p:cNvSpPr txBox="1"/>
+          <p:nvPr/>
+        </p:nvSpPr>
+        <p:spPr>
+          <a:xfrm>
+            <a:off x="609600" y="5971680"/>
+            <a:ext cx="5403850" cy="196850"/>
+          </a:xfrm>
+          <a:prstGeom prst="rect">
+            <a:avLst/>
+          </a:prstGeom>
+          <a:noFill/>
+        </p:spPr>
+        <p:txBody>
+          <a:bodyPr wrap="none" lIns="0" rIns="0" tIns="0" bIns="0" anchor="ctr">
+            <a:noAutofit/>
+          </a:bodyPr>
+          <a:lstStyle/>
+          <a:p>
+            <a:pPr algn="l"/>
+            <a:r>
+              <a:rPr sz="1100" b="0" i="0" spc="-22">
+                <a:solidFill>
+                  <a:srgbClr val="64707A"/>
+                </a:solidFill>
+                <a:latin typeface="Poppins SemiBold"/>
+                <a:ea typeface="Poppins SemiBold"/>
+                <a:cs typeface="Poppins SemiBold"/>
+              </a:rPr>
+              <a:t>What it was</a:t>
+            </a:r>
+          </a:p>
+        </p:txBody>
+      </p:sp>
+      <p:sp>
+        <p:nvSpPr>
+          <p:cNvPr id="15" name="TextBox 14"/>
+          <p:cNvSpPr txBox="1"/>
+          <p:nvPr/>
+        </p:nvSpPr>
+        <p:spPr>
+          <a:xfrm>
+            <a:off x="609600" y="6215463"/>
+            <a:ext cx="5403850" cy="120650"/>
+          </a:xfrm>
+          <a:prstGeom prst="rect">
+            <a:avLst/>
+          </a:prstGeom>
+          <a:noFill/>
+        </p:spPr>
+        <p:txBody>
+          <a:bodyPr wrap="none" lIns="0" rIns="0" tIns="0" bIns="0" anchor="ctr">
+            <a:noAutofit/>
+          </a:bodyPr>
+          <a:lstStyle/>
+          <a:p>
+            <a:pPr algn="l"/>
+            <a:r>
+              <a:rPr sz="800" b="0" i="0">
+                <a:solidFill>
+                  <a:srgbClr val="64707A"/>
+                </a:solidFill>
+                <a:latin typeface="Urbanist"/>
+                <a:ea typeface="Urbanist"/>
+                <a:cs typeface="Urbanist"/>
+              </a:rPr>
+              <a:t>One or two sentences on the state it started in.</a:t>
+            </a:r>
+          </a:p>
+        </p:txBody>
+      </p:sp>
+      <p:sp>
+        <p:nvSpPr>
+          <p:cNvPr id="16" name="Rectangle 15"/>
+          <p:cNvSpPr/>
+          <p:nvPr/>
+        </p:nvSpPr>
+        <p:spPr>
+          <a:xfrm>
+            <a:off x="6178550" y="1701800"/>
+            <a:ext cx="5403850" cy="4174630"/>
+          </a:xfrm>
+          <a:prstGeom prst="rect">
+            <a:avLst/>
+          </a:prstGeom>
+          <a:solidFill>
+            <a:srgbClr val="FFFFFF"/>
+          </a:solidFill>
+          <a:ln>
+            <a:noFill/>
+          </a:ln>
+          <a:effectLst/>
+        </p:spPr>
+        <p:txBody>
+          <a:bodyPr rtlCol="0" anchor="ctr"/>
+          <a:lstStyle/>
+          <a:p>
+            <a:pPr algn="ctr"/>
+          </a:p>
+        </p:txBody>
+      </p:sp>
+      <p:sp>
+        <p:nvSpPr>
+          <p:cNvPr id="17" name="Rectangle 16"/>
+          <p:cNvSpPr/>
+          <p:nvPr/>
+        </p:nvSpPr>
+        <p:spPr>
+          <a:xfrm>
+            <a:off x="6178550" y="1701800"/>
+            <a:ext cx="499370" cy="190500"/>
+          </a:xfrm>
+          <a:prstGeom prst="rect">
+            <a:avLst/>
+          </a:prstGeom>
+          <a:solidFill>
+            <a:srgbClr val="EC2326"/>
+          </a:solidFill>
+          <a:ln>
+            <a:noFill/>
+          </a:ln>
+          <a:effectLst/>
+        </p:spPr>
+        <p:txBody>
+          <a:bodyPr rtlCol="0" anchor="ctr"/>
+          <a:lstStyle/>
+          <a:p>
+            <a:pPr algn="ctr"/>
+          </a:p>
+        </p:txBody>
+      </p:sp>
+      <p:sp>
+        <p:nvSpPr>
+          <p:cNvPr id="18" name="TextBox 17"/>
+          <p:cNvSpPr txBox="1"/>
+          <p:nvPr/>
+        </p:nvSpPr>
+        <p:spPr>
+          <a:xfrm>
+            <a:off x="6178550" y="1758950"/>
+            <a:ext cx="499370" cy="76200"/>
+          </a:xfrm>
+          <a:prstGeom prst="rect">
+            <a:avLst/>
+          </a:prstGeom>
+          <a:noFill/>
+        </p:spPr>
+        <p:txBody>
+          <a:bodyPr wrap="none" lIns="101600" rIns="101600" tIns="0" bIns="0" anchor="ctr">
+            <a:noAutofit/>
+          </a:bodyPr>
+          <a:lstStyle/>
+          <a:p>
+            <a:pPr algn="l"/>
+            <a:r>
+              <a:rPr sz="620" b="0" i="0" spc="125">
+                <a:solidFill>
+                  <a:srgbClr val="FFFFFF"/>
+                </a:solidFill>
+                <a:latin typeface="League Spartan SemiBold"/>
+                <a:ea typeface="League Spartan SemiBold"/>
+                <a:cs typeface="League Spartan SemiBold"/>
+              </a:rPr>
+              <a:t>AFTER</a:t>
+            </a:r>
+          </a:p>
+        </p:txBody>
+      </p:sp>
+      <p:pic>
+        <p:nvPicPr>
+          <p:cNvPr id="19" name="Picture 18" descr="glance-cleanroom.jpg"/>
+          <p:cNvPicPr>
+            <a:picLocks noChangeAspect="1"/>
+          </p:cNvPicPr>
+          <p:nvPr/>
+        </p:nvPicPr>
+        <p:blipFill>
+          <a:blip r:embed="rId4"/>
+          <a:srcRect t="15233" b="15233"/>
+          <a:stretch>
+            <a:fillRect/>
+          </a:stretch>
+        </p:blipFill>
+        <p:spPr>
+          <a:xfrm>
+            <a:off x="6178550" y="1701800"/>
+            <a:ext cx="5403850" cy="4174630"/>
+          </a:xfrm>
+          <a:prstGeom prst="rect">
+            <a:avLst/>
+          </a:prstGeom>
+        </p:spPr>
+      </p:pic>
+      <p:sp>
+        <p:nvSpPr>
+          <p:cNvPr id="20" name="TextBox 19"/>
+          <p:cNvSpPr txBox="1"/>
+          <p:nvPr/>
+        </p:nvSpPr>
+        <p:spPr>
+          <a:xfrm>
+            <a:off x="6178550" y="5971680"/>
+            <a:ext cx="5403850" cy="196850"/>
+          </a:xfrm>
+          <a:prstGeom prst="rect">
+            <a:avLst/>
+          </a:prstGeom>
+          <a:noFill/>
+        </p:spPr>
+        <p:txBody>
+          <a:bodyPr wrap="none" lIns="0" rIns="0" tIns="0" bIns="0" anchor="ctr">
+            <a:noAutofit/>
+          </a:bodyPr>
+          <a:lstStyle/>
+          <a:p>
+            <a:pPr algn="l"/>
+            <a:r>
+              <a:rPr sz="1100" b="0" i="0" spc="-22">
+                <a:solidFill>
+                  <a:srgbClr val="64707A"/>
+                </a:solidFill>
+                <a:latin typeface="Poppins SemiBold"/>
+                <a:ea typeface="Poppins SemiBold"/>
+                <a:cs typeface="Poppins SemiBold"/>
+              </a:rPr>
+              <a:t>What it became</a:t>
+            </a:r>
+          </a:p>
+        </p:txBody>
+      </p:sp>
+      <p:sp>
+        <p:nvSpPr>
+          <p:cNvPr id="21" name="TextBox 20"/>
+          <p:cNvSpPr txBox="1"/>
+          <p:nvPr/>
+        </p:nvSpPr>
+        <p:spPr>
+          <a:xfrm>
+            <a:off x="6178550" y="6215463"/>
+            <a:ext cx="5403850" cy="120650"/>
+          </a:xfrm>
+          <a:prstGeom prst="rect">
+            <a:avLst/>
+          </a:prstGeom>
+          <a:noFill/>
+        </p:spPr>
+        <p:txBody>
+          <a:bodyPr wrap="none" lIns="0" rIns="0" tIns="0" bIns="0" anchor="ctr">
+            <a:noAutofit/>
+          </a:bodyPr>
+          <a:lstStyle/>
+          <a:p>
+            <a:pPr algn="l"/>
+            <a:r>
+              <a:rPr sz="800" b="0" i="0">
+                <a:solidFill>
+                  <a:srgbClr val="64707A"/>
+                </a:solidFill>
+                <a:latin typeface="Urbanist"/>
+                <a:ea typeface="Urbanist"/>
+                <a:cs typeface="Urbanist"/>
+              </a:rPr>
+              <a:t>One or two sentences on the state it ended in.</a:t>
+            </a:r>
+          </a:p>
+        </p:txBody>
+      </p:sp>
+      <p:sp>
+        <p:nvSpPr>
+          <p:cNvPr id="22" name="TextBox 21"/>
+          <p:cNvSpPr txBox="1"/>
+          <p:nvPr/>
+        </p:nvSpPr>
+        <p:spPr>
+          <a:xfrm>
+            <a:off x="609600" y="6445250"/>
+            <a:ext cx="131070" cy="76200"/>
+          </a:xfrm>
+          <a:prstGeom prst="rect">
+            <a:avLst/>
+          </a:prstGeom>
+          <a:noFill/>
+        </p:spPr>
+        <p:txBody>
+          <a:bodyPr wrap="none" lIns="0" rIns="0" tIns="0" bIns="0" anchor="ctr">
+            <a:noAutofit/>
+          </a:bodyPr>
+          <a:lstStyle/>
+          <a:p>
+            <a:pPr algn="l"/>
+            <a:r>
+              <a:rPr sz="680" b="0" i="0" spc="148">
+                <a:solidFill>
+                  <a:srgbClr val="64707A"/>
+                </a:solidFill>
+                <a:latin typeface="League Spartan Medium"/>
+                <a:ea typeface="League Spartan Medium"/>
+                <a:cs typeface="League Spartan Medium"/>
+              </a:rPr>
+              <a:t>40</a:t>
+            </a:r>
+          </a:p>
+        </p:txBody>
+      </p:sp>
+      <p:sp>
+        <p:nvSpPr>
+          <p:cNvPr id="23" name="TextBox 22"/>
+          <p:cNvSpPr txBox="1"/>
+          <p:nvPr/>
+        </p:nvSpPr>
+        <p:spPr>
+          <a:xfrm>
+            <a:off x="10569080" y="6429375"/>
+            <a:ext cx="1013320" cy="76200"/>
+          </a:xfrm>
+          <a:prstGeom prst="rect">
+            <a:avLst/>
+          </a:prstGeom>
+          <a:noFill/>
+        </p:spPr>
+        <p:txBody>
+          <a:bodyPr wrap="none" lIns="0" rIns="0" tIns="0" bIns="0" anchor="ctr">
+            <a:noAutofit/>
+          </a:bodyPr>
+          <a:lstStyle/>
+          <a:p>
+            <a:pPr algn="l"/>
+            <a:r>
+              <a:rPr sz="680" b="0" i="0" spc="148">
+                <a:solidFill>
+                  <a:srgbClr val="64707A"/>
+                </a:solidFill>
+                <a:latin typeface="League Spartan"/>
+                <a:ea typeface="League Spartan"/>
+                <a:cs typeface="League Spartan"/>
+              </a:rPr>
+              <a:t>BEFORE AND AFTER</a:t>
             </a:r>
           </a:p>
         </p:txBody>

--- a/iaq-deck/template/IAQ-Master-Template-Examples.pptx
+++ b/iaq-deck/template/IAQ-Master-Template-Examples.pptx
@@ -3225,8 +3225,6 @@
                   <a:srgbClr val="101A2B"/>
                 </a:solidFill>
                 <a:latin typeface="League Spartan SemiBold"/>
-                <a:ea typeface="League Spartan SemiBold"/>
-                <a:cs typeface="League Spartan SemiBold"/>
               </a:rPr>
               <a:t>IAQ TECHNOLOGY INTERNATIONAL SDN BHD</a:t>
             </a:r>
@@ -3316,8 +3314,6 @@
                   <a:srgbClr val="EC2326"/>
                 </a:solidFill>
                 <a:latin typeface="Poppins SemiBold"/>
-                <a:ea typeface="Poppins SemiBold"/>
-                <a:cs typeface="Poppins SemiBold"/>
               </a:rPr>
               <a:t>Master template</a:t>
             </a:r>
@@ -3353,10 +3349,8 @@
                   <a:srgbClr val="64707A"/>
                 </a:solidFill>
                 <a:latin typeface="Urbanist"/>
-                <a:ea typeface="Urbanist"/>
-                <a:cs typeface="Urbanist"/>
-              </a:rPr>
-              <a:t>Seventeen layouts to build a new slide from. Each one is shown filled, then empty with a line in every box.</a:t>
+              </a:rPr>
+              <a:t>Every layout in the set, shown filled and then empty with a line in every box.</a:t>
             </a:r>
           </a:p>
         </p:txBody>
@@ -3390,8 +3384,6 @@
                   <a:srgbClr val="EC2326"/>
                 </a:solidFill>
                 <a:latin typeface="League Spartan SemiBold"/>
-                <a:ea typeface="League Spartan SemiBold"/>
-                <a:cs typeface="League Spartan SemiBold"/>
               </a:rPr>
               <a:t>01</a:t>
             </a:r>
@@ -3427,8 +3419,6 @@
                   <a:srgbClr val="101A2B"/>
                 </a:solidFill>
                 <a:latin typeface="Poppins SemiBold"/>
-                <a:ea typeface="Poppins SemiBold"/>
-                <a:cs typeface="Poppins SemiBold"/>
               </a:rPr>
               <a:t>Title</a:t>
             </a:r>
@@ -3464,8 +3454,6 @@
                   <a:srgbClr val="64707A"/>
                 </a:solidFill>
                 <a:latin typeface="Urbanist"/>
-                <a:ea typeface="Urbanist"/>
-                <a:cs typeface="Urbanist"/>
               </a:rPr>
               <a:t>Open a deck or a chapter of one.</a:t>
             </a:r>
@@ -3501,8 +3489,6 @@
                   <a:srgbClr val="EC2326"/>
                 </a:solidFill>
                 <a:latin typeface="League Spartan SemiBold"/>
-                <a:ea typeface="League Spartan SemiBold"/>
-                <a:cs typeface="League Spartan SemiBold"/>
               </a:rPr>
               <a:t>02</a:t>
             </a:r>
@@ -3538,8 +3524,6 @@
                   <a:srgbClr val="101A2B"/>
                 </a:solidFill>
                 <a:latin typeface="Poppins SemiBold"/>
-                <a:ea typeface="Poppins SemiBold"/>
-                <a:cs typeface="Poppins SemiBold"/>
               </a:rPr>
               <a:t>Section divider</a:t>
             </a:r>
@@ -3575,8 +3559,6 @@
                   <a:srgbClr val="64707A"/>
                 </a:solidFill>
                 <a:latin typeface="Urbanist"/>
-                <a:ea typeface="Urbanist"/>
-                <a:cs typeface="Urbanist"/>
               </a:rPr>
               <a:t>Open a new part of the deck.</a:t>
             </a:r>
@@ -3612,8 +3594,6 @@
                   <a:srgbClr val="EC2326"/>
                 </a:solidFill>
                 <a:latin typeface="League Spartan SemiBold"/>
-                <a:ea typeface="League Spartan SemiBold"/>
-                <a:cs typeface="League Spartan SemiBold"/>
               </a:rPr>
               <a:t>03</a:t>
             </a:r>
@@ -3649,8 +3629,6 @@
                   <a:srgbClr val="101A2B"/>
                 </a:solidFill>
                 <a:latin typeface="Poppins SemiBold"/>
-                <a:ea typeface="Poppins SemiBold"/>
-                <a:cs typeface="Poppins SemiBold"/>
               </a:rPr>
               <a:t>Statement</a:t>
             </a:r>
@@ -3686,8 +3664,6 @@
                   <a:srgbClr val="64707A"/>
                 </a:solidFill>
                 <a:latin typeface="Urbanist"/>
-                <a:ea typeface="Urbanist"/>
-                <a:cs typeface="Urbanist"/>
               </a:rPr>
               <a:t>One argument, said plainly, with a photograph.</a:t>
             </a:r>
@@ -3723,8 +3699,6 @@
                   <a:srgbClr val="EC2326"/>
                 </a:solidFill>
                 <a:latin typeface="League Spartan SemiBold"/>
-                <a:ea typeface="League Spartan SemiBold"/>
-                <a:cs typeface="League Spartan SemiBold"/>
               </a:rPr>
               <a:t>04</a:t>
             </a:r>
@@ -3760,8 +3734,6 @@
                   <a:srgbClr val="101A2B"/>
                 </a:solidFill>
                 <a:latin typeface="Poppins SemiBold"/>
-                <a:ea typeface="Poppins SemiBold"/>
-                <a:cs typeface="Poppins SemiBold"/>
               </a:rPr>
               <a:t>Highlights</a:t>
             </a:r>
@@ -3797,8 +3769,6 @@
                   <a:srgbClr val="64707A"/>
                 </a:solidFill>
                 <a:latin typeface="Urbanist"/>
-                <a:ea typeface="Urbanist"/>
-                <a:cs typeface="Urbanist"/>
               </a:rPr>
               <a:t>Three or four figures that carry the page.</a:t>
             </a:r>
@@ -3834,8 +3804,6 @@
                   <a:srgbClr val="EC2326"/>
                 </a:solidFill>
                 <a:latin typeface="League Spartan SemiBold"/>
-                <a:ea typeface="League Spartan SemiBold"/>
-                <a:cs typeface="League Spartan SemiBold"/>
               </a:rPr>
               <a:t>05</a:t>
             </a:r>
@@ -3871,8 +3839,6 @@
                   <a:srgbClr val="101A2B"/>
                 </a:solidFill>
                 <a:latin typeface="Poppins SemiBold"/>
-                <a:ea typeface="Poppins SemiBold"/>
-                <a:cs typeface="Poppins SemiBold"/>
               </a:rPr>
               <a:t>Icon cards</a:t>
             </a:r>
@@ -3908,8 +3874,6 @@
                   <a:srgbClr val="64707A"/>
                 </a:solidFill>
                 <a:latin typeface="Urbanist"/>
-                <a:ea typeface="Urbanist"/>
-                <a:cs typeface="Urbanist"/>
               </a:rPr>
               <a:t>A set of capabilities, services or principles.</a:t>
             </a:r>
@@ -3945,8 +3909,6 @@
                   <a:srgbClr val="EC2326"/>
                 </a:solidFill>
                 <a:latin typeface="League Spartan SemiBold"/>
-                <a:ea typeface="League Spartan SemiBold"/>
-                <a:cs typeface="League Spartan SemiBold"/>
               </a:rPr>
               <a:t>06</a:t>
             </a:r>
@@ -3982,8 +3944,6 @@
                   <a:srgbClr val="101A2B"/>
                 </a:solidFill>
                 <a:latin typeface="Poppins SemiBold"/>
-                <a:ea typeface="Poppins SemiBold"/>
-                <a:cs typeface="Poppins SemiBold"/>
               </a:rPr>
               <a:t>Comparison</a:t>
             </a:r>
@@ -4019,8 +3979,6 @@
                   <a:srgbClr val="64707A"/>
                 </a:solidFill>
                 <a:latin typeface="Urbanist"/>
-                <a:ea typeface="Urbanist"/>
-                <a:cs typeface="Urbanist"/>
               </a:rPr>
               <a:t>Two or three options read side by side.</a:t>
             </a:r>
@@ -4056,8 +4014,6 @@
                   <a:srgbClr val="EC2326"/>
                 </a:solidFill>
                 <a:latin typeface="League Spartan SemiBold"/>
-                <a:ea typeface="League Spartan SemiBold"/>
-                <a:cs typeface="League Spartan SemiBold"/>
               </a:rPr>
               <a:t>07</a:t>
             </a:r>
@@ -4093,8 +4049,6 @@
                   <a:srgbClr val="101A2B"/>
                 </a:solidFill>
                 <a:latin typeface="Poppins SemiBold"/>
-                <a:ea typeface="Poppins SemiBold"/>
-                <a:cs typeface="Poppins SemiBold"/>
               </a:rPr>
               <a:t>Org chart · reporting tree</a:t>
             </a:r>
@@ -4130,8 +4084,6 @@
                   <a:srgbClr val="64707A"/>
                 </a:solidFill>
                 <a:latin typeface="Urbanist"/>
-                <a:ea typeface="Urbanist"/>
-                <a:cs typeface="Urbanist"/>
               </a:rPr>
               <a:t>Who reports to whom, three levels at most.</a:t>
             </a:r>
@@ -4167,8 +4119,6 @@
                   <a:srgbClr val="EC2326"/>
                 </a:solidFill>
                 <a:latin typeface="League Spartan SemiBold"/>
-                <a:ea typeface="League Spartan SemiBold"/>
-                <a:cs typeface="League Spartan SemiBold"/>
               </a:rPr>
               <a:t>08</a:t>
             </a:r>
@@ -4204,8 +4154,6 @@
                   <a:srgbClr val="101A2B"/>
                 </a:solidFill>
                 <a:latin typeface="Poppins SemiBold"/>
-                <a:ea typeface="Poppins SemiBold"/>
-                <a:cs typeface="Poppins SemiBold"/>
               </a:rPr>
               <a:t>Org chart · flat team band</a:t>
             </a:r>
@@ -4241,8 +4189,6 @@
                   <a:srgbClr val="64707A"/>
                 </a:solidFill>
                 <a:latin typeface="Urbanist"/>
-                <a:ea typeface="Urbanist"/>
-                <a:cs typeface="Urbanist"/>
               </a:rPr>
               <a:t>A team of peers, no hierarchy implied.</a:t>
             </a:r>
@@ -4278,8 +4224,6 @@
                   <a:srgbClr val="EC2326"/>
                 </a:solidFill>
                 <a:latin typeface="League Spartan SemiBold"/>
-                <a:ea typeface="League Spartan SemiBold"/>
-                <a:cs typeface="League Spartan SemiBold"/>
               </a:rPr>
               <a:t>09</a:t>
             </a:r>
@@ -4315,8 +4259,6 @@
                   <a:srgbClr val="101A2B"/>
                 </a:solidFill>
                 <a:latin typeface="Poppins SemiBold"/>
-                <a:ea typeface="Poppins SemiBold"/>
-                <a:cs typeface="Poppins SemiBold"/>
               </a:rPr>
               <a:t>Org chart · group structure</a:t>
             </a:r>
@@ -4352,8 +4294,6 @@
                   <a:srgbClr val="64707A"/>
                 </a:solidFill>
                 <a:latin typeface="Urbanist"/>
-                <a:ea typeface="Urbanist"/>
-                <a:cs typeface="Urbanist"/>
               </a:rPr>
               <a:t>A holding company and the businesses under it.</a:t>
             </a:r>
@@ -4389,8 +4329,6 @@
                   <a:srgbClr val="EC2326"/>
                 </a:solidFill>
                 <a:latin typeface="League Spartan SemiBold"/>
-                <a:ea typeface="League Spartan SemiBold"/>
-                <a:cs typeface="League Spartan SemiBold"/>
               </a:rPr>
               <a:t>10</a:t>
             </a:r>
@@ -4426,8 +4364,6 @@
                   <a:srgbClr val="101A2B"/>
                 </a:solidFill>
                 <a:latin typeface="Poppins SemiBold"/>
-                <a:ea typeface="Poppins SemiBold"/>
-                <a:cs typeface="Poppins SemiBold"/>
               </a:rPr>
               <a:t>Process</a:t>
             </a:r>
@@ -4463,8 +4399,6 @@
                   <a:srgbClr val="64707A"/>
                 </a:solidFill>
                 <a:latin typeface="Urbanist"/>
-                <a:ea typeface="Urbanist"/>
-                <a:cs typeface="Urbanist"/>
               </a:rPr>
               <a:t>Stages that run in order, start to finish.</a:t>
             </a:r>
@@ -4500,8 +4434,6 @@
                   <a:srgbClr val="EC2326"/>
                 </a:solidFill>
                 <a:latin typeface="League Spartan SemiBold"/>
-                <a:ea typeface="League Spartan SemiBold"/>
-                <a:cs typeface="League Spartan SemiBold"/>
               </a:rPr>
               <a:t>11</a:t>
             </a:r>
@@ -4537,8 +4469,6 @@
                   <a:srgbClr val="101A2B"/>
                 </a:solidFill>
                 <a:latin typeface="Poppins SemiBold"/>
-                <a:ea typeface="Poppins SemiBold"/>
-                <a:cs typeface="Poppins SemiBold"/>
               </a:rPr>
               <a:t>Timeline</a:t>
             </a:r>
@@ -4574,8 +4504,6 @@
                   <a:srgbClr val="64707A"/>
                 </a:solidFill>
                 <a:latin typeface="Urbanist"/>
-                <a:ea typeface="Urbanist"/>
-                <a:cs typeface="Urbanist"/>
               </a:rPr>
               <a:t>Dates in order, with what happened at each.</a:t>
             </a:r>
@@ -4611,8 +4539,6 @@
                   <a:srgbClr val="EC2326"/>
                 </a:solidFill>
                 <a:latin typeface="League Spartan SemiBold"/>
-                <a:ea typeface="League Spartan SemiBold"/>
-                <a:cs typeface="League Spartan SemiBold"/>
               </a:rPr>
               <a:t>12</a:t>
             </a:r>
@@ -4648,8 +4574,6 @@
                   <a:srgbClr val="101A2B"/>
                 </a:solidFill>
                 <a:latin typeface="Poppins SemiBold"/>
-                <a:ea typeface="Poppins SemiBold"/>
-                <a:cs typeface="Poppins SemiBold"/>
               </a:rPr>
               <a:t>Infographic</a:t>
             </a:r>
@@ -4685,8 +4609,6 @@
                   <a:srgbClr val="64707A"/>
                 </a:solidFill>
                 <a:latin typeface="Urbanist"/>
-                <a:ea typeface="Urbanist"/>
-                <a:cs typeface="Urbanist"/>
               </a:rPr>
               <a:t>One visual in the middle, the parts around it.</a:t>
             </a:r>
@@ -4722,8 +4644,6 @@
                   <a:srgbClr val="EC2326"/>
                 </a:solidFill>
                 <a:latin typeface="League Spartan SemiBold"/>
-                <a:ea typeface="League Spartan SemiBold"/>
-                <a:cs typeface="League Spartan SemiBold"/>
               </a:rPr>
               <a:t>13</a:t>
             </a:r>
@@ -4759,8 +4679,6 @@
                   <a:srgbClr val="101A2B"/>
                 </a:solidFill>
                 <a:latin typeface="Poppins SemiBold"/>
-                <a:ea typeface="Poppins SemiBold"/>
-                <a:cs typeface="Poppins SemiBold"/>
               </a:rPr>
               <a:t>Image and specs</a:t>
             </a:r>
@@ -4796,8 +4714,6 @@
                   <a:srgbClr val="64707A"/>
                 </a:solidFill>
                 <a:latin typeface="Urbanist"/>
-                <a:ea typeface="Urbanist"/>
-                <a:cs typeface="Urbanist"/>
               </a:rPr>
               <a:t>One project or product, pictured and specified.</a:t>
             </a:r>
@@ -4833,8 +4749,6 @@
                   <a:srgbClr val="EC2326"/>
                 </a:solidFill>
                 <a:latin typeface="League Spartan SemiBold"/>
-                <a:ea typeface="League Spartan SemiBold"/>
-                <a:cs typeface="League Spartan SemiBold"/>
               </a:rPr>
               <a:t>14</a:t>
             </a:r>
@@ -4870,8 +4784,6 @@
                   <a:srgbClr val="101A2B"/>
                 </a:solidFill>
                 <a:latin typeface="Poppins SemiBold"/>
-                <a:ea typeface="Poppins SemiBold"/>
-                <a:cs typeface="Poppins SemiBold"/>
               </a:rPr>
               <a:t>Programme</a:t>
             </a:r>
@@ -4907,8 +4819,6 @@
                   <a:srgbClr val="64707A"/>
                 </a:solidFill>
                 <a:latin typeface="Urbanist"/>
-                <a:ea typeface="Urbanist"/>
-                <a:cs typeface="Urbanist"/>
               </a:rPr>
               <a:t>Work packages against a calendar.</a:t>
             </a:r>
@@ -4944,8 +4854,6 @@
                   <a:srgbClr val="EC2326"/>
                 </a:solidFill>
                 <a:latin typeface="League Spartan SemiBold"/>
-                <a:ea typeface="League Spartan SemiBold"/>
-                <a:cs typeface="League Spartan SemiBold"/>
               </a:rPr>
               <a:t>15</a:t>
             </a:r>
@@ -4981,8 +4889,6 @@
                   <a:srgbClr val="101A2B"/>
                 </a:solidFill>
                 <a:latin typeface="Poppins SemiBold"/>
-                <a:ea typeface="Poppins SemiBold"/>
-                <a:cs typeface="Poppins SemiBold"/>
               </a:rPr>
               <a:t>Table</a:t>
             </a:r>
@@ -5018,8 +4924,6 @@
                   <a:srgbClr val="64707A"/>
                 </a:solidFill>
                 <a:latin typeface="Urbanist"/>
-                <a:ea typeface="Urbanist"/>
-                <a:cs typeface="Urbanist"/>
               </a:rPr>
               <a:t>Rows and columns, where the detail has to be exact.</a:t>
             </a:r>
@@ -5055,8 +4959,6 @@
                   <a:srgbClr val="EC2326"/>
                 </a:solidFill>
                 <a:latin typeface="League Spartan SemiBold"/>
-                <a:ea typeface="League Spartan SemiBold"/>
-                <a:cs typeface="League Spartan SemiBold"/>
               </a:rPr>
               <a:t>16</a:t>
             </a:r>
@@ -5092,8 +4994,6 @@
                   <a:srgbClr val="101A2B"/>
                 </a:solidFill>
                 <a:latin typeface="Poppins SemiBold"/>
-                <a:ea typeface="Poppins SemiBold"/>
-                <a:cs typeface="Poppins SemiBold"/>
               </a:rPr>
               <a:t>Full-bleed image</a:t>
             </a:r>
@@ -5129,8 +5029,6 @@
                   <a:srgbClr val="64707A"/>
                 </a:solidFill>
                 <a:latin typeface="Urbanist"/>
-                <a:ea typeface="Urbanist"/>
-                <a:cs typeface="Urbanist"/>
               </a:rPr>
               <a:t>Let one photograph carry the page.</a:t>
             </a:r>
@@ -5166,8 +5064,6 @@
                   <a:srgbClr val="EC2326"/>
                 </a:solidFill>
                 <a:latin typeface="League Spartan SemiBold"/>
-                <a:ea typeface="League Spartan SemiBold"/>
-                <a:cs typeface="League Spartan SemiBold"/>
               </a:rPr>
               <a:t>17</a:t>
             </a:r>
@@ -5203,8 +5099,6 @@
                   <a:srgbClr val="101A2B"/>
                 </a:solidFill>
                 <a:latin typeface="Poppins SemiBold"/>
-                <a:ea typeface="Poppins SemiBold"/>
-                <a:cs typeface="Poppins SemiBold"/>
               </a:rPr>
               <a:t>Closing</a:t>
             </a:r>
@@ -5240,8 +5134,6 @@
                   <a:srgbClr val="64707A"/>
                 </a:solidFill>
                 <a:latin typeface="Urbanist"/>
-                <a:ea typeface="Urbanist"/>
-                <a:cs typeface="Urbanist"/>
               </a:rPr>
               <a:t>End the deck: the ask, and how to reach you.</a:t>
             </a:r>
@@ -5277,8 +5169,6 @@
                   <a:srgbClr val="EC2326"/>
                 </a:solidFill>
                 <a:latin typeface="League Spartan SemiBold"/>
-                <a:ea typeface="League Spartan SemiBold"/>
-                <a:cs typeface="League Spartan SemiBold"/>
               </a:rPr>
               <a:t>18</a:t>
             </a:r>
@@ -5314,8 +5204,6 @@
                   <a:srgbClr val="101A2B"/>
                 </a:solidFill>
                 <a:latin typeface="Poppins SemiBold"/>
-                <a:ea typeface="Poppins SemiBold"/>
-                <a:cs typeface="Poppins SemiBold"/>
               </a:rPr>
               <a:t>Agenda</a:t>
             </a:r>
@@ -5351,8 +5239,6 @@
                   <a:srgbClr val="64707A"/>
                 </a:solidFill>
                 <a:latin typeface="Urbanist"/>
-                <a:ea typeface="Urbanist"/>
-                <a:cs typeface="Urbanist"/>
               </a:rPr>
               <a:t>What the deck covers, before it covers it.</a:t>
             </a:r>
@@ -5388,8 +5274,6 @@
                   <a:srgbClr val="EC2326"/>
                 </a:solidFill>
                 <a:latin typeface="League Spartan SemiBold"/>
-                <a:ea typeface="League Spartan SemiBold"/>
-                <a:cs typeface="League Spartan SemiBold"/>
               </a:rPr>
               <a:t>19</a:t>
             </a:r>
@@ -5425,8 +5309,6 @@
                   <a:srgbClr val="101A2B"/>
                 </a:solidFill>
                 <a:latin typeface="Poppins SemiBold"/>
-                <a:ea typeface="Poppins SemiBold"/>
-                <a:cs typeface="Poppins SemiBold"/>
               </a:rPr>
               <a:t>Quote</a:t>
             </a:r>
@@ -5462,8 +5344,6 @@
                   <a:srgbClr val="64707A"/>
                 </a:solidFill>
                 <a:latin typeface="Urbanist"/>
-                <a:ea typeface="Urbanist"/>
-                <a:cs typeface="Urbanist"/>
               </a:rPr>
               <a:t>Let a client, or the board, say it instead of you.</a:t>
             </a:r>
@@ -5499,8 +5379,6 @@
                   <a:srgbClr val="EC2326"/>
                 </a:solidFill>
                 <a:latin typeface="League Spartan SemiBold"/>
-                <a:ea typeface="League Spartan SemiBold"/>
-                <a:cs typeface="League Spartan SemiBold"/>
               </a:rPr>
               <a:t>20</a:t>
             </a:r>
@@ -5536,8 +5414,6 @@
                   <a:srgbClr val="101A2B"/>
                 </a:solidFill>
                 <a:latin typeface="Poppins SemiBold"/>
-                <a:ea typeface="Poppins SemiBold"/>
-                <a:cs typeface="Poppins SemiBold"/>
               </a:rPr>
               <a:t>Before and after</a:t>
             </a:r>
@@ -5573,8 +5449,6 @@
                   <a:srgbClr val="64707A"/>
                 </a:solidFill>
                 <a:latin typeface="Urbanist"/>
-                <a:ea typeface="Urbanist"/>
-                <a:cs typeface="Urbanist"/>
               </a:rPr>
               <a:t>Two states of the same thing, side by side.</a:t>
             </a:r>
@@ -5610,8 +5484,6 @@
                   <a:srgbClr val="64707A"/>
                 </a:solidFill>
                 <a:latin typeface="League Spartan Medium"/>
-                <a:ea typeface="League Spartan Medium"/>
-                <a:cs typeface="League Spartan Medium"/>
               </a:rPr>
               <a:t>00</a:t>
             </a:r>
@@ -5647,8 +5519,6 @@
                   <a:srgbClr val="64707A"/>
                 </a:solidFill>
                 <a:latin typeface="League Spartan"/>
-                <a:ea typeface="League Spartan"/>
-                <a:cs typeface="League Spartan"/>
               </a:rPr>
               <a:t>CONTENTS</a:t>
             </a:r>
@@ -5762,8 +5632,6 @@
                   <a:srgbClr val="FFFFFF"/>
                 </a:solidFill>
                 <a:latin typeface="League Spartan SemiBold"/>
-                <a:ea typeface="League Spartan SemiBold"/>
-                <a:cs typeface="League Spartan SemiBold"/>
               </a:rPr>
               <a:t>05</a:t>
             </a:r>
@@ -5799,8 +5667,6 @@
                   <a:srgbClr val="101A2B"/>
                 </a:solidFill>
                 <a:latin typeface="League Spartan SemiBold"/>
-                <a:ea typeface="League Spartan SemiBold"/>
-                <a:cs typeface="League Spartan SemiBold"/>
               </a:rPr>
               <a:t>PART 01 · THE COMPANY</a:t>
             </a:r>
@@ -5890,8 +5756,6 @@
                   <a:srgbClr val="EC2326"/>
                 </a:solidFill>
                 <a:latin typeface="Poppins SemiBold"/>
-                <a:ea typeface="Poppins SemiBold"/>
-                <a:cs typeface="Poppins SemiBold"/>
               </a:rPr>
               <a:t>What we self-perform</a:t>
             </a:r>
@@ -5927,8 +5791,6 @@
                   <a:srgbClr val="64707A"/>
                 </a:solidFill>
                 <a:latin typeface="Urbanist"/>
-                <a:ea typeface="Urbanist"/>
-                <a:cs typeface="Urbanist"/>
               </a:rPr>
               <a:t>Six packages under one contract.</a:t>
             </a:r>
@@ -6050,8 +5912,6 @@
                   <a:srgbClr val="101A2B"/>
                 </a:solidFill>
                 <a:latin typeface="Urbanist SemiBold"/>
-                <a:ea typeface="Urbanist SemiBold"/>
-                <a:cs typeface="Urbanist SemiBold"/>
               </a:rPr>
               <a:t>Engineering design</a:t>
             </a:r>
@@ -6087,8 +5947,6 @@
                   <a:srgbClr val="64707A"/>
                 </a:solidFill>
                 <a:latin typeface="Urbanist"/>
-                <a:ea typeface="Urbanist"/>
-                <a:cs typeface="Urbanist"/>
               </a:rPr>
               <a:t>CSA and MEP, to specification</a:t>
             </a:r>
@@ -6126,8 +5984,6 @@
                   </a:srgbClr>
                 </a:solidFill>
                 <a:latin typeface="Poppins"/>
-                <a:ea typeface="Poppins"/>
-                <a:cs typeface="Poppins"/>
               </a:rPr>
               <a:t>01</a:t>
             </a:r>
@@ -6249,8 +6105,6 @@
                   <a:srgbClr val="101A2B"/>
                 </a:solidFill>
                 <a:latin typeface="Urbanist SemiBold"/>
-                <a:ea typeface="Urbanist SemiBold"/>
-                <a:cs typeface="Urbanist SemiBold"/>
               </a:rPr>
               <a:t>Electrical systems</a:t>
             </a:r>
@@ -6286,8 +6140,6 @@
                   <a:srgbClr val="64707A"/>
                 </a:solidFill>
                 <a:latin typeface="Urbanist"/>
-                <a:ea typeface="Urbanist"/>
-                <a:cs typeface="Urbanist"/>
               </a:rPr>
               <a:t>Up to 33kV substations</a:t>
             </a:r>
@@ -6325,8 +6177,6 @@
                   </a:srgbClr>
                 </a:solidFill>
                 <a:latin typeface="Poppins"/>
-                <a:ea typeface="Poppins"/>
-                <a:cs typeface="Poppins"/>
               </a:rPr>
               <a:t>02</a:t>
             </a:r>
@@ -6448,8 +6298,6 @@
                   <a:srgbClr val="101A2B"/>
                 </a:solidFill>
                 <a:latin typeface="Urbanist SemiBold"/>
-                <a:ea typeface="Urbanist SemiBold"/>
-                <a:cs typeface="Urbanist SemiBold"/>
               </a:rPr>
               <a:t>Cleanroom systems</a:t>
             </a:r>
@@ -6485,8 +6333,6 @@
                   <a:srgbClr val="64707A"/>
                 </a:solidFill>
                 <a:latin typeface="Urbanist"/>
-                <a:ea typeface="Urbanist"/>
-                <a:cs typeface="Urbanist"/>
               </a:rPr>
               <a:t>ISO 3 to ISO 8</a:t>
             </a:r>
@@ -6524,8 +6370,6 @@
                   </a:srgbClr>
                 </a:solidFill>
                 <a:latin typeface="Poppins"/>
-                <a:ea typeface="Poppins"/>
-                <a:cs typeface="Poppins"/>
               </a:rPr>
               <a:t>03</a:t>
             </a:r>
@@ -6647,8 +6491,6 @@
                   <a:srgbClr val="101A2B"/>
                 </a:solidFill>
                 <a:latin typeface="Urbanist SemiBold"/>
-                <a:ea typeface="Urbanist SemiBold"/>
-                <a:cs typeface="Urbanist SemiBold"/>
               </a:rPr>
               <a:t>Commissioning</a:t>
             </a:r>
@@ -6684,8 +6526,6 @@
                   <a:srgbClr val="64707A"/>
                 </a:solidFill>
                 <a:latin typeface="Urbanist"/>
-                <a:ea typeface="Urbanist"/>
-                <a:cs typeface="Urbanist"/>
               </a:rPr>
               <a:t>Testing and handover</a:t>
             </a:r>
@@ -6723,8 +6563,6 @@
                   </a:srgbClr>
                 </a:solidFill>
                 <a:latin typeface="Poppins"/>
-                <a:ea typeface="Poppins"/>
-                <a:cs typeface="Poppins"/>
               </a:rPr>
               <a:t>04</a:t>
             </a:r>
@@ -6876,8 +6714,6 @@
                   <a:srgbClr val="101A2B"/>
                 </a:solidFill>
                 <a:latin typeface="Urbanist SemiBold"/>
-                <a:ea typeface="Urbanist SemiBold"/>
-                <a:cs typeface="Urbanist SemiBold"/>
               </a:rPr>
               <a:t>Maintenance</a:t>
             </a:r>
@@ -6913,8 +6749,6 @@
                   <a:srgbClr val="64707A"/>
                 </a:solidFill>
                 <a:latin typeface="Urbanist"/>
-                <a:ea typeface="Urbanist"/>
-                <a:cs typeface="Urbanist"/>
               </a:rPr>
               <a:t>Operate, service, optimise</a:t>
             </a:r>
@@ -6952,8 +6786,6 @@
                   </a:srgbClr>
                 </a:solidFill>
                 <a:latin typeface="Poppins"/>
-                <a:ea typeface="Poppins"/>
-                <a:cs typeface="Poppins"/>
               </a:rPr>
               <a:t>05</a:t>
             </a:r>
@@ -7105,8 +6937,6 @@
                   <a:srgbClr val="101A2B"/>
                 </a:solidFill>
                 <a:latin typeface="Urbanist SemiBold"/>
-                <a:ea typeface="Urbanist SemiBold"/>
-                <a:cs typeface="Urbanist SemiBold"/>
               </a:rPr>
               <a:t>Energy management</a:t>
             </a:r>
@@ -7142,8 +6972,6 @@
                   <a:srgbClr val="64707A"/>
                 </a:solidFill>
                 <a:latin typeface="Urbanist"/>
-                <a:ea typeface="Urbanist"/>
-                <a:cs typeface="Urbanist"/>
               </a:rPr>
               <a:t>Carbon and cost reduction</a:t>
             </a:r>
@@ -7181,8 +7009,6 @@
                   </a:srgbClr>
                 </a:solidFill>
                 <a:latin typeface="Poppins"/>
-                <a:ea typeface="Poppins"/>
-                <a:cs typeface="Poppins"/>
               </a:rPr>
               <a:t>06</a:t>
             </a:r>
@@ -7218,8 +7044,6 @@
                   <a:srgbClr val="64707A"/>
                 </a:solidFill>
                 <a:latin typeface="League Spartan Medium"/>
-                <a:ea typeface="League Spartan Medium"/>
-                <a:cs typeface="League Spartan Medium"/>
               </a:rPr>
               <a:t>09</a:t>
             </a:r>
@@ -7255,8 +7079,6 @@
                   <a:srgbClr val="64707A"/>
                 </a:solidFill>
                 <a:latin typeface="League Spartan"/>
-                <a:ea typeface="League Spartan"/>
-                <a:cs typeface="League Spartan"/>
               </a:rPr>
               <a:t>ICON CARDS</a:t>
             </a:r>
@@ -7370,8 +7192,6 @@
                   <a:srgbClr val="FFFFFF"/>
                 </a:solidFill>
                 <a:latin typeface="League Spartan SemiBold"/>
-                <a:ea typeface="League Spartan SemiBold"/>
-                <a:cs typeface="League Spartan SemiBold"/>
               </a:rPr>
               <a:t>05</a:t>
             </a:r>
@@ -7407,8 +7227,6 @@
                   <a:srgbClr val="101A2B"/>
                 </a:solidFill>
                 <a:latin typeface="League Spartan SemiBold"/>
-                <a:ea typeface="League Spartan SemiBold"/>
-                <a:cs typeface="League Spartan SemiBold"/>
               </a:rPr>
               <a:t>SECTION NAME</a:t>
             </a:r>
@@ -7498,8 +7316,6 @@
                   <a:srgbClr val="64707A"/>
                 </a:solidFill>
                 <a:latin typeface="Poppins SemiBold"/>
-                <a:ea typeface="Poppins SemiBold"/>
-                <a:cs typeface="Poppins SemiBold"/>
               </a:rPr>
               <a:t>Page title</a:t>
             </a:r>
@@ -7535,8 +7351,6 @@
                   <a:srgbClr val="64707A"/>
                 </a:solidFill>
                 <a:latin typeface="Urbanist"/>
-                <a:ea typeface="Urbanist"/>
-                <a:cs typeface="Urbanist"/>
               </a:rPr>
               <a:t>One line under it saying what the page is for.</a:t>
             </a:r>
@@ -7658,8 +7472,6 @@
                   <a:srgbClr val="64707A"/>
                 </a:solidFill>
                 <a:latin typeface="Urbanist SemiBold"/>
-                <a:ea typeface="Urbanist SemiBold"/>
-                <a:cs typeface="Urbanist SemiBold"/>
               </a:rPr>
               <a:t>Item name</a:t>
             </a:r>
@@ -7695,8 +7507,6 @@
                   <a:srgbClr val="64707A"/>
                 </a:solidFill>
                 <a:latin typeface="Urbanist"/>
-                <a:ea typeface="Urbanist"/>
-                <a:cs typeface="Urbanist"/>
               </a:rPr>
               <a:t>What it covers, four or five words</a:t>
             </a:r>
@@ -7734,8 +7544,6 @@
                   </a:srgbClr>
                 </a:solidFill>
                 <a:latin typeface="Poppins"/>
-                <a:ea typeface="Poppins"/>
-                <a:cs typeface="Poppins"/>
               </a:rPr>
               <a:t>01</a:t>
             </a:r>
@@ -7857,8 +7665,6 @@
                   <a:srgbClr val="64707A"/>
                 </a:solidFill>
                 <a:latin typeface="Urbanist SemiBold"/>
-                <a:ea typeface="Urbanist SemiBold"/>
-                <a:cs typeface="Urbanist SemiBold"/>
               </a:rPr>
               <a:t>Item name</a:t>
             </a:r>
@@ -7894,8 +7700,6 @@
                   <a:srgbClr val="64707A"/>
                 </a:solidFill>
                 <a:latin typeface="Urbanist"/>
-                <a:ea typeface="Urbanist"/>
-                <a:cs typeface="Urbanist"/>
               </a:rPr>
               <a:t>What it covers, four or five words</a:t>
             </a:r>
@@ -7933,8 +7737,6 @@
                   </a:srgbClr>
                 </a:solidFill>
                 <a:latin typeface="Poppins"/>
-                <a:ea typeface="Poppins"/>
-                <a:cs typeface="Poppins"/>
               </a:rPr>
               <a:t>02</a:t>
             </a:r>
@@ -8056,8 +7858,6 @@
                   <a:srgbClr val="64707A"/>
                 </a:solidFill>
                 <a:latin typeface="Urbanist SemiBold"/>
-                <a:ea typeface="Urbanist SemiBold"/>
-                <a:cs typeface="Urbanist SemiBold"/>
               </a:rPr>
               <a:t>Item name</a:t>
             </a:r>
@@ -8093,8 +7893,6 @@
                   <a:srgbClr val="64707A"/>
                 </a:solidFill>
                 <a:latin typeface="Urbanist"/>
-                <a:ea typeface="Urbanist"/>
-                <a:cs typeface="Urbanist"/>
               </a:rPr>
               <a:t>What it covers, four or five words</a:t>
             </a:r>
@@ -8132,8 +7930,6 @@
                   </a:srgbClr>
                 </a:solidFill>
                 <a:latin typeface="Poppins"/>
-                <a:ea typeface="Poppins"/>
-                <a:cs typeface="Poppins"/>
               </a:rPr>
               <a:t>03</a:t>
             </a:r>
@@ -8255,8 +8051,6 @@
                   <a:srgbClr val="64707A"/>
                 </a:solidFill>
                 <a:latin typeface="Urbanist SemiBold"/>
-                <a:ea typeface="Urbanist SemiBold"/>
-                <a:cs typeface="Urbanist SemiBold"/>
               </a:rPr>
               <a:t>Item name</a:t>
             </a:r>
@@ -8292,8 +8086,6 @@
                   <a:srgbClr val="64707A"/>
                 </a:solidFill>
                 <a:latin typeface="Urbanist"/>
-                <a:ea typeface="Urbanist"/>
-                <a:cs typeface="Urbanist"/>
               </a:rPr>
               <a:t>What it covers, four or five words</a:t>
             </a:r>
@@ -8331,8 +8123,6 @@
                   </a:srgbClr>
                 </a:solidFill>
                 <a:latin typeface="Poppins"/>
-                <a:ea typeface="Poppins"/>
-                <a:cs typeface="Poppins"/>
               </a:rPr>
               <a:t>04</a:t>
             </a:r>
@@ -8484,8 +8274,6 @@
                   <a:srgbClr val="64707A"/>
                 </a:solidFill>
                 <a:latin typeface="Urbanist SemiBold"/>
-                <a:ea typeface="Urbanist SemiBold"/>
-                <a:cs typeface="Urbanist SemiBold"/>
               </a:rPr>
               <a:t>Item name</a:t>
             </a:r>
@@ -8521,8 +8309,6 @@
                   <a:srgbClr val="64707A"/>
                 </a:solidFill>
                 <a:latin typeface="Urbanist"/>
-                <a:ea typeface="Urbanist"/>
-                <a:cs typeface="Urbanist"/>
               </a:rPr>
               <a:t>What it covers, four or five words</a:t>
             </a:r>
@@ -8560,8 +8346,6 @@
                   </a:srgbClr>
                 </a:solidFill>
                 <a:latin typeface="Poppins"/>
-                <a:ea typeface="Poppins"/>
-                <a:cs typeface="Poppins"/>
               </a:rPr>
               <a:t>05</a:t>
             </a:r>
@@ -8713,8 +8497,6 @@
                   <a:srgbClr val="64707A"/>
                 </a:solidFill>
                 <a:latin typeface="Urbanist SemiBold"/>
-                <a:ea typeface="Urbanist SemiBold"/>
-                <a:cs typeface="Urbanist SemiBold"/>
               </a:rPr>
               <a:t>Item name</a:t>
             </a:r>
@@ -8750,8 +8532,6 @@
                   <a:srgbClr val="64707A"/>
                 </a:solidFill>
                 <a:latin typeface="Urbanist"/>
-                <a:ea typeface="Urbanist"/>
-                <a:cs typeface="Urbanist"/>
               </a:rPr>
               <a:t>What it covers, four or five words</a:t>
             </a:r>
@@ -8789,8 +8569,6 @@
                   </a:srgbClr>
                 </a:solidFill>
                 <a:latin typeface="Poppins"/>
-                <a:ea typeface="Poppins"/>
-                <a:cs typeface="Poppins"/>
               </a:rPr>
               <a:t>06</a:t>
             </a:r>
@@ -8826,8 +8604,6 @@
                   <a:srgbClr val="64707A"/>
                 </a:solidFill>
                 <a:latin typeface="League Spartan Medium"/>
-                <a:ea typeface="League Spartan Medium"/>
-                <a:cs typeface="League Spartan Medium"/>
               </a:rPr>
               <a:t>10</a:t>
             </a:r>
@@ -8863,8 +8639,6 @@
                   <a:srgbClr val="64707A"/>
                 </a:solidFill>
                 <a:latin typeface="League Spartan"/>
-                <a:ea typeface="League Spartan"/>
-                <a:cs typeface="League Spartan"/>
               </a:rPr>
               <a:t>ICON CARDS</a:t>
             </a:r>
@@ -8978,8 +8752,6 @@
                   <a:srgbClr val="FFFFFF"/>
                 </a:solidFill>
                 <a:latin typeface="League Spartan SemiBold"/>
-                <a:ea typeface="League Spartan SemiBold"/>
-                <a:cs typeface="League Spartan SemiBold"/>
               </a:rPr>
               <a:t>06</a:t>
             </a:r>
@@ -9015,8 +8787,6 @@
                   <a:srgbClr val="101A2B"/>
                 </a:solidFill>
                 <a:latin typeface="League Spartan SemiBold"/>
-                <a:ea typeface="League Spartan SemiBold"/>
-                <a:cs typeface="League Spartan SemiBold"/>
               </a:rPr>
               <a:t>PART 01 · THE COMPANY</a:t>
             </a:r>
@@ -9106,8 +8876,6 @@
                   <a:srgbClr val="EC2326"/>
                 </a:solidFill>
                 <a:latin typeface="Poppins SemiBold"/>
-                <a:ea typeface="Poppins SemiBold"/>
-                <a:cs typeface="Poppins SemiBold"/>
               </a:rPr>
               <a:t>Three ways to contract the work</a:t>
             </a:r>
@@ -9143,8 +8911,6 @@
                   <a:srgbClr val="64707A"/>
                 </a:solidFill>
                 <a:latin typeface="Urbanist"/>
-                <a:ea typeface="Urbanist"/>
-                <a:cs typeface="Urbanist"/>
               </a:rPr>
               <a:t>The same crews, scoped three ways.</a:t>
             </a:r>
@@ -9210,8 +8976,6 @@
                   <a:srgbClr val="EC2326"/>
                 </a:solidFill>
                 <a:latin typeface="League Spartan SemiBold"/>
-                <a:ea typeface="League Spartan SemiBold"/>
-                <a:cs typeface="League Spartan SemiBold"/>
               </a:rPr>
               <a:t>MODEL 01</a:t>
             </a:r>
@@ -9247,8 +9011,6 @@
                   <a:srgbClr val="101A2B"/>
                 </a:solidFill>
                 <a:latin typeface="Poppins SemiBold"/>
-                <a:ea typeface="Poppins SemiBold"/>
-                <a:cs typeface="Poppins SemiBold"/>
               </a:rPr>
               <a:t>EPCM</a:t>
             </a:r>
@@ -9314,8 +9076,6 @@
                   <a:srgbClr val="64707A"/>
                 </a:solidFill>
                 <a:latin typeface="Urbanist"/>
-                <a:ea typeface="Urbanist"/>
-                <a:cs typeface="Urbanist"/>
               </a:rPr>
               <a:t>Management of engineering, procurement and construction.</a:t>
             </a:r>
@@ -9381,8 +9141,6 @@
                   <a:srgbClr val="1E2A3D"/>
                 </a:solidFill>
                 <a:latin typeface="Urbanist"/>
-                <a:ea typeface="Urbanist"/>
-                <a:cs typeface="Urbanist"/>
               </a:rPr>
               <a:t>Client holds the trade contracts</a:t>
             </a:r>
@@ -9448,8 +9206,6 @@
                   <a:srgbClr val="1E2A3D"/>
                 </a:solidFill>
                 <a:latin typeface="Urbanist"/>
-                <a:ea typeface="Urbanist"/>
-                <a:cs typeface="Urbanist"/>
               </a:rPr>
               <a:t>IAQ manages delivery</a:t>
             </a:r>
@@ -9515,8 +9271,6 @@
                   <a:srgbClr val="1E2A3D"/>
                 </a:solidFill>
                 <a:latin typeface="Urbanist"/>
-                <a:ea typeface="Urbanist"/>
-                <a:cs typeface="Urbanist"/>
               </a:rPr>
               <a:t>Fastest route to a fab ramp</a:t>
             </a:r>
@@ -9582,8 +9336,6 @@
                   <a:srgbClr val="1E2A3D"/>
                 </a:solidFill>
                 <a:latin typeface="Urbanist"/>
-                <a:ea typeface="Urbanist"/>
-                <a:cs typeface="Urbanist"/>
               </a:rPr>
               <a:t>Best where scope is still moving</a:t>
             </a:r>
@@ -9649,8 +9401,6 @@
                   <a:srgbClr val="EC2326"/>
                 </a:solidFill>
                 <a:latin typeface="League Spartan SemiBold"/>
-                <a:ea typeface="League Spartan SemiBold"/>
-                <a:cs typeface="League Spartan SemiBold"/>
               </a:rPr>
               <a:t>MODEL 02</a:t>
             </a:r>
@@ -9686,8 +9436,6 @@
                   <a:srgbClr val="FFFFFF"/>
                 </a:solidFill>
                 <a:latin typeface="Poppins SemiBold"/>
-                <a:ea typeface="Poppins SemiBold"/>
-                <a:cs typeface="Poppins SemiBold"/>
               </a:rPr>
               <a:t>EPCC</a:t>
             </a:r>
@@ -9753,8 +9501,6 @@
                   <a:srgbClr val="64707A"/>
                 </a:solidFill>
                 <a:latin typeface="Urbanist"/>
-                <a:ea typeface="Urbanist"/>
-                <a:cs typeface="Urbanist"/>
               </a:rPr>
               <a:t>Full turnkey from conception to operation.</a:t>
             </a:r>
@@ -9820,8 +9566,6 @@
                   <a:srgbClr val="E7EBF0"/>
                 </a:solidFill>
                 <a:latin typeface="Urbanist"/>
-                <a:ea typeface="Urbanist"/>
-                <a:cs typeface="Urbanist"/>
               </a:rPr>
               <a:t>IAQ holds every contract</a:t>
             </a:r>
@@ -9887,8 +9631,6 @@
                   <a:srgbClr val="E7EBF0"/>
                 </a:solidFill>
                 <a:latin typeface="Urbanist"/>
-                <a:ea typeface="Urbanist"/>
-                <a:cs typeface="Urbanist"/>
               </a:rPr>
               <a:t>One programme, one accountability</a:t>
             </a:r>
@@ -9954,8 +9696,6 @@
                   <a:srgbClr val="E7EBF0"/>
                 </a:solidFill>
                 <a:latin typeface="Urbanist"/>
-                <a:ea typeface="Urbanist"/>
-                <a:cs typeface="Urbanist"/>
               </a:rPr>
               <a:t>Fixed scope, fixed completion</a:t>
             </a:r>
@@ -10021,8 +9761,6 @@
                   <a:srgbClr val="E7EBF0"/>
                 </a:solidFill>
                 <a:latin typeface="Urbanist"/>
-                <a:ea typeface="Urbanist"/>
-                <a:cs typeface="Urbanist"/>
               </a:rPr>
               <a:t>Best where the brief is settled</a:t>
             </a:r>
@@ -10088,8 +9826,6 @@
                   <a:srgbClr val="EC2326"/>
                 </a:solidFill>
                 <a:latin typeface="League Spartan SemiBold"/>
-                <a:ea typeface="League Spartan SemiBold"/>
-                <a:cs typeface="League Spartan SemiBold"/>
               </a:rPr>
               <a:t>MODEL 03</a:t>
             </a:r>
@@ -10125,8 +9861,6 @@
                   <a:srgbClr val="101A2B"/>
                 </a:solidFill>
                 <a:latin typeface="Poppins SemiBold"/>
-                <a:ea typeface="Poppins SemiBold"/>
-                <a:cs typeface="Poppins SemiBold"/>
               </a:rPr>
               <a:t>EFM</a:t>
             </a:r>
@@ -10192,8 +9926,6 @@
                   <a:srgbClr val="64707A"/>
                 </a:solidFill>
                 <a:latin typeface="Urbanist"/>
-                <a:ea typeface="Urbanist"/>
-                <a:cs typeface="Urbanist"/>
               </a:rPr>
               <a:t>Energy and facility management after handover.</a:t>
             </a:r>
@@ -10259,8 +9991,6 @@
                   <a:srgbClr val="1E2A3D"/>
                 </a:solidFill>
                 <a:latin typeface="Urbanist"/>
-                <a:ea typeface="Urbanist"/>
-                <a:cs typeface="Urbanist"/>
               </a:rPr>
               <a:t>Planned and reactive maintenance</a:t>
             </a:r>
@@ -10326,8 +10056,6 @@
                   <a:srgbClr val="1E2A3D"/>
                 </a:solidFill>
                 <a:latin typeface="Urbanist"/>
-                <a:ea typeface="Urbanist"/>
-                <a:cs typeface="Urbanist"/>
               </a:rPr>
               <a:t>Energy and carbon reduction</a:t>
             </a:r>
@@ -10393,8 +10121,6 @@
                   <a:srgbClr val="1E2A3D"/>
                 </a:solidFill>
                 <a:latin typeface="Urbanist"/>
-                <a:ea typeface="Urbanist"/>
-                <a:cs typeface="Urbanist"/>
               </a:rPr>
               <a:t>Operates the asset for its life</a:t>
             </a:r>
@@ -10460,8 +10186,6 @@
                   <a:srgbClr val="1E2A3D"/>
                 </a:solidFill>
                 <a:latin typeface="Urbanist"/>
-                <a:ea typeface="Urbanist"/>
-                <a:cs typeface="Urbanist"/>
               </a:rPr>
               <a:t>Best where uptime decides value</a:t>
             </a:r>
@@ -10497,8 +10221,6 @@
                   <a:srgbClr val="64707A"/>
                 </a:solidFill>
                 <a:latin typeface="League Spartan Medium"/>
-                <a:ea typeface="League Spartan Medium"/>
-                <a:cs typeface="League Spartan Medium"/>
               </a:rPr>
               <a:t>11</a:t>
             </a:r>
@@ -10534,8 +10256,6 @@
                   <a:srgbClr val="64707A"/>
                 </a:solidFill>
                 <a:latin typeface="League Spartan"/>
-                <a:ea typeface="League Spartan"/>
-                <a:cs typeface="League Spartan"/>
               </a:rPr>
               <a:t>COMPARISON</a:t>
             </a:r>
@@ -10649,8 +10369,6 @@
                   <a:srgbClr val="FFFFFF"/>
                 </a:solidFill>
                 <a:latin typeface="League Spartan SemiBold"/>
-                <a:ea typeface="League Spartan SemiBold"/>
-                <a:cs typeface="League Spartan SemiBold"/>
               </a:rPr>
               <a:t>06</a:t>
             </a:r>
@@ -10686,8 +10404,6 @@
                   <a:srgbClr val="101A2B"/>
                 </a:solidFill>
                 <a:latin typeface="League Spartan SemiBold"/>
-                <a:ea typeface="League Spartan SemiBold"/>
-                <a:cs typeface="League Spartan SemiBold"/>
               </a:rPr>
               <a:t>SECTION NAME</a:t>
             </a:r>
@@ -10777,8 +10493,6 @@
                   <a:srgbClr val="64707A"/>
                 </a:solidFill>
                 <a:latin typeface="Poppins SemiBold"/>
-                <a:ea typeface="Poppins SemiBold"/>
-                <a:cs typeface="Poppins SemiBold"/>
               </a:rPr>
               <a:t>Page title</a:t>
             </a:r>
@@ -10814,8 +10528,6 @@
                   <a:srgbClr val="64707A"/>
                 </a:solidFill>
                 <a:latin typeface="Urbanist"/>
-                <a:ea typeface="Urbanist"/>
-                <a:cs typeface="Urbanist"/>
               </a:rPr>
               <a:t>One line under it saying what the page is for.</a:t>
             </a:r>
@@ -10881,8 +10593,6 @@
                   <a:srgbClr val="64707A"/>
                 </a:solidFill>
                 <a:latin typeface="League Spartan SemiBold"/>
-                <a:ea typeface="League Spartan SemiBold"/>
-                <a:cs typeface="League Spartan SemiBold"/>
               </a:rPr>
               <a:t>OPTION 01</a:t>
             </a:r>
@@ -10918,8 +10628,6 @@
                   <a:srgbClr val="64707A"/>
                 </a:solidFill>
                 <a:latin typeface="Poppins SemiBold"/>
-                <a:ea typeface="Poppins SemiBold"/>
-                <a:cs typeface="Poppins SemiBold"/>
               </a:rPr>
               <a:t>First option</a:t>
             </a:r>
@@ -10985,8 +10693,6 @@
                   <a:srgbClr val="64707A"/>
                 </a:solidFill>
                 <a:latin typeface="Urbanist"/>
-                <a:ea typeface="Urbanist"/>
-                <a:cs typeface="Urbanist"/>
               </a:rPr>
               <a:t>One sentence saying what it is.</a:t>
             </a:r>
@@ -11052,8 +10758,6 @@
                   <a:srgbClr val="64707A"/>
                 </a:solidFill>
                 <a:latin typeface="Urbanist"/>
-                <a:ea typeface="Urbanist"/>
-                <a:cs typeface="Urbanist"/>
               </a:rPr>
               <a:t>A point of difference</a:t>
             </a:r>
@@ -11119,8 +10823,6 @@
                   <a:srgbClr val="64707A"/>
                 </a:solidFill>
                 <a:latin typeface="Urbanist"/>
-                <a:ea typeface="Urbanist"/>
-                <a:cs typeface="Urbanist"/>
               </a:rPr>
               <a:t>A second point</a:t>
             </a:r>
@@ -11186,8 +10888,6 @@
                   <a:srgbClr val="64707A"/>
                 </a:solidFill>
                 <a:latin typeface="Urbanist"/>
-                <a:ea typeface="Urbanist"/>
-                <a:cs typeface="Urbanist"/>
               </a:rPr>
               <a:t>A third point</a:t>
             </a:r>
@@ -11253,8 +10953,6 @@
                   <a:srgbClr val="64707A"/>
                 </a:solidFill>
                 <a:latin typeface="Urbanist"/>
-                <a:ea typeface="Urbanist"/>
-                <a:cs typeface="Urbanist"/>
               </a:rPr>
               <a:t>When to choose it</a:t>
             </a:r>
@@ -11320,8 +11018,6 @@
                   <a:srgbClr val="64707A"/>
                 </a:solidFill>
                 <a:latin typeface="League Spartan SemiBold"/>
-                <a:ea typeface="League Spartan SemiBold"/>
-                <a:cs typeface="League Spartan SemiBold"/>
               </a:rPr>
               <a:t>OPTION 02</a:t>
             </a:r>
@@ -11357,8 +11053,6 @@
                   <a:srgbClr val="64707A"/>
                 </a:solidFill>
                 <a:latin typeface="Poppins SemiBold"/>
-                <a:ea typeface="Poppins SemiBold"/>
-                <a:cs typeface="Poppins SemiBold"/>
               </a:rPr>
               <a:t>Second option</a:t>
             </a:r>
@@ -11424,8 +11118,6 @@
                   <a:srgbClr val="64707A"/>
                 </a:solidFill>
                 <a:latin typeface="Urbanist"/>
-                <a:ea typeface="Urbanist"/>
-                <a:cs typeface="Urbanist"/>
               </a:rPr>
               <a:t>One sentence saying what it is.</a:t>
             </a:r>
@@ -11491,8 +11183,6 @@
                   <a:srgbClr val="E7EBF0"/>
                 </a:solidFill>
                 <a:latin typeface="Urbanist"/>
-                <a:ea typeface="Urbanist"/>
-                <a:cs typeface="Urbanist"/>
               </a:rPr>
               <a:t>A point of difference</a:t>
             </a:r>
@@ -11558,8 +11248,6 @@
                   <a:srgbClr val="E7EBF0"/>
                 </a:solidFill>
                 <a:latin typeface="Urbanist"/>
-                <a:ea typeface="Urbanist"/>
-                <a:cs typeface="Urbanist"/>
               </a:rPr>
               <a:t>A second point</a:t>
             </a:r>
@@ -11625,8 +11313,6 @@
                   <a:srgbClr val="E7EBF0"/>
                 </a:solidFill>
                 <a:latin typeface="Urbanist"/>
-                <a:ea typeface="Urbanist"/>
-                <a:cs typeface="Urbanist"/>
               </a:rPr>
               <a:t>A third point</a:t>
             </a:r>
@@ -11692,8 +11378,6 @@
                   <a:srgbClr val="E7EBF0"/>
                 </a:solidFill>
                 <a:latin typeface="Urbanist"/>
-                <a:ea typeface="Urbanist"/>
-                <a:cs typeface="Urbanist"/>
               </a:rPr>
               <a:t>When to choose it</a:t>
             </a:r>
@@ -11759,8 +11443,6 @@
                   <a:srgbClr val="64707A"/>
                 </a:solidFill>
                 <a:latin typeface="League Spartan SemiBold"/>
-                <a:ea typeface="League Spartan SemiBold"/>
-                <a:cs typeface="League Spartan SemiBold"/>
               </a:rPr>
               <a:t>OPTION 03</a:t>
             </a:r>
@@ -11796,8 +11478,6 @@
                   <a:srgbClr val="64707A"/>
                 </a:solidFill>
                 <a:latin typeface="Poppins SemiBold"/>
-                <a:ea typeface="Poppins SemiBold"/>
-                <a:cs typeface="Poppins SemiBold"/>
               </a:rPr>
               <a:t>Third option</a:t>
             </a:r>
@@ -11863,8 +11543,6 @@
                   <a:srgbClr val="64707A"/>
                 </a:solidFill>
                 <a:latin typeface="Urbanist"/>
-                <a:ea typeface="Urbanist"/>
-                <a:cs typeface="Urbanist"/>
               </a:rPr>
               <a:t>One sentence saying what it is.</a:t>
             </a:r>
@@ -11930,8 +11608,6 @@
                   <a:srgbClr val="64707A"/>
                 </a:solidFill>
                 <a:latin typeface="Urbanist"/>
-                <a:ea typeface="Urbanist"/>
-                <a:cs typeface="Urbanist"/>
               </a:rPr>
               <a:t>A point of difference</a:t>
             </a:r>
@@ -11997,8 +11673,6 @@
                   <a:srgbClr val="64707A"/>
                 </a:solidFill>
                 <a:latin typeface="Urbanist"/>
-                <a:ea typeface="Urbanist"/>
-                <a:cs typeface="Urbanist"/>
               </a:rPr>
               <a:t>A second point</a:t>
             </a:r>
@@ -12064,8 +11738,6 @@
                   <a:srgbClr val="64707A"/>
                 </a:solidFill>
                 <a:latin typeface="Urbanist"/>
-                <a:ea typeface="Urbanist"/>
-                <a:cs typeface="Urbanist"/>
               </a:rPr>
               <a:t>A third point</a:t>
             </a:r>
@@ -12131,8 +11803,6 @@
                   <a:srgbClr val="64707A"/>
                 </a:solidFill>
                 <a:latin typeface="Urbanist"/>
-                <a:ea typeface="Urbanist"/>
-                <a:cs typeface="Urbanist"/>
               </a:rPr>
               <a:t>When to choose it</a:t>
             </a:r>
@@ -12168,8 +11838,6 @@
                   <a:srgbClr val="64707A"/>
                 </a:solidFill>
                 <a:latin typeface="League Spartan Medium"/>
-                <a:ea typeface="League Spartan Medium"/>
-                <a:cs typeface="League Spartan Medium"/>
               </a:rPr>
               <a:t>12</a:t>
             </a:r>
@@ -12205,8 +11873,6 @@
                   <a:srgbClr val="64707A"/>
                 </a:solidFill>
                 <a:latin typeface="League Spartan"/>
-                <a:ea typeface="League Spartan"/>
-                <a:cs typeface="League Spartan"/>
               </a:rPr>
               <a:t>COMPARISON</a:t>
             </a:r>
@@ -12320,8 +11986,6 @@
                   <a:srgbClr val="FFFFFF"/>
                 </a:solidFill>
                 <a:latin typeface="League Spartan SemiBold"/>
-                <a:ea typeface="League Spartan SemiBold"/>
-                <a:cs typeface="League Spartan SemiBold"/>
               </a:rPr>
               <a:t>07</a:t>
             </a:r>
@@ -12357,8 +12021,6 @@
                   <a:srgbClr val="101A2B"/>
                 </a:solidFill>
                 <a:latin typeface="League Spartan SemiBold"/>
-                <a:ea typeface="League Spartan SemiBold"/>
-                <a:cs typeface="League Spartan SemiBold"/>
               </a:rPr>
               <a:t>PART 01 · THE COMPANY</a:t>
             </a:r>
@@ -12448,8 +12110,6 @@
                   <a:srgbClr val="EC2326"/>
                 </a:solidFill>
                 <a:latin typeface="Poppins SemiBold"/>
-                <a:ea typeface="Poppins SemiBold"/>
-                <a:cs typeface="Poppins SemiBold"/>
               </a:rPr>
               <a:t>How the company is run</a:t>
             </a:r>
@@ -12485,8 +12145,6 @@
                   <a:srgbClr val="64707A"/>
                 </a:solidFill>
                 <a:latin typeface="Urbanist"/>
-                <a:ea typeface="Urbanist"/>
-                <a:cs typeface="Urbanist"/>
               </a:rPr>
               <a:t>Board, executive and the four lines.</a:t>
             </a:r>
@@ -12552,8 +12210,6 @@
                   <a:srgbClr val="EC2326"/>
                 </a:solidFill>
                 <a:latin typeface="League Spartan SemiBold"/>
-                <a:ea typeface="League Spartan SemiBold"/>
-                <a:cs typeface="League Spartan SemiBold"/>
               </a:rPr>
               <a:t>CHAIRMAN</a:t>
             </a:r>
@@ -12589,8 +12245,6 @@
                   <a:srgbClr val="FFFFFF"/>
                 </a:solidFill>
                 <a:latin typeface="Poppins SemiBold"/>
-                <a:ea typeface="Poppins SemiBold"/>
-                <a:cs typeface="Poppins SemiBold"/>
               </a:rPr>
               <a:t>Board of Directors</a:t>
             </a:r>
@@ -12626,8 +12280,6 @@
                   <a:srgbClr val="96A2B2"/>
                 </a:solidFill>
                 <a:latin typeface="Urbanist"/>
-                <a:ea typeface="Urbanist"/>
-                <a:cs typeface="Urbanist"/>
               </a:rPr>
               <a:t>Governance and strategy</a:t>
             </a:r>
@@ -12873,8 +12525,6 @@
                   <a:srgbClr val="EC2326"/>
                 </a:solidFill>
                 <a:latin typeface="League Spartan SemiBold"/>
-                <a:ea typeface="League Spartan SemiBold"/>
-                <a:cs typeface="League Spartan SemiBold"/>
               </a:rPr>
               <a:t>MANAGING DIRECTOR</a:t>
             </a:r>
@@ -12910,8 +12560,6 @@
                   <a:srgbClr val="101A2B"/>
                 </a:solidFill>
                 <a:latin typeface="Poppins SemiBold"/>
-                <a:ea typeface="Poppins SemiBold"/>
-                <a:cs typeface="Poppins SemiBold"/>
               </a:rPr>
               <a:t>Group MD</a:t>
             </a:r>
@@ -12947,8 +12595,6 @@
                   <a:srgbClr val="64707A"/>
                 </a:solidFill>
                 <a:latin typeface="Urbanist"/>
-                <a:ea typeface="Urbanist"/>
-                <a:cs typeface="Urbanist"/>
               </a:rPr>
               <a:t>Operations and delivery</a:t>
             </a:r>
@@ -13014,8 +12660,6 @@
                   <a:srgbClr val="EC2326"/>
                 </a:solidFill>
                 <a:latin typeface="League Spartan SemiBold"/>
-                <a:ea typeface="League Spartan SemiBold"/>
-                <a:cs typeface="League Spartan SemiBold"/>
               </a:rPr>
               <a:t>DIRECTOR</a:t>
             </a:r>
@@ -13051,8 +12695,6 @@
                   <a:srgbClr val="101A2B"/>
                 </a:solidFill>
                 <a:latin typeface="Poppins SemiBold"/>
-                <a:ea typeface="Poppins SemiBold"/>
-                <a:cs typeface="Poppins SemiBold"/>
               </a:rPr>
               <a:t>Engineering</a:t>
             </a:r>
@@ -13088,8 +12730,6 @@
                   <a:srgbClr val="64707A"/>
                 </a:solidFill>
                 <a:latin typeface="Urbanist"/>
-                <a:ea typeface="Urbanist"/>
-                <a:cs typeface="Urbanist"/>
               </a:rPr>
               <a:t>Design and method</a:t>
             </a:r>
@@ -13155,8 +12795,6 @@
                   <a:srgbClr val="EC2326"/>
                 </a:solidFill>
                 <a:latin typeface="League Spartan SemiBold"/>
-                <a:ea typeface="League Spartan SemiBold"/>
-                <a:cs typeface="League Spartan SemiBold"/>
               </a:rPr>
               <a:t>DIRECTOR</a:t>
             </a:r>
@@ -13192,8 +12830,6 @@
                   <a:srgbClr val="101A2B"/>
                 </a:solidFill>
                 <a:latin typeface="Poppins SemiBold"/>
-                <a:ea typeface="Poppins SemiBold"/>
-                <a:cs typeface="Poppins SemiBold"/>
               </a:rPr>
               <a:t>Commercial</a:t>
             </a:r>
@@ -13229,8 +12865,6 @@
                   <a:srgbClr val="64707A"/>
                 </a:solidFill>
                 <a:latin typeface="Urbanist"/>
-                <a:ea typeface="Urbanist"/>
-                <a:cs typeface="Urbanist"/>
               </a:rPr>
               <a:t>Cost, contracts and risk</a:t>
             </a:r>
@@ -13296,8 +12930,6 @@
                   <a:srgbClr val="EC2326"/>
                 </a:solidFill>
                 <a:latin typeface="League Spartan SemiBold"/>
-                <a:ea typeface="League Spartan SemiBold"/>
-                <a:cs typeface="League Spartan SemiBold"/>
               </a:rPr>
               <a:t>DIRECTOR</a:t>
             </a:r>
@@ -13333,8 +12965,6 @@
                   <a:srgbClr val="101A2B"/>
                 </a:solidFill>
                 <a:latin typeface="Poppins SemiBold"/>
-                <a:ea typeface="Poppins SemiBold"/>
-                <a:cs typeface="Poppins SemiBold"/>
               </a:rPr>
               <a:t>HSE and Quality</a:t>
             </a:r>
@@ -13370,8 +13000,6 @@
                   <a:srgbClr val="64707A"/>
                 </a:solidFill>
                 <a:latin typeface="Urbanist"/>
-                <a:ea typeface="Urbanist"/>
-                <a:cs typeface="Urbanist"/>
               </a:rPr>
               <a:t>Standards and audit</a:t>
             </a:r>
@@ -13407,8 +13035,6 @@
                   <a:srgbClr val="64707A"/>
                 </a:solidFill>
                 <a:latin typeface="League Spartan Medium"/>
-                <a:ea typeface="League Spartan Medium"/>
-                <a:cs typeface="League Spartan Medium"/>
               </a:rPr>
               <a:t>13</a:t>
             </a:r>
@@ -13444,8 +13070,6 @@
                   <a:srgbClr val="64707A"/>
                 </a:solidFill>
                 <a:latin typeface="League Spartan"/>
-                <a:ea typeface="League Spartan"/>
-                <a:cs typeface="League Spartan"/>
               </a:rPr>
               <a:t>ORG CHART · REPORTING TREE</a:t>
             </a:r>
@@ -13559,8 +13183,6 @@
                   <a:srgbClr val="FFFFFF"/>
                 </a:solidFill>
                 <a:latin typeface="League Spartan SemiBold"/>
-                <a:ea typeface="League Spartan SemiBold"/>
-                <a:cs typeface="League Spartan SemiBold"/>
               </a:rPr>
               <a:t>07</a:t>
             </a:r>
@@ -13596,8 +13218,6 @@
                   <a:srgbClr val="101A2B"/>
                 </a:solidFill>
                 <a:latin typeface="League Spartan SemiBold"/>
-                <a:ea typeface="League Spartan SemiBold"/>
-                <a:cs typeface="League Spartan SemiBold"/>
               </a:rPr>
               <a:t>SECTION NAME</a:t>
             </a:r>
@@ -13687,8 +13307,6 @@
                   <a:srgbClr val="64707A"/>
                 </a:solidFill>
                 <a:latin typeface="Poppins SemiBold"/>
-                <a:ea typeface="Poppins SemiBold"/>
-                <a:cs typeface="Poppins SemiBold"/>
               </a:rPr>
               <a:t>Page title</a:t>
             </a:r>
@@ -13724,8 +13342,6 @@
                   <a:srgbClr val="64707A"/>
                 </a:solidFill>
                 <a:latin typeface="Urbanist"/>
-                <a:ea typeface="Urbanist"/>
-                <a:cs typeface="Urbanist"/>
               </a:rPr>
               <a:t>One line under it saying what the page is for.</a:t>
             </a:r>
@@ -13791,8 +13407,6 @@
                   <a:srgbClr val="64707A"/>
                 </a:solidFill>
                 <a:latin typeface="League Spartan SemiBold"/>
-                <a:ea typeface="League Spartan SemiBold"/>
-                <a:cs typeface="League Spartan SemiBold"/>
               </a:rPr>
               <a:t>ROLE</a:t>
             </a:r>
@@ -13828,8 +13442,6 @@
                   <a:srgbClr val="64707A"/>
                 </a:solidFill>
                 <a:latin typeface="Poppins SemiBold"/>
-                <a:ea typeface="Poppins SemiBold"/>
-                <a:cs typeface="Poppins SemiBold"/>
               </a:rPr>
               <a:t>Name or function</a:t>
             </a:r>
@@ -13865,8 +13477,6 @@
                   <a:srgbClr val="64707A"/>
                 </a:solidFill>
                 <a:latin typeface="Urbanist"/>
-                <a:ea typeface="Urbanist"/>
-                <a:cs typeface="Urbanist"/>
               </a:rPr>
               <a:t>What they are accountable for</a:t>
             </a:r>
@@ -14112,8 +13722,6 @@
                   <a:srgbClr val="64707A"/>
                 </a:solidFill>
                 <a:latin typeface="League Spartan SemiBold"/>
-                <a:ea typeface="League Spartan SemiBold"/>
-                <a:cs typeface="League Spartan SemiBold"/>
               </a:rPr>
               <a:t>ROLE</a:t>
             </a:r>
@@ -14149,8 +13757,6 @@
                   <a:srgbClr val="64707A"/>
                 </a:solidFill>
                 <a:latin typeface="Poppins SemiBold"/>
-                <a:ea typeface="Poppins SemiBold"/>
-                <a:cs typeface="Poppins SemiBold"/>
               </a:rPr>
               <a:t>Name or function</a:t>
             </a:r>
@@ -14186,8 +13792,6 @@
                   <a:srgbClr val="64707A"/>
                 </a:solidFill>
                 <a:latin typeface="Urbanist"/>
-                <a:ea typeface="Urbanist"/>
-                <a:cs typeface="Urbanist"/>
               </a:rPr>
               <a:t>One line</a:t>
             </a:r>
@@ -14253,8 +13857,6 @@
                   <a:srgbClr val="64707A"/>
                 </a:solidFill>
                 <a:latin typeface="League Spartan SemiBold"/>
-                <a:ea typeface="League Spartan SemiBold"/>
-                <a:cs typeface="League Spartan SemiBold"/>
               </a:rPr>
               <a:t>ROLE</a:t>
             </a:r>
@@ -14290,8 +13892,6 @@
                   <a:srgbClr val="64707A"/>
                 </a:solidFill>
                 <a:latin typeface="Poppins SemiBold"/>
-                <a:ea typeface="Poppins SemiBold"/>
-                <a:cs typeface="Poppins SemiBold"/>
               </a:rPr>
               <a:t>Name or function</a:t>
             </a:r>
@@ -14327,8 +13927,6 @@
                   <a:srgbClr val="64707A"/>
                 </a:solidFill>
                 <a:latin typeface="Urbanist"/>
-                <a:ea typeface="Urbanist"/>
-                <a:cs typeface="Urbanist"/>
               </a:rPr>
               <a:t>One line</a:t>
             </a:r>
@@ -14394,8 +13992,6 @@
                   <a:srgbClr val="64707A"/>
                 </a:solidFill>
                 <a:latin typeface="League Spartan SemiBold"/>
-                <a:ea typeface="League Spartan SemiBold"/>
-                <a:cs typeface="League Spartan SemiBold"/>
               </a:rPr>
               <a:t>ROLE</a:t>
             </a:r>
@@ -14431,8 +14027,6 @@
                   <a:srgbClr val="64707A"/>
                 </a:solidFill>
                 <a:latin typeface="Poppins SemiBold"/>
-                <a:ea typeface="Poppins SemiBold"/>
-                <a:cs typeface="Poppins SemiBold"/>
               </a:rPr>
               <a:t>Name or function</a:t>
             </a:r>
@@ -14468,8 +14062,6 @@
                   <a:srgbClr val="64707A"/>
                 </a:solidFill>
                 <a:latin typeface="Urbanist"/>
-                <a:ea typeface="Urbanist"/>
-                <a:cs typeface="Urbanist"/>
               </a:rPr>
               <a:t>One line</a:t>
             </a:r>
@@ -14535,8 +14127,6 @@
                   <a:srgbClr val="64707A"/>
                 </a:solidFill>
                 <a:latin typeface="League Spartan SemiBold"/>
-                <a:ea typeface="League Spartan SemiBold"/>
-                <a:cs typeface="League Spartan SemiBold"/>
               </a:rPr>
               <a:t>ROLE</a:t>
             </a:r>
@@ -14572,8 +14162,6 @@
                   <a:srgbClr val="64707A"/>
                 </a:solidFill>
                 <a:latin typeface="Poppins SemiBold"/>
-                <a:ea typeface="Poppins SemiBold"/>
-                <a:cs typeface="Poppins SemiBold"/>
               </a:rPr>
               <a:t>Name or function</a:t>
             </a:r>
@@ -14609,8 +14197,6 @@
                   <a:srgbClr val="64707A"/>
                 </a:solidFill>
                 <a:latin typeface="Urbanist"/>
-                <a:ea typeface="Urbanist"/>
-                <a:cs typeface="Urbanist"/>
               </a:rPr>
               <a:t>One line</a:t>
             </a:r>
@@ -14646,8 +14232,6 @@
                   <a:srgbClr val="64707A"/>
                 </a:solidFill>
                 <a:latin typeface="League Spartan Medium"/>
-                <a:ea typeface="League Spartan Medium"/>
-                <a:cs typeface="League Spartan Medium"/>
               </a:rPr>
               <a:t>14</a:t>
             </a:r>
@@ -14683,8 +14267,6 @@
                   <a:srgbClr val="64707A"/>
                 </a:solidFill>
                 <a:latin typeface="League Spartan"/>
-                <a:ea typeface="League Spartan"/>
-                <a:cs typeface="League Spartan"/>
               </a:rPr>
               <a:t>ORG CHART · REPORTING TREE</a:t>
             </a:r>
@@ -14798,8 +14380,6 @@
                   <a:srgbClr val="FFFFFF"/>
                 </a:solidFill>
                 <a:latin typeface="League Spartan SemiBold"/>
-                <a:ea typeface="League Spartan SemiBold"/>
-                <a:cs typeface="League Spartan SemiBold"/>
               </a:rPr>
               <a:t>08</a:t>
             </a:r>
@@ -14835,8 +14415,6 @@
                   <a:srgbClr val="101A2B"/>
                 </a:solidFill>
                 <a:latin typeface="League Spartan SemiBold"/>
-                <a:ea typeface="League Spartan SemiBold"/>
-                <a:cs typeface="League Spartan SemiBold"/>
               </a:rPr>
               <a:t>PART 01 · THE COMPANY</a:t>
             </a:r>
@@ -14926,8 +14504,6 @@
                   <a:srgbClr val="EC2326"/>
                 </a:solidFill>
                 <a:latin typeface="Poppins SemiBold"/>
-                <a:ea typeface="Poppins SemiBold"/>
-                <a:cs typeface="Poppins SemiBold"/>
               </a:rPr>
               <a:t>The project team</a:t>
             </a:r>
@@ -14963,8 +14539,6 @@
                   <a:srgbClr val="64707A"/>
                 </a:solidFill>
                 <a:latin typeface="Urbanist"/>
-                <a:ea typeface="Urbanist"/>
-                <a:cs typeface="Urbanist"/>
               </a:rPr>
               <a:t>Who the client deals with, day to day.</a:t>
             </a:r>
@@ -15086,8 +14660,6 @@
                   <a:srgbClr val="EC2326"/>
                 </a:solidFill>
                 <a:latin typeface="League Spartan SemiBold"/>
-                <a:ea typeface="League Spartan SemiBold"/>
-                <a:cs typeface="League Spartan SemiBold"/>
               </a:rPr>
               <a:t>PROJECT DIRECTOR</a:t>
             </a:r>
@@ -15123,8 +14695,6 @@
                   <a:srgbClr val="101A2B"/>
                 </a:solidFill>
                 <a:latin typeface="Poppins SemiBold"/>
-                <a:ea typeface="Poppins SemiBold"/>
-                <a:cs typeface="Poppins SemiBold"/>
               </a:rPr>
               <a:t>Name here</a:t>
             </a:r>
@@ -15160,8 +14730,6 @@
                   <a:srgbClr val="64707A"/>
                 </a:solidFill>
                 <a:latin typeface="Urbanist"/>
-                <a:ea typeface="Urbanist"/>
-                <a:cs typeface="Urbanist"/>
               </a:rPr>
               <a:t>Single point of contact</a:t>
             </a:r>
@@ -15283,8 +14851,6 @@
                   <a:srgbClr val="EC2326"/>
                 </a:solidFill>
                 <a:latin typeface="League Spartan SemiBold"/>
-                <a:ea typeface="League Spartan SemiBold"/>
-                <a:cs typeface="League Spartan SemiBold"/>
               </a:rPr>
               <a:t>CONSTRUCTION MANAGER</a:t>
             </a:r>
@@ -15320,8 +14886,6 @@
                   <a:srgbClr val="101A2B"/>
                 </a:solidFill>
                 <a:latin typeface="Poppins SemiBold"/>
-                <a:ea typeface="Poppins SemiBold"/>
-                <a:cs typeface="Poppins SemiBold"/>
               </a:rPr>
               <a:t>Name here</a:t>
             </a:r>
@@ -15357,8 +14921,6 @@
                   <a:srgbClr val="64707A"/>
                 </a:solidFill>
                 <a:latin typeface="Urbanist"/>
-                <a:ea typeface="Urbanist"/>
-                <a:cs typeface="Urbanist"/>
               </a:rPr>
               <a:t>Site and programme</a:t>
             </a:r>
@@ -15480,8 +15042,6 @@
                   <a:srgbClr val="EC2326"/>
                 </a:solidFill>
                 <a:latin typeface="League Spartan SemiBold"/>
-                <a:ea typeface="League Spartan SemiBold"/>
-                <a:cs typeface="League Spartan SemiBold"/>
               </a:rPr>
               <a:t>LEAD ENGINEER</a:t>
             </a:r>
@@ -15517,8 +15077,6 @@
                   <a:srgbClr val="101A2B"/>
                 </a:solidFill>
                 <a:latin typeface="Poppins SemiBold"/>
-                <a:ea typeface="Poppins SemiBold"/>
-                <a:cs typeface="Poppins SemiBold"/>
               </a:rPr>
               <a:t>Name here</a:t>
             </a:r>
@@ -15554,8 +15112,6 @@
                   <a:srgbClr val="64707A"/>
                 </a:solidFill>
                 <a:latin typeface="Urbanist"/>
-                <a:ea typeface="Urbanist"/>
-                <a:cs typeface="Urbanist"/>
               </a:rPr>
               <a:t>Design and method</a:t>
             </a:r>
@@ -15677,8 +15233,6 @@
                   <a:srgbClr val="EC2326"/>
                 </a:solidFill>
                 <a:latin typeface="League Spartan SemiBold"/>
-                <a:ea typeface="League Spartan SemiBold"/>
-                <a:cs typeface="League Spartan SemiBold"/>
               </a:rPr>
               <a:t>QA / QC MANAGER</a:t>
             </a:r>
@@ -15714,8 +15268,6 @@
                   <a:srgbClr val="101A2B"/>
                 </a:solidFill>
                 <a:latin typeface="Poppins SemiBold"/>
-                <a:ea typeface="Poppins SemiBold"/>
-                <a:cs typeface="Poppins SemiBold"/>
               </a:rPr>
               <a:t>Name here</a:t>
             </a:r>
@@ -15751,8 +15303,6 @@
                   <a:srgbClr val="64707A"/>
                 </a:solidFill>
                 <a:latin typeface="Urbanist"/>
-                <a:ea typeface="Urbanist"/>
-                <a:cs typeface="Urbanist"/>
               </a:rPr>
               <a:t>Inspection and records</a:t>
             </a:r>
@@ -15874,8 +15424,6 @@
                   <a:srgbClr val="EC2326"/>
                 </a:solidFill>
                 <a:latin typeface="League Spartan SemiBold"/>
-                <a:ea typeface="League Spartan SemiBold"/>
-                <a:cs typeface="League Spartan SemiBold"/>
               </a:rPr>
               <a:t>HSE MANAGER</a:t>
             </a:r>
@@ -15911,8 +15459,6 @@
                   <a:srgbClr val="101A2B"/>
                 </a:solidFill>
                 <a:latin typeface="Poppins SemiBold"/>
-                <a:ea typeface="Poppins SemiBold"/>
-                <a:cs typeface="Poppins SemiBold"/>
               </a:rPr>
               <a:t>Name here</a:t>
             </a:r>
@@ -15948,8 +15494,6 @@
                   <a:srgbClr val="64707A"/>
                 </a:solidFill>
                 <a:latin typeface="Urbanist"/>
-                <a:ea typeface="Urbanist"/>
-                <a:cs typeface="Urbanist"/>
               </a:rPr>
               <a:t>Safety on every shift</a:t>
             </a:r>
@@ -15985,8 +15529,6 @@
                   <a:srgbClr val="64707A"/>
                 </a:solidFill>
                 <a:latin typeface="League Spartan Medium"/>
-                <a:ea typeface="League Spartan Medium"/>
-                <a:cs typeface="League Spartan Medium"/>
               </a:rPr>
               <a:t>15</a:t>
             </a:r>
@@ -16022,8 +15564,6 @@
                   <a:srgbClr val="64707A"/>
                 </a:solidFill>
                 <a:latin typeface="League Spartan"/>
-                <a:ea typeface="League Spartan"/>
-                <a:cs typeface="League Spartan"/>
               </a:rPr>
               <a:t>ORG CHART · FLAT TEAM BAND</a:t>
             </a:r>
@@ -16137,8 +15677,6 @@
                   <a:srgbClr val="FFFFFF"/>
                 </a:solidFill>
                 <a:latin typeface="League Spartan SemiBold"/>
-                <a:ea typeface="League Spartan SemiBold"/>
-                <a:cs typeface="League Spartan SemiBold"/>
               </a:rPr>
               <a:t>08</a:t>
             </a:r>
@@ -16174,8 +15712,6 @@
                   <a:srgbClr val="101A2B"/>
                 </a:solidFill>
                 <a:latin typeface="League Spartan SemiBold"/>
-                <a:ea typeface="League Spartan SemiBold"/>
-                <a:cs typeface="League Spartan SemiBold"/>
               </a:rPr>
               <a:t>SECTION NAME</a:t>
             </a:r>
@@ -16265,8 +15801,6 @@
                   <a:srgbClr val="64707A"/>
                 </a:solidFill>
                 <a:latin typeface="Poppins SemiBold"/>
-                <a:ea typeface="Poppins SemiBold"/>
-                <a:cs typeface="Poppins SemiBold"/>
               </a:rPr>
               <a:t>Page title</a:t>
             </a:r>
@@ -16302,8 +15836,6 @@
                   <a:srgbClr val="64707A"/>
                 </a:solidFill>
                 <a:latin typeface="Urbanist"/>
-                <a:ea typeface="Urbanist"/>
-                <a:cs typeface="Urbanist"/>
               </a:rPr>
               <a:t>One line under it saying what the page is for.</a:t>
             </a:r>
@@ -16425,8 +15957,6 @@
                   <a:srgbClr val="64707A"/>
                 </a:solidFill>
                 <a:latin typeface="League Spartan SemiBold"/>
-                <a:ea typeface="League Spartan SemiBold"/>
-                <a:cs typeface="League Spartan SemiBold"/>
               </a:rPr>
               <a:t>ROLE</a:t>
             </a:r>
@@ -16462,8 +15992,6 @@
                   <a:srgbClr val="64707A"/>
                 </a:solidFill>
                 <a:latin typeface="Poppins SemiBold"/>
-                <a:ea typeface="Poppins SemiBold"/>
-                <a:cs typeface="Poppins SemiBold"/>
               </a:rPr>
               <a:t>Name</a:t>
             </a:r>
@@ -16499,8 +16027,6 @@
                   <a:srgbClr val="64707A"/>
                 </a:solidFill>
                 <a:latin typeface="Urbanist"/>
-                <a:ea typeface="Urbanist"/>
-                <a:cs typeface="Urbanist"/>
               </a:rPr>
               <a:t>What they own</a:t>
             </a:r>
@@ -16622,8 +16148,6 @@
                   <a:srgbClr val="64707A"/>
                 </a:solidFill>
                 <a:latin typeface="League Spartan SemiBold"/>
-                <a:ea typeface="League Spartan SemiBold"/>
-                <a:cs typeface="League Spartan SemiBold"/>
               </a:rPr>
               <a:t>ROLE</a:t>
             </a:r>
@@ -16659,8 +16183,6 @@
                   <a:srgbClr val="64707A"/>
                 </a:solidFill>
                 <a:latin typeface="Poppins SemiBold"/>
-                <a:ea typeface="Poppins SemiBold"/>
-                <a:cs typeface="Poppins SemiBold"/>
               </a:rPr>
               <a:t>Name</a:t>
             </a:r>
@@ -16696,8 +16218,6 @@
                   <a:srgbClr val="64707A"/>
                 </a:solidFill>
                 <a:latin typeface="Urbanist"/>
-                <a:ea typeface="Urbanist"/>
-                <a:cs typeface="Urbanist"/>
               </a:rPr>
               <a:t>What they own</a:t>
             </a:r>
@@ -16819,8 +16339,6 @@
                   <a:srgbClr val="64707A"/>
                 </a:solidFill>
                 <a:latin typeface="League Spartan SemiBold"/>
-                <a:ea typeface="League Spartan SemiBold"/>
-                <a:cs typeface="League Spartan SemiBold"/>
               </a:rPr>
               <a:t>ROLE</a:t>
             </a:r>
@@ -16856,8 +16374,6 @@
                   <a:srgbClr val="64707A"/>
                 </a:solidFill>
                 <a:latin typeface="Poppins SemiBold"/>
-                <a:ea typeface="Poppins SemiBold"/>
-                <a:cs typeface="Poppins SemiBold"/>
               </a:rPr>
               <a:t>Name</a:t>
             </a:r>
@@ -16893,8 +16409,6 @@
                   <a:srgbClr val="64707A"/>
                 </a:solidFill>
                 <a:latin typeface="Urbanist"/>
-                <a:ea typeface="Urbanist"/>
-                <a:cs typeface="Urbanist"/>
               </a:rPr>
               <a:t>What they own</a:t>
             </a:r>
@@ -17016,8 +16530,6 @@
                   <a:srgbClr val="64707A"/>
                 </a:solidFill>
                 <a:latin typeface="League Spartan SemiBold"/>
-                <a:ea typeface="League Spartan SemiBold"/>
-                <a:cs typeface="League Spartan SemiBold"/>
               </a:rPr>
               <a:t>ROLE</a:t>
             </a:r>
@@ -17053,8 +16565,6 @@
                   <a:srgbClr val="64707A"/>
                 </a:solidFill>
                 <a:latin typeface="Poppins SemiBold"/>
-                <a:ea typeface="Poppins SemiBold"/>
-                <a:cs typeface="Poppins SemiBold"/>
               </a:rPr>
               <a:t>Name</a:t>
             </a:r>
@@ -17090,8 +16600,6 @@
                   <a:srgbClr val="64707A"/>
                 </a:solidFill>
                 <a:latin typeface="Urbanist"/>
-                <a:ea typeface="Urbanist"/>
-                <a:cs typeface="Urbanist"/>
               </a:rPr>
               <a:t>What they own</a:t>
             </a:r>
@@ -17213,8 +16721,6 @@
                   <a:srgbClr val="64707A"/>
                 </a:solidFill>
                 <a:latin typeface="League Spartan SemiBold"/>
-                <a:ea typeface="League Spartan SemiBold"/>
-                <a:cs typeface="League Spartan SemiBold"/>
               </a:rPr>
               <a:t>ROLE</a:t>
             </a:r>
@@ -17250,8 +16756,6 @@
                   <a:srgbClr val="64707A"/>
                 </a:solidFill>
                 <a:latin typeface="Poppins SemiBold"/>
-                <a:ea typeface="Poppins SemiBold"/>
-                <a:cs typeface="Poppins SemiBold"/>
               </a:rPr>
               <a:t>Name</a:t>
             </a:r>
@@ -17287,8 +16791,6 @@
                   <a:srgbClr val="64707A"/>
                 </a:solidFill>
                 <a:latin typeface="Urbanist"/>
-                <a:ea typeface="Urbanist"/>
-                <a:cs typeface="Urbanist"/>
               </a:rPr>
               <a:t>What they own</a:t>
             </a:r>
@@ -17324,8 +16826,6 @@
                   <a:srgbClr val="64707A"/>
                 </a:solidFill>
                 <a:latin typeface="League Spartan Medium"/>
-                <a:ea typeface="League Spartan Medium"/>
-                <a:cs typeface="League Spartan Medium"/>
               </a:rPr>
               <a:t>16</a:t>
             </a:r>
@@ -17361,8 +16861,6 @@
                   <a:srgbClr val="64707A"/>
                 </a:solidFill>
                 <a:latin typeface="League Spartan"/>
-                <a:ea typeface="League Spartan"/>
-                <a:cs typeface="League Spartan"/>
               </a:rPr>
               <a:t>ORG CHART · FLAT TEAM BAND</a:t>
             </a:r>
@@ -17476,8 +16974,6 @@
                   <a:srgbClr val="FFFFFF"/>
                 </a:solidFill>
                 <a:latin typeface="League Spartan SemiBold"/>
-                <a:ea typeface="League Spartan SemiBold"/>
-                <a:cs typeface="League Spartan SemiBold"/>
               </a:rPr>
               <a:t>09</a:t>
             </a:r>
@@ -17513,8 +17009,6 @@
                   <a:srgbClr val="101A2B"/>
                 </a:solidFill>
                 <a:latin typeface="League Spartan SemiBold"/>
-                <a:ea typeface="League Spartan SemiBold"/>
-                <a:cs typeface="League Spartan SemiBold"/>
               </a:rPr>
               <a:t>PART 01 · THE COMPANY</a:t>
             </a:r>
@@ -17604,8 +17098,6 @@
                   <a:srgbClr val="EC2326"/>
                 </a:solidFill>
                 <a:latin typeface="Poppins SemiBold"/>
-                <a:ea typeface="Poppins SemiBold"/>
-                <a:cs typeface="Poppins SemiBold"/>
               </a:rPr>
               <a:t>The group</a:t>
             </a:r>
@@ -17641,8 +17133,6 @@
                   <a:srgbClr val="64707A"/>
                 </a:solidFill>
                 <a:latin typeface="Urbanist"/>
-                <a:ea typeface="Urbanist"/>
-                <a:cs typeface="Urbanist"/>
               </a:rPr>
               <a:t>One holding company, four operating businesses.</a:t>
             </a:r>
@@ -17708,8 +17198,6 @@
                   <a:srgbClr val="EC2326"/>
                 </a:solidFill>
                 <a:latin typeface="League Spartan SemiBold"/>
-                <a:ea typeface="League Spartan SemiBold"/>
-                <a:cs typeface="League Spartan SemiBold"/>
               </a:rPr>
               <a:t>HOLDING</a:t>
             </a:r>
@@ -17745,8 +17233,6 @@
                   <a:srgbClr val="FFFFFF"/>
                 </a:solidFill>
                 <a:latin typeface="Poppins SemiBold"/>
-                <a:ea typeface="Poppins SemiBold"/>
-                <a:cs typeface="Poppins SemiBold"/>
               </a:rPr>
               <a:t>IAQ Technology International Sdn Bhd</a:t>
             </a:r>
@@ -17782,8 +17268,6 @@
                   <a:srgbClr val="96A2B2"/>
                 </a:solidFill>
                 <a:latin typeface="Urbanist"/>
-                <a:ea typeface="Urbanist"/>
-                <a:cs typeface="Urbanist"/>
               </a:rPr>
               <a:t>Incorporated 1995 · 200001031412</a:t>
             </a:r>
@@ -18029,8 +17513,6 @@
                   <a:srgbClr val="EC2326"/>
                 </a:solidFill>
                 <a:latin typeface="League Spartan SemiBold"/>
-                <a:ea typeface="League Spartan SemiBold"/>
-                <a:cs typeface="League Spartan SemiBold"/>
               </a:rPr>
               <a:t>COMPANY 01</a:t>
             </a:r>
@@ -18066,8 +17548,6 @@
                   <a:srgbClr val="101A2B"/>
                 </a:solidFill>
                 <a:latin typeface="Poppins SemiBold"/>
-                <a:ea typeface="Poppins SemiBold"/>
-                <a:cs typeface="Poppins SemiBold"/>
               </a:rPr>
               <a:t>IAQ Solutions</a:t>
             </a:r>
@@ -18133,8 +17613,6 @@
                   <a:srgbClr val="64707A"/>
                 </a:solidFill>
                 <a:latin typeface="Urbanist"/>
-                <a:ea typeface="Urbanist"/>
-                <a:cs typeface="Urbanist"/>
               </a:rPr>
               <a:t>Cleanroom systems</a:t>
             </a:r>
@@ -18200,8 +17678,6 @@
                   <a:srgbClr val="64707A"/>
                 </a:solidFill>
                 <a:latin typeface="Urbanist"/>
-                <a:ea typeface="Urbanist"/>
-                <a:cs typeface="Urbanist"/>
               </a:rPr>
               <a:t>CSA and MEP</a:t>
             </a:r>
@@ -18267,8 +17743,6 @@
                   <a:srgbClr val="64707A"/>
                 </a:solidFill>
                 <a:latin typeface="Urbanist"/>
-                <a:ea typeface="Urbanist"/>
-                <a:cs typeface="Urbanist"/>
               </a:rPr>
               <a:t>Malaysia and Singapore</a:t>
             </a:r>
@@ -18334,8 +17808,6 @@
                   <a:srgbClr val="EC2326"/>
                 </a:solidFill>
                 <a:latin typeface="League Spartan SemiBold"/>
-                <a:ea typeface="League Spartan SemiBold"/>
-                <a:cs typeface="League Spartan SemiBold"/>
               </a:rPr>
               <a:t>COMPANY 02</a:t>
             </a:r>
@@ -18371,8 +17843,6 @@
                   <a:srgbClr val="101A2B"/>
                 </a:solidFill>
                 <a:latin typeface="Poppins SemiBold"/>
-                <a:ea typeface="Poppins SemiBold"/>
-                <a:cs typeface="Poppins SemiBold"/>
               </a:rPr>
               <a:t>IAQ Utility Solutions</a:t>
             </a:r>
@@ -18438,8 +17908,6 @@
                   <a:srgbClr val="64707A"/>
                 </a:solidFill>
                 <a:latin typeface="Urbanist"/>
-                <a:ea typeface="Urbanist"/>
-                <a:cs typeface="Urbanist"/>
               </a:rPr>
               <a:t>Process utilities</a:t>
             </a:r>
@@ -18505,8 +17973,6 @@
                   <a:srgbClr val="64707A"/>
                 </a:solidFill>
                 <a:latin typeface="Urbanist"/>
-                <a:ea typeface="Urbanist"/>
-                <a:cs typeface="Urbanist"/>
               </a:rPr>
               <a:t>Tool hookup</a:t>
             </a:r>
@@ -18572,8 +18038,6 @@
                   <a:srgbClr val="64707A"/>
                 </a:solidFill>
                 <a:latin typeface="Urbanist"/>
-                <a:ea typeface="Urbanist"/>
-                <a:cs typeface="Urbanist"/>
               </a:rPr>
               <a:t>EPCM packages</a:t>
             </a:r>
@@ -18639,8 +18103,6 @@
                   <a:srgbClr val="EC2326"/>
                 </a:solidFill>
                 <a:latin typeface="League Spartan SemiBold"/>
-                <a:ea typeface="League Spartan SemiBold"/>
-                <a:cs typeface="League Spartan SemiBold"/>
               </a:rPr>
               <a:t>COMPANY 03</a:t>
             </a:r>
@@ -18676,8 +18138,6 @@
                   <a:srgbClr val="101A2B"/>
                 </a:solidFill>
                 <a:latin typeface="Poppins SemiBold"/>
-                <a:ea typeface="Poppins SemiBold"/>
-                <a:cs typeface="Poppins SemiBold"/>
               </a:rPr>
               <a:t>IAQ Energy Facility Management</a:t>
             </a:r>
@@ -18743,8 +18203,6 @@
                   <a:srgbClr val="64707A"/>
                 </a:solidFill>
                 <a:latin typeface="Urbanist"/>
-                <a:ea typeface="Urbanist"/>
-                <a:cs typeface="Urbanist"/>
               </a:rPr>
               <a:t>District cooling</a:t>
             </a:r>
@@ -18810,8 +18268,6 @@
                   <a:srgbClr val="64707A"/>
                 </a:solidFill>
                 <a:latin typeface="Urbanist"/>
-                <a:ea typeface="Urbanist"/>
-                <a:cs typeface="Urbanist"/>
               </a:rPr>
               <a:t>Chiller plants</a:t>
             </a:r>
@@ -18877,8 +18333,6 @@
                   <a:srgbClr val="64707A"/>
                 </a:solidFill>
                 <a:latin typeface="Urbanist"/>
-                <a:ea typeface="Urbanist"/>
-                <a:cs typeface="Urbanist"/>
               </a:rPr>
               <a:t>Operate and maintain</a:t>
             </a:r>
@@ -18944,8 +18398,6 @@
                   <a:srgbClr val="EC2326"/>
                 </a:solidFill>
                 <a:latin typeface="League Spartan SemiBold"/>
-                <a:ea typeface="League Spartan SemiBold"/>
-                <a:cs typeface="League Spartan SemiBold"/>
               </a:rPr>
               <a:t>COMPANY 04</a:t>
             </a:r>
@@ -18981,8 +18433,6 @@
                   <a:srgbClr val="101A2B"/>
                 </a:solidFill>
                 <a:latin typeface="Poppins SemiBold"/>
-                <a:ea typeface="Poppins SemiBold"/>
-                <a:cs typeface="Poppins SemiBold"/>
               </a:rPr>
               <a:t>IAQ Europe</a:t>
             </a:r>
@@ -19048,8 +18498,6 @@
                   <a:srgbClr val="64707A"/>
                 </a:solidFill>
                 <a:latin typeface="Urbanist"/>
-                <a:ea typeface="Urbanist"/>
-                <a:cs typeface="Urbanist"/>
               </a:rPr>
               <a:t>Gigafactories</a:t>
             </a:r>
@@ -19115,8 +18563,6 @@
                   <a:srgbClr val="64707A"/>
                 </a:solidFill>
                 <a:latin typeface="Urbanist"/>
-                <a:ea typeface="Urbanist"/>
-                <a:cs typeface="Urbanist"/>
               </a:rPr>
               <a:t>Wafer fabs</a:t>
             </a:r>
@@ -19182,8 +18628,6 @@
                   <a:srgbClr val="64707A"/>
                 </a:solidFill>
                 <a:latin typeface="Urbanist"/>
-                <a:ea typeface="Urbanist"/>
-                <a:cs typeface="Urbanist"/>
               </a:rPr>
               <a:t>Sweden, Germany, France</a:t>
             </a:r>
@@ -19219,8 +18663,6 @@
                   <a:srgbClr val="64707A"/>
                 </a:solidFill>
                 <a:latin typeface="League Spartan Medium"/>
-                <a:ea typeface="League Spartan Medium"/>
-                <a:cs typeface="League Spartan Medium"/>
               </a:rPr>
               <a:t>17</a:t>
             </a:r>
@@ -19256,8 +18698,6 @@
                   <a:srgbClr val="64707A"/>
                 </a:solidFill>
                 <a:latin typeface="League Spartan"/>
-                <a:ea typeface="League Spartan"/>
-                <a:cs typeface="League Spartan"/>
               </a:rPr>
               <a:t>ORG CHART · GROUP STRUCTURE</a:t>
             </a:r>
@@ -19371,8 +18811,6 @@
                   <a:srgbClr val="FFFFFF"/>
                 </a:solidFill>
                 <a:latin typeface="League Spartan SemiBold"/>
-                <a:ea typeface="League Spartan SemiBold"/>
-                <a:cs typeface="League Spartan SemiBold"/>
               </a:rPr>
               <a:t>09</a:t>
             </a:r>
@@ -19408,8 +18846,6 @@
                   <a:srgbClr val="101A2B"/>
                 </a:solidFill>
                 <a:latin typeface="League Spartan SemiBold"/>
-                <a:ea typeface="League Spartan SemiBold"/>
-                <a:cs typeface="League Spartan SemiBold"/>
               </a:rPr>
               <a:t>SECTION NAME</a:t>
             </a:r>
@@ -19499,8 +18935,6 @@
                   <a:srgbClr val="64707A"/>
                 </a:solidFill>
                 <a:latin typeface="Poppins SemiBold"/>
-                <a:ea typeface="Poppins SemiBold"/>
-                <a:cs typeface="Poppins SemiBold"/>
               </a:rPr>
               <a:t>Page title</a:t>
             </a:r>
@@ -19536,8 +18970,6 @@
                   <a:srgbClr val="64707A"/>
                 </a:solidFill>
                 <a:latin typeface="Urbanist"/>
-                <a:ea typeface="Urbanist"/>
-                <a:cs typeface="Urbanist"/>
               </a:rPr>
               <a:t>One line under it saying what the page is for.</a:t>
             </a:r>
@@ -19603,8 +19035,6 @@
                   <a:srgbClr val="64707A"/>
                 </a:solidFill>
                 <a:latin typeface="League Spartan SemiBold"/>
-                <a:ea typeface="League Spartan SemiBold"/>
-                <a:cs typeface="League Spartan SemiBold"/>
               </a:rPr>
               <a:t>HOLDING</a:t>
             </a:r>
@@ -19640,8 +19070,6 @@
                   <a:srgbClr val="64707A"/>
                 </a:solidFill>
                 <a:latin typeface="Poppins SemiBold"/>
-                <a:ea typeface="Poppins SemiBold"/>
-                <a:cs typeface="Poppins SemiBold"/>
               </a:rPr>
               <a:t>Parent company name</a:t>
             </a:r>
@@ -19677,8 +19105,6 @@
                   <a:srgbClr val="64707A"/>
                 </a:solidFill>
                 <a:latin typeface="Urbanist"/>
-                <a:ea typeface="Urbanist"/>
-                <a:cs typeface="Urbanist"/>
               </a:rPr>
               <a:t>Incorporated 0000</a:t>
             </a:r>
@@ -19924,8 +19350,6 @@
                   <a:srgbClr val="64707A"/>
                 </a:solidFill>
                 <a:latin typeface="League Spartan SemiBold"/>
-                <a:ea typeface="League Spartan SemiBold"/>
-                <a:cs typeface="League Spartan SemiBold"/>
               </a:rPr>
               <a:t>COMPANY 00</a:t>
             </a:r>
@@ -19961,8 +19385,6 @@
                   <a:srgbClr val="64707A"/>
                 </a:solidFill>
                 <a:latin typeface="Poppins SemiBold"/>
-                <a:ea typeface="Poppins SemiBold"/>
-                <a:cs typeface="Poppins SemiBold"/>
               </a:rPr>
               <a:t>Business name</a:t>
             </a:r>
@@ -20028,8 +19450,6 @@
                   <a:srgbClr val="64707A"/>
                 </a:solidFill>
                 <a:latin typeface="Urbanist"/>
-                <a:ea typeface="Urbanist"/>
-                <a:cs typeface="Urbanist"/>
               </a:rPr>
               <a:t>What it does</a:t>
             </a:r>
@@ -20095,8 +19515,6 @@
                   <a:srgbClr val="64707A"/>
                 </a:solidFill>
                 <a:latin typeface="Urbanist"/>
-                <a:ea typeface="Urbanist"/>
-                <a:cs typeface="Urbanist"/>
               </a:rPr>
               <a:t>What it does</a:t>
             </a:r>
@@ -20162,8 +19580,6 @@
                   <a:srgbClr val="64707A"/>
                 </a:solidFill>
                 <a:latin typeface="Urbanist"/>
-                <a:ea typeface="Urbanist"/>
-                <a:cs typeface="Urbanist"/>
               </a:rPr>
               <a:t>Where it works</a:t>
             </a:r>
@@ -20229,8 +19645,6 @@
                   <a:srgbClr val="64707A"/>
                 </a:solidFill>
                 <a:latin typeface="League Spartan SemiBold"/>
-                <a:ea typeface="League Spartan SemiBold"/>
-                <a:cs typeface="League Spartan SemiBold"/>
               </a:rPr>
               <a:t>COMPANY 00</a:t>
             </a:r>
@@ -20266,8 +19680,6 @@
                   <a:srgbClr val="64707A"/>
                 </a:solidFill>
                 <a:latin typeface="Poppins SemiBold"/>
-                <a:ea typeface="Poppins SemiBold"/>
-                <a:cs typeface="Poppins SemiBold"/>
               </a:rPr>
               <a:t>Business name</a:t>
             </a:r>
@@ -20333,8 +19745,6 @@
                   <a:srgbClr val="64707A"/>
                 </a:solidFill>
                 <a:latin typeface="Urbanist"/>
-                <a:ea typeface="Urbanist"/>
-                <a:cs typeface="Urbanist"/>
               </a:rPr>
               <a:t>What it does</a:t>
             </a:r>
@@ -20400,8 +19810,6 @@
                   <a:srgbClr val="64707A"/>
                 </a:solidFill>
                 <a:latin typeface="Urbanist"/>
-                <a:ea typeface="Urbanist"/>
-                <a:cs typeface="Urbanist"/>
               </a:rPr>
               <a:t>What it does</a:t>
             </a:r>
@@ -20467,8 +19875,6 @@
                   <a:srgbClr val="64707A"/>
                 </a:solidFill>
                 <a:latin typeface="Urbanist"/>
-                <a:ea typeface="Urbanist"/>
-                <a:cs typeface="Urbanist"/>
               </a:rPr>
               <a:t>Where it works</a:t>
             </a:r>
@@ -20534,8 +19940,6 @@
                   <a:srgbClr val="64707A"/>
                 </a:solidFill>
                 <a:latin typeface="League Spartan SemiBold"/>
-                <a:ea typeface="League Spartan SemiBold"/>
-                <a:cs typeface="League Spartan SemiBold"/>
               </a:rPr>
               <a:t>COMPANY 00</a:t>
             </a:r>
@@ -20571,8 +19975,6 @@
                   <a:srgbClr val="64707A"/>
                 </a:solidFill>
                 <a:latin typeface="Poppins SemiBold"/>
-                <a:ea typeface="Poppins SemiBold"/>
-                <a:cs typeface="Poppins SemiBold"/>
               </a:rPr>
               <a:t>Business name</a:t>
             </a:r>
@@ -20638,8 +20040,6 @@
                   <a:srgbClr val="64707A"/>
                 </a:solidFill>
                 <a:latin typeface="Urbanist"/>
-                <a:ea typeface="Urbanist"/>
-                <a:cs typeface="Urbanist"/>
               </a:rPr>
               <a:t>What it does</a:t>
             </a:r>
@@ -20705,8 +20105,6 @@
                   <a:srgbClr val="64707A"/>
                 </a:solidFill>
                 <a:latin typeface="Urbanist"/>
-                <a:ea typeface="Urbanist"/>
-                <a:cs typeface="Urbanist"/>
               </a:rPr>
               <a:t>What it does</a:t>
             </a:r>
@@ -20772,8 +20170,6 @@
                   <a:srgbClr val="64707A"/>
                 </a:solidFill>
                 <a:latin typeface="Urbanist"/>
-                <a:ea typeface="Urbanist"/>
-                <a:cs typeface="Urbanist"/>
               </a:rPr>
               <a:t>Where it works</a:t>
             </a:r>
@@ -20839,8 +20235,6 @@
                   <a:srgbClr val="64707A"/>
                 </a:solidFill>
                 <a:latin typeface="League Spartan SemiBold"/>
-                <a:ea typeface="League Spartan SemiBold"/>
-                <a:cs typeface="League Spartan SemiBold"/>
               </a:rPr>
               <a:t>COMPANY 00</a:t>
             </a:r>
@@ -20876,8 +20270,6 @@
                   <a:srgbClr val="64707A"/>
                 </a:solidFill>
                 <a:latin typeface="Poppins SemiBold"/>
-                <a:ea typeface="Poppins SemiBold"/>
-                <a:cs typeface="Poppins SemiBold"/>
               </a:rPr>
               <a:t>Business name</a:t>
             </a:r>
@@ -20943,8 +20335,6 @@
                   <a:srgbClr val="64707A"/>
                 </a:solidFill>
                 <a:latin typeface="Urbanist"/>
-                <a:ea typeface="Urbanist"/>
-                <a:cs typeface="Urbanist"/>
               </a:rPr>
               <a:t>What it does</a:t>
             </a:r>
@@ -21010,8 +20400,6 @@
                   <a:srgbClr val="64707A"/>
                 </a:solidFill>
                 <a:latin typeface="Urbanist"/>
-                <a:ea typeface="Urbanist"/>
-                <a:cs typeface="Urbanist"/>
               </a:rPr>
               <a:t>What it does</a:t>
             </a:r>
@@ -21077,8 +20465,6 @@
                   <a:srgbClr val="64707A"/>
                 </a:solidFill>
                 <a:latin typeface="Urbanist"/>
-                <a:ea typeface="Urbanist"/>
-                <a:cs typeface="Urbanist"/>
               </a:rPr>
               <a:t>Where it works</a:t>
             </a:r>
@@ -21114,8 +20500,6 @@
                   <a:srgbClr val="64707A"/>
                 </a:solidFill>
                 <a:latin typeface="League Spartan Medium"/>
-                <a:ea typeface="League Spartan Medium"/>
-                <a:cs typeface="League Spartan Medium"/>
               </a:rPr>
               <a:t>18</a:t>
             </a:r>
@@ -21151,8 +20535,6 @@
                   <a:srgbClr val="64707A"/>
                 </a:solidFill>
                 <a:latin typeface="League Spartan"/>
-                <a:ea typeface="League Spartan"/>
-                <a:cs typeface="League Spartan"/>
               </a:rPr>
               <a:t>ORG CHART · GROUP STRUCTURE</a:t>
             </a:r>
@@ -21386,8 +20768,6 @@
                   <a:srgbClr val="FFFFFF"/>
                 </a:solidFill>
                 <a:latin typeface="League Spartan SemiBold"/>
-                <a:ea typeface="League Spartan SemiBold"/>
-                <a:cs typeface="League Spartan SemiBold"/>
               </a:rPr>
               <a:t>01</a:t>
             </a:r>
@@ -21423,8 +20803,6 @@
                   <a:srgbClr val="E7EBF0"/>
                 </a:solidFill>
                 <a:latin typeface="League Spartan SemiBold"/>
-                <a:ea typeface="League Spartan SemiBold"/>
-                <a:cs typeface="League Spartan SemiBold"/>
               </a:rPr>
               <a:t>IAQ TECHNOLOGY INTERNATIONAL SDN BHD</a:t>
             </a:r>
@@ -21484,8 +20862,6 @@
                   <a:srgbClr val="EC2326"/>
                 </a:solidFill>
                 <a:latin typeface="League Spartan SemiBold"/>
-                <a:ea typeface="League Spartan SemiBold"/>
-                <a:cs typeface="League Spartan SemiBold"/>
               </a:rPr>
               <a:t>CAPABILITY STATEMENT · 2026</a:t>
             </a:r>
@@ -21525,8 +20901,6 @@
                   <a:srgbClr val="FFFFFF"/>
                 </a:solidFill>
                 <a:latin typeface="Poppins SemiBold"/>
-                <a:ea typeface="Poppins SemiBold"/>
-                <a:cs typeface="Poppins SemiBold"/>
               </a:rPr>
               <a:t>Engineering the facilities advanced industry runs on.</a:t>
             </a:r>
@@ -21566,8 +20940,6 @@
                   <a:srgbClr val="E7EBF0"/>
                 </a:solidFill>
                 <a:latin typeface="Urbanist"/>
-                <a:ea typeface="Urbanist"/>
-                <a:cs typeface="Urbanist"/>
               </a:rPr>
               <a:t>Cleanroom critical delivery for semiconductor, data centre, EV battery, pharmaceutical and energy.</a:t>
             </a:r>
@@ -21603,8 +20975,6 @@
                   <a:srgbClr val="96A2B2"/>
                 </a:solidFill>
                 <a:latin typeface="League Spartan"/>
-                <a:ea typeface="League Spartan"/>
-                <a:cs typeface="League Spartan"/>
               </a:rPr>
               <a:t>PREPARED FOR · CLIENT NAME · OCTOBER 2026</a:t>
             </a:r>
@@ -21640,8 +21010,6 @@
                   <a:srgbClr val="96A2B2"/>
                 </a:solidFill>
                 <a:latin typeface="League Spartan Medium"/>
-                <a:ea typeface="League Spartan Medium"/>
-                <a:cs typeface="League Spartan Medium"/>
               </a:rPr>
               <a:t>01</a:t>
             </a:r>
@@ -21677,8 +21045,6 @@
                   <a:srgbClr val="96A2B2"/>
                 </a:solidFill>
                 <a:latin typeface="League Spartan"/>
-                <a:ea typeface="League Spartan"/>
-                <a:cs typeface="League Spartan"/>
               </a:rPr>
               <a:t>TITLE</a:t>
             </a:r>
@@ -21792,8 +21158,6 @@
                   <a:srgbClr val="FFFFFF"/>
                 </a:solidFill>
                 <a:latin typeface="League Spartan SemiBold"/>
-                <a:ea typeface="League Spartan SemiBold"/>
-                <a:cs typeface="League Spartan SemiBold"/>
               </a:rPr>
               <a:t>10</a:t>
             </a:r>
@@ -21829,8 +21193,6 @@
                   <a:srgbClr val="101A2B"/>
                 </a:solidFill>
                 <a:latin typeface="League Spartan SemiBold"/>
-                <a:ea typeface="League Spartan SemiBold"/>
-                <a:cs typeface="League Spartan SemiBold"/>
               </a:rPr>
               <a:t>PART 01 · THE COMPANY</a:t>
             </a:r>
@@ -21920,8 +21282,6 @@
                   <a:srgbClr val="EC2326"/>
                 </a:solidFill>
                 <a:latin typeface="Poppins SemiBold"/>
-                <a:ea typeface="Poppins SemiBold"/>
-                <a:cs typeface="Poppins SemiBold"/>
               </a:rPr>
               <a:t>How a package is delivered</a:t>
             </a:r>
@@ -21957,8 +21317,6 @@
                   <a:srgbClr val="64707A"/>
                 </a:solidFill>
                 <a:latin typeface="Urbanist"/>
-                <a:ea typeface="Urbanist"/>
-                <a:cs typeface="Urbanist"/>
               </a:rPr>
               <a:t>Five stages, one accountability.</a:t>
             </a:r>
@@ -22054,8 +21412,6 @@
                   <a:srgbClr val="64707A"/>
                 </a:solidFill>
                 <a:latin typeface="League Spartan SemiBold"/>
-                <a:ea typeface="League Spartan SemiBold"/>
-                <a:cs typeface="League Spartan SemiBold"/>
               </a:rPr>
               <a:t>THE DELIVERY CYCLE</a:t>
             </a:r>
@@ -22091,8 +21447,6 @@
                   <a:srgbClr val="64707A"/>
                 </a:solidFill>
                 <a:latin typeface="Urbanist"/>
-                <a:ea typeface="Urbanist"/>
-                <a:cs typeface="Urbanist"/>
               </a:rPr>
               <a:t>Every package runs the same five stages, whoever holds the contract.</a:t>
             </a:r>
@@ -22246,8 +21600,6 @@
                   <a:srgbClr val="FFFFFF"/>
                 </a:solidFill>
                 <a:latin typeface="League Spartan SemiBold"/>
-                <a:ea typeface="League Spartan SemiBold"/>
-                <a:cs typeface="League Spartan SemiBold"/>
               </a:rPr>
               <a:t>01</a:t>
             </a:r>
@@ -22283,8 +21635,6 @@
                   <a:srgbClr val="101A2B"/>
                 </a:solidFill>
                 <a:latin typeface="Poppins SemiBold"/>
-                <a:ea typeface="Poppins SemiBold"/>
-                <a:cs typeface="Poppins SemiBold"/>
               </a:rPr>
               <a:t>Engineering</a:t>
             </a:r>
@@ -22320,8 +21670,6 @@
                   <a:srgbClr val="64707A"/>
                 </a:solidFill>
                 <a:latin typeface="Urbanist"/>
-                <a:ea typeface="Urbanist"/>
-                <a:cs typeface="Urbanist"/>
               </a:rPr>
               <a:t>Design and consultation</a:t>
             </a:r>
@@ -22475,8 +21823,6 @@
                   <a:srgbClr val="FFFFFF"/>
                 </a:solidFill>
                 <a:latin typeface="League Spartan SemiBold"/>
-                <a:ea typeface="League Spartan SemiBold"/>
-                <a:cs typeface="League Spartan SemiBold"/>
               </a:rPr>
               <a:t>02</a:t>
             </a:r>
@@ -22512,8 +21858,6 @@
                   <a:srgbClr val="101A2B"/>
                 </a:solidFill>
                 <a:latin typeface="Poppins SemiBold"/>
-                <a:ea typeface="Poppins SemiBold"/>
-                <a:cs typeface="Poppins SemiBold"/>
               </a:rPr>
               <a:t>Procurement</a:t>
             </a:r>
@@ -22549,8 +21893,6 @@
                   <a:srgbClr val="64707A"/>
                 </a:solidFill>
                 <a:latin typeface="Urbanist"/>
-                <a:ea typeface="Urbanist"/>
-                <a:cs typeface="Urbanist"/>
               </a:rPr>
               <a:t>Sourcing and supply chain</a:t>
             </a:r>
@@ -22704,8 +22046,6 @@
                   <a:srgbClr val="FFFFFF"/>
                 </a:solidFill>
                 <a:latin typeface="League Spartan SemiBold"/>
-                <a:ea typeface="League Spartan SemiBold"/>
-                <a:cs typeface="League Spartan SemiBold"/>
               </a:rPr>
               <a:t>03</a:t>
             </a:r>
@@ -22741,8 +22081,6 @@
                   <a:srgbClr val="101A2B"/>
                 </a:solidFill>
                 <a:latin typeface="Poppins SemiBold"/>
-                <a:ea typeface="Poppins SemiBold"/>
-                <a:cs typeface="Poppins SemiBold"/>
               </a:rPr>
               <a:t>Construction</a:t>
             </a:r>
@@ -22778,8 +22116,6 @@
                   <a:srgbClr val="64707A"/>
                 </a:solidFill>
                 <a:latin typeface="Urbanist"/>
-                <a:ea typeface="Urbanist"/>
-                <a:cs typeface="Urbanist"/>
               </a:rPr>
               <a:t>Self-performed packages</a:t>
             </a:r>
@@ -22933,8 +22269,6 @@
                   <a:srgbClr val="FFFFFF"/>
                 </a:solidFill>
                 <a:latin typeface="League Spartan SemiBold"/>
-                <a:ea typeface="League Spartan SemiBold"/>
-                <a:cs typeface="League Spartan SemiBold"/>
               </a:rPr>
               <a:t>04</a:t>
             </a:r>
@@ -22970,8 +22304,6 @@
                   <a:srgbClr val="101A2B"/>
                 </a:solidFill>
                 <a:latin typeface="Poppins SemiBold"/>
-                <a:ea typeface="Poppins SemiBold"/>
-                <a:cs typeface="Poppins SemiBold"/>
               </a:rPr>
               <a:t>Testing</a:t>
             </a:r>
@@ -23007,8 +22339,6 @@
                   <a:srgbClr val="64707A"/>
                 </a:solidFill>
                 <a:latin typeface="Urbanist"/>
-                <a:ea typeface="Urbanist"/>
-                <a:cs typeface="Urbanist"/>
               </a:rPr>
               <a:t>Commissioning and handover</a:t>
             </a:r>
@@ -23130,8 +22460,6 @@
                   <a:srgbClr val="FFFFFF"/>
                 </a:solidFill>
                 <a:latin typeface="League Spartan SemiBold"/>
-                <a:ea typeface="League Spartan SemiBold"/>
-                <a:cs typeface="League Spartan SemiBold"/>
               </a:rPr>
               <a:t>05</a:t>
             </a:r>
@@ -23167,8 +22495,6 @@
                   <a:srgbClr val="101A2B"/>
                 </a:solidFill>
                 <a:latin typeface="Poppins SemiBold"/>
-                <a:ea typeface="Poppins SemiBold"/>
-                <a:cs typeface="Poppins SemiBold"/>
               </a:rPr>
               <a:t>Maintenance</a:t>
             </a:r>
@@ -23204,8 +22530,6 @@
                   <a:srgbClr val="64707A"/>
                 </a:solidFill>
                 <a:latin typeface="Urbanist"/>
-                <a:ea typeface="Urbanist"/>
-                <a:cs typeface="Urbanist"/>
               </a:rPr>
               <a:t>Operate, service, optimise</a:t>
             </a:r>
@@ -23241,8 +22565,6 @@
                   <a:srgbClr val="64707A"/>
                 </a:solidFill>
                 <a:latin typeface="League Spartan Medium"/>
-                <a:ea typeface="League Spartan Medium"/>
-                <a:cs typeface="League Spartan Medium"/>
               </a:rPr>
               <a:t>19</a:t>
             </a:r>
@@ -23278,8 +22600,6 @@
                   <a:srgbClr val="64707A"/>
                 </a:solidFill>
                 <a:latin typeface="League Spartan"/>
-                <a:ea typeface="League Spartan"/>
-                <a:cs typeface="League Spartan"/>
               </a:rPr>
               <a:t>PROCESS</a:t>
             </a:r>
@@ -23393,8 +22713,6 @@
                   <a:srgbClr val="FFFFFF"/>
                 </a:solidFill>
                 <a:latin typeface="League Spartan SemiBold"/>
-                <a:ea typeface="League Spartan SemiBold"/>
-                <a:cs typeface="League Spartan SemiBold"/>
               </a:rPr>
               <a:t>10</a:t>
             </a:r>
@@ -23430,8 +22748,6 @@
                   <a:srgbClr val="101A2B"/>
                 </a:solidFill>
                 <a:latin typeface="League Spartan SemiBold"/>
-                <a:ea typeface="League Spartan SemiBold"/>
-                <a:cs typeface="League Spartan SemiBold"/>
               </a:rPr>
               <a:t>SECTION NAME</a:t>
             </a:r>
@@ -23521,8 +22837,6 @@
                   <a:srgbClr val="64707A"/>
                 </a:solidFill>
                 <a:latin typeface="Poppins SemiBold"/>
-                <a:ea typeface="Poppins SemiBold"/>
-                <a:cs typeface="Poppins SemiBold"/>
               </a:rPr>
               <a:t>Page title</a:t>
             </a:r>
@@ -23558,8 +22872,6 @@
                   <a:srgbClr val="64707A"/>
                 </a:solidFill>
                 <a:latin typeface="Urbanist"/>
-                <a:ea typeface="Urbanist"/>
-                <a:cs typeface="Urbanist"/>
               </a:rPr>
               <a:t>One line under it saying what the page is for.</a:t>
             </a:r>
@@ -23655,8 +22967,6 @@
                   <a:srgbClr val="64707A"/>
                 </a:solidFill>
                 <a:latin typeface="League Spartan SemiBold"/>
-                <a:ea typeface="League Spartan SemiBold"/>
-                <a:cs typeface="League Spartan SemiBold"/>
               </a:rPr>
               <a:t>PROCESS NAME</a:t>
             </a:r>
@@ -23692,8 +23002,6 @@
                   <a:srgbClr val="64707A"/>
                 </a:solidFill>
                 <a:latin typeface="Urbanist"/>
-                <a:ea typeface="Urbanist"/>
-                <a:cs typeface="Urbanist"/>
               </a:rPr>
               <a:t>One sentence saying what the process is and where it starts.</a:t>
             </a:r>
@@ -23847,8 +23155,6 @@
                   <a:srgbClr val="FFFFFF"/>
                 </a:solidFill>
                 <a:latin typeface="League Spartan SemiBold"/>
-                <a:ea typeface="League Spartan SemiBold"/>
-                <a:cs typeface="League Spartan SemiBold"/>
               </a:rPr>
               <a:t>01</a:t>
             </a:r>
@@ -23884,8 +23190,6 @@
                   <a:srgbClr val="64707A"/>
                 </a:solidFill>
                 <a:latin typeface="Poppins SemiBold"/>
-                <a:ea typeface="Poppins SemiBold"/>
-                <a:cs typeface="Poppins SemiBold"/>
               </a:rPr>
               <a:t>Stage name</a:t>
             </a:r>
@@ -23921,8 +23225,6 @@
                   <a:srgbClr val="64707A"/>
                 </a:solidFill>
                 <a:latin typeface="Urbanist"/>
-                <a:ea typeface="Urbanist"/>
-                <a:cs typeface="Urbanist"/>
               </a:rPr>
               <a:t>Three or four words</a:t>
             </a:r>
@@ -24076,8 +23378,6 @@
                   <a:srgbClr val="FFFFFF"/>
                 </a:solidFill>
                 <a:latin typeface="League Spartan SemiBold"/>
-                <a:ea typeface="League Spartan SemiBold"/>
-                <a:cs typeface="League Spartan SemiBold"/>
               </a:rPr>
               <a:t>02</a:t>
             </a:r>
@@ -24113,8 +23413,6 @@
                   <a:srgbClr val="64707A"/>
                 </a:solidFill>
                 <a:latin typeface="Poppins SemiBold"/>
-                <a:ea typeface="Poppins SemiBold"/>
-                <a:cs typeface="Poppins SemiBold"/>
               </a:rPr>
               <a:t>Stage name</a:t>
             </a:r>
@@ -24150,8 +23448,6 @@
                   <a:srgbClr val="64707A"/>
                 </a:solidFill>
                 <a:latin typeface="Urbanist"/>
-                <a:ea typeface="Urbanist"/>
-                <a:cs typeface="Urbanist"/>
               </a:rPr>
               <a:t>Three or four words</a:t>
             </a:r>
@@ -24305,8 +23601,6 @@
                   <a:srgbClr val="FFFFFF"/>
                 </a:solidFill>
                 <a:latin typeface="League Spartan SemiBold"/>
-                <a:ea typeface="League Spartan SemiBold"/>
-                <a:cs typeface="League Spartan SemiBold"/>
               </a:rPr>
               <a:t>03</a:t>
             </a:r>
@@ -24342,8 +23636,6 @@
                   <a:srgbClr val="64707A"/>
                 </a:solidFill>
                 <a:latin typeface="Poppins SemiBold"/>
-                <a:ea typeface="Poppins SemiBold"/>
-                <a:cs typeface="Poppins SemiBold"/>
               </a:rPr>
               <a:t>Stage name</a:t>
             </a:r>
@@ -24379,8 +23671,6 @@
                   <a:srgbClr val="64707A"/>
                 </a:solidFill>
                 <a:latin typeface="Urbanist"/>
-                <a:ea typeface="Urbanist"/>
-                <a:cs typeface="Urbanist"/>
               </a:rPr>
               <a:t>Three or four words</a:t>
             </a:r>
@@ -24534,8 +23824,6 @@
                   <a:srgbClr val="FFFFFF"/>
                 </a:solidFill>
                 <a:latin typeface="League Spartan SemiBold"/>
-                <a:ea typeface="League Spartan SemiBold"/>
-                <a:cs typeface="League Spartan SemiBold"/>
               </a:rPr>
               <a:t>04</a:t>
             </a:r>
@@ -24571,8 +23859,6 @@
                   <a:srgbClr val="64707A"/>
                 </a:solidFill>
                 <a:latin typeface="Poppins SemiBold"/>
-                <a:ea typeface="Poppins SemiBold"/>
-                <a:cs typeface="Poppins SemiBold"/>
               </a:rPr>
               <a:t>Stage name</a:t>
             </a:r>
@@ -24608,8 +23894,6 @@
                   <a:srgbClr val="64707A"/>
                 </a:solidFill>
                 <a:latin typeface="Urbanist"/>
-                <a:ea typeface="Urbanist"/>
-                <a:cs typeface="Urbanist"/>
               </a:rPr>
               <a:t>Three or four words</a:t>
             </a:r>
@@ -24731,8 +24015,6 @@
                   <a:srgbClr val="FFFFFF"/>
                 </a:solidFill>
                 <a:latin typeface="League Spartan SemiBold"/>
-                <a:ea typeface="League Spartan SemiBold"/>
-                <a:cs typeface="League Spartan SemiBold"/>
               </a:rPr>
               <a:t>05</a:t>
             </a:r>
@@ -24768,8 +24050,6 @@
                   <a:srgbClr val="64707A"/>
                 </a:solidFill>
                 <a:latin typeface="Poppins SemiBold"/>
-                <a:ea typeface="Poppins SemiBold"/>
-                <a:cs typeface="Poppins SemiBold"/>
               </a:rPr>
               <a:t>Stage name</a:t>
             </a:r>
@@ -24805,8 +24085,6 @@
                   <a:srgbClr val="64707A"/>
                 </a:solidFill>
                 <a:latin typeface="Urbanist"/>
-                <a:ea typeface="Urbanist"/>
-                <a:cs typeface="Urbanist"/>
               </a:rPr>
               <a:t>Three or four words</a:t>
             </a:r>
@@ -24842,8 +24120,6 @@
                   <a:srgbClr val="64707A"/>
                 </a:solidFill>
                 <a:latin typeface="League Spartan Medium"/>
-                <a:ea typeface="League Spartan Medium"/>
-                <a:cs typeface="League Spartan Medium"/>
               </a:rPr>
               <a:t>20</a:t>
             </a:r>
@@ -24879,8 +24155,6 @@
                   <a:srgbClr val="64707A"/>
                 </a:solidFill>
                 <a:latin typeface="League Spartan"/>
-                <a:ea typeface="League Spartan"/>
-                <a:cs typeface="League Spartan"/>
               </a:rPr>
               <a:t>PROCESS</a:t>
             </a:r>
@@ -24994,8 +24268,6 @@
                   <a:srgbClr val="FFFFFF"/>
                 </a:solidFill>
                 <a:latin typeface="League Spartan SemiBold"/>
-                <a:ea typeface="League Spartan SemiBold"/>
-                <a:cs typeface="League Spartan SemiBold"/>
               </a:rPr>
               <a:t>11</a:t>
             </a:r>
@@ -25031,8 +24303,6 @@
                   <a:srgbClr val="101A2B"/>
                 </a:solidFill>
                 <a:latin typeface="League Spartan SemiBold"/>
-                <a:ea typeface="League Spartan SemiBold"/>
-                <a:cs typeface="League Spartan SemiBold"/>
               </a:rPr>
               <a:t>PART 01 · THE COMPANY</a:t>
             </a:r>
@@ -25122,8 +24392,6 @@
                   <a:srgbClr val="EC2326"/>
                 </a:solidFill>
                 <a:latin typeface="Poppins SemiBold"/>
-                <a:ea typeface="Poppins SemiBold"/>
-                <a:cs typeface="Poppins SemiBold"/>
               </a:rPr>
               <a:t>Thirty-one years</a:t>
             </a:r>
@@ -25159,8 +24427,6 @@
                   <a:srgbClr val="64707A"/>
                 </a:solidFill>
                 <a:latin typeface="Urbanist"/>
-                <a:ea typeface="Urbanist"/>
-                <a:cs typeface="Urbanist"/>
               </a:rPr>
               <a:t>The turns that made the company.</a:t>
             </a:r>
@@ -25196,8 +24462,6 @@
                   <a:srgbClr val="101A2B"/>
                 </a:solidFill>
                 <a:latin typeface="Poppins SemiBold"/>
-                <a:ea typeface="Poppins SemiBold"/>
-                <a:cs typeface="Poppins SemiBold"/>
               </a:rPr>
               <a:t>Founded</a:t>
             </a:r>
@@ -25233,8 +24497,6 @@
                   <a:srgbClr val="64707A"/>
                 </a:solidFill>
                 <a:latin typeface="Urbanist"/>
-                <a:ea typeface="Urbanist"/>
-                <a:cs typeface="Urbanist"/>
               </a:rPr>
               <a:t>Incorporated as a cleanroom specialist</a:t>
             </a:r>
@@ -25270,8 +24532,6 @@
                   <a:srgbClr val="101A2B"/>
                 </a:solidFill>
                 <a:latin typeface="Poppins SemiBold"/>
-                <a:ea typeface="Poppins SemiBold"/>
-                <a:cs typeface="Poppins SemiBold"/>
               </a:rPr>
               <a:t>Largest DCC plant</a:t>
             </a:r>
@@ -25307,8 +24567,6 @@
                   <a:srgbClr val="64707A"/>
                 </a:solidFill>
                 <a:latin typeface="Urbanist"/>
-                <a:ea typeface="Urbanist"/>
-                <a:cs typeface="Urbanist"/>
               </a:rPr>
               <a:t>KLCC district cooling, a national first</a:t>
             </a:r>
@@ -25344,8 +24602,6 @@
                   <a:srgbClr val="101A2B"/>
                 </a:solidFill>
                 <a:latin typeface="Poppins SemiBold"/>
-                <a:ea typeface="Poppins SemiBold"/>
-                <a:cs typeface="Poppins SemiBold"/>
               </a:rPr>
               <a:t>Three continents</a:t>
             </a:r>
@@ -25381,8 +24637,6 @@
                   <a:srgbClr val="64707A"/>
                 </a:solidFill>
                 <a:latin typeface="Urbanist"/>
-                <a:ea typeface="Urbanist"/>
-                <a:cs typeface="Urbanist"/>
               </a:rPr>
               <a:t>India, the United States and Ireland open</a:t>
             </a:r>
@@ -25482,8 +24736,6 @@
                   <a:srgbClr val="EC2326"/>
                 </a:solidFill>
                 <a:latin typeface="League Spartan SemiBold"/>
-                <a:ea typeface="League Spartan SemiBold"/>
-                <a:cs typeface="League Spartan SemiBold"/>
               </a:rPr>
               <a:t>1995</a:t>
             </a:r>
@@ -25551,8 +24803,6 @@
                   <a:srgbClr val="EC2326"/>
                 </a:solidFill>
                 <a:latin typeface="League Spartan SemiBold"/>
-                <a:ea typeface="League Spartan SemiBold"/>
-                <a:cs typeface="League Spartan SemiBold"/>
               </a:rPr>
               <a:t>2008</a:t>
             </a:r>
@@ -25620,8 +24870,6 @@
                   <a:srgbClr val="EC2326"/>
                 </a:solidFill>
                 <a:latin typeface="League Spartan SemiBold"/>
-                <a:ea typeface="League Spartan SemiBold"/>
-                <a:cs typeface="League Spartan SemiBold"/>
               </a:rPr>
               <a:t>2016</a:t>
             </a:r>
@@ -25689,8 +24937,6 @@
                   <a:srgbClr val="EC2326"/>
                 </a:solidFill>
                 <a:latin typeface="League Spartan SemiBold"/>
-                <a:ea typeface="League Spartan SemiBold"/>
-                <a:cs typeface="League Spartan SemiBold"/>
               </a:rPr>
               <a:t>2021</a:t>
             </a:r>
@@ -25758,8 +25004,6 @@
                   <a:srgbClr val="EC2326"/>
                 </a:solidFill>
                 <a:latin typeface="League Spartan SemiBold"/>
-                <a:ea typeface="League Spartan SemiBold"/>
-                <a:cs typeface="League Spartan SemiBold"/>
               </a:rPr>
               <a:t>2026</a:t>
             </a:r>
@@ -25795,8 +25039,6 @@
                   <a:srgbClr val="101A2B"/>
                 </a:solidFill>
                 <a:latin typeface="Poppins SemiBold"/>
-                <a:ea typeface="Poppins SemiBold"/>
-                <a:cs typeface="Poppins SemiBold"/>
               </a:rPr>
               <a:t>Class 10 cleanroom</a:t>
             </a:r>
@@ -25832,8 +25074,6 @@
                   <a:srgbClr val="64707A"/>
                 </a:solidFill>
                 <a:latin typeface="Urbanist"/>
-                <a:ea typeface="Urbanist"/>
-                <a:cs typeface="Urbanist"/>
               </a:rPr>
               <a:t>Western Digital PJ, a first in the region</a:t>
             </a:r>
@@ -25869,8 +25109,6 @@
                   <a:srgbClr val="101A2B"/>
                 </a:solidFill>
                 <a:latin typeface="Poppins SemiBold"/>
-                <a:ea typeface="Poppins SemiBold"/>
-                <a:cs typeface="Poppins SemiBold"/>
               </a:rPr>
               <a:t>Four fab expansions</a:t>
             </a:r>
@@ -25906,8 +25144,6 @@
                   <a:srgbClr val="64707A"/>
                 </a:solidFill>
                 <a:latin typeface="Urbanist"/>
-                <a:ea typeface="Urbanist"/>
-                <a:cs typeface="Urbanist"/>
               </a:rPr>
               <a:t>SilTerra, Soitec, Infineon, Microsoft</a:t>
             </a:r>
@@ -25943,8 +25179,6 @@
                   <a:srgbClr val="64707A"/>
                 </a:solidFill>
                 <a:latin typeface="League Spartan Medium"/>
-                <a:ea typeface="League Spartan Medium"/>
-                <a:cs typeface="League Spartan Medium"/>
               </a:rPr>
               <a:t>21</a:t>
             </a:r>
@@ -25980,8 +25214,6 @@
                   <a:srgbClr val="64707A"/>
                 </a:solidFill>
                 <a:latin typeface="League Spartan"/>
-                <a:ea typeface="League Spartan"/>
-                <a:cs typeface="League Spartan"/>
               </a:rPr>
               <a:t>TIMELINE</a:t>
             </a:r>
@@ -26095,8 +25327,6 @@
                   <a:srgbClr val="FFFFFF"/>
                 </a:solidFill>
                 <a:latin typeface="League Spartan SemiBold"/>
-                <a:ea typeface="League Spartan SemiBold"/>
-                <a:cs typeface="League Spartan SemiBold"/>
               </a:rPr>
               <a:t>11</a:t>
             </a:r>
@@ -26132,8 +25362,6 @@
                   <a:srgbClr val="101A2B"/>
                 </a:solidFill>
                 <a:latin typeface="League Spartan SemiBold"/>
-                <a:ea typeface="League Spartan SemiBold"/>
-                <a:cs typeface="League Spartan SemiBold"/>
               </a:rPr>
               <a:t>SECTION NAME</a:t>
             </a:r>
@@ -26223,8 +25451,6 @@
                   <a:srgbClr val="64707A"/>
                 </a:solidFill>
                 <a:latin typeface="Poppins SemiBold"/>
-                <a:ea typeface="Poppins SemiBold"/>
-                <a:cs typeface="Poppins SemiBold"/>
               </a:rPr>
               <a:t>Page title</a:t>
             </a:r>
@@ -26260,8 +25486,6 @@
                   <a:srgbClr val="64707A"/>
                 </a:solidFill>
                 <a:latin typeface="Urbanist"/>
-                <a:ea typeface="Urbanist"/>
-                <a:cs typeface="Urbanist"/>
               </a:rPr>
               <a:t>One line under it saying what the page is for.</a:t>
             </a:r>
@@ -26297,8 +25521,6 @@
                   <a:srgbClr val="64707A"/>
                 </a:solidFill>
                 <a:latin typeface="Poppins SemiBold"/>
-                <a:ea typeface="Poppins SemiBold"/>
-                <a:cs typeface="Poppins SemiBold"/>
               </a:rPr>
               <a:t>Event</a:t>
             </a:r>
@@ -26334,8 +25556,6 @@
                   <a:srgbClr val="64707A"/>
                 </a:solidFill>
                 <a:latin typeface="Urbanist"/>
-                <a:ea typeface="Urbanist"/>
-                <a:cs typeface="Urbanist"/>
               </a:rPr>
               <a:t>One line on what happened</a:t>
             </a:r>
@@ -26371,8 +25591,6 @@
                   <a:srgbClr val="64707A"/>
                 </a:solidFill>
                 <a:latin typeface="Poppins SemiBold"/>
-                <a:ea typeface="Poppins SemiBold"/>
-                <a:cs typeface="Poppins SemiBold"/>
               </a:rPr>
               <a:t>Event</a:t>
             </a:r>
@@ -26408,8 +25626,6 @@
                   <a:srgbClr val="64707A"/>
                 </a:solidFill>
                 <a:latin typeface="Urbanist"/>
-                <a:ea typeface="Urbanist"/>
-                <a:cs typeface="Urbanist"/>
               </a:rPr>
               <a:t>One line on what happened</a:t>
             </a:r>
@@ -26445,8 +25661,6 @@
                   <a:srgbClr val="64707A"/>
                 </a:solidFill>
                 <a:latin typeface="Poppins SemiBold"/>
-                <a:ea typeface="Poppins SemiBold"/>
-                <a:cs typeface="Poppins SemiBold"/>
               </a:rPr>
               <a:t>Event</a:t>
             </a:r>
@@ -26482,8 +25696,6 @@
                   <a:srgbClr val="64707A"/>
                 </a:solidFill>
                 <a:latin typeface="Urbanist"/>
-                <a:ea typeface="Urbanist"/>
-                <a:cs typeface="Urbanist"/>
               </a:rPr>
               <a:t>One line on what happened</a:t>
             </a:r>
@@ -26583,8 +25795,6 @@
                   <a:srgbClr val="64707A"/>
                 </a:solidFill>
                 <a:latin typeface="League Spartan SemiBold"/>
-                <a:ea typeface="League Spartan SemiBold"/>
-                <a:cs typeface="League Spartan SemiBold"/>
               </a:rPr>
               <a:t>0000</a:t>
             </a:r>
@@ -26652,8 +25862,6 @@
                   <a:srgbClr val="64707A"/>
                 </a:solidFill>
                 <a:latin typeface="League Spartan SemiBold"/>
-                <a:ea typeface="League Spartan SemiBold"/>
-                <a:cs typeface="League Spartan SemiBold"/>
               </a:rPr>
               <a:t>0000</a:t>
             </a:r>
@@ -26721,8 +25929,6 @@
                   <a:srgbClr val="64707A"/>
                 </a:solidFill>
                 <a:latin typeface="League Spartan SemiBold"/>
-                <a:ea typeface="League Spartan SemiBold"/>
-                <a:cs typeface="League Spartan SemiBold"/>
               </a:rPr>
               <a:t>0000</a:t>
             </a:r>
@@ -26790,8 +25996,6 @@
                   <a:srgbClr val="64707A"/>
                 </a:solidFill>
                 <a:latin typeface="League Spartan SemiBold"/>
-                <a:ea typeface="League Spartan SemiBold"/>
-                <a:cs typeface="League Spartan SemiBold"/>
               </a:rPr>
               <a:t>0000</a:t>
             </a:r>
@@ -26859,8 +26063,6 @@
                   <a:srgbClr val="64707A"/>
                 </a:solidFill>
                 <a:latin typeface="League Spartan SemiBold"/>
-                <a:ea typeface="League Spartan SemiBold"/>
-                <a:cs typeface="League Spartan SemiBold"/>
               </a:rPr>
               <a:t>0000</a:t>
             </a:r>
@@ -26896,8 +26098,6 @@
                   <a:srgbClr val="64707A"/>
                 </a:solidFill>
                 <a:latin typeface="Poppins SemiBold"/>
-                <a:ea typeface="Poppins SemiBold"/>
-                <a:cs typeface="Poppins SemiBold"/>
               </a:rPr>
               <a:t>Event</a:t>
             </a:r>
@@ -26933,8 +26133,6 @@
                   <a:srgbClr val="64707A"/>
                 </a:solidFill>
                 <a:latin typeface="Urbanist"/>
-                <a:ea typeface="Urbanist"/>
-                <a:cs typeface="Urbanist"/>
               </a:rPr>
               <a:t>One line on what happened</a:t>
             </a:r>
@@ -26970,8 +26168,6 @@
                   <a:srgbClr val="64707A"/>
                 </a:solidFill>
                 <a:latin typeface="Poppins SemiBold"/>
-                <a:ea typeface="Poppins SemiBold"/>
-                <a:cs typeface="Poppins SemiBold"/>
               </a:rPr>
               <a:t>Event</a:t>
             </a:r>
@@ -27007,8 +26203,6 @@
                   <a:srgbClr val="64707A"/>
                 </a:solidFill>
                 <a:latin typeface="Urbanist"/>
-                <a:ea typeface="Urbanist"/>
-                <a:cs typeface="Urbanist"/>
               </a:rPr>
               <a:t>One line on what happened</a:t>
             </a:r>
@@ -27044,8 +26238,6 @@
                   <a:srgbClr val="64707A"/>
                 </a:solidFill>
                 <a:latin typeface="League Spartan Medium"/>
-                <a:ea typeface="League Spartan Medium"/>
-                <a:cs typeface="League Spartan Medium"/>
               </a:rPr>
               <a:t>22</a:t>
             </a:r>
@@ -27081,8 +26273,6 @@
                   <a:srgbClr val="64707A"/>
                 </a:solidFill>
                 <a:latin typeface="League Spartan"/>
-                <a:ea typeface="League Spartan"/>
-                <a:cs typeface="League Spartan"/>
               </a:rPr>
               <a:t>TIMELINE</a:t>
             </a:r>
@@ -27196,8 +26386,6 @@
                   <a:srgbClr val="FFFFFF"/>
                 </a:solidFill>
                 <a:latin typeface="League Spartan SemiBold"/>
-                <a:ea typeface="League Spartan SemiBold"/>
-                <a:cs typeface="League Spartan SemiBold"/>
               </a:rPr>
               <a:t>12</a:t>
             </a:r>
@@ -27233,8 +26421,6 @@
                   <a:srgbClr val="101A2B"/>
                 </a:solidFill>
                 <a:latin typeface="League Spartan SemiBold"/>
-                <a:ea typeface="League Spartan SemiBold"/>
-                <a:cs typeface="League Spartan SemiBold"/>
               </a:rPr>
               <a:t>PART 01 · THE COMPANY</a:t>
             </a:r>
@@ -27324,8 +26510,6 @@
                   <a:srgbClr val="EC2326"/>
                 </a:solidFill>
                 <a:latin typeface="Poppins SemiBold"/>
-                <a:ea typeface="Poppins SemiBold"/>
-                <a:cs typeface="Poppins SemiBold"/>
               </a:rPr>
               <a:t>What goes into the building</a:t>
             </a:r>
@@ -27361,8 +26545,6 @@
                   <a:srgbClr val="64707A"/>
                 </a:solidFill>
                 <a:latin typeface="Urbanist"/>
-                <a:ea typeface="Urbanist"/>
-                <a:cs typeface="Urbanist"/>
               </a:rPr>
               <a:t>Six systems, one model, one contract.</a:t>
             </a:r>
@@ -27484,8 +26666,6 @@
                   <a:srgbClr val="EC2326"/>
                 </a:solidFill>
                 <a:latin typeface="League Spartan SemiBold"/>
-                <a:ea typeface="League Spartan SemiBold"/>
-                <a:cs typeface="League Spartan SemiBold"/>
               </a:rPr>
               <a:t>01</a:t>
             </a:r>
@@ -27521,8 +26701,6 @@
                   <a:srgbClr val="101A2B"/>
                 </a:solidFill>
                 <a:latin typeface="Poppins SemiBold"/>
-                <a:ea typeface="Poppins SemiBold"/>
-                <a:cs typeface="Poppins SemiBold"/>
               </a:rPr>
               <a:t>Structure</a:t>
             </a:r>
@@ -27558,8 +26736,6 @@
                   <a:srgbClr val="64707A"/>
                 </a:solidFill>
                 <a:latin typeface="Urbanist"/>
-                <a:ea typeface="Urbanist"/>
-                <a:cs typeface="Urbanist"/>
               </a:rPr>
               <a:t>Greenfield and brownfield CSA</a:t>
             </a:r>
@@ -27681,8 +26857,6 @@
                   <a:srgbClr val="EC2326"/>
                 </a:solidFill>
                 <a:latin typeface="League Spartan SemiBold"/>
-                <a:ea typeface="League Spartan SemiBold"/>
-                <a:cs typeface="League Spartan SemiBold"/>
               </a:rPr>
               <a:t>02</a:t>
             </a:r>
@@ -27718,8 +26892,6 @@
                   <a:srgbClr val="101A2B"/>
                 </a:solidFill>
                 <a:latin typeface="Poppins SemiBold"/>
-                <a:ea typeface="Poppins SemiBold"/>
-                <a:cs typeface="Poppins SemiBold"/>
               </a:rPr>
               <a:t>Electrical</a:t>
             </a:r>
@@ -27755,8 +26927,6 @@
                   <a:srgbClr val="64707A"/>
                 </a:solidFill>
                 <a:latin typeface="Urbanist"/>
-                <a:ea typeface="Urbanist"/>
-                <a:cs typeface="Urbanist"/>
               </a:rPr>
               <a:t>Up to 33kV substations</a:t>
             </a:r>
@@ -27878,8 +27048,6 @@
                   <a:srgbClr val="EC2326"/>
                 </a:solidFill>
                 <a:latin typeface="League Spartan SemiBold"/>
-                <a:ea typeface="League Spartan SemiBold"/>
-                <a:cs typeface="League Spartan SemiBold"/>
               </a:rPr>
               <a:t>03</a:t>
             </a:r>
@@ -27915,8 +27083,6 @@
                   <a:srgbClr val="101A2B"/>
                 </a:solidFill>
                 <a:latin typeface="Poppins SemiBold"/>
-                <a:ea typeface="Poppins SemiBold"/>
-                <a:cs typeface="Poppins SemiBold"/>
               </a:rPr>
               <a:t>Cleanroom</a:t>
             </a:r>
@@ -27952,8 +27118,6 @@
                   <a:srgbClr val="64707A"/>
                 </a:solidFill>
                 <a:latin typeface="Urbanist"/>
-                <a:ea typeface="Urbanist"/>
-                <a:cs typeface="Urbanist"/>
               </a:rPr>
               <a:t>ISO 3 to ISO 8</a:t>
             </a:r>
@@ -28019,8 +27183,6 @@
                   <a:srgbClr val="64707A"/>
                 </a:solidFill>
                 <a:latin typeface="League Spartan SemiBold"/>
-                <a:ea typeface="League Spartan SemiBold"/>
-                <a:cs typeface="League Spartan SemiBold"/>
               </a:rPr>
               <a:t>ONE MODEL, SIX SYSTEMS</a:t>
             </a:r>
@@ -28084,8 +27246,6 @@
                   <a:srgbClr val="64707A"/>
                 </a:solidFill>
                 <a:latin typeface="Urbanist"/>
-                <a:ea typeface="Urbanist"/>
-                <a:cs typeface="Urbanist"/>
               </a:rPr>
               <a:t>Every system on this page is installed in the same building, by IAQ’s own crews, under one programme.</a:t>
             </a:r>
@@ -28207,8 +27367,6 @@
                   <a:srgbClr val="EC2326"/>
                 </a:solidFill>
                 <a:latin typeface="League Spartan SemiBold"/>
-                <a:ea typeface="League Spartan SemiBold"/>
-                <a:cs typeface="League Spartan SemiBold"/>
               </a:rPr>
               <a:t>04</a:t>
             </a:r>
@@ -28244,8 +27402,6 @@
                   <a:srgbClr val="101A2B"/>
                 </a:solidFill>
                 <a:latin typeface="Poppins SemiBold"/>
-                <a:ea typeface="Poppins SemiBold"/>
-                <a:cs typeface="Poppins SemiBold"/>
               </a:rPr>
               <a:t>Process utilities</a:t>
             </a:r>
@@ -28281,8 +27437,6 @@
                   <a:srgbClr val="64707A"/>
                 </a:solidFill>
                 <a:latin typeface="Urbanist"/>
-                <a:ea typeface="Urbanist"/>
-                <a:cs typeface="Urbanist"/>
               </a:rPr>
               <a:t>Water, chemical, gas, exhaust</a:t>
             </a:r>
@@ -28404,8 +27558,6 @@
                   <a:srgbClr val="EC2326"/>
                 </a:solidFill>
                 <a:latin typeface="League Spartan SemiBold"/>
-                <a:ea typeface="League Spartan SemiBold"/>
-                <a:cs typeface="League Spartan SemiBold"/>
               </a:rPr>
               <a:t>05</a:t>
             </a:r>
@@ -28441,8 +27593,6 @@
                   <a:srgbClr val="101A2B"/>
                 </a:solidFill>
                 <a:latin typeface="Poppins SemiBold"/>
-                <a:ea typeface="Poppins SemiBold"/>
-                <a:cs typeface="Poppins SemiBold"/>
               </a:rPr>
               <a:t>Monitoring</a:t>
             </a:r>
@@ -28478,8 +27628,6 @@
                   <a:srgbClr val="64707A"/>
                 </a:solidFill>
                 <a:latin typeface="Urbanist"/>
-                <a:ea typeface="Urbanist"/>
-                <a:cs typeface="Urbanist"/>
               </a:rPr>
               <a:t>FMCS, BMS, PA</a:t>
             </a:r>
@@ -28601,8 +27749,6 @@
                   <a:srgbClr val="EC2326"/>
                 </a:solidFill>
                 <a:latin typeface="League Spartan SemiBold"/>
-                <a:ea typeface="League Spartan SemiBold"/>
-                <a:cs typeface="League Spartan SemiBold"/>
               </a:rPr>
               <a:t>06</a:t>
             </a:r>
@@ -28638,8 +27784,6 @@
                   <a:srgbClr val="101A2B"/>
                 </a:solidFill>
                 <a:latin typeface="Poppins SemiBold"/>
-                <a:ea typeface="Poppins SemiBold"/>
-                <a:cs typeface="Poppins SemiBold"/>
               </a:rPr>
               <a:t>Tool hookup</a:t>
             </a:r>
@@ -28675,8 +27819,6 @@
                   <a:srgbClr val="64707A"/>
                 </a:solidFill>
                 <a:latin typeface="Urbanist"/>
-                <a:ea typeface="Urbanist"/>
-                <a:cs typeface="Urbanist"/>
               </a:rPr>
               <a:t>Progressive install</a:t>
             </a:r>
@@ -28712,8 +27854,6 @@
                   <a:srgbClr val="64707A"/>
                 </a:solidFill>
                 <a:latin typeface="League Spartan Medium"/>
-                <a:ea typeface="League Spartan Medium"/>
-                <a:cs typeface="League Spartan Medium"/>
               </a:rPr>
               <a:t>23</a:t>
             </a:r>
@@ -28749,8 +27889,6 @@
                   <a:srgbClr val="64707A"/>
                 </a:solidFill>
                 <a:latin typeface="League Spartan"/>
-                <a:ea typeface="League Spartan"/>
-                <a:cs typeface="League Spartan"/>
               </a:rPr>
               <a:t>INFOGRAPHIC</a:t>
             </a:r>
@@ -28864,8 +28002,6 @@
                   <a:srgbClr val="FFFFFF"/>
                 </a:solidFill>
                 <a:latin typeface="League Spartan SemiBold"/>
-                <a:ea typeface="League Spartan SemiBold"/>
-                <a:cs typeface="League Spartan SemiBold"/>
               </a:rPr>
               <a:t>12</a:t>
             </a:r>
@@ -28901,8 +28037,6 @@
                   <a:srgbClr val="101A2B"/>
                 </a:solidFill>
                 <a:latin typeface="League Spartan SemiBold"/>
-                <a:ea typeface="League Spartan SemiBold"/>
-                <a:cs typeface="League Spartan SemiBold"/>
               </a:rPr>
               <a:t>SECTION NAME</a:t>
             </a:r>
@@ -28992,8 +28126,6 @@
                   <a:srgbClr val="64707A"/>
                 </a:solidFill>
                 <a:latin typeface="Poppins SemiBold"/>
-                <a:ea typeface="Poppins SemiBold"/>
-                <a:cs typeface="Poppins SemiBold"/>
               </a:rPr>
               <a:t>Page title</a:t>
             </a:r>
@@ -29029,8 +28161,6 @@
                   <a:srgbClr val="64707A"/>
                 </a:solidFill>
                 <a:latin typeface="Urbanist"/>
-                <a:ea typeface="Urbanist"/>
-                <a:cs typeface="Urbanist"/>
               </a:rPr>
               <a:t>One line under it saying what the page is for.</a:t>
             </a:r>
@@ -29152,8 +28282,6 @@
                   <a:srgbClr val="64707A"/>
                 </a:solidFill>
                 <a:latin typeface="League Spartan SemiBold"/>
-                <a:ea typeface="League Spartan SemiBold"/>
-                <a:cs typeface="League Spartan SemiBold"/>
               </a:rPr>
               <a:t>01</a:t>
             </a:r>
@@ -29189,8 +28317,6 @@
                   <a:srgbClr val="64707A"/>
                 </a:solidFill>
                 <a:latin typeface="Poppins SemiBold"/>
-                <a:ea typeface="Poppins SemiBold"/>
-                <a:cs typeface="Poppins SemiBold"/>
               </a:rPr>
               <a:t>Part name</a:t>
             </a:r>
@@ -29226,8 +28352,6 @@
                   <a:srgbClr val="64707A"/>
                 </a:solidFill>
                 <a:latin typeface="Urbanist"/>
-                <a:ea typeface="Urbanist"/>
-                <a:cs typeface="Urbanist"/>
               </a:rPr>
               <a:t>What it covers, four words</a:t>
             </a:r>
@@ -29349,8 +28473,6 @@
                   <a:srgbClr val="64707A"/>
                 </a:solidFill>
                 <a:latin typeface="League Spartan SemiBold"/>
-                <a:ea typeface="League Spartan SemiBold"/>
-                <a:cs typeface="League Spartan SemiBold"/>
               </a:rPr>
               <a:t>02</a:t>
             </a:r>
@@ -29386,8 +28508,6 @@
                   <a:srgbClr val="64707A"/>
                 </a:solidFill>
                 <a:latin typeface="Poppins SemiBold"/>
-                <a:ea typeface="Poppins SemiBold"/>
-                <a:cs typeface="Poppins SemiBold"/>
               </a:rPr>
               <a:t>Part name</a:t>
             </a:r>
@@ -29423,8 +28543,6 @@
                   <a:srgbClr val="64707A"/>
                 </a:solidFill>
                 <a:latin typeface="Urbanist"/>
-                <a:ea typeface="Urbanist"/>
-                <a:cs typeface="Urbanist"/>
               </a:rPr>
               <a:t>What it covers, four words</a:t>
             </a:r>
@@ -29546,8 +28664,6 @@
                   <a:srgbClr val="64707A"/>
                 </a:solidFill>
                 <a:latin typeface="League Spartan SemiBold"/>
-                <a:ea typeface="League Spartan SemiBold"/>
-                <a:cs typeface="League Spartan SemiBold"/>
               </a:rPr>
               <a:t>03</a:t>
             </a:r>
@@ -29583,8 +28699,6 @@
                   <a:srgbClr val="64707A"/>
                 </a:solidFill>
                 <a:latin typeface="Poppins SemiBold"/>
-                <a:ea typeface="Poppins SemiBold"/>
-                <a:cs typeface="Poppins SemiBold"/>
               </a:rPr>
               <a:t>Part name</a:t>
             </a:r>
@@ -29620,8 +28734,6 @@
                   <a:srgbClr val="64707A"/>
                 </a:solidFill>
                 <a:latin typeface="Urbanist"/>
-                <a:ea typeface="Urbanist"/>
-                <a:cs typeface="Urbanist"/>
               </a:rPr>
               <a:t>What it covers, four words</a:t>
             </a:r>
@@ -29687,8 +28799,6 @@
                   <a:srgbClr val="64707A"/>
                 </a:solidFill>
                 <a:latin typeface="League Spartan SemiBold"/>
-                <a:ea typeface="League Spartan SemiBold"/>
-                <a:cs typeface="League Spartan SemiBold"/>
               </a:rPr>
               <a:t>CAPTION OVER THE VISUAL</a:t>
             </a:r>
@@ -29748,8 +28858,6 @@
                   <a:srgbClr val="64707A"/>
                 </a:solidFill>
                 <a:latin typeface="Urbanist"/>
-                <a:ea typeface="Urbanist"/>
-                <a:cs typeface="Urbanist"/>
               </a:rPr>
               <a:t>One sentence under the visual saying what the whole thing adds up to.</a:t>
             </a:r>
@@ -29871,8 +28979,6 @@
                   <a:srgbClr val="64707A"/>
                 </a:solidFill>
                 <a:latin typeface="League Spartan SemiBold"/>
-                <a:ea typeface="League Spartan SemiBold"/>
-                <a:cs typeface="League Spartan SemiBold"/>
               </a:rPr>
               <a:t>04</a:t>
             </a:r>
@@ -29908,8 +29014,6 @@
                   <a:srgbClr val="64707A"/>
                 </a:solidFill>
                 <a:latin typeface="Poppins SemiBold"/>
-                <a:ea typeface="Poppins SemiBold"/>
-                <a:cs typeface="Poppins SemiBold"/>
               </a:rPr>
               <a:t>Part name</a:t>
             </a:r>
@@ -29945,8 +29049,6 @@
                   <a:srgbClr val="64707A"/>
                 </a:solidFill>
                 <a:latin typeface="Urbanist"/>
-                <a:ea typeface="Urbanist"/>
-                <a:cs typeface="Urbanist"/>
               </a:rPr>
               <a:t>What it covers, four words</a:t>
             </a:r>
@@ -30068,8 +29170,6 @@
                   <a:srgbClr val="64707A"/>
                 </a:solidFill>
                 <a:latin typeface="League Spartan SemiBold"/>
-                <a:ea typeface="League Spartan SemiBold"/>
-                <a:cs typeface="League Spartan SemiBold"/>
               </a:rPr>
               <a:t>05</a:t>
             </a:r>
@@ -30105,8 +29205,6 @@
                   <a:srgbClr val="64707A"/>
                 </a:solidFill>
                 <a:latin typeface="Poppins SemiBold"/>
-                <a:ea typeface="Poppins SemiBold"/>
-                <a:cs typeface="Poppins SemiBold"/>
               </a:rPr>
               <a:t>Part name</a:t>
             </a:r>
@@ -30142,8 +29240,6 @@
                   <a:srgbClr val="64707A"/>
                 </a:solidFill>
                 <a:latin typeface="Urbanist"/>
-                <a:ea typeface="Urbanist"/>
-                <a:cs typeface="Urbanist"/>
               </a:rPr>
               <a:t>What it covers, four words</a:t>
             </a:r>
@@ -30265,8 +29361,6 @@
                   <a:srgbClr val="64707A"/>
                 </a:solidFill>
                 <a:latin typeface="League Spartan SemiBold"/>
-                <a:ea typeface="League Spartan SemiBold"/>
-                <a:cs typeface="League Spartan SemiBold"/>
               </a:rPr>
               <a:t>06</a:t>
             </a:r>
@@ -30302,8 +29396,6 @@
                   <a:srgbClr val="64707A"/>
                 </a:solidFill>
                 <a:latin typeface="Poppins SemiBold"/>
-                <a:ea typeface="Poppins SemiBold"/>
-                <a:cs typeface="Poppins SemiBold"/>
               </a:rPr>
               <a:t>Part name</a:t>
             </a:r>
@@ -30339,8 +29431,6 @@
                   <a:srgbClr val="64707A"/>
                 </a:solidFill>
                 <a:latin typeface="Urbanist"/>
-                <a:ea typeface="Urbanist"/>
-                <a:cs typeface="Urbanist"/>
               </a:rPr>
               <a:t>What it covers, four words</a:t>
             </a:r>
@@ -30376,8 +29466,6 @@
                   <a:srgbClr val="64707A"/>
                 </a:solidFill>
                 <a:latin typeface="League Spartan Medium"/>
-                <a:ea typeface="League Spartan Medium"/>
-                <a:cs typeface="League Spartan Medium"/>
               </a:rPr>
               <a:t>24</a:t>
             </a:r>
@@ -30413,8 +29501,6 @@
                   <a:srgbClr val="64707A"/>
                 </a:solidFill>
                 <a:latin typeface="League Spartan"/>
-                <a:ea typeface="League Spartan"/>
-                <a:cs typeface="League Spartan"/>
               </a:rPr>
               <a:t>INFOGRAPHIC</a:t>
             </a:r>
@@ -30528,8 +29614,6 @@
                   <a:srgbClr val="FFFFFF"/>
                 </a:solidFill>
                 <a:latin typeface="League Spartan SemiBold"/>
-                <a:ea typeface="League Spartan SemiBold"/>
-                <a:cs typeface="League Spartan SemiBold"/>
               </a:rPr>
               <a:t>13</a:t>
             </a:r>
@@ -30565,8 +29649,6 @@
                   <a:srgbClr val="101A2B"/>
                 </a:solidFill>
                 <a:latin typeface="League Spartan SemiBold"/>
-                <a:ea typeface="League Spartan SemiBold"/>
-                <a:cs typeface="League Spartan SemiBold"/>
               </a:rPr>
               <a:t>PART 02 · PROJECT REFERENCES</a:t>
             </a:r>
@@ -30656,8 +29738,6 @@
                   <a:srgbClr val="EC2326"/>
                 </a:solidFill>
                 <a:latin typeface="Poppins SemiBold"/>
-                <a:ea typeface="Poppins SemiBold"/>
-                <a:cs typeface="Poppins SemiBold"/>
               </a:rPr>
               <a:t>Project reference</a:t>
             </a:r>
@@ -30693,8 +29773,6 @@
                   <a:srgbClr val="64707A"/>
                 </a:solidFill>
                 <a:latin typeface="Urbanist"/>
-                <a:ea typeface="Urbanist"/>
-                <a:cs typeface="Urbanist"/>
               </a:rPr>
               <a:t>One project, what it was and what it took.</a:t>
             </a:r>
@@ -30785,8 +29863,6 @@
                   <a:srgbClr val="64707A"/>
                 </a:solidFill>
                 <a:latin typeface="League Spartan SemiBold"/>
-                <a:ea typeface="League Spartan SemiBold"/>
-                <a:cs typeface="League Spartan SemiBold"/>
               </a:rPr>
               <a:t>KULIM, KEDAH · GREENFIELD WAFER FAB</a:t>
             </a:r>
@@ -30822,8 +29898,6 @@
                   <a:srgbClr val="101A2B"/>
                 </a:solidFill>
                 <a:latin typeface="Poppins SemiBold"/>
-                <a:ea typeface="Poppins SemiBold"/>
-                <a:cs typeface="Poppins SemiBold"/>
               </a:rPr>
               <a:t>Infineon Kulim Wafer Fab 3</a:t>
             </a:r>
@@ -30889,8 +29963,6 @@
                   <a:srgbClr val="EC2326"/>
                 </a:solidFill>
                 <a:latin typeface="League Spartan SemiBold"/>
-                <a:ea typeface="League Spartan SemiBold"/>
-                <a:cs typeface="League Spartan SemiBold"/>
               </a:rPr>
               <a:t>EPCC &amp; DESIGN BUILD</a:t>
             </a:r>
@@ -30956,8 +30028,6 @@
                   <a:srgbClr val="EC2326"/>
                 </a:solidFill>
                 <a:latin typeface="League Spartan SemiBold"/>
-                <a:ea typeface="League Spartan SemiBold"/>
-                <a:cs typeface="League Spartan SemiBold"/>
               </a:rPr>
               <a:t>CLEANROOM SYSTEMS</a:t>
             </a:r>
@@ -31023,8 +30093,6 @@
                   <a:srgbClr val="EC2326"/>
                 </a:solidFill>
                 <a:latin typeface="League Spartan SemiBold"/>
-                <a:ea typeface="League Spartan SemiBold"/>
-                <a:cs typeface="League Spartan SemiBold"/>
               </a:rPr>
               <a:t>ACMV &amp; MECHANICAL</a:t>
             </a:r>
@@ -31060,8 +30128,6 @@
                   <a:srgbClr val="64707A"/>
                 </a:solidFill>
                 <a:latin typeface="League Spartan SemiBold"/>
-                <a:ea typeface="League Spartan SemiBold"/>
-                <a:cs typeface="League Spartan SemiBold"/>
               </a:rPr>
               <a:t>DESCRIPTION</a:t>
             </a:r>
@@ -31101,8 +30167,6 @@
                   <a:srgbClr val="1E2A3D"/>
                 </a:solidFill>
                 <a:latin typeface="Urbanist"/>
-                <a:ea typeface="Urbanist"/>
-                <a:cs typeface="Urbanist"/>
               </a:rPr>
               <a:t>General contractor for WP06, KLM3 Expansion, 36,000 m² cleanroom area</a:t>
             </a:r>
@@ -31138,8 +30202,6 @@
                   <a:srgbClr val="64707A"/>
                 </a:solidFill>
                 <a:latin typeface="League Spartan SemiBold"/>
-                <a:ea typeface="League Spartan SemiBold"/>
-                <a:cs typeface="League Spartan SemiBold"/>
               </a:rPr>
               <a:t>SCOPE</a:t>
             </a:r>
@@ -31175,8 +30237,6 @@
                   <a:srgbClr val="1E2A3D"/>
                 </a:solidFill>
                 <a:latin typeface="Urbanist"/>
-                <a:ea typeface="Urbanist"/>
-                <a:cs typeface="Urbanist"/>
               </a:rPr>
               <a:t>PCC for cleanroom and mechanical works</a:t>
             </a:r>
@@ -31212,8 +30272,6 @@
                   <a:srgbClr val="64707A"/>
                 </a:solidFill>
                 <a:latin typeface="League Spartan SemiBold"/>
-                <a:ea typeface="League Spartan SemiBold"/>
-                <a:cs typeface="League Spartan SemiBold"/>
               </a:rPr>
               <a:t>CLEANROOM</a:t>
             </a:r>
@@ -31249,8 +30307,6 @@
                   <a:srgbClr val="1E2A3D"/>
                 </a:solidFill>
                 <a:latin typeface="Urbanist"/>
-                <a:ea typeface="Urbanist"/>
-                <a:cs typeface="Urbanist"/>
               </a:rPr>
               <a:t>ISO 4 to 7 · Class 10 to 100 to 10K</a:t>
             </a:r>
@@ -31286,8 +30342,6 @@
                   <a:srgbClr val="64707A"/>
                 </a:solidFill>
                 <a:latin typeface="League Spartan SemiBold"/>
-                <a:ea typeface="League Spartan SemiBold"/>
-                <a:cs typeface="League Spartan SemiBold"/>
               </a:rPr>
               <a:t>COMPLETED</a:t>
             </a:r>
@@ -31323,8 +30377,6 @@
                   <a:srgbClr val="1E2A3D"/>
                 </a:solidFill>
                 <a:latin typeface="Urbanist"/>
-                <a:ea typeface="Urbanist"/>
-                <a:cs typeface="Urbanist"/>
               </a:rPr>
               <a:t>2024</a:t>
             </a:r>
@@ -31360,8 +30412,6 @@
                   <a:srgbClr val="64707A"/>
                 </a:solidFill>
                 <a:latin typeface="League Spartan Medium"/>
-                <a:ea typeface="League Spartan Medium"/>
-                <a:cs typeface="League Spartan Medium"/>
               </a:rPr>
               <a:t>25</a:t>
             </a:r>
@@ -31397,8 +30447,6 @@
                   <a:srgbClr val="64707A"/>
                 </a:solidFill>
                 <a:latin typeface="League Spartan"/>
-                <a:ea typeface="League Spartan"/>
-                <a:cs typeface="League Spartan"/>
               </a:rPr>
               <a:t>IMAGE AND SPECS</a:t>
             </a:r>
@@ -31512,8 +30560,6 @@
                   <a:srgbClr val="FFFFFF"/>
                 </a:solidFill>
                 <a:latin typeface="League Spartan SemiBold"/>
-                <a:ea typeface="League Spartan SemiBold"/>
-                <a:cs typeface="League Spartan SemiBold"/>
               </a:rPr>
               <a:t>13</a:t>
             </a:r>
@@ -31549,8 +30595,6 @@
                   <a:srgbClr val="101A2B"/>
                 </a:solidFill>
                 <a:latin typeface="League Spartan SemiBold"/>
-                <a:ea typeface="League Spartan SemiBold"/>
-                <a:cs typeface="League Spartan SemiBold"/>
               </a:rPr>
               <a:t>SECTION NAME</a:t>
             </a:r>
@@ -31640,8 +30684,6 @@
                   <a:srgbClr val="64707A"/>
                 </a:solidFill>
                 <a:latin typeface="Poppins SemiBold"/>
-                <a:ea typeface="Poppins SemiBold"/>
-                <a:cs typeface="Poppins SemiBold"/>
               </a:rPr>
               <a:t>Page title</a:t>
             </a:r>
@@ -31677,8 +30719,6 @@
                   <a:srgbClr val="64707A"/>
                 </a:solidFill>
                 <a:latin typeface="Urbanist"/>
-                <a:ea typeface="Urbanist"/>
-                <a:cs typeface="Urbanist"/>
               </a:rPr>
               <a:t>One line under it saying what the page is for.</a:t>
             </a:r>
@@ -31769,8 +30809,6 @@
                   <a:srgbClr val="64707A"/>
                 </a:solidFill>
                 <a:latin typeface="League Spartan SemiBold"/>
-                <a:ea typeface="League Spartan SemiBold"/>
-                <a:cs typeface="League Spartan SemiBold"/>
               </a:rPr>
               <a:t>LOCATION · WHAT KIND OF FACILITY</a:t>
             </a:r>
@@ -31806,8 +30844,6 @@
                   <a:srgbClr val="64707A"/>
                 </a:solidFill>
                 <a:latin typeface="Poppins SemiBold"/>
-                <a:ea typeface="Poppins SemiBold"/>
-                <a:cs typeface="Poppins SemiBold"/>
               </a:rPr>
               <a:t>Project or product name</a:t>
             </a:r>
@@ -31873,8 +30909,6 @@
                   <a:srgbClr val="64707A"/>
                 </a:solidFill>
                 <a:latin typeface="League Spartan SemiBold"/>
-                <a:ea typeface="League Spartan SemiBold"/>
-                <a:cs typeface="League Spartan SemiBold"/>
               </a:rPr>
               <a:t>SERVICE LINE</a:t>
             </a:r>
@@ -31940,8 +30974,6 @@
                   <a:srgbClr val="64707A"/>
                 </a:solidFill>
                 <a:latin typeface="League Spartan SemiBold"/>
-                <a:ea typeface="League Spartan SemiBold"/>
-                <a:cs typeface="League Spartan SemiBold"/>
               </a:rPr>
               <a:t>SERVICE LINE</a:t>
             </a:r>
@@ -32007,8 +31039,6 @@
                   <a:srgbClr val="64707A"/>
                 </a:solidFill>
                 <a:latin typeface="League Spartan SemiBold"/>
-                <a:ea typeface="League Spartan SemiBold"/>
-                <a:cs typeface="League Spartan SemiBold"/>
               </a:rPr>
               <a:t>SERVICE LINE</a:t>
             </a:r>
@@ -32044,8 +31074,6 @@
                   <a:srgbClr val="64707A"/>
                 </a:solidFill>
                 <a:latin typeface="League Spartan SemiBold"/>
-                <a:ea typeface="League Spartan SemiBold"/>
-                <a:cs typeface="League Spartan SemiBold"/>
               </a:rPr>
               <a:t>DESCRIPTION</a:t>
             </a:r>
@@ -32081,8 +31109,6 @@
                   <a:srgbClr val="64707A"/>
                 </a:solidFill>
                 <a:latin typeface="Urbanist"/>
-                <a:ea typeface="Urbanist"/>
-                <a:cs typeface="Urbanist"/>
               </a:rPr>
               <a:t>One sentence on what the job was</a:t>
             </a:r>
@@ -32118,8 +31144,6 @@
                   <a:srgbClr val="64707A"/>
                 </a:solidFill>
                 <a:latin typeface="League Spartan SemiBold"/>
-                <a:ea typeface="League Spartan SemiBold"/>
-                <a:cs typeface="League Spartan SemiBold"/>
               </a:rPr>
               <a:t>SCOPE</a:t>
             </a:r>
@@ -32155,8 +31179,6 @@
                   <a:srgbClr val="64707A"/>
                 </a:solidFill>
                 <a:latin typeface="Urbanist"/>
-                <a:ea typeface="Urbanist"/>
-                <a:cs typeface="Urbanist"/>
               </a:rPr>
               <a:t>What was in the contract</a:t>
             </a:r>
@@ -32192,8 +31214,6 @@
                   <a:srgbClr val="64707A"/>
                 </a:solidFill>
                 <a:latin typeface="League Spartan SemiBold"/>
-                <a:ea typeface="League Spartan SemiBold"/>
-                <a:cs typeface="League Spartan SemiBold"/>
               </a:rPr>
               <a:t>CLEANROOM</a:t>
             </a:r>
@@ -32229,8 +31249,6 @@
                   <a:srgbClr val="64707A"/>
                 </a:solidFill>
                 <a:latin typeface="Urbanist"/>
-                <a:ea typeface="Urbanist"/>
-                <a:cs typeface="Urbanist"/>
               </a:rPr>
               <a:t>Class or grade, if it applies</a:t>
             </a:r>
@@ -32266,8 +31284,6 @@
                   <a:srgbClr val="64707A"/>
                 </a:solidFill>
                 <a:latin typeface="League Spartan SemiBold"/>
-                <a:ea typeface="League Spartan SemiBold"/>
-                <a:cs typeface="League Spartan SemiBold"/>
               </a:rPr>
               <a:t>COMPLETED</a:t>
             </a:r>
@@ -32303,8 +31319,6 @@
                   <a:srgbClr val="64707A"/>
                 </a:solidFill>
                 <a:latin typeface="Urbanist"/>
-                <a:ea typeface="Urbanist"/>
-                <a:cs typeface="Urbanist"/>
               </a:rPr>
               <a:t>Year</a:t>
             </a:r>
@@ -32340,8 +31354,6 @@
                   <a:srgbClr val="64707A"/>
                 </a:solidFill>
                 <a:latin typeface="League Spartan Medium"/>
-                <a:ea typeface="League Spartan Medium"/>
-                <a:cs typeface="League Spartan Medium"/>
               </a:rPr>
               <a:t>26</a:t>
             </a:r>
@@ -32377,8 +31389,6 @@
                   <a:srgbClr val="64707A"/>
                 </a:solidFill>
                 <a:latin typeface="League Spartan"/>
-                <a:ea typeface="League Spartan"/>
-                <a:cs typeface="League Spartan"/>
               </a:rPr>
               <a:t>IMAGE AND SPECS</a:t>
             </a:r>
@@ -32492,8 +31502,6 @@
                   <a:srgbClr val="FFFFFF"/>
                 </a:solidFill>
                 <a:latin typeface="League Spartan SemiBold"/>
-                <a:ea typeface="League Spartan SemiBold"/>
-                <a:cs typeface="League Spartan SemiBold"/>
               </a:rPr>
               <a:t>14</a:t>
             </a:r>
@@ -32529,8 +31537,6 @@
                   <a:srgbClr val="101A2B"/>
                 </a:solidFill>
                 <a:latin typeface="League Spartan SemiBold"/>
-                <a:ea typeface="League Spartan SemiBold"/>
-                <a:cs typeface="League Spartan SemiBold"/>
               </a:rPr>
               <a:t>PART 01 · THE COMPANY</a:t>
             </a:r>
@@ -32620,8 +31626,6 @@
                   <a:srgbClr val="EC2326"/>
                 </a:solidFill>
                 <a:latin typeface="Poppins SemiBold"/>
-                <a:ea typeface="Poppins SemiBold"/>
-                <a:cs typeface="Poppins SemiBold"/>
               </a:rPr>
               <a:t>Indicative programme</a:t>
             </a:r>
@@ -32657,8 +31661,6 @@
                   <a:srgbClr val="64707A"/>
                 </a:solidFill>
                 <a:latin typeface="Urbanist"/>
-                <a:ea typeface="Urbanist"/>
-                <a:cs typeface="Urbanist"/>
               </a:rPr>
               <a:t>Six quarters, from award to handover.</a:t>
             </a:r>
@@ -32694,8 +31696,6 @@
                   <a:srgbClr val="64707A"/>
                 </a:solidFill>
                 <a:latin typeface="League Spartan SemiBold"/>
-                <a:ea typeface="League Spartan SemiBold"/>
-                <a:cs typeface="League Spartan SemiBold"/>
               </a:rPr>
               <a:t>Q1 26</a:t>
             </a:r>
@@ -32731,8 +31731,6 @@
                   <a:srgbClr val="64707A"/>
                 </a:solidFill>
                 <a:latin typeface="League Spartan SemiBold"/>
-                <a:ea typeface="League Spartan SemiBold"/>
-                <a:cs typeface="League Spartan SemiBold"/>
               </a:rPr>
               <a:t>Q2 26</a:t>
             </a:r>
@@ -32768,8 +31766,6 @@
                   <a:srgbClr val="64707A"/>
                 </a:solidFill>
                 <a:latin typeface="League Spartan SemiBold"/>
-                <a:ea typeface="League Spartan SemiBold"/>
-                <a:cs typeface="League Spartan SemiBold"/>
               </a:rPr>
               <a:t>Q3 26</a:t>
             </a:r>
@@ -32805,8 +31801,6 @@
                   <a:srgbClr val="64707A"/>
                 </a:solidFill>
                 <a:latin typeface="League Spartan SemiBold"/>
-                <a:ea typeface="League Spartan SemiBold"/>
-                <a:cs typeface="League Spartan SemiBold"/>
               </a:rPr>
               <a:t>Q4 26</a:t>
             </a:r>
@@ -32842,8 +31836,6 @@
                   <a:srgbClr val="64707A"/>
                 </a:solidFill>
                 <a:latin typeface="League Spartan SemiBold"/>
-                <a:ea typeface="League Spartan SemiBold"/>
-                <a:cs typeface="League Spartan SemiBold"/>
               </a:rPr>
               <a:t>Q1 27</a:t>
             </a:r>
@@ -32879,8 +31871,6 @@
                   <a:srgbClr val="64707A"/>
                 </a:solidFill>
                 <a:latin typeface="League Spartan SemiBold"/>
-                <a:ea typeface="League Spartan SemiBold"/>
-                <a:cs typeface="League Spartan SemiBold"/>
               </a:rPr>
               <a:t>Q2 27</a:t>
             </a:r>
@@ -32916,8 +31906,6 @@
                   <a:srgbClr val="101A2B"/>
                 </a:solidFill>
                 <a:latin typeface="Urbanist SemiBold"/>
-                <a:ea typeface="Urbanist SemiBold"/>
-                <a:cs typeface="Urbanist SemiBold"/>
               </a:rPr>
               <a:t>Engineering design</a:t>
             </a:r>
@@ -32953,8 +31941,6 @@
                   <a:srgbClr val="64707A"/>
                 </a:solidFill>
                 <a:latin typeface="Urbanist"/>
-                <a:ea typeface="Urbanist"/>
-                <a:cs typeface="Urbanist"/>
               </a:rPr>
               <a:t>CSA and MEP to IFC</a:t>
             </a:r>
@@ -33050,8 +32036,6 @@
                   <a:srgbClr val="FFFFFF"/>
                 </a:solidFill>
                 <a:latin typeface="League Spartan SemiBold"/>
-                <a:ea typeface="League Spartan SemiBold"/>
-                <a:cs typeface="League Spartan SemiBold"/>
               </a:rPr>
               <a:t>8 weeks</a:t>
             </a:r>
@@ -33087,8 +32071,6 @@
                   <a:srgbClr val="101A2B"/>
                 </a:solidFill>
                 <a:latin typeface="Urbanist SemiBold"/>
-                <a:ea typeface="Urbanist SemiBold"/>
-                <a:cs typeface="Urbanist SemiBold"/>
               </a:rPr>
               <a:t>Long lead procurement</a:t>
             </a:r>
@@ -33124,8 +32106,6 @@
                   <a:srgbClr val="64707A"/>
                 </a:solidFill>
                 <a:latin typeface="Urbanist"/>
-                <a:ea typeface="Urbanist"/>
-                <a:cs typeface="Urbanist"/>
               </a:rPr>
               <a:t>AHUs, switchgear, chillers</a:t>
             </a:r>
@@ -33223,8 +32203,6 @@
                   <a:srgbClr val="101A2B"/>
                 </a:solidFill>
                 <a:latin typeface="Urbanist SemiBold"/>
-                <a:ea typeface="Urbanist SemiBold"/>
-                <a:cs typeface="Urbanist SemiBold"/>
               </a:rPr>
               <a:t>Civil and structural</a:t>
             </a:r>
@@ -33260,8 +32238,6 @@
                   <a:srgbClr val="64707A"/>
                 </a:solidFill>
                 <a:latin typeface="Urbanist"/>
-                <a:ea typeface="Urbanist"/>
-                <a:cs typeface="Urbanist"/>
               </a:rPr>
               <a:t>Foundations to envelope</a:t>
             </a:r>
@@ -33357,8 +32333,6 @@
                   <a:srgbClr val="101A2B"/>
                 </a:solidFill>
                 <a:latin typeface="Urbanist SemiBold"/>
-                <a:ea typeface="Urbanist SemiBold"/>
-                <a:cs typeface="Urbanist SemiBold"/>
               </a:rPr>
               <a:t>Cleanroom build</a:t>
             </a:r>
@@ -33394,8 +32368,6 @@
                   <a:srgbClr val="64707A"/>
                 </a:solidFill>
                 <a:latin typeface="Urbanist"/>
-                <a:ea typeface="Urbanist"/>
-                <a:cs typeface="Urbanist"/>
               </a:rPr>
               <a:t>Walls, ceilings, flooring</a:t>
             </a:r>
@@ -33491,8 +32463,6 @@
                   <a:srgbClr val="101A2B"/>
                 </a:solidFill>
                 <a:latin typeface="Urbanist SemiBold"/>
-                <a:ea typeface="Urbanist SemiBold"/>
-                <a:cs typeface="Urbanist SemiBold"/>
               </a:rPr>
               <a:t>Process utilities</a:t>
             </a:r>
@@ -33528,8 +32498,6 @@
                   <a:srgbClr val="64707A"/>
                 </a:solidFill>
                 <a:latin typeface="Urbanist"/>
-                <a:ea typeface="Urbanist"/>
-                <a:cs typeface="Urbanist"/>
               </a:rPr>
               <a:t>Water, gas, chemical, exhaust</a:t>
             </a:r>
@@ -33625,8 +32593,6 @@
                   <a:srgbClr val="101A2B"/>
                 </a:solidFill>
                 <a:latin typeface="Urbanist SemiBold"/>
-                <a:ea typeface="Urbanist SemiBold"/>
-                <a:cs typeface="Urbanist SemiBold"/>
               </a:rPr>
               <a:t>Testing and handover</a:t>
             </a:r>
@@ -33662,8 +32628,6 @@
                   <a:srgbClr val="64707A"/>
                 </a:solidFill>
                 <a:latin typeface="Urbanist"/>
-                <a:ea typeface="Urbanist"/>
-                <a:cs typeface="Urbanist"/>
               </a:rPr>
               <a:t>Classification and C&amp;Q</a:t>
             </a:r>
@@ -33759,8 +32723,6 @@
                   <a:srgbClr val="FFFFFF"/>
                 </a:solidFill>
                 <a:latin typeface="League Spartan SemiBold"/>
-                <a:ea typeface="League Spartan SemiBold"/>
-                <a:cs typeface="League Spartan SemiBold"/>
               </a:rPr>
               <a:t>Handover</a:t>
             </a:r>
@@ -33796,8 +32758,6 @@
                   <a:srgbClr val="64707A"/>
                 </a:solidFill>
                 <a:latin typeface="League Spartan Medium"/>
-                <a:ea typeface="League Spartan Medium"/>
-                <a:cs typeface="League Spartan Medium"/>
               </a:rPr>
               <a:t>27</a:t>
             </a:r>
@@ -33833,8 +32793,6 @@
                   <a:srgbClr val="64707A"/>
                 </a:solidFill>
                 <a:latin typeface="League Spartan"/>
-                <a:ea typeface="League Spartan"/>
-                <a:cs typeface="League Spartan"/>
               </a:rPr>
               <a:t>PROGRAMME</a:t>
             </a:r>
@@ -33948,8 +32906,6 @@
                   <a:srgbClr val="FFFFFF"/>
                 </a:solidFill>
                 <a:latin typeface="League Spartan SemiBold"/>
-                <a:ea typeface="League Spartan SemiBold"/>
-                <a:cs typeface="League Spartan SemiBold"/>
               </a:rPr>
               <a:t>14</a:t>
             </a:r>
@@ -33985,8 +32941,6 @@
                   <a:srgbClr val="101A2B"/>
                 </a:solidFill>
                 <a:latin typeface="League Spartan SemiBold"/>
-                <a:ea typeface="League Spartan SemiBold"/>
-                <a:cs typeface="League Spartan SemiBold"/>
               </a:rPr>
               <a:t>SECTION NAME</a:t>
             </a:r>
@@ -34076,8 +33030,6 @@
                   <a:srgbClr val="64707A"/>
                 </a:solidFill>
                 <a:latin typeface="Poppins SemiBold"/>
-                <a:ea typeface="Poppins SemiBold"/>
-                <a:cs typeface="Poppins SemiBold"/>
               </a:rPr>
               <a:t>Page title</a:t>
             </a:r>
@@ -34113,8 +33065,6 @@
                   <a:srgbClr val="64707A"/>
                 </a:solidFill>
                 <a:latin typeface="Urbanist"/>
-                <a:ea typeface="Urbanist"/>
-                <a:cs typeface="Urbanist"/>
               </a:rPr>
               <a:t>One line under it saying what the page is for.</a:t>
             </a:r>
@@ -34150,8 +33100,6 @@
                   <a:srgbClr val="64707A"/>
                 </a:solidFill>
                 <a:latin typeface="League Spartan SemiBold"/>
-                <a:ea typeface="League Spartan SemiBold"/>
-                <a:cs typeface="League Spartan SemiBold"/>
               </a:rPr>
               <a:t>PERIOD</a:t>
             </a:r>
@@ -34187,8 +33135,6 @@
                   <a:srgbClr val="64707A"/>
                 </a:solidFill>
                 <a:latin typeface="League Spartan SemiBold"/>
-                <a:ea typeface="League Spartan SemiBold"/>
-                <a:cs typeface="League Spartan SemiBold"/>
               </a:rPr>
               <a:t>PERIOD</a:t>
             </a:r>
@@ -34224,8 +33170,6 @@
                   <a:srgbClr val="64707A"/>
                 </a:solidFill>
                 <a:latin typeface="League Spartan SemiBold"/>
-                <a:ea typeface="League Spartan SemiBold"/>
-                <a:cs typeface="League Spartan SemiBold"/>
               </a:rPr>
               <a:t>PERIOD</a:t>
             </a:r>
@@ -34261,8 +33205,6 @@
                   <a:srgbClr val="64707A"/>
                 </a:solidFill>
                 <a:latin typeface="League Spartan SemiBold"/>
-                <a:ea typeface="League Spartan SemiBold"/>
-                <a:cs typeface="League Spartan SemiBold"/>
               </a:rPr>
               <a:t>PERIOD</a:t>
             </a:r>
@@ -34298,8 +33240,6 @@
                   <a:srgbClr val="64707A"/>
                 </a:solidFill>
                 <a:latin typeface="League Spartan SemiBold"/>
-                <a:ea typeface="League Spartan SemiBold"/>
-                <a:cs typeface="League Spartan SemiBold"/>
               </a:rPr>
               <a:t>PERIOD</a:t>
             </a:r>
@@ -34335,8 +33275,6 @@
                   <a:srgbClr val="64707A"/>
                 </a:solidFill>
                 <a:latin typeface="League Spartan SemiBold"/>
-                <a:ea typeface="League Spartan SemiBold"/>
-                <a:cs typeface="League Spartan SemiBold"/>
               </a:rPr>
               <a:t>PERIOD</a:t>
             </a:r>
@@ -34372,8 +33310,6 @@
                   <a:srgbClr val="101A2B"/>
                 </a:solidFill>
                 <a:latin typeface="Urbanist SemiBold"/>
-                <a:ea typeface="Urbanist SemiBold"/>
-                <a:cs typeface="Urbanist SemiBold"/>
               </a:rPr>
               <a:t>Work package</a:t>
             </a:r>
@@ -34409,8 +33345,6 @@
                   <a:srgbClr val="64707A"/>
                 </a:solidFill>
                 <a:latin typeface="Urbanist"/>
-                <a:ea typeface="Urbanist"/>
-                <a:cs typeface="Urbanist"/>
               </a:rPr>
               <a:t>What is in it</a:t>
             </a:r>
@@ -34506,8 +33440,6 @@
                   <a:srgbClr val="FFFFFF"/>
                 </a:solidFill>
                 <a:latin typeface="League Spartan SemiBold"/>
-                <a:ea typeface="League Spartan SemiBold"/>
-                <a:cs typeface="League Spartan SemiBold"/>
               </a:rPr>
               <a:t>Milestone</a:t>
             </a:r>
@@ -34543,8 +33475,6 @@
                   <a:srgbClr val="101A2B"/>
                 </a:solidFill>
                 <a:latin typeface="Urbanist SemiBold"/>
-                <a:ea typeface="Urbanist SemiBold"/>
-                <a:cs typeface="Urbanist SemiBold"/>
               </a:rPr>
               <a:t>Work package</a:t>
             </a:r>
@@ -34580,8 +33510,6 @@
                   <a:srgbClr val="64707A"/>
                 </a:solidFill>
                 <a:latin typeface="Urbanist"/>
-                <a:ea typeface="Urbanist"/>
-                <a:cs typeface="Urbanist"/>
               </a:rPr>
               <a:t>What is in it</a:t>
             </a:r>
@@ -34679,8 +33607,6 @@
                   <a:srgbClr val="101A2B"/>
                 </a:solidFill>
                 <a:latin typeface="Urbanist SemiBold"/>
-                <a:ea typeface="Urbanist SemiBold"/>
-                <a:cs typeface="Urbanist SemiBold"/>
               </a:rPr>
               <a:t>Work package</a:t>
             </a:r>
@@ -34716,8 +33642,6 @@
                   <a:srgbClr val="64707A"/>
                 </a:solidFill>
                 <a:latin typeface="Urbanist"/>
-                <a:ea typeface="Urbanist"/>
-                <a:cs typeface="Urbanist"/>
               </a:rPr>
               <a:t>What is in it</a:t>
             </a:r>
@@ -34813,8 +33737,6 @@
                   <a:srgbClr val="101A2B"/>
                 </a:solidFill>
                 <a:latin typeface="Urbanist SemiBold"/>
-                <a:ea typeface="Urbanist SemiBold"/>
-                <a:cs typeface="Urbanist SemiBold"/>
               </a:rPr>
               <a:t>Work package</a:t>
             </a:r>
@@ -34850,8 +33772,6 @@
                   <a:srgbClr val="64707A"/>
                 </a:solidFill>
                 <a:latin typeface="Urbanist"/>
-                <a:ea typeface="Urbanist"/>
-                <a:cs typeface="Urbanist"/>
               </a:rPr>
               <a:t>What is in it</a:t>
             </a:r>
@@ -34947,8 +33867,6 @@
                   <a:srgbClr val="101A2B"/>
                 </a:solidFill>
                 <a:latin typeface="Urbanist SemiBold"/>
-                <a:ea typeface="Urbanist SemiBold"/>
-                <a:cs typeface="Urbanist SemiBold"/>
               </a:rPr>
               <a:t>Work package</a:t>
             </a:r>
@@ -34984,8 +33902,6 @@
                   <a:srgbClr val="64707A"/>
                 </a:solidFill>
                 <a:latin typeface="Urbanist"/>
-                <a:ea typeface="Urbanist"/>
-                <a:cs typeface="Urbanist"/>
               </a:rPr>
               <a:t>What is in it</a:t>
             </a:r>
@@ -35081,8 +33997,6 @@
                   <a:srgbClr val="101A2B"/>
                 </a:solidFill>
                 <a:latin typeface="Urbanist SemiBold"/>
-                <a:ea typeface="Urbanist SemiBold"/>
-                <a:cs typeface="Urbanist SemiBold"/>
               </a:rPr>
               <a:t>Work package</a:t>
             </a:r>
@@ -35118,8 +34032,6 @@
                   <a:srgbClr val="64707A"/>
                 </a:solidFill>
                 <a:latin typeface="Urbanist"/>
-                <a:ea typeface="Urbanist"/>
-                <a:cs typeface="Urbanist"/>
               </a:rPr>
               <a:t>What is in it</a:t>
             </a:r>
@@ -35215,8 +34127,6 @@
                   <a:srgbClr val="FFFFFF"/>
                 </a:solidFill>
                 <a:latin typeface="League Spartan SemiBold"/>
-                <a:ea typeface="League Spartan SemiBold"/>
-                <a:cs typeface="League Spartan SemiBold"/>
               </a:rPr>
               <a:t>Milestone</a:t>
             </a:r>
@@ -35252,8 +34162,6 @@
                   <a:srgbClr val="64707A"/>
                 </a:solidFill>
                 <a:latin typeface="League Spartan Medium"/>
-                <a:ea typeface="League Spartan Medium"/>
-                <a:cs typeface="League Spartan Medium"/>
               </a:rPr>
               <a:t>28</a:t>
             </a:r>
@@ -35289,8 +34197,6 @@
                   <a:srgbClr val="64707A"/>
                 </a:solidFill>
                 <a:latin typeface="League Spartan"/>
-                <a:ea typeface="League Spartan"/>
-                <a:cs typeface="League Spartan"/>
               </a:rPr>
               <a:t>PROGRAMME</a:t>
             </a:r>
@@ -35524,8 +34430,6 @@
                   <a:srgbClr val="FFFFFF"/>
                 </a:solidFill>
                 <a:latin typeface="League Spartan SemiBold"/>
-                <a:ea typeface="League Spartan SemiBold"/>
-                <a:cs typeface="League Spartan SemiBold"/>
               </a:rPr>
               <a:t>01</a:t>
             </a:r>
@@ -35561,8 +34465,6 @@
                   <a:srgbClr val="E7EBF0"/>
                 </a:solidFill>
                 <a:latin typeface="League Spartan SemiBold"/>
-                <a:ea typeface="League Spartan SemiBold"/>
-                <a:cs typeface="League Spartan SemiBold"/>
               </a:rPr>
               <a:t>IAQ TECHNOLOGY INTERNATIONAL SDN BHD</a:t>
             </a:r>
@@ -35622,8 +34524,6 @@
                   <a:srgbClr val="64707A"/>
                 </a:solidFill>
                 <a:latin typeface="League Spartan SemiBold"/>
-                <a:ea typeface="League Spartan SemiBold"/>
-                <a:cs typeface="League Spartan SemiBold"/>
               </a:rPr>
               <a:t>KICKER · TWO OR THREE WORDS</a:t>
             </a:r>
@@ -35663,8 +34563,6 @@
                   <a:srgbClr val="FFFFFF"/>
                 </a:solidFill>
                 <a:latin typeface="Poppins SemiBold"/>
-                <a:ea typeface="Poppins SemiBold"/>
-                <a:cs typeface="Poppins SemiBold"/>
               </a:rPr>
               <a:t>The one line this deck is about, eight words or fewer.</a:t>
             </a:r>
@@ -35700,8 +34598,6 @@
                   <a:srgbClr val="64707A"/>
                 </a:solidFill>
                 <a:latin typeface="Urbanist"/>
-                <a:ea typeface="Urbanist"/>
-                <a:cs typeface="Urbanist"/>
               </a:rPr>
               <a:t>A sentence under it saying who it is for and what it covers.</a:t>
             </a:r>
@@ -35737,8 +34633,6 @@
                   <a:srgbClr val="64707A"/>
                 </a:solidFill>
                 <a:latin typeface="League Spartan"/>
-                <a:ea typeface="League Spartan"/>
-                <a:cs typeface="League Spartan"/>
               </a:rPr>
               <a:t>PREPARED FOR · CLIENT · DATE</a:t>
             </a:r>
@@ -35774,8 +34668,6 @@
                   <a:srgbClr val="96A2B2"/>
                 </a:solidFill>
                 <a:latin typeface="League Spartan Medium"/>
-                <a:ea typeface="League Spartan Medium"/>
-                <a:cs typeface="League Spartan Medium"/>
               </a:rPr>
               <a:t>02</a:t>
             </a:r>
@@ -35811,8 +34703,6 @@
                   <a:srgbClr val="96A2B2"/>
                 </a:solidFill>
                 <a:latin typeface="League Spartan"/>
-                <a:ea typeface="League Spartan"/>
-                <a:cs typeface="League Spartan"/>
               </a:rPr>
               <a:t>TITLE</a:t>
             </a:r>
@@ -35926,8 +34816,6 @@
                   <a:srgbClr val="FFFFFF"/>
                 </a:solidFill>
                 <a:latin typeface="League Spartan SemiBold"/>
-                <a:ea typeface="League Spartan SemiBold"/>
-                <a:cs typeface="League Spartan SemiBold"/>
               </a:rPr>
               <a:t>15</a:t>
             </a:r>
@@ -35963,8 +34851,6 @@
                   <a:srgbClr val="101A2B"/>
                 </a:solidFill>
                 <a:latin typeface="League Spartan SemiBold"/>
-                <a:ea typeface="League Spartan SemiBold"/>
-                <a:cs typeface="League Spartan SemiBold"/>
               </a:rPr>
               <a:t>PART 01 · THE COMPANY</a:t>
             </a:r>
@@ -36054,8 +34940,6 @@
                   <a:srgbClr val="EC2326"/>
                 </a:solidFill>
                 <a:latin typeface="Poppins SemiBold"/>
-                <a:ea typeface="Poppins SemiBold"/>
-                <a:cs typeface="Poppins SemiBold"/>
               </a:rPr>
               <a:t>Cleanroom classes we build to</a:t>
             </a:r>
@@ -36091,8 +34975,6 @@
                   <a:srgbClr val="64707A"/>
                 </a:solidFill>
                 <a:latin typeface="Urbanist"/>
-                <a:ea typeface="Urbanist"/>
-                <a:cs typeface="Urbanist"/>
               </a:rPr>
               <a:t>What each grade means and where it is used.</a:t>
             </a:r>
@@ -36158,8 +35040,6 @@
                   <a:srgbClr val="FFFFFF"/>
                 </a:solidFill>
                 <a:latin typeface="League Spartan SemiBold"/>
-                <a:ea typeface="League Spartan SemiBold"/>
-                <a:cs typeface="League Spartan SemiBold"/>
               </a:rPr>
               <a:t>CLASS</a:t>
             </a:r>
@@ -36225,8 +35105,6 @@
                   <a:srgbClr val="FFFFFF"/>
                 </a:solidFill>
                 <a:latin typeface="League Spartan SemiBold"/>
-                <a:ea typeface="League Spartan SemiBold"/>
-                <a:cs typeface="League Spartan SemiBold"/>
               </a:rPr>
               <a:t>ISO GRADE</a:t>
             </a:r>
@@ -36292,8 +35170,6 @@
                   <a:srgbClr val="FFFFFF"/>
                 </a:solidFill>
                 <a:latin typeface="League Spartan SemiBold"/>
-                <a:ea typeface="League Spartan SemiBold"/>
-                <a:cs typeface="League Spartan SemiBold"/>
               </a:rPr>
               <a:t>PARTICLES PER M³</a:t>
             </a:r>
@@ -36359,8 +35235,6 @@
                   <a:srgbClr val="FFFFFF"/>
                 </a:solidFill>
                 <a:latin typeface="League Spartan SemiBold"/>
-                <a:ea typeface="League Spartan SemiBold"/>
-                <a:cs typeface="League Spartan SemiBold"/>
               </a:rPr>
               <a:t>TYPICAL USE</a:t>
             </a:r>
@@ -36426,8 +35300,6 @@
                   <a:srgbClr val="FFFFFF"/>
                 </a:solidFill>
                 <a:latin typeface="League Spartan SemiBold"/>
-                <a:ea typeface="League Spartan SemiBold"/>
-                <a:cs typeface="League Spartan SemiBold"/>
               </a:rPr>
               <a:t>DELIVERED</a:t>
             </a:r>
@@ -36493,8 +35365,6 @@
                   <a:srgbClr val="101A2B"/>
                 </a:solidFill>
                 <a:latin typeface="Urbanist SemiBold"/>
-                <a:ea typeface="Urbanist SemiBold"/>
-                <a:cs typeface="Urbanist SemiBold"/>
               </a:rPr>
               <a:t>Class 1</a:t>
             </a:r>
@@ -36560,8 +35430,6 @@
                   <a:srgbClr val="1E2A3D"/>
                 </a:solidFill>
                 <a:latin typeface="Urbanist"/>
-                <a:ea typeface="Urbanist"/>
-                <a:cs typeface="Urbanist"/>
               </a:rPr>
               <a:t>ISO 3</a:t>
             </a:r>
@@ -36627,8 +35495,6 @@
                   <a:srgbClr val="1E2A3D"/>
                 </a:solidFill>
                 <a:latin typeface="Urbanist"/>
-                <a:ea typeface="Urbanist"/>
-                <a:cs typeface="Urbanist"/>
               </a:rPr>
               <a:t>≤ 1,000 at 0.1 µm</a:t>
             </a:r>
@@ -36694,8 +35560,6 @@
                   <a:srgbClr val="1E2A3D"/>
                 </a:solidFill>
                 <a:latin typeface="Urbanist"/>
-                <a:ea typeface="Urbanist"/>
-                <a:cs typeface="Urbanist"/>
               </a:rPr>
               <a:t>Advanced-node lithography</a:t>
             </a:r>
@@ -36761,8 +35625,6 @@
                   <a:srgbClr val="EC2326"/>
                 </a:solidFill>
                 <a:latin typeface="Urbanist SemiBold"/>
-                <a:ea typeface="Urbanist SemiBold"/>
-                <a:cs typeface="Urbanist SemiBold"/>
               </a:rPr>
               <a:t>Yes</a:t>
             </a:r>
@@ -36828,8 +35690,6 @@
                   <a:srgbClr val="101A2B"/>
                 </a:solidFill>
                 <a:latin typeface="Urbanist SemiBold"/>
-                <a:ea typeface="Urbanist SemiBold"/>
-                <a:cs typeface="Urbanist SemiBold"/>
               </a:rPr>
               <a:t>Class 10</a:t>
             </a:r>
@@ -36895,8 +35755,6 @@
                   <a:srgbClr val="1E2A3D"/>
                 </a:solidFill>
                 <a:latin typeface="Urbanist"/>
-                <a:ea typeface="Urbanist"/>
-                <a:cs typeface="Urbanist"/>
               </a:rPr>
               <a:t>ISO 4</a:t>
             </a:r>
@@ -36962,8 +35820,6 @@
                   <a:srgbClr val="1E2A3D"/>
                 </a:solidFill>
                 <a:latin typeface="Urbanist"/>
-                <a:ea typeface="Urbanist"/>
-                <a:cs typeface="Urbanist"/>
               </a:rPr>
               <a:t>≤ 10,000 at 0.1 µm</a:t>
             </a:r>
@@ -37029,8 +35885,6 @@
                   <a:srgbClr val="1E2A3D"/>
                 </a:solidFill>
                 <a:latin typeface="Urbanist"/>
-                <a:ea typeface="Urbanist"/>
-                <a:cs typeface="Urbanist"/>
               </a:rPr>
               <a:t>Wafer fabrication</a:t>
             </a:r>
@@ -37096,8 +35950,6 @@
                   <a:srgbClr val="EC2326"/>
                 </a:solidFill>
                 <a:latin typeface="Urbanist SemiBold"/>
-                <a:ea typeface="Urbanist SemiBold"/>
-                <a:cs typeface="Urbanist SemiBold"/>
               </a:rPr>
               <a:t>Yes</a:t>
             </a:r>
@@ -37163,8 +36015,6 @@
                   <a:srgbClr val="101A2B"/>
                 </a:solidFill>
                 <a:latin typeface="Urbanist SemiBold"/>
-                <a:ea typeface="Urbanist SemiBold"/>
-                <a:cs typeface="Urbanist SemiBold"/>
               </a:rPr>
               <a:t>Class 100</a:t>
             </a:r>
@@ -37230,8 +36080,6 @@
                   <a:srgbClr val="1E2A3D"/>
                 </a:solidFill>
                 <a:latin typeface="Urbanist"/>
-                <a:ea typeface="Urbanist"/>
-                <a:cs typeface="Urbanist"/>
               </a:rPr>
               <a:t>ISO 5</a:t>
             </a:r>
@@ -37297,8 +36145,6 @@
                   <a:srgbClr val="1E2A3D"/>
                 </a:solidFill>
                 <a:latin typeface="Urbanist"/>
-                <a:ea typeface="Urbanist"/>
-                <a:cs typeface="Urbanist"/>
               </a:rPr>
               <a:t>≤ 3,520 at 0.5 µm</a:t>
             </a:r>
@@ -37364,8 +36210,6 @@
                   <a:srgbClr val="1E2A3D"/>
                 </a:solidFill>
                 <a:latin typeface="Urbanist"/>
-                <a:ea typeface="Urbanist"/>
-                <a:cs typeface="Urbanist"/>
               </a:rPr>
               <a:t>Photomask, test and assembly</a:t>
             </a:r>
@@ -37431,8 +36275,6 @@
                   <a:srgbClr val="EC2326"/>
                 </a:solidFill>
                 <a:latin typeface="Urbanist SemiBold"/>
-                <a:ea typeface="Urbanist SemiBold"/>
-                <a:cs typeface="Urbanist SemiBold"/>
               </a:rPr>
               <a:t>Yes</a:t>
             </a:r>
@@ -37498,8 +36340,6 @@
                   <a:srgbClr val="101A2B"/>
                 </a:solidFill>
                 <a:latin typeface="Urbanist SemiBold"/>
-                <a:ea typeface="Urbanist SemiBold"/>
-                <a:cs typeface="Urbanist SemiBold"/>
               </a:rPr>
               <a:t>Class 1K</a:t>
             </a:r>
@@ -37565,8 +36405,6 @@
                   <a:srgbClr val="1E2A3D"/>
                 </a:solidFill>
                 <a:latin typeface="Urbanist"/>
-                <a:ea typeface="Urbanist"/>
-                <a:cs typeface="Urbanist"/>
               </a:rPr>
               <a:t>ISO 6</a:t>
             </a:r>
@@ -37632,8 +36470,6 @@
                   <a:srgbClr val="1E2A3D"/>
                 </a:solidFill>
                 <a:latin typeface="Urbanist"/>
-                <a:ea typeface="Urbanist"/>
-                <a:cs typeface="Urbanist"/>
               </a:rPr>
               <a:t>≤ 35,200 at 0.5 µm</a:t>
             </a:r>
@@ -37699,8 +36535,6 @@
                   <a:srgbClr val="1E2A3D"/>
                 </a:solidFill>
                 <a:latin typeface="Urbanist"/>
-                <a:ea typeface="Urbanist"/>
-                <a:cs typeface="Urbanist"/>
               </a:rPr>
               <a:t>Medical device, parenteral</a:t>
             </a:r>
@@ -37766,8 +36600,6 @@
                   <a:srgbClr val="EC2326"/>
                 </a:solidFill>
                 <a:latin typeface="Urbanist SemiBold"/>
-                <a:ea typeface="Urbanist SemiBold"/>
-                <a:cs typeface="Urbanist SemiBold"/>
               </a:rPr>
               <a:t>Yes</a:t>
             </a:r>
@@ -37833,8 +36665,6 @@
                   <a:srgbClr val="101A2B"/>
                 </a:solidFill>
                 <a:latin typeface="Urbanist SemiBold"/>
-                <a:ea typeface="Urbanist SemiBold"/>
-                <a:cs typeface="Urbanist SemiBold"/>
               </a:rPr>
               <a:t>Class 10K</a:t>
             </a:r>
@@ -37900,8 +36730,6 @@
                   <a:srgbClr val="1E2A3D"/>
                 </a:solidFill>
                 <a:latin typeface="Urbanist"/>
-                <a:ea typeface="Urbanist"/>
-                <a:cs typeface="Urbanist"/>
               </a:rPr>
               <a:t>ISO 7</a:t>
             </a:r>
@@ -37967,8 +36795,6 @@
                   <a:srgbClr val="1E2A3D"/>
                 </a:solidFill>
                 <a:latin typeface="Urbanist"/>
-                <a:ea typeface="Urbanist"/>
-                <a:cs typeface="Urbanist"/>
               </a:rPr>
               <a:t>≤ 352,000 at 0.5 µm</a:t>
             </a:r>
@@ -38034,8 +36860,6 @@
                   <a:srgbClr val="1E2A3D"/>
                 </a:solidFill>
                 <a:latin typeface="Urbanist"/>
-                <a:ea typeface="Urbanist"/>
-                <a:cs typeface="Urbanist"/>
               </a:rPr>
               <a:t>Pharmaceutical, GMP</a:t>
             </a:r>
@@ -38101,8 +36925,6 @@
                   <a:srgbClr val="EC2326"/>
                 </a:solidFill>
                 <a:latin typeface="Urbanist SemiBold"/>
-                <a:ea typeface="Urbanist SemiBold"/>
-                <a:cs typeface="Urbanist SemiBold"/>
               </a:rPr>
               <a:t>Yes</a:t>
             </a:r>
@@ -38168,8 +36990,6 @@
                   <a:srgbClr val="101A2B"/>
                 </a:solidFill>
                 <a:latin typeface="Urbanist SemiBold"/>
-                <a:ea typeface="Urbanist SemiBold"/>
-                <a:cs typeface="Urbanist SemiBold"/>
               </a:rPr>
               <a:t>Class 100K</a:t>
             </a:r>
@@ -38235,8 +37055,6 @@
                   <a:srgbClr val="1E2A3D"/>
                 </a:solidFill>
                 <a:latin typeface="Urbanist"/>
-                <a:ea typeface="Urbanist"/>
-                <a:cs typeface="Urbanist"/>
               </a:rPr>
               <a:t>ISO 8</a:t>
             </a:r>
@@ -38302,8 +37120,6 @@
                   <a:srgbClr val="1E2A3D"/>
                 </a:solidFill>
                 <a:latin typeface="Urbanist"/>
-                <a:ea typeface="Urbanist"/>
-                <a:cs typeface="Urbanist"/>
               </a:rPr>
               <a:t>≤ 3.5 m at 0.5 µm</a:t>
             </a:r>
@@ -38369,8 +37185,6 @@
                   <a:srgbClr val="1E2A3D"/>
                 </a:solidFill>
                 <a:latin typeface="Urbanist"/>
-                <a:ea typeface="Urbanist"/>
-                <a:cs typeface="Urbanist"/>
               </a:rPr>
               <a:t>Packaging and support areas</a:t>
             </a:r>
@@ -38436,8 +37250,6 @@
                   <a:srgbClr val="EC2326"/>
                 </a:solidFill>
                 <a:latin typeface="Urbanist SemiBold"/>
-                <a:ea typeface="Urbanist SemiBold"/>
-                <a:cs typeface="Urbanist SemiBold"/>
               </a:rPr>
               <a:t>Yes</a:t>
             </a:r>
@@ -38473,8 +37285,6 @@
                   <a:srgbClr val="64707A"/>
                 </a:solidFill>
                 <a:latin typeface="League Spartan Medium"/>
-                <a:ea typeface="League Spartan Medium"/>
-                <a:cs typeface="League Spartan Medium"/>
               </a:rPr>
               <a:t>29</a:t>
             </a:r>
@@ -38510,8 +37320,6 @@
                   <a:srgbClr val="64707A"/>
                 </a:solidFill>
                 <a:latin typeface="League Spartan"/>
-                <a:ea typeface="League Spartan"/>
-                <a:cs typeface="League Spartan"/>
               </a:rPr>
               <a:t>TABLE</a:t>
             </a:r>
@@ -38625,8 +37433,6 @@
                   <a:srgbClr val="FFFFFF"/>
                 </a:solidFill>
                 <a:latin typeface="League Spartan SemiBold"/>
-                <a:ea typeface="League Spartan SemiBold"/>
-                <a:cs typeface="League Spartan SemiBold"/>
               </a:rPr>
               <a:t>15</a:t>
             </a:r>
@@ -38662,8 +37468,6 @@
                   <a:srgbClr val="101A2B"/>
                 </a:solidFill>
                 <a:latin typeface="League Spartan SemiBold"/>
-                <a:ea typeface="League Spartan SemiBold"/>
-                <a:cs typeface="League Spartan SemiBold"/>
               </a:rPr>
               <a:t>SECTION NAME</a:t>
             </a:r>
@@ -38753,8 +37557,6 @@
                   <a:srgbClr val="64707A"/>
                 </a:solidFill>
                 <a:latin typeface="Poppins SemiBold"/>
-                <a:ea typeface="Poppins SemiBold"/>
-                <a:cs typeface="Poppins SemiBold"/>
               </a:rPr>
               <a:t>Page title</a:t>
             </a:r>
@@ -38790,8 +37592,6 @@
                   <a:srgbClr val="64707A"/>
                 </a:solidFill>
                 <a:latin typeface="Urbanist"/>
-                <a:ea typeface="Urbanist"/>
-                <a:cs typeface="Urbanist"/>
               </a:rPr>
               <a:t>One line under it saying what the page is for.</a:t>
             </a:r>
@@ -38857,8 +37657,6 @@
                   <a:srgbClr val="FFFFFF"/>
                 </a:solidFill>
                 <a:latin typeface="League Spartan SemiBold"/>
-                <a:ea typeface="League Spartan SemiBold"/>
-                <a:cs typeface="League Spartan SemiBold"/>
               </a:rPr>
               <a:t>COLUMN</a:t>
             </a:r>
@@ -38924,8 +37722,6 @@
                   <a:srgbClr val="FFFFFF"/>
                 </a:solidFill>
                 <a:latin typeface="League Spartan SemiBold"/>
-                <a:ea typeface="League Spartan SemiBold"/>
-                <a:cs typeface="League Spartan SemiBold"/>
               </a:rPr>
               <a:t>COLUMN</a:t>
             </a:r>
@@ -38991,8 +37787,6 @@
                   <a:srgbClr val="FFFFFF"/>
                 </a:solidFill>
                 <a:latin typeface="League Spartan SemiBold"/>
-                <a:ea typeface="League Spartan SemiBold"/>
-                <a:cs typeface="League Spartan SemiBold"/>
               </a:rPr>
               <a:t>COLUMN</a:t>
             </a:r>
@@ -39058,8 +37852,6 @@
                   <a:srgbClr val="FFFFFF"/>
                 </a:solidFill>
                 <a:latin typeface="League Spartan SemiBold"/>
-                <a:ea typeface="League Spartan SemiBold"/>
-                <a:cs typeface="League Spartan SemiBold"/>
               </a:rPr>
               <a:t>COLUMN</a:t>
             </a:r>
@@ -39125,8 +37917,6 @@
                   <a:srgbClr val="FFFFFF"/>
                 </a:solidFill>
                 <a:latin typeface="League Spartan SemiBold"/>
-                <a:ea typeface="League Spartan SemiBold"/>
-                <a:cs typeface="League Spartan SemiBold"/>
               </a:rPr>
               <a:t>COLUMN</a:t>
             </a:r>
@@ -39192,8 +37982,6 @@
                   <a:srgbClr val="64707A"/>
                 </a:solidFill>
                 <a:latin typeface="Urbanist SemiBold"/>
-                <a:ea typeface="Urbanist SemiBold"/>
-                <a:cs typeface="Urbanist SemiBold"/>
               </a:rPr>
               <a:t>Row label</a:t>
             </a:r>
@@ -39259,8 +38047,6 @@
                   <a:srgbClr val="64707A"/>
                 </a:solidFill>
                 <a:latin typeface="Urbanist"/>
-                <a:ea typeface="Urbanist"/>
-                <a:cs typeface="Urbanist"/>
               </a:rPr>
               <a:t>Value</a:t>
             </a:r>
@@ -39326,8 +38112,6 @@
                   <a:srgbClr val="64707A"/>
                 </a:solidFill>
                 <a:latin typeface="Urbanist"/>
-                <a:ea typeface="Urbanist"/>
-                <a:cs typeface="Urbanist"/>
               </a:rPr>
               <a:t>Value</a:t>
             </a:r>
@@ -39393,8 +38177,6 @@
                   <a:srgbClr val="64707A"/>
                 </a:solidFill>
                 <a:latin typeface="Urbanist"/>
-                <a:ea typeface="Urbanist"/>
-                <a:cs typeface="Urbanist"/>
               </a:rPr>
               <a:t>Value</a:t>
             </a:r>
@@ -39460,8 +38242,6 @@
                   <a:srgbClr val="64707A"/>
                 </a:solidFill>
                 <a:latin typeface="Urbanist SemiBold"/>
-                <a:ea typeface="Urbanist SemiBold"/>
-                <a:cs typeface="Urbanist SemiBold"/>
               </a:rPr>
               <a:t>Called out</a:t>
             </a:r>
@@ -39527,8 +38307,6 @@
                   <a:srgbClr val="64707A"/>
                 </a:solidFill>
                 <a:latin typeface="Urbanist SemiBold"/>
-                <a:ea typeface="Urbanist SemiBold"/>
-                <a:cs typeface="Urbanist SemiBold"/>
               </a:rPr>
               <a:t>Row label</a:t>
             </a:r>
@@ -39594,8 +38372,6 @@
                   <a:srgbClr val="64707A"/>
                 </a:solidFill>
                 <a:latin typeface="Urbanist"/>
-                <a:ea typeface="Urbanist"/>
-                <a:cs typeface="Urbanist"/>
               </a:rPr>
               <a:t>Value</a:t>
             </a:r>
@@ -39661,8 +38437,6 @@
                   <a:srgbClr val="64707A"/>
                 </a:solidFill>
                 <a:latin typeface="Urbanist"/>
-                <a:ea typeface="Urbanist"/>
-                <a:cs typeface="Urbanist"/>
               </a:rPr>
               <a:t>Value</a:t>
             </a:r>
@@ -39728,8 +38502,6 @@
                   <a:srgbClr val="64707A"/>
                 </a:solidFill>
                 <a:latin typeface="Urbanist"/>
-                <a:ea typeface="Urbanist"/>
-                <a:cs typeface="Urbanist"/>
               </a:rPr>
               <a:t>Value</a:t>
             </a:r>
@@ -39795,8 +38567,6 @@
                   <a:srgbClr val="64707A"/>
                 </a:solidFill>
                 <a:latin typeface="Urbanist SemiBold"/>
-                <a:ea typeface="Urbanist SemiBold"/>
-                <a:cs typeface="Urbanist SemiBold"/>
               </a:rPr>
               <a:t>Called out</a:t>
             </a:r>
@@ -39862,8 +38632,6 @@
                   <a:srgbClr val="64707A"/>
                 </a:solidFill>
                 <a:latin typeface="Urbanist SemiBold"/>
-                <a:ea typeface="Urbanist SemiBold"/>
-                <a:cs typeface="Urbanist SemiBold"/>
               </a:rPr>
               <a:t>Row label</a:t>
             </a:r>
@@ -39929,8 +38697,6 @@
                   <a:srgbClr val="64707A"/>
                 </a:solidFill>
                 <a:latin typeface="Urbanist"/>
-                <a:ea typeface="Urbanist"/>
-                <a:cs typeface="Urbanist"/>
               </a:rPr>
               <a:t>Value</a:t>
             </a:r>
@@ -39996,8 +38762,6 @@
                   <a:srgbClr val="64707A"/>
                 </a:solidFill>
                 <a:latin typeface="Urbanist"/>
-                <a:ea typeface="Urbanist"/>
-                <a:cs typeface="Urbanist"/>
               </a:rPr>
               <a:t>Value</a:t>
             </a:r>
@@ -40063,8 +38827,6 @@
                   <a:srgbClr val="64707A"/>
                 </a:solidFill>
                 <a:latin typeface="Urbanist"/>
-                <a:ea typeface="Urbanist"/>
-                <a:cs typeface="Urbanist"/>
               </a:rPr>
               <a:t>Value</a:t>
             </a:r>
@@ -40130,8 +38892,6 @@
                   <a:srgbClr val="64707A"/>
                 </a:solidFill>
                 <a:latin typeface="Urbanist SemiBold"/>
-                <a:ea typeface="Urbanist SemiBold"/>
-                <a:cs typeface="Urbanist SemiBold"/>
               </a:rPr>
               <a:t>Called out</a:t>
             </a:r>
@@ -40197,8 +38957,6 @@
                   <a:srgbClr val="64707A"/>
                 </a:solidFill>
                 <a:latin typeface="Urbanist SemiBold"/>
-                <a:ea typeface="Urbanist SemiBold"/>
-                <a:cs typeface="Urbanist SemiBold"/>
               </a:rPr>
               <a:t>Row label</a:t>
             </a:r>
@@ -40264,8 +39022,6 @@
                   <a:srgbClr val="64707A"/>
                 </a:solidFill>
                 <a:latin typeface="Urbanist"/>
-                <a:ea typeface="Urbanist"/>
-                <a:cs typeface="Urbanist"/>
               </a:rPr>
               <a:t>Value</a:t>
             </a:r>
@@ -40331,8 +39087,6 @@
                   <a:srgbClr val="64707A"/>
                 </a:solidFill>
                 <a:latin typeface="Urbanist"/>
-                <a:ea typeface="Urbanist"/>
-                <a:cs typeface="Urbanist"/>
               </a:rPr>
               <a:t>Value</a:t>
             </a:r>
@@ -40398,8 +39152,6 @@
                   <a:srgbClr val="64707A"/>
                 </a:solidFill>
                 <a:latin typeface="Urbanist"/>
-                <a:ea typeface="Urbanist"/>
-                <a:cs typeface="Urbanist"/>
               </a:rPr>
               <a:t>Value</a:t>
             </a:r>
@@ -40465,8 +39217,6 @@
                   <a:srgbClr val="64707A"/>
                 </a:solidFill>
                 <a:latin typeface="Urbanist SemiBold"/>
-                <a:ea typeface="Urbanist SemiBold"/>
-                <a:cs typeface="Urbanist SemiBold"/>
               </a:rPr>
               <a:t>Called out</a:t>
             </a:r>
@@ -40532,8 +39282,6 @@
                   <a:srgbClr val="64707A"/>
                 </a:solidFill>
                 <a:latin typeface="Urbanist SemiBold"/>
-                <a:ea typeface="Urbanist SemiBold"/>
-                <a:cs typeface="Urbanist SemiBold"/>
               </a:rPr>
               <a:t>Row label</a:t>
             </a:r>
@@ -40599,8 +39347,6 @@
                   <a:srgbClr val="64707A"/>
                 </a:solidFill>
                 <a:latin typeface="Urbanist"/>
-                <a:ea typeface="Urbanist"/>
-                <a:cs typeface="Urbanist"/>
               </a:rPr>
               <a:t>Value</a:t>
             </a:r>
@@ -40666,8 +39412,6 @@
                   <a:srgbClr val="64707A"/>
                 </a:solidFill>
                 <a:latin typeface="Urbanist"/>
-                <a:ea typeface="Urbanist"/>
-                <a:cs typeface="Urbanist"/>
               </a:rPr>
               <a:t>Value</a:t>
             </a:r>
@@ -40733,8 +39477,6 @@
                   <a:srgbClr val="64707A"/>
                 </a:solidFill>
                 <a:latin typeface="Urbanist"/>
-                <a:ea typeface="Urbanist"/>
-                <a:cs typeface="Urbanist"/>
               </a:rPr>
               <a:t>Value</a:t>
             </a:r>
@@ -40800,8 +39542,6 @@
                   <a:srgbClr val="64707A"/>
                 </a:solidFill>
                 <a:latin typeface="Urbanist SemiBold"/>
-                <a:ea typeface="Urbanist SemiBold"/>
-                <a:cs typeface="Urbanist SemiBold"/>
               </a:rPr>
               <a:t>Called out</a:t>
             </a:r>
@@ -40867,8 +39607,6 @@
                   <a:srgbClr val="64707A"/>
                 </a:solidFill>
                 <a:latin typeface="Urbanist SemiBold"/>
-                <a:ea typeface="Urbanist SemiBold"/>
-                <a:cs typeface="Urbanist SemiBold"/>
               </a:rPr>
               <a:t>Row label</a:t>
             </a:r>
@@ -40934,8 +39672,6 @@
                   <a:srgbClr val="64707A"/>
                 </a:solidFill>
                 <a:latin typeface="Urbanist"/>
-                <a:ea typeface="Urbanist"/>
-                <a:cs typeface="Urbanist"/>
               </a:rPr>
               <a:t>Value</a:t>
             </a:r>
@@ -41001,8 +39737,6 @@
                   <a:srgbClr val="64707A"/>
                 </a:solidFill>
                 <a:latin typeface="Urbanist"/>
-                <a:ea typeface="Urbanist"/>
-                <a:cs typeface="Urbanist"/>
               </a:rPr>
               <a:t>Value</a:t>
             </a:r>
@@ -41068,8 +39802,6 @@
                   <a:srgbClr val="64707A"/>
                 </a:solidFill>
                 <a:latin typeface="Urbanist"/>
-                <a:ea typeface="Urbanist"/>
-                <a:cs typeface="Urbanist"/>
               </a:rPr>
               <a:t>Value</a:t>
             </a:r>
@@ -41135,8 +39867,6 @@
                   <a:srgbClr val="64707A"/>
                 </a:solidFill>
                 <a:latin typeface="Urbanist SemiBold"/>
-                <a:ea typeface="Urbanist SemiBold"/>
-                <a:cs typeface="Urbanist SemiBold"/>
               </a:rPr>
               <a:t>Called out</a:t>
             </a:r>
@@ -41172,8 +39902,6 @@
                   <a:srgbClr val="64707A"/>
                 </a:solidFill>
                 <a:latin typeface="League Spartan Medium"/>
-                <a:ea typeface="League Spartan Medium"/>
-                <a:cs typeface="League Spartan Medium"/>
               </a:rPr>
               <a:t>30</a:t>
             </a:r>
@@ -41209,8 +39937,6 @@
                   <a:srgbClr val="64707A"/>
                 </a:solidFill>
                 <a:latin typeface="League Spartan"/>
-                <a:ea typeface="League Spartan"/>
-                <a:cs typeface="League Spartan"/>
               </a:rPr>
               <a:t>TABLE</a:t>
             </a:r>
@@ -41444,8 +40170,6 @@
                   <a:srgbClr val="FFFFFF"/>
                 </a:solidFill>
                 <a:latin typeface="League Spartan SemiBold"/>
-                <a:ea typeface="League Spartan SemiBold"/>
-                <a:cs typeface="League Spartan SemiBold"/>
               </a:rPr>
               <a:t>16</a:t>
             </a:r>
@@ -41481,8 +40205,6 @@
                   <a:srgbClr val="E7EBF0"/>
                 </a:solidFill>
                 <a:latin typeface="League Spartan SemiBold"/>
-                <a:ea typeface="League Spartan SemiBold"/>
-                <a:cs typeface="League Spartan SemiBold"/>
               </a:rPr>
               <a:t>IAQ TECHNOLOGY INTERNATIONAL SDN BHD</a:t>
             </a:r>
@@ -41601,8 +40323,6 @@
                   <a:srgbClr val="FFFFFF"/>
                 </a:solidFill>
                 <a:latin typeface="Poppins SemiBold"/>
-                <a:ea typeface="Poppins SemiBold"/>
-                <a:cs typeface="Poppins SemiBold"/>
               </a:rPr>
               <a:t>The rooms that cannot fail.</a:t>
             </a:r>
@@ -41638,8 +40358,6 @@
                   <a:srgbClr val="E7EBF0"/>
                 </a:solidFill>
                 <a:latin typeface="Urbanist"/>
-                <a:ea typeface="Urbanist"/>
-                <a:cs typeface="Urbanist"/>
               </a:rPr>
               <a:t>Thirty-one years of cleanroom critical delivery, on three continents.</a:t>
             </a:r>
@@ -41675,8 +40393,6 @@
                   <a:srgbClr val="96A2B2"/>
                 </a:solidFill>
                 <a:latin typeface="League Spartan Medium"/>
-                <a:ea typeface="League Spartan Medium"/>
-                <a:cs typeface="League Spartan Medium"/>
               </a:rPr>
               <a:t>31</a:t>
             </a:r>
@@ -41712,8 +40428,6 @@
                   <a:srgbClr val="96A2B2"/>
                 </a:solidFill>
                 <a:latin typeface="League Spartan"/>
-                <a:ea typeface="League Spartan"/>
-                <a:cs typeface="League Spartan"/>
               </a:rPr>
               <a:t>FULL-BLEED IMAGE</a:t>
             </a:r>
@@ -41947,8 +40661,6 @@
                   <a:srgbClr val="FFFFFF"/>
                 </a:solidFill>
                 <a:latin typeface="League Spartan SemiBold"/>
-                <a:ea typeface="League Spartan SemiBold"/>
-                <a:cs typeface="League Spartan SemiBold"/>
               </a:rPr>
               <a:t>16</a:t>
             </a:r>
@@ -41984,8 +40696,6 @@
                   <a:srgbClr val="E7EBF0"/>
                 </a:solidFill>
                 <a:latin typeface="League Spartan SemiBold"/>
-                <a:ea typeface="League Spartan SemiBold"/>
-                <a:cs typeface="League Spartan SemiBold"/>
               </a:rPr>
               <a:t>IAQ TECHNOLOGY INTERNATIONAL SDN BHD</a:t>
             </a:r>
@@ -42104,8 +40814,6 @@
                   <a:srgbClr val="FFFFFF"/>
                 </a:solidFill>
                 <a:latin typeface="Poppins SemiBold"/>
-                <a:ea typeface="Poppins SemiBold"/>
-                <a:cs typeface="Poppins SemiBold"/>
               </a:rPr>
               <a:t>One line over the photograph.</a:t>
             </a:r>
@@ -42141,8 +40849,6 @@
                   <a:srgbClr val="E7EBF0"/>
                 </a:solidFill>
                 <a:latin typeface="Urbanist"/>
-                <a:ea typeface="Urbanist"/>
-                <a:cs typeface="Urbanist"/>
               </a:rPr>
               <a:t>A sentence under it, if the line needs support. Otherwise leave it out.</a:t>
             </a:r>
@@ -42178,8 +40884,6 @@
                   <a:srgbClr val="96A2B2"/>
                 </a:solidFill>
                 <a:latin typeface="League Spartan Medium"/>
-                <a:ea typeface="League Spartan Medium"/>
-                <a:cs typeface="League Spartan Medium"/>
               </a:rPr>
               <a:t>32</a:t>
             </a:r>
@@ -42215,8 +40919,6 @@
                   <a:srgbClr val="96A2B2"/>
                 </a:solidFill>
                 <a:latin typeface="League Spartan"/>
-                <a:ea typeface="League Spartan"/>
-                <a:cs typeface="League Spartan"/>
               </a:rPr>
               <a:t>FULL-BLEED IMAGE</a:t>
             </a:r>
@@ -42450,8 +41152,6 @@
                   <a:srgbClr val="FFFFFF"/>
                 </a:solidFill>
                 <a:latin typeface="League Spartan SemiBold"/>
-                <a:ea typeface="League Spartan SemiBold"/>
-                <a:cs typeface="League Spartan SemiBold"/>
               </a:rPr>
               <a:t>17</a:t>
             </a:r>
@@ -42487,8 +41187,6 @@
                   <a:srgbClr val="E7EBF0"/>
                 </a:solidFill>
                 <a:latin typeface="League Spartan SemiBold"/>
-                <a:ea typeface="League Spartan SemiBold"/>
-                <a:cs typeface="League Spartan SemiBold"/>
               </a:rPr>
               <a:t>IAQ TECHNOLOGY INTERNATIONAL SDN BHD</a:t>
             </a:r>
@@ -42548,8 +41246,6 @@
                   <a:srgbClr val="FFFFFF"/>
                 </a:solidFill>
                 <a:latin typeface="Poppins SemiBold"/>
-                <a:ea typeface="Poppins SemiBold"/>
-                <a:cs typeface="Poppins SemiBold"/>
               </a:rPr>
               <a:t>Let us look at your facility.</a:t>
             </a:r>
@@ -42585,8 +41281,6 @@
                   <a:srgbClr val="E7EBF0"/>
                 </a:solidFill>
                 <a:latin typeface="Urbanist"/>
-                <a:ea typeface="Urbanist"/>
-                <a:cs typeface="Urbanist"/>
               </a:rPr>
               <a:t>Tell us the class, the programme and the constraint. We will tell you what it takes.</a:t>
             </a:r>
@@ -42622,8 +41316,6 @@
                   <a:srgbClr val="96A2B2"/>
                 </a:solidFill>
                 <a:latin typeface="League Spartan SemiBold"/>
-                <a:ea typeface="League Spartan SemiBold"/>
-                <a:cs typeface="League Spartan SemiBold"/>
               </a:rPr>
               <a:t>ENQUIRIES</a:t>
             </a:r>
@@ -42659,8 +41351,6 @@
                   <a:srgbClr val="E7EBF0"/>
                 </a:solidFill>
                 <a:latin typeface="Urbanist"/>
-                <a:ea typeface="Urbanist"/>
-                <a:cs typeface="Urbanist"/>
               </a:rPr>
               <a:t>business@iaqtechnology.com.my</a:t>
             </a:r>
@@ -42696,8 +41386,6 @@
                   <a:srgbClr val="96A2B2"/>
                 </a:solidFill>
                 <a:latin typeface="League Spartan SemiBold"/>
-                <a:ea typeface="League Spartan SemiBold"/>
-                <a:cs typeface="League Spartan SemiBold"/>
               </a:rPr>
               <a:t>TELEPHONE</a:t>
             </a:r>
@@ -42733,8 +41421,6 @@
                   <a:srgbClr val="E7EBF0"/>
                 </a:solidFill>
                 <a:latin typeface="Urbanist"/>
-                <a:ea typeface="Urbanist"/>
-                <a:cs typeface="Urbanist"/>
               </a:rPr>
               <a:t>+603 5131 9999</a:t>
             </a:r>
@@ -42770,8 +41456,6 @@
                   <a:srgbClr val="96A2B2"/>
                 </a:solidFill>
                 <a:latin typeface="League Spartan SemiBold"/>
-                <a:ea typeface="League Spartan SemiBold"/>
-                <a:cs typeface="League Spartan SemiBold"/>
               </a:rPr>
               <a:t>HEAD OFFICE</a:t>
             </a:r>
@@ -42807,8 +41491,6 @@
                   <a:srgbClr val="E7EBF0"/>
                 </a:solidFill>
                 <a:latin typeface="Urbanist"/>
-                <a:ea typeface="Urbanist"/>
-                <a:cs typeface="Urbanist"/>
               </a:rPr>
               <a:t>12, Jalan Sungai Jeluh 32/192, Shah Alam, Selangor</a:t>
             </a:r>
@@ -42844,8 +41526,6 @@
                   <a:srgbClr val="96A2B2"/>
                 </a:solidFill>
                 <a:latin typeface="League Spartan SemiBold"/>
-                <a:ea typeface="League Spartan SemiBold"/>
-                <a:cs typeface="League Spartan SemiBold"/>
               </a:rPr>
               <a:t>ONLINE</a:t>
             </a:r>
@@ -42881,8 +41561,6 @@
                   <a:srgbClr val="E7EBF0"/>
                 </a:solidFill>
                 <a:latin typeface="Urbanist"/>
-                <a:ea typeface="Urbanist"/>
-                <a:cs typeface="Urbanist"/>
               </a:rPr>
               <a:t>iaqtechnology.com.my</a:t>
             </a:r>
@@ -42918,8 +41596,6 @@
                   <a:srgbClr val="96A2B2"/>
                 </a:solidFill>
                 <a:latin typeface="League Spartan Medium"/>
-                <a:ea typeface="League Spartan Medium"/>
-                <a:cs typeface="League Spartan Medium"/>
               </a:rPr>
               <a:t>33</a:t>
             </a:r>
@@ -42955,8 +41631,6 @@
                   <a:srgbClr val="96A2B2"/>
                 </a:solidFill>
                 <a:latin typeface="League Spartan"/>
-                <a:ea typeface="League Spartan"/>
-                <a:cs typeface="League Spartan"/>
               </a:rPr>
               <a:t>CLOSING</a:t>
             </a:r>
@@ -43190,8 +41864,6 @@
                   <a:srgbClr val="FFFFFF"/>
                 </a:solidFill>
                 <a:latin typeface="League Spartan SemiBold"/>
-                <a:ea typeface="League Spartan SemiBold"/>
-                <a:cs typeface="League Spartan SemiBold"/>
               </a:rPr>
               <a:t>17</a:t>
             </a:r>
@@ -43227,8 +41899,6 @@
                   <a:srgbClr val="E7EBF0"/>
                 </a:solidFill>
                 <a:latin typeface="League Spartan SemiBold"/>
-                <a:ea typeface="League Spartan SemiBold"/>
-                <a:cs typeface="League Spartan SemiBold"/>
               </a:rPr>
               <a:t>IAQ TECHNOLOGY INTERNATIONAL SDN BHD</a:t>
             </a:r>
@@ -43288,8 +41958,6 @@
                   <a:srgbClr val="FFFFFF"/>
                 </a:solidFill>
                 <a:latin typeface="Poppins SemiBold"/>
-                <a:ea typeface="Poppins SemiBold"/>
-                <a:cs typeface="Poppins SemiBold"/>
               </a:rPr>
               <a:t>The closing line, six words or fewer.</a:t>
             </a:r>
@@ -43325,8 +41993,6 @@
                   <a:srgbClr val="64707A"/>
                 </a:solidFill>
                 <a:latin typeface="Urbanist"/>
-                <a:ea typeface="Urbanist"/>
-                <a:cs typeface="Urbanist"/>
               </a:rPr>
               <a:t>A sentence saying what you want to happen next.</a:t>
             </a:r>
@@ -43362,8 +42028,6 @@
                   <a:srgbClr val="96A2B2"/>
                 </a:solidFill>
                 <a:latin typeface="League Spartan SemiBold"/>
-                <a:ea typeface="League Spartan SemiBold"/>
-                <a:cs typeface="League Spartan SemiBold"/>
               </a:rPr>
               <a:t>LABEL</a:t>
             </a:r>
@@ -43399,8 +42063,6 @@
                   <a:srgbClr val="E7EBF0"/>
                 </a:solidFill>
                 <a:latin typeface="Urbanist"/>
-                <a:ea typeface="Urbanist"/>
-                <a:cs typeface="Urbanist"/>
               </a:rPr>
               <a:t>The detail</a:t>
             </a:r>
@@ -43436,8 +42098,6 @@
                   <a:srgbClr val="96A2B2"/>
                 </a:solidFill>
                 <a:latin typeface="League Spartan SemiBold"/>
-                <a:ea typeface="League Spartan SemiBold"/>
-                <a:cs typeface="League Spartan SemiBold"/>
               </a:rPr>
               <a:t>LABEL</a:t>
             </a:r>
@@ -43473,8 +42133,6 @@
                   <a:srgbClr val="E7EBF0"/>
                 </a:solidFill>
                 <a:latin typeface="Urbanist"/>
-                <a:ea typeface="Urbanist"/>
-                <a:cs typeface="Urbanist"/>
               </a:rPr>
               <a:t>The detail</a:t>
             </a:r>
@@ -43510,8 +42168,6 @@
                   <a:srgbClr val="96A2B2"/>
                 </a:solidFill>
                 <a:latin typeface="League Spartan SemiBold"/>
-                <a:ea typeface="League Spartan SemiBold"/>
-                <a:cs typeface="League Spartan SemiBold"/>
               </a:rPr>
               <a:t>LABEL</a:t>
             </a:r>
@@ -43547,8 +42203,6 @@
                   <a:srgbClr val="E7EBF0"/>
                 </a:solidFill>
                 <a:latin typeface="Urbanist"/>
-                <a:ea typeface="Urbanist"/>
-                <a:cs typeface="Urbanist"/>
               </a:rPr>
               <a:t>The detail</a:t>
             </a:r>
@@ -43584,8 +42238,6 @@
                   <a:srgbClr val="96A2B2"/>
                 </a:solidFill>
                 <a:latin typeface="League Spartan SemiBold"/>
-                <a:ea typeface="League Spartan SemiBold"/>
-                <a:cs typeface="League Spartan SemiBold"/>
               </a:rPr>
               <a:t>LABEL</a:t>
             </a:r>
@@ -43621,8 +42273,6 @@
                   <a:srgbClr val="E7EBF0"/>
                 </a:solidFill>
                 <a:latin typeface="Urbanist"/>
-                <a:ea typeface="Urbanist"/>
-                <a:cs typeface="Urbanist"/>
               </a:rPr>
               <a:t>The detail</a:t>
             </a:r>
@@ -43658,8 +42308,6 @@
                   <a:srgbClr val="96A2B2"/>
                 </a:solidFill>
                 <a:latin typeface="League Spartan Medium"/>
-                <a:ea typeface="League Spartan Medium"/>
-                <a:cs typeface="League Spartan Medium"/>
               </a:rPr>
               <a:t>34</a:t>
             </a:r>
@@ -43695,8 +42343,6 @@
                   <a:srgbClr val="96A2B2"/>
                 </a:solidFill>
                 <a:latin typeface="League Spartan"/>
-                <a:ea typeface="League Spartan"/>
-                <a:cs typeface="League Spartan"/>
               </a:rPr>
               <a:t>CLOSING</a:t>
             </a:r>
@@ -43810,8 +42456,6 @@
                   <a:srgbClr val="FFFFFF"/>
                 </a:solidFill>
                 <a:latin typeface="League Spartan SemiBold"/>
-                <a:ea typeface="League Spartan SemiBold"/>
-                <a:cs typeface="League Spartan SemiBold"/>
               </a:rPr>
               <a:t>18</a:t>
             </a:r>
@@ -43847,8 +42491,6 @@
                   <a:srgbClr val="101A2B"/>
                 </a:solidFill>
                 <a:latin typeface="League Spartan SemiBold"/>
-                <a:ea typeface="League Spartan SemiBold"/>
-                <a:cs typeface="League Spartan SemiBold"/>
               </a:rPr>
               <a:t>PART 01 · THE COMPANY</a:t>
             </a:r>
@@ -43938,8 +42580,6 @@
                   <a:srgbClr val="EC2326"/>
                 </a:solidFill>
                 <a:latin typeface="Poppins SemiBold"/>
-                <a:ea typeface="Poppins SemiBold"/>
-                <a:cs typeface="Poppins SemiBold"/>
               </a:rPr>
               <a:t>What follows</a:t>
             </a:r>
@@ -43975,8 +42615,6 @@
                   <a:srgbClr val="64707A"/>
                 </a:solidFill>
                 <a:latin typeface="Urbanist"/>
-                <a:ea typeface="Urbanist"/>
-                <a:cs typeface="Urbanist"/>
               </a:rPr>
               <a:t>Three parts, and what each one answers.</a:t>
             </a:r>
@@ -44012,8 +42650,6 @@
                   <a:srgbClr val="EC2326"/>
                 </a:solidFill>
                 <a:latin typeface="Poppins"/>
-                <a:ea typeface="Poppins"/>
-                <a:cs typeface="Poppins"/>
               </a:rPr>
               <a:t>01</a:t>
             </a:r>
@@ -44079,8 +42715,6 @@
                   <a:srgbClr val="101A2B"/>
                 </a:solidFill>
                 <a:latin typeface="Poppins SemiBold"/>
-                <a:ea typeface="Poppins SemiBold"/>
-                <a:cs typeface="Poppins SemiBold"/>
               </a:rPr>
               <a:t>The Company</a:t>
             </a:r>
@@ -44116,8 +42750,6 @@
                   <a:srgbClr val="EC2326"/>
                 </a:solidFill>
                 <a:latin typeface="League Spartan SemiBold"/>
-                <a:ea typeface="League Spartan SemiBold"/>
-                <a:cs typeface="League Spartan SemiBold"/>
               </a:rPr>
               <a:t>01.1</a:t>
             </a:r>
@@ -44153,8 +42785,6 @@
                   <a:srgbClr val="1E2A3D"/>
                 </a:solidFill>
                 <a:latin typeface="Urbanist Medium"/>
-                <a:ea typeface="Urbanist Medium"/>
-                <a:cs typeface="Urbanist Medium"/>
               </a:rPr>
               <a:t>Who we are and what we build</a:t>
             </a:r>
@@ -44190,8 +42820,6 @@
                   <a:srgbClr val="EC2326"/>
                 </a:solidFill>
                 <a:latin typeface="League Spartan SemiBold"/>
-                <a:ea typeface="League Spartan SemiBold"/>
-                <a:cs typeface="League Spartan SemiBold"/>
               </a:rPr>
               <a:t>01.2</a:t>
             </a:r>
@@ -44227,8 +42855,6 @@
                   <a:srgbClr val="1E2A3D"/>
                 </a:solidFill>
                 <a:latin typeface="Urbanist Medium"/>
-                <a:ea typeface="Urbanist Medium"/>
-                <a:cs typeface="Urbanist Medium"/>
               </a:rPr>
               <a:t>The numbers behind it</a:t>
             </a:r>
@@ -44264,8 +42890,6 @@
                   <a:srgbClr val="EC2326"/>
                 </a:solidFill>
                 <a:latin typeface="League Spartan SemiBold"/>
-                <a:ea typeface="League Spartan SemiBold"/>
-                <a:cs typeface="League Spartan SemiBold"/>
               </a:rPr>
               <a:t>01.3</a:t>
             </a:r>
@@ -44301,8 +42925,6 @@
                   <a:srgbClr val="1E2A3D"/>
                 </a:solidFill>
                 <a:latin typeface="Urbanist Medium"/>
-                <a:ea typeface="Urbanist Medium"/>
-                <a:cs typeface="Urbanist Medium"/>
               </a:rPr>
               <a:t>Thirty-one years of milestones</a:t>
             </a:r>
@@ -44338,8 +42960,6 @@
                   <a:srgbClr val="EC2326"/>
                 </a:solidFill>
                 <a:latin typeface="League Spartan SemiBold"/>
-                <a:ea typeface="League Spartan SemiBold"/>
-                <a:cs typeface="League Spartan SemiBold"/>
               </a:rPr>
               <a:t>01.4</a:t>
             </a:r>
@@ -44375,8 +42995,6 @@
                   <a:srgbClr val="1E2A3D"/>
                 </a:solidFill>
                 <a:latin typeface="Urbanist Medium"/>
-                <a:ea typeface="Urbanist Medium"/>
-                <a:cs typeface="Urbanist Medium"/>
               </a:rPr>
               <a:t>Where we work</a:t>
             </a:r>
@@ -44412,8 +43030,6 @@
                   <a:srgbClr val="EC2326"/>
                 </a:solidFill>
                 <a:latin typeface="Poppins"/>
-                <a:ea typeface="Poppins"/>
-                <a:cs typeface="Poppins"/>
               </a:rPr>
               <a:t>02</a:t>
             </a:r>
@@ -44479,8 +43095,6 @@
                   <a:srgbClr val="101A2B"/>
                 </a:solidFill>
                 <a:latin typeface="Poppins SemiBold"/>
-                <a:ea typeface="Poppins SemiBold"/>
-                <a:cs typeface="Poppins SemiBold"/>
               </a:rPr>
               <a:t>Project References</a:t>
             </a:r>
@@ -44516,8 +43130,6 @@
                   <a:srgbClr val="EC2326"/>
                 </a:solidFill>
                 <a:latin typeface="League Spartan SemiBold"/>
-                <a:ea typeface="League Spartan SemiBold"/>
-                <a:cs typeface="League Spartan SemiBold"/>
               </a:rPr>
               <a:t>02.1</a:t>
             </a:r>
@@ -44553,8 +43165,6 @@
                   <a:srgbClr val="1E2A3D"/>
                 </a:solidFill>
                 <a:latin typeface="Urbanist Medium"/>
-                <a:ea typeface="Urbanist Medium"/>
-                <a:cs typeface="Urbanist Medium"/>
               </a:rPr>
               <a:t>How the portfolio breaks down</a:t>
             </a:r>
@@ -44590,8 +43200,6 @@
                   <a:srgbClr val="EC2326"/>
                 </a:solidFill>
                 <a:latin typeface="League Spartan SemiBold"/>
-                <a:ea typeface="League Spartan SemiBold"/>
-                <a:cs typeface="League Spartan SemiBold"/>
               </a:rPr>
               <a:t>02.2</a:t>
             </a:r>
@@ -44627,8 +43235,6 @@
                   <a:srgbClr val="1E2A3D"/>
                 </a:solidFill>
                 <a:latin typeface="Urbanist Medium"/>
-                <a:ea typeface="Urbanist Medium"/>
-                <a:cs typeface="Urbanist Medium"/>
               </a:rPr>
               <a:t>Semiconductor and display</a:t>
             </a:r>
@@ -44664,8 +43270,6 @@
                   <a:srgbClr val="EC2326"/>
                 </a:solidFill>
                 <a:latin typeface="League Spartan SemiBold"/>
-                <a:ea typeface="League Spartan SemiBold"/>
-                <a:cs typeface="League Spartan SemiBold"/>
               </a:rPr>
               <a:t>02.3</a:t>
             </a:r>
@@ -44701,8 +43305,6 @@
                   <a:srgbClr val="1E2A3D"/>
                 </a:solidFill>
                 <a:latin typeface="Urbanist Medium"/>
-                <a:ea typeface="Urbanist Medium"/>
-                <a:cs typeface="Urbanist Medium"/>
               </a:rPr>
               <a:t>Data centre and EV battery</a:t>
             </a:r>
@@ -44738,8 +43340,6 @@
                   <a:srgbClr val="EC2326"/>
                 </a:solidFill>
                 <a:latin typeface="League Spartan SemiBold"/>
-                <a:ea typeface="League Spartan SemiBold"/>
-                <a:cs typeface="League Spartan SemiBold"/>
               </a:rPr>
               <a:t>02.4</a:t>
             </a:r>
@@ -44775,8 +43375,6 @@
                   <a:srgbClr val="1E2A3D"/>
                 </a:solidFill>
                 <a:latin typeface="Urbanist Medium"/>
-                <a:ea typeface="Urbanist Medium"/>
-                <a:cs typeface="Urbanist Medium"/>
               </a:rPr>
               <a:t>The full reference list</a:t>
             </a:r>
@@ -44812,8 +43410,6 @@
                   <a:srgbClr val="EC2326"/>
                 </a:solidFill>
                 <a:latin typeface="Poppins"/>
-                <a:ea typeface="Poppins"/>
-                <a:cs typeface="Poppins"/>
               </a:rPr>
               <a:t>03</a:t>
             </a:r>
@@ -44879,8 +43475,6 @@
                   <a:srgbClr val="101A2B"/>
                 </a:solidFill>
                 <a:latin typeface="Poppins SemiBold"/>
-                <a:ea typeface="Poppins SemiBold"/>
-                <a:cs typeface="Poppins SemiBold"/>
               </a:rPr>
               <a:t>Safety, Quality and ESG</a:t>
             </a:r>
@@ -44916,8 +43510,6 @@
                   <a:srgbClr val="EC2326"/>
                 </a:solidFill>
                 <a:latin typeface="League Spartan SemiBold"/>
-                <a:ea typeface="League Spartan SemiBold"/>
-                <a:cs typeface="League Spartan SemiBold"/>
               </a:rPr>
               <a:t>03.1</a:t>
             </a:r>
@@ -44953,8 +43545,6 @@
                   <a:srgbClr val="1E2A3D"/>
                 </a:solidFill>
                 <a:latin typeface="Urbanist Medium"/>
-                <a:ea typeface="Urbanist Medium"/>
-                <a:cs typeface="Urbanist Medium"/>
               </a:rPr>
               <a:t>The commitments we hold</a:t>
             </a:r>
@@ -44990,8 +43580,6 @@
                   <a:srgbClr val="EC2326"/>
                 </a:solidFill>
                 <a:latin typeface="League Spartan SemiBold"/>
-                <a:ea typeface="League Spartan SemiBold"/>
-                <a:cs typeface="League Spartan SemiBold"/>
               </a:rPr>
               <a:t>03.2</a:t>
             </a:r>
@@ -45027,8 +43615,6 @@
                   <a:srgbClr val="1E2A3D"/>
                 </a:solidFill>
                 <a:latin typeface="Urbanist Medium"/>
-                <a:ea typeface="Urbanist Medium"/>
-                <a:cs typeface="Urbanist Medium"/>
               </a:rPr>
               <a:t>Certifications and licences</a:t>
             </a:r>
@@ -45064,8 +43650,6 @@
                   <a:srgbClr val="EC2326"/>
                 </a:solidFill>
                 <a:latin typeface="League Spartan SemiBold"/>
-                <a:ea typeface="League Spartan SemiBold"/>
-                <a:cs typeface="League Spartan SemiBold"/>
               </a:rPr>
               <a:t>03.3</a:t>
             </a:r>
@@ -45101,8 +43685,6 @@
                   <a:srgbClr val="1E2A3D"/>
                 </a:solidFill>
                 <a:latin typeface="Urbanist Medium"/>
-                <a:ea typeface="Urbanist Medium"/>
-                <a:cs typeface="Urbanist Medium"/>
               </a:rPr>
               <a:t>Builder of the Year 2024</a:t>
             </a:r>
@@ -45138,8 +43720,6 @@
                   <a:srgbClr val="EC2326"/>
                 </a:solidFill>
                 <a:latin typeface="League Spartan SemiBold"/>
-                <a:ea typeface="League Spartan SemiBold"/>
-                <a:cs typeface="League Spartan SemiBold"/>
               </a:rPr>
               <a:t>03.4</a:t>
             </a:r>
@@ -45175,8 +43755,6 @@
                   <a:srgbClr val="1E2A3D"/>
                 </a:solidFill>
                 <a:latin typeface="Urbanist Medium"/>
-                <a:ea typeface="Urbanist Medium"/>
-                <a:cs typeface="Urbanist Medium"/>
               </a:rPr>
               <a:t>How we are assessed</a:t>
             </a:r>
@@ -45212,8 +43790,6 @@
                   <a:srgbClr val="64707A"/>
                 </a:solidFill>
                 <a:latin typeface="League Spartan Medium"/>
-                <a:ea typeface="League Spartan Medium"/>
-                <a:cs typeface="League Spartan Medium"/>
               </a:rPr>
               <a:t>35</a:t>
             </a:r>
@@ -45249,8 +43825,6 @@
                   <a:srgbClr val="64707A"/>
                 </a:solidFill>
                 <a:latin typeface="League Spartan"/>
-                <a:ea typeface="League Spartan"/>
-                <a:cs typeface="League Spartan"/>
               </a:rPr>
               <a:t>AGENDA</a:t>
             </a:r>
@@ -45364,8 +43938,6 @@
                   <a:srgbClr val="FFFFFF"/>
                 </a:solidFill>
                 <a:latin typeface="League Spartan SemiBold"/>
-                <a:ea typeface="League Spartan SemiBold"/>
-                <a:cs typeface="League Spartan SemiBold"/>
               </a:rPr>
               <a:t>18</a:t>
             </a:r>
@@ -45401,8 +43973,6 @@
                   <a:srgbClr val="101A2B"/>
                 </a:solidFill>
                 <a:latin typeface="League Spartan SemiBold"/>
-                <a:ea typeface="League Spartan SemiBold"/>
-                <a:cs typeface="League Spartan SemiBold"/>
               </a:rPr>
               <a:t>SECTION NAME</a:t>
             </a:r>
@@ -45492,8 +44062,6 @@
                   <a:srgbClr val="64707A"/>
                 </a:solidFill>
                 <a:latin typeface="Poppins SemiBold"/>
-                <a:ea typeface="Poppins SemiBold"/>
-                <a:cs typeface="Poppins SemiBold"/>
               </a:rPr>
               <a:t>Page title</a:t>
             </a:r>
@@ -45529,8 +44097,6 @@
                   <a:srgbClr val="64707A"/>
                 </a:solidFill>
                 <a:latin typeface="Urbanist"/>
-                <a:ea typeface="Urbanist"/>
-                <a:cs typeface="Urbanist"/>
               </a:rPr>
               <a:t>One line under it saying what the page is for.</a:t>
             </a:r>
@@ -45566,8 +44132,6 @@
                   <a:srgbClr val="64707A"/>
                 </a:solidFill>
                 <a:latin typeface="Poppins"/>
-                <a:ea typeface="Poppins"/>
-                <a:cs typeface="Poppins"/>
               </a:rPr>
               <a:t>01</a:t>
             </a:r>
@@ -45633,8 +44197,6 @@
                   <a:srgbClr val="64707A"/>
                 </a:solidFill>
                 <a:latin typeface="Poppins SemiBold"/>
-                <a:ea typeface="Poppins SemiBold"/>
-                <a:cs typeface="Poppins SemiBold"/>
               </a:rPr>
               <a:t>Part name</a:t>
             </a:r>
@@ -45670,8 +44232,6 @@
                   <a:srgbClr val="64707A"/>
                 </a:solidFill>
                 <a:latin typeface="League Spartan SemiBold"/>
-                <a:ea typeface="League Spartan SemiBold"/>
-                <a:cs typeface="League Spartan SemiBold"/>
               </a:rPr>
               <a:t>01.1</a:t>
             </a:r>
@@ -45707,8 +44267,6 @@
                   <a:srgbClr val="64707A"/>
                 </a:solidFill>
                 <a:latin typeface="Urbanist Medium"/>
-                <a:ea typeface="Urbanist Medium"/>
-                <a:cs typeface="Urbanist Medium"/>
               </a:rPr>
               <a:t>What this section answers</a:t>
             </a:r>
@@ -45744,8 +44302,6 @@
                   <a:srgbClr val="64707A"/>
                 </a:solidFill>
                 <a:latin typeface="League Spartan SemiBold"/>
-                <a:ea typeface="League Spartan SemiBold"/>
-                <a:cs typeface="League Spartan SemiBold"/>
               </a:rPr>
               <a:t>01.2</a:t>
             </a:r>
@@ -45781,8 +44337,6 @@
                   <a:srgbClr val="64707A"/>
                 </a:solidFill>
                 <a:latin typeface="Urbanist Medium"/>
-                <a:ea typeface="Urbanist Medium"/>
-                <a:cs typeface="Urbanist Medium"/>
               </a:rPr>
               <a:t>What this section answers</a:t>
             </a:r>
@@ -45818,8 +44372,6 @@
                   <a:srgbClr val="64707A"/>
                 </a:solidFill>
                 <a:latin typeface="League Spartan SemiBold"/>
-                <a:ea typeface="League Spartan SemiBold"/>
-                <a:cs typeface="League Spartan SemiBold"/>
               </a:rPr>
               <a:t>01.3</a:t>
             </a:r>
@@ -45855,8 +44407,6 @@
                   <a:srgbClr val="64707A"/>
                 </a:solidFill>
                 <a:latin typeface="Urbanist Medium"/>
-                <a:ea typeface="Urbanist Medium"/>
-                <a:cs typeface="Urbanist Medium"/>
               </a:rPr>
               <a:t>What this section answers</a:t>
             </a:r>
@@ -45892,8 +44442,6 @@
                   <a:srgbClr val="64707A"/>
                 </a:solidFill>
                 <a:latin typeface="League Spartan SemiBold"/>
-                <a:ea typeface="League Spartan SemiBold"/>
-                <a:cs typeface="League Spartan SemiBold"/>
               </a:rPr>
               <a:t>01.4</a:t>
             </a:r>
@@ -45929,8 +44477,6 @@
                   <a:srgbClr val="64707A"/>
                 </a:solidFill>
                 <a:latin typeface="Urbanist Medium"/>
-                <a:ea typeface="Urbanist Medium"/>
-                <a:cs typeface="Urbanist Medium"/>
               </a:rPr>
               <a:t>What this section answers</a:t>
             </a:r>
@@ -45966,8 +44512,6 @@
                   <a:srgbClr val="64707A"/>
                 </a:solidFill>
                 <a:latin typeface="Poppins"/>
-                <a:ea typeface="Poppins"/>
-                <a:cs typeface="Poppins"/>
               </a:rPr>
               <a:t>02</a:t>
             </a:r>
@@ -46033,8 +44577,6 @@
                   <a:srgbClr val="64707A"/>
                 </a:solidFill>
                 <a:latin typeface="Poppins SemiBold"/>
-                <a:ea typeface="Poppins SemiBold"/>
-                <a:cs typeface="Poppins SemiBold"/>
               </a:rPr>
               <a:t>Part name</a:t>
             </a:r>
@@ -46070,8 +44612,6 @@
                   <a:srgbClr val="64707A"/>
                 </a:solidFill>
                 <a:latin typeface="League Spartan SemiBold"/>
-                <a:ea typeface="League Spartan SemiBold"/>
-                <a:cs typeface="League Spartan SemiBold"/>
               </a:rPr>
               <a:t>02.1</a:t>
             </a:r>
@@ -46107,8 +44647,6 @@
                   <a:srgbClr val="64707A"/>
                 </a:solidFill>
                 <a:latin typeface="Urbanist Medium"/>
-                <a:ea typeface="Urbanist Medium"/>
-                <a:cs typeface="Urbanist Medium"/>
               </a:rPr>
               <a:t>What this section answers</a:t>
             </a:r>
@@ -46144,8 +44682,6 @@
                   <a:srgbClr val="64707A"/>
                 </a:solidFill>
                 <a:latin typeface="League Spartan SemiBold"/>
-                <a:ea typeface="League Spartan SemiBold"/>
-                <a:cs typeface="League Spartan SemiBold"/>
               </a:rPr>
               <a:t>02.2</a:t>
             </a:r>
@@ -46181,8 +44717,6 @@
                   <a:srgbClr val="64707A"/>
                 </a:solidFill>
                 <a:latin typeface="Urbanist Medium"/>
-                <a:ea typeface="Urbanist Medium"/>
-                <a:cs typeface="Urbanist Medium"/>
               </a:rPr>
               <a:t>What this section answers</a:t>
             </a:r>
@@ -46218,8 +44752,6 @@
                   <a:srgbClr val="64707A"/>
                 </a:solidFill>
                 <a:latin typeface="League Spartan SemiBold"/>
-                <a:ea typeface="League Spartan SemiBold"/>
-                <a:cs typeface="League Spartan SemiBold"/>
               </a:rPr>
               <a:t>02.3</a:t>
             </a:r>
@@ -46255,8 +44787,6 @@
                   <a:srgbClr val="64707A"/>
                 </a:solidFill>
                 <a:latin typeface="Urbanist Medium"/>
-                <a:ea typeface="Urbanist Medium"/>
-                <a:cs typeface="Urbanist Medium"/>
               </a:rPr>
               <a:t>What this section answers</a:t>
             </a:r>
@@ -46292,8 +44822,6 @@
                   <a:srgbClr val="64707A"/>
                 </a:solidFill>
                 <a:latin typeface="League Spartan SemiBold"/>
-                <a:ea typeface="League Spartan SemiBold"/>
-                <a:cs typeface="League Spartan SemiBold"/>
               </a:rPr>
               <a:t>02.4</a:t>
             </a:r>
@@ -46329,8 +44857,6 @@
                   <a:srgbClr val="64707A"/>
                 </a:solidFill>
                 <a:latin typeface="Urbanist Medium"/>
-                <a:ea typeface="Urbanist Medium"/>
-                <a:cs typeface="Urbanist Medium"/>
               </a:rPr>
               <a:t>What this section answers</a:t>
             </a:r>
@@ -46366,8 +44892,6 @@
                   <a:srgbClr val="64707A"/>
                 </a:solidFill>
                 <a:latin typeface="Poppins"/>
-                <a:ea typeface="Poppins"/>
-                <a:cs typeface="Poppins"/>
               </a:rPr>
               <a:t>03</a:t>
             </a:r>
@@ -46433,8 +44957,6 @@
                   <a:srgbClr val="64707A"/>
                 </a:solidFill>
                 <a:latin typeface="Poppins SemiBold"/>
-                <a:ea typeface="Poppins SemiBold"/>
-                <a:cs typeface="Poppins SemiBold"/>
               </a:rPr>
               <a:t>Part name</a:t>
             </a:r>
@@ -46470,8 +44992,6 @@
                   <a:srgbClr val="64707A"/>
                 </a:solidFill>
                 <a:latin typeface="League Spartan SemiBold"/>
-                <a:ea typeface="League Spartan SemiBold"/>
-                <a:cs typeface="League Spartan SemiBold"/>
               </a:rPr>
               <a:t>03.1</a:t>
             </a:r>
@@ -46507,8 +45027,6 @@
                   <a:srgbClr val="64707A"/>
                 </a:solidFill>
                 <a:latin typeface="Urbanist Medium"/>
-                <a:ea typeface="Urbanist Medium"/>
-                <a:cs typeface="Urbanist Medium"/>
               </a:rPr>
               <a:t>What this section answers</a:t>
             </a:r>
@@ -46544,8 +45062,6 @@
                   <a:srgbClr val="64707A"/>
                 </a:solidFill>
                 <a:latin typeface="League Spartan SemiBold"/>
-                <a:ea typeface="League Spartan SemiBold"/>
-                <a:cs typeface="League Spartan SemiBold"/>
               </a:rPr>
               <a:t>03.2</a:t>
             </a:r>
@@ -46581,8 +45097,6 @@
                   <a:srgbClr val="64707A"/>
                 </a:solidFill>
                 <a:latin typeface="Urbanist Medium"/>
-                <a:ea typeface="Urbanist Medium"/>
-                <a:cs typeface="Urbanist Medium"/>
               </a:rPr>
               <a:t>What this section answers</a:t>
             </a:r>
@@ -46618,8 +45132,6 @@
                   <a:srgbClr val="64707A"/>
                 </a:solidFill>
                 <a:latin typeface="League Spartan SemiBold"/>
-                <a:ea typeface="League Spartan SemiBold"/>
-                <a:cs typeface="League Spartan SemiBold"/>
               </a:rPr>
               <a:t>03.3</a:t>
             </a:r>
@@ -46655,8 +45167,6 @@
                   <a:srgbClr val="64707A"/>
                 </a:solidFill>
                 <a:latin typeface="Urbanist Medium"/>
-                <a:ea typeface="Urbanist Medium"/>
-                <a:cs typeface="Urbanist Medium"/>
               </a:rPr>
               <a:t>What this section answers</a:t>
             </a:r>
@@ -46692,8 +45202,6 @@
                   <a:srgbClr val="64707A"/>
                 </a:solidFill>
                 <a:latin typeface="League Spartan SemiBold"/>
-                <a:ea typeface="League Spartan SemiBold"/>
-                <a:cs typeface="League Spartan SemiBold"/>
               </a:rPr>
               <a:t>03.4</a:t>
             </a:r>
@@ -46729,8 +45237,6 @@
                   <a:srgbClr val="64707A"/>
                 </a:solidFill>
                 <a:latin typeface="Urbanist Medium"/>
-                <a:ea typeface="Urbanist Medium"/>
-                <a:cs typeface="Urbanist Medium"/>
               </a:rPr>
               <a:t>What this section answers</a:t>
             </a:r>
@@ -46766,8 +45272,6 @@
                   <a:srgbClr val="64707A"/>
                 </a:solidFill>
                 <a:latin typeface="League Spartan Medium"/>
-                <a:ea typeface="League Spartan Medium"/>
-                <a:cs typeface="League Spartan Medium"/>
               </a:rPr>
               <a:t>36</a:t>
             </a:r>
@@ -46803,8 +45307,6 @@
                   <a:srgbClr val="64707A"/>
                 </a:solidFill>
                 <a:latin typeface="League Spartan"/>
-                <a:ea typeface="League Spartan"/>
-                <a:cs typeface="League Spartan"/>
               </a:rPr>
               <a:t>AGENDA</a:t>
             </a:r>
@@ -46918,8 +45420,6 @@
                   <a:srgbClr val="FFFFFF"/>
                 </a:solidFill>
                 <a:latin typeface="League Spartan SemiBold"/>
-                <a:ea typeface="League Spartan SemiBold"/>
-                <a:cs typeface="League Spartan SemiBold"/>
               </a:rPr>
               <a:t>19</a:t>
             </a:r>
@@ -46955,8 +45455,6 @@
                   <a:srgbClr val="101A2B"/>
                 </a:solidFill>
                 <a:latin typeface="League Spartan SemiBold"/>
-                <a:ea typeface="League Spartan SemiBold"/>
-                <a:cs typeface="League Spartan SemiBold"/>
               </a:rPr>
               <a:t>PART 02 · PROJECT REFERENCES</a:t>
             </a:r>
@@ -47046,8 +45544,6 @@
                   <a:srgbClr val="EC2326"/>
                 </a:solidFill>
                 <a:latin typeface="Poppins SemiBold"/>
-                <a:ea typeface="Poppins SemiBold"/>
-                <a:cs typeface="Poppins SemiBold"/>
               </a:rPr>
               <a:t>In their words</a:t>
             </a:r>
@@ -47083,8 +45579,6 @@
                   <a:srgbClr val="64707A"/>
                 </a:solidFill>
                 <a:latin typeface="Urbanist"/>
-                <a:ea typeface="Urbanist"/>
-                <a:cs typeface="Urbanist"/>
               </a:rPr>
               <a:t>What the people who hired us say about it.</a:t>
             </a:r>
@@ -47120,8 +45614,6 @@
                   <a:srgbClr val="EC2326"/>
                 </a:solidFill>
                 <a:latin typeface="Poppins"/>
-                <a:ea typeface="Poppins"/>
-                <a:cs typeface="Poppins"/>
               </a:rPr>
               <a:t>“</a:t>
             </a:r>
@@ -47161,8 +45653,6 @@
                   <a:srgbClr val="101A2B"/>
                 </a:solidFill>
                 <a:latin typeface="Poppins SemiBold"/>
-                <a:ea typeface="Poppins SemiBold"/>
-                <a:cs typeface="Poppins SemiBold"/>
               </a:rPr>
               <a:t>They self-performed the packages that usually slip. That is the whole reason the fab opened on time.</a:t>
             </a:r>
@@ -47228,8 +45718,6 @@
                   <a:srgbClr val="101A2B"/>
                 </a:solidFill>
                 <a:latin typeface="Urbanist SemiBold"/>
-                <a:ea typeface="Urbanist SemiBold"/>
-                <a:cs typeface="Urbanist SemiBold"/>
               </a:rPr>
               <a:t>Name of the person</a:t>
             </a:r>
@@ -47265,8 +45753,6 @@
                   <a:srgbClr val="64707A"/>
                 </a:solidFill>
                 <a:latin typeface="League Spartan SemiBold"/>
-                <a:ea typeface="League Spartan SemiBold"/>
-                <a:cs typeface="League Spartan SemiBold"/>
               </a:rPr>
               <a:t>ROLE · CLIENT ORGANISATION</a:t>
             </a:r>
@@ -47357,8 +45843,6 @@
                   <a:srgbClr val="64707A"/>
                 </a:solidFill>
                 <a:latin typeface="League Spartan Medium"/>
-                <a:ea typeface="League Spartan Medium"/>
-                <a:cs typeface="League Spartan Medium"/>
               </a:rPr>
               <a:t>37</a:t>
             </a:r>
@@ -47394,8 +45878,6 @@
                   <a:srgbClr val="64707A"/>
                 </a:solidFill>
                 <a:latin typeface="League Spartan"/>
-                <a:ea typeface="League Spartan"/>
-                <a:cs typeface="League Spartan"/>
               </a:rPr>
               <a:t>QUOTE</a:t>
             </a:r>
@@ -47509,8 +45991,6 @@
                   <a:srgbClr val="FFFFFF"/>
                 </a:solidFill>
                 <a:latin typeface="League Spartan SemiBold"/>
-                <a:ea typeface="League Spartan SemiBold"/>
-                <a:cs typeface="League Spartan SemiBold"/>
               </a:rPr>
               <a:t>19</a:t>
             </a:r>
@@ -47546,8 +46026,6 @@
                   <a:srgbClr val="101A2B"/>
                 </a:solidFill>
                 <a:latin typeface="League Spartan SemiBold"/>
-                <a:ea typeface="League Spartan SemiBold"/>
-                <a:cs typeface="League Spartan SemiBold"/>
               </a:rPr>
               <a:t>SECTION NAME</a:t>
             </a:r>
@@ -47637,8 +46115,6 @@
                   <a:srgbClr val="64707A"/>
                 </a:solidFill>
                 <a:latin typeface="Poppins SemiBold"/>
-                <a:ea typeface="Poppins SemiBold"/>
-                <a:cs typeface="Poppins SemiBold"/>
               </a:rPr>
               <a:t>Page title</a:t>
             </a:r>
@@ -47674,8 +46150,6 @@
                   <a:srgbClr val="64707A"/>
                 </a:solidFill>
                 <a:latin typeface="Urbanist"/>
-                <a:ea typeface="Urbanist"/>
-                <a:cs typeface="Urbanist"/>
               </a:rPr>
               <a:t>One line under it saying what the page is for.</a:t>
             </a:r>
@@ -47711,8 +46185,6 @@
                   <a:srgbClr val="64707A"/>
                 </a:solidFill>
                 <a:latin typeface="Poppins"/>
-                <a:ea typeface="Poppins"/>
-                <a:cs typeface="Poppins"/>
               </a:rPr>
               <a:t>“</a:t>
             </a:r>
@@ -47752,8 +46224,6 @@
                   <a:srgbClr val="64707A"/>
                 </a:solidFill>
                 <a:latin typeface="Poppins SemiBold"/>
-                <a:ea typeface="Poppins SemiBold"/>
-                <a:cs typeface="Poppins SemiBold"/>
               </a:rPr>
               <a:t>The quotation, two lines at most. Cut it back until only the part worth repeating is left.</a:t>
             </a:r>
@@ -47819,8 +46289,6 @@
                   <a:srgbClr val="64707A"/>
                 </a:solidFill>
                 <a:latin typeface="Urbanist SemiBold"/>
-                <a:ea typeface="Urbanist SemiBold"/>
-                <a:cs typeface="Urbanist SemiBold"/>
               </a:rPr>
               <a:t>Name of the person</a:t>
             </a:r>
@@ -47856,8 +46324,6 @@
                   <a:srgbClr val="64707A"/>
                 </a:solidFill>
                 <a:latin typeface="League Spartan SemiBold"/>
-                <a:ea typeface="League Spartan SemiBold"/>
-                <a:cs typeface="League Spartan SemiBold"/>
               </a:rPr>
               <a:t>ROLE · ORGANISATION</a:t>
             </a:r>
@@ -47948,8 +46414,6 @@
                   <a:srgbClr val="64707A"/>
                 </a:solidFill>
                 <a:latin typeface="League Spartan Medium"/>
-                <a:ea typeface="League Spartan Medium"/>
-                <a:cs typeface="League Spartan Medium"/>
               </a:rPr>
               <a:t>38</a:t>
             </a:r>
@@ -47985,8 +46449,6 @@
                   <a:srgbClr val="64707A"/>
                 </a:solidFill>
                 <a:latin typeface="League Spartan"/>
-                <a:ea typeface="League Spartan"/>
-                <a:cs typeface="League Spartan"/>
               </a:rPr>
               <a:t>QUOTE</a:t>
             </a:r>
@@ -48220,8 +46682,6 @@
                   <a:srgbClr val="FFFFFF"/>
                 </a:solidFill>
                 <a:latin typeface="League Spartan SemiBold"/>
-                <a:ea typeface="League Spartan SemiBold"/>
-                <a:cs typeface="League Spartan SemiBold"/>
               </a:rPr>
               <a:t>02</a:t>
             </a:r>
@@ -48257,8 +46717,6 @@
                   <a:srgbClr val="E7EBF0"/>
                 </a:solidFill>
                 <a:latin typeface="League Spartan SemiBold"/>
-                <a:ea typeface="League Spartan SemiBold"/>
-                <a:cs typeface="League Spartan SemiBold"/>
               </a:rPr>
               <a:t>PART 02 · PROJECT REFERENCES</a:t>
             </a:r>
@@ -48294,8 +46752,6 @@
                   <a:srgbClr val="EC2326"/>
                 </a:solidFill>
                 <a:latin typeface="League Spartan SemiBold"/>
-                <a:ea typeface="League Spartan SemiBold"/>
-                <a:cs typeface="League Spartan SemiBold"/>
               </a:rPr>
               <a:t>PART 02 OF 03</a:t>
             </a:r>
@@ -48331,8 +46787,6 @@
                   <a:srgbClr val="EC2326"/>
                 </a:solidFill>
                 <a:latin typeface="Poppins"/>
-                <a:ea typeface="Poppins"/>
-                <a:cs typeface="Poppins"/>
               </a:rPr>
               <a:t>02</a:t>
             </a:r>
@@ -48368,8 +46822,6 @@
                   <a:srgbClr val="FFFFFF"/>
                 </a:solidFill>
                 <a:latin typeface="Poppins SemiBold"/>
-                <a:ea typeface="Poppins SemiBold"/>
-                <a:cs typeface="Poppins SemiBold"/>
               </a:rPr>
               <a:t>Project References</a:t>
             </a:r>
@@ -48405,8 +46857,6 @@
                   <a:srgbClr val="96A2B2"/>
                 </a:solidFill>
                 <a:latin typeface="League Spartan Medium"/>
-                <a:ea typeface="League Spartan Medium"/>
-                <a:cs typeface="League Spartan Medium"/>
               </a:rPr>
               <a:t>SECTIONS 02.1 TO 02.47</a:t>
             </a:r>
@@ -48474,8 +46924,6 @@
                   <a:srgbClr val="E7EBF0"/>
                 </a:solidFill>
                 <a:latin typeface="Urbanist Medium"/>
-                <a:ea typeface="Urbanist Medium"/>
-                <a:cs typeface="Urbanist Medium"/>
               </a:rPr>
               <a:t>235+ projects completed across three regions</a:t>
             </a:r>
@@ -48511,8 +46959,6 @@
                   <a:srgbClr val="E7EBF0"/>
                 </a:solidFill>
                 <a:latin typeface="Urbanist Medium"/>
-                <a:ea typeface="Urbanist Medium"/>
-                <a:cs typeface="Urbanist Medium"/>
               </a:rPr>
               <a:t>Over 1.5 million m² of cleanroom built</a:t>
             </a:r>
@@ -48572,8 +47018,6 @@
                   <a:srgbClr val="96A2B2"/>
                 </a:solidFill>
                 <a:latin typeface="League Spartan Medium"/>
-                <a:ea typeface="League Spartan Medium"/>
-                <a:cs typeface="League Spartan Medium"/>
               </a:rPr>
               <a:t>03</a:t>
             </a:r>
@@ -48687,8 +47131,6 @@
                   <a:srgbClr val="FFFFFF"/>
                 </a:solidFill>
                 <a:latin typeface="League Spartan SemiBold"/>
-                <a:ea typeface="League Spartan SemiBold"/>
-                <a:cs typeface="League Spartan SemiBold"/>
               </a:rPr>
               <a:t>20</a:t>
             </a:r>
@@ -48724,8 +47166,6 @@
                   <a:srgbClr val="101A2B"/>
                 </a:solidFill>
                 <a:latin typeface="League Spartan SemiBold"/>
-                <a:ea typeface="League Spartan SemiBold"/>
-                <a:cs typeface="League Spartan SemiBold"/>
               </a:rPr>
               <a:t>PART 02 · PROJECT REFERENCES</a:t>
             </a:r>
@@ -48815,8 +47255,6 @@
                   <a:srgbClr val="EC2326"/>
                 </a:solidFill>
                 <a:latin typeface="Poppins SemiBold"/>
-                <a:ea typeface="Poppins SemiBold"/>
-                <a:cs typeface="Poppins SemiBold"/>
               </a:rPr>
               <a:t>What changed</a:t>
             </a:r>
@@ -48852,8 +47290,6 @@
                   <a:srgbClr val="64707A"/>
                 </a:solidFill>
                 <a:latin typeface="Urbanist"/>
-                <a:ea typeface="Urbanist"/>
-                <a:cs typeface="Urbanist"/>
               </a:rPr>
               <a:t>The same hall, before handover and in production.</a:t>
             </a:r>
@@ -48949,8 +47385,6 @@
                   <a:srgbClr val="FFFFFF"/>
                 </a:solidFill>
                 <a:latin typeface="League Spartan SemiBold"/>
-                <a:ea typeface="League Spartan SemiBold"/>
-                <a:cs typeface="League Spartan SemiBold"/>
               </a:rPr>
               <a:t>BEFORE</a:t>
             </a:r>
@@ -49011,8 +47445,6 @@
                   <a:srgbClr val="101A2B"/>
                 </a:solidFill>
                 <a:latin typeface="Poppins SemiBold"/>
-                <a:ea typeface="Poppins SemiBold"/>
-                <a:cs typeface="Poppins SemiBold"/>
               </a:rPr>
               <a:t>Shell and core</a:t>
             </a:r>
@@ -49048,8 +47480,6 @@
                   <a:srgbClr val="64707A"/>
                 </a:solidFill>
                 <a:latin typeface="Urbanist"/>
-                <a:ea typeface="Urbanist"/>
-                <a:cs typeface="Urbanist"/>
               </a:rPr>
               <a:t>Structure complete, services roughed in, no classification yet.</a:t>
             </a:r>
@@ -49145,8 +47575,6 @@
                   <a:srgbClr val="FFFFFF"/>
                 </a:solidFill>
                 <a:latin typeface="League Spartan SemiBold"/>
-                <a:ea typeface="League Spartan SemiBold"/>
-                <a:cs typeface="League Spartan SemiBold"/>
               </a:rPr>
               <a:t>AFTER</a:t>
             </a:r>
@@ -49207,8 +47635,6 @@
                   <a:srgbClr val="101A2B"/>
                 </a:solidFill>
                 <a:latin typeface="Poppins SemiBold"/>
-                <a:ea typeface="Poppins SemiBold"/>
-                <a:cs typeface="Poppins SemiBold"/>
               </a:rPr>
               <a:t>ISO 5 in production</a:t>
             </a:r>
@@ -49244,8 +47670,6 @@
                   <a:srgbClr val="64707A"/>
                 </a:solidFill>
                 <a:latin typeface="Urbanist"/>
-                <a:ea typeface="Urbanist"/>
-                <a:cs typeface="Urbanist"/>
               </a:rPr>
               <a:t>Classified, commissioned and handed over to the client’s team.</a:t>
             </a:r>
@@ -49281,8 +47705,6 @@
                   <a:srgbClr val="64707A"/>
                 </a:solidFill>
                 <a:latin typeface="League Spartan Medium"/>
-                <a:ea typeface="League Spartan Medium"/>
-                <a:cs typeface="League Spartan Medium"/>
               </a:rPr>
               <a:t>39</a:t>
             </a:r>
@@ -49318,8 +47740,6 @@
                   <a:srgbClr val="64707A"/>
                 </a:solidFill>
                 <a:latin typeface="League Spartan"/>
-                <a:ea typeface="League Spartan"/>
-                <a:cs typeface="League Spartan"/>
               </a:rPr>
               <a:t>BEFORE AND AFTER</a:t>
             </a:r>
@@ -49433,8 +47853,6 @@
                   <a:srgbClr val="FFFFFF"/>
                 </a:solidFill>
                 <a:latin typeface="League Spartan SemiBold"/>
-                <a:ea typeface="League Spartan SemiBold"/>
-                <a:cs typeface="League Spartan SemiBold"/>
               </a:rPr>
               <a:t>20</a:t>
             </a:r>
@@ -49470,8 +47888,6 @@
                   <a:srgbClr val="101A2B"/>
                 </a:solidFill>
                 <a:latin typeface="League Spartan SemiBold"/>
-                <a:ea typeface="League Spartan SemiBold"/>
-                <a:cs typeface="League Spartan SemiBold"/>
               </a:rPr>
               <a:t>SECTION NAME</a:t>
             </a:r>
@@ -49561,8 +47977,6 @@
                   <a:srgbClr val="64707A"/>
                 </a:solidFill>
                 <a:latin typeface="Poppins SemiBold"/>
-                <a:ea typeface="Poppins SemiBold"/>
-                <a:cs typeface="Poppins SemiBold"/>
               </a:rPr>
               <a:t>Page title</a:t>
             </a:r>
@@ -49598,8 +48012,6 @@
                   <a:srgbClr val="64707A"/>
                 </a:solidFill>
                 <a:latin typeface="Urbanist"/>
-                <a:ea typeface="Urbanist"/>
-                <a:cs typeface="Urbanist"/>
               </a:rPr>
               <a:t>One line under it saying what the page is for.</a:t>
             </a:r>
@@ -49695,8 +48107,6 @@
                   <a:srgbClr val="FFFFFF"/>
                 </a:solidFill>
                 <a:latin typeface="League Spartan SemiBold"/>
-                <a:ea typeface="League Spartan SemiBold"/>
-                <a:cs typeface="League Spartan SemiBold"/>
               </a:rPr>
               <a:t>BEFORE</a:t>
             </a:r>
@@ -49757,8 +48167,6 @@
                   <a:srgbClr val="64707A"/>
                 </a:solidFill>
                 <a:latin typeface="Poppins SemiBold"/>
-                <a:ea typeface="Poppins SemiBold"/>
-                <a:cs typeface="Poppins SemiBold"/>
               </a:rPr>
               <a:t>What it was</a:t>
             </a:r>
@@ -49794,8 +48202,6 @@
                   <a:srgbClr val="64707A"/>
                 </a:solidFill>
                 <a:latin typeface="Urbanist"/>
-                <a:ea typeface="Urbanist"/>
-                <a:cs typeface="Urbanist"/>
               </a:rPr>
               <a:t>One or two sentences on the state it started in.</a:t>
             </a:r>
@@ -49891,8 +48297,6 @@
                   <a:srgbClr val="FFFFFF"/>
                 </a:solidFill>
                 <a:latin typeface="League Spartan SemiBold"/>
-                <a:ea typeface="League Spartan SemiBold"/>
-                <a:cs typeface="League Spartan SemiBold"/>
               </a:rPr>
               <a:t>AFTER</a:t>
             </a:r>
@@ -49953,8 +48357,6 @@
                   <a:srgbClr val="64707A"/>
                 </a:solidFill>
                 <a:latin typeface="Poppins SemiBold"/>
-                <a:ea typeface="Poppins SemiBold"/>
-                <a:cs typeface="Poppins SemiBold"/>
               </a:rPr>
               <a:t>What it became</a:t>
             </a:r>
@@ -49990,8 +48392,6 @@
                   <a:srgbClr val="64707A"/>
                 </a:solidFill>
                 <a:latin typeface="Urbanist"/>
-                <a:ea typeface="Urbanist"/>
-                <a:cs typeface="Urbanist"/>
               </a:rPr>
               <a:t>One or two sentences on the state it ended in.</a:t>
             </a:r>
@@ -50027,8 +48427,6 @@
                   <a:srgbClr val="64707A"/>
                 </a:solidFill>
                 <a:latin typeface="League Spartan Medium"/>
-                <a:ea typeface="League Spartan Medium"/>
-                <a:cs typeface="League Spartan Medium"/>
               </a:rPr>
               <a:t>40</a:t>
             </a:r>
@@ -50064,8 +48462,6 @@
                   <a:srgbClr val="64707A"/>
                 </a:solidFill>
                 <a:latin typeface="League Spartan"/>
-                <a:ea typeface="League Spartan"/>
-                <a:cs typeface="League Spartan"/>
               </a:rPr>
               <a:t>BEFORE AND AFTER</a:t>
             </a:r>
@@ -50299,8 +48695,6 @@
                   <a:srgbClr val="FFFFFF"/>
                 </a:solidFill>
                 <a:latin typeface="League Spartan SemiBold"/>
-                <a:ea typeface="League Spartan SemiBold"/>
-                <a:cs typeface="League Spartan SemiBold"/>
               </a:rPr>
               <a:t>02</a:t>
             </a:r>
@@ -50336,8 +48730,6 @@
                   <a:srgbClr val="E7EBF0"/>
                 </a:solidFill>
                 <a:latin typeface="League Spartan SemiBold"/>
-                <a:ea typeface="League Spartan SemiBold"/>
-                <a:cs typeface="League Spartan SemiBold"/>
               </a:rPr>
               <a:t>SECTION NAME</a:t>
             </a:r>
@@ -50373,8 +48765,6 @@
                   <a:srgbClr val="EC2326"/>
                 </a:solidFill>
                 <a:latin typeface="League Spartan SemiBold"/>
-                <a:ea typeface="League Spartan SemiBold"/>
-                <a:cs typeface="League Spartan SemiBold"/>
               </a:rPr>
               <a:t>PART 00 OF 00</a:t>
             </a:r>
@@ -50410,8 +48800,6 @@
                   <a:srgbClr val="EC2326"/>
                 </a:solidFill>
                 <a:latin typeface="Poppins"/>
-                <a:ea typeface="Poppins"/>
-                <a:cs typeface="Poppins"/>
               </a:rPr>
               <a:t>00</a:t>
             </a:r>
@@ -50447,8 +48835,6 @@
                   <a:srgbClr val="FFFFFF"/>
                 </a:solidFill>
                 <a:latin typeface="Poppins SemiBold"/>
-                <a:ea typeface="Poppins SemiBold"/>
-                <a:cs typeface="Poppins SemiBold"/>
               </a:rPr>
               <a:t>Section name</a:t>
             </a:r>
@@ -50484,8 +48870,6 @@
                   <a:srgbClr val="96A2B2"/>
                 </a:solidFill>
                 <a:latin typeface="League Spartan Medium"/>
-                <a:ea typeface="League Spartan Medium"/>
-                <a:cs typeface="League Spartan Medium"/>
               </a:rPr>
               <a:t>WHAT THIS PART COVERS</a:t>
             </a:r>
@@ -50553,8 +48937,6 @@
                   <a:srgbClr val="E7EBF0"/>
                 </a:solidFill>
                 <a:latin typeface="Urbanist Medium"/>
-                <a:ea typeface="Urbanist Medium"/>
-                <a:cs typeface="Urbanist Medium"/>
               </a:rPr>
               <a:t>A fact worth leading with</a:t>
             </a:r>
@@ -50590,8 +48972,6 @@
                   <a:srgbClr val="E7EBF0"/>
                 </a:solidFill>
                 <a:latin typeface="Urbanist Medium"/>
-                <a:ea typeface="Urbanist Medium"/>
-                <a:cs typeface="Urbanist Medium"/>
               </a:rPr>
               <a:t>A second fact, the same length</a:t>
             </a:r>
@@ -50651,8 +49031,6 @@
                   <a:srgbClr val="96A2B2"/>
                 </a:solidFill>
                 <a:latin typeface="League Spartan Medium"/>
-                <a:ea typeface="League Spartan Medium"/>
-                <a:cs typeface="League Spartan Medium"/>
               </a:rPr>
               <a:t>04</a:t>
             </a:r>
@@ -50766,8 +49144,6 @@
                   <a:srgbClr val="FFFFFF"/>
                 </a:solidFill>
                 <a:latin typeface="League Spartan SemiBold"/>
-                <a:ea typeface="League Spartan SemiBold"/>
-                <a:cs typeface="League Spartan SemiBold"/>
               </a:rPr>
               <a:t>03</a:t>
             </a:r>
@@ -50803,8 +49179,6 @@
                   <a:srgbClr val="101A2B"/>
                 </a:solidFill>
                 <a:latin typeface="League Spartan SemiBold"/>
-                <a:ea typeface="League Spartan SemiBold"/>
-                <a:cs typeface="League Spartan SemiBold"/>
               </a:rPr>
               <a:t>PART 01 · THE COMPANY</a:t>
             </a:r>
@@ -50894,8 +49268,6 @@
                   <a:srgbClr val="EC2326"/>
                 </a:solidFill>
                 <a:latin typeface="Poppins SemiBold"/>
-                <a:ea typeface="Poppins SemiBold"/>
-                <a:cs typeface="Poppins SemiBold"/>
               </a:rPr>
               <a:t>Why IAQ</a:t>
             </a:r>
@@ -50931,8 +49303,6 @@
                   <a:srgbClr val="64707A"/>
                 </a:solidFill>
                 <a:latin typeface="Urbanist"/>
-                <a:ea typeface="Urbanist"/>
-                <a:cs typeface="Urbanist"/>
               </a:rPr>
               <a:t>The case in one line, and what stands behind it.</a:t>
             </a:r>
@@ -50972,8 +49342,6 @@
                   <a:srgbClr val="101A2B"/>
                 </a:solidFill>
                 <a:latin typeface="Poppins SemiBold"/>
-                <a:ea typeface="Poppins SemiBold"/>
-                <a:cs typeface="Poppins SemiBold"/>
               </a:rPr>
               <a:t>Thirty-one years of building the rooms that cannot fail.</a:t>
             </a:r>
@@ -51013,8 +49381,6 @@
                   <a:srgbClr val="1E2A3D"/>
                 </a:solidFill>
                 <a:latin typeface="Urbanist"/>
-                <a:ea typeface="Urbanist"/>
-                <a:cs typeface="Urbanist"/>
               </a:rPr>
               <a:t>Cleanrooms, process utilities and tool hookup for the industries where contamination control, precision and compliance are absolute. Self-performed, under one contract.</a:t>
             </a:r>
@@ -51075,8 +49441,6 @@
                   <a:srgbClr val="64707A"/>
                 </a:solidFill>
                 <a:latin typeface="League Spartan Medium"/>
-                <a:ea typeface="League Spartan Medium"/>
-                <a:cs typeface="League Spartan Medium"/>
               </a:rPr>
               <a:t>05</a:t>
             </a:r>
@@ -51112,8 +49476,6 @@
                   <a:srgbClr val="64707A"/>
                 </a:solidFill>
                 <a:latin typeface="League Spartan"/>
-                <a:ea typeface="League Spartan"/>
-                <a:cs typeface="League Spartan"/>
               </a:rPr>
               <a:t>STATEMENT</a:t>
             </a:r>
@@ -51227,8 +49589,6 @@
                   <a:srgbClr val="FFFFFF"/>
                 </a:solidFill>
                 <a:latin typeface="League Spartan SemiBold"/>
-                <a:ea typeface="League Spartan SemiBold"/>
-                <a:cs typeface="League Spartan SemiBold"/>
               </a:rPr>
               <a:t>03</a:t>
             </a:r>
@@ -51264,8 +49624,6 @@
                   <a:srgbClr val="101A2B"/>
                 </a:solidFill>
                 <a:latin typeface="League Spartan SemiBold"/>
-                <a:ea typeface="League Spartan SemiBold"/>
-                <a:cs typeface="League Spartan SemiBold"/>
               </a:rPr>
               <a:t>SECTION NAME</a:t>
             </a:r>
@@ -51355,8 +49713,6 @@
                   <a:srgbClr val="64707A"/>
                 </a:solidFill>
                 <a:latin typeface="Poppins SemiBold"/>
-                <a:ea typeface="Poppins SemiBold"/>
-                <a:cs typeface="Poppins SemiBold"/>
               </a:rPr>
               <a:t>Page title</a:t>
             </a:r>
@@ -51392,8 +49748,6 @@
                   <a:srgbClr val="64707A"/>
                 </a:solidFill>
                 <a:latin typeface="Urbanist"/>
-                <a:ea typeface="Urbanist"/>
-                <a:cs typeface="Urbanist"/>
               </a:rPr>
               <a:t>One line under it saying what the page is for.</a:t>
             </a:r>
@@ -51433,8 +49787,6 @@
                   <a:srgbClr val="64707A"/>
                 </a:solidFill>
                 <a:latin typeface="Poppins SemiBold"/>
-                <a:ea typeface="Poppins SemiBold"/>
-                <a:cs typeface="Poppins SemiBold"/>
               </a:rPr>
               <a:t>The statement, two lines at most, said plainly.</a:t>
             </a:r>
@@ -51474,8 +49826,6 @@
                   <a:srgbClr val="64707A"/>
                 </a:solidFill>
                 <a:latin typeface="Urbanist"/>
-                <a:ea typeface="Urbanist"/>
-                <a:cs typeface="Urbanist"/>
               </a:rPr>
               <a:t>Two or three sentences carrying the argument. Say what is true, what it is worth, and leave the rest to the next page.</a:t>
             </a:r>
@@ -51536,8 +49886,6 @@
                   <a:srgbClr val="64707A"/>
                 </a:solidFill>
                 <a:latin typeface="League Spartan Medium"/>
-                <a:ea typeface="League Spartan Medium"/>
-                <a:cs typeface="League Spartan Medium"/>
               </a:rPr>
               <a:t>06</a:t>
             </a:r>
@@ -51573,8 +49921,6 @@
                   <a:srgbClr val="64707A"/>
                 </a:solidFill>
                 <a:latin typeface="League Spartan"/>
-                <a:ea typeface="League Spartan"/>
-                <a:cs typeface="League Spartan"/>
               </a:rPr>
               <a:t>STATEMENT</a:t>
             </a:r>
@@ -51688,8 +50034,6 @@
                   <a:srgbClr val="FFFFFF"/>
                 </a:solidFill>
                 <a:latin typeface="League Spartan SemiBold"/>
-                <a:ea typeface="League Spartan SemiBold"/>
-                <a:cs typeface="League Spartan SemiBold"/>
               </a:rPr>
               <a:t>04</a:t>
             </a:r>
@@ -51725,8 +50069,6 @@
                   <a:srgbClr val="101A2B"/>
                 </a:solidFill>
                 <a:latin typeface="League Spartan SemiBold"/>
-                <a:ea typeface="League Spartan SemiBold"/>
-                <a:cs typeface="League Spartan SemiBold"/>
               </a:rPr>
               <a:t>PART 01 · THE COMPANY</a:t>
             </a:r>
@@ -51816,8 +50158,6 @@
                   <a:srgbClr val="EC2326"/>
                 </a:solidFill>
                 <a:latin typeface="Poppins SemiBold"/>
-                <a:ea typeface="Poppins SemiBold"/>
-                <a:cs typeface="Poppins SemiBold"/>
               </a:rPr>
               <a:t>The year in four numbers</a:t>
             </a:r>
@@ -51853,8 +50193,6 @@
                   <a:srgbClr val="64707A"/>
                 </a:solidFill>
                 <a:latin typeface="Urbanist"/>
-                <a:ea typeface="Urbanist"/>
-                <a:cs typeface="Urbanist"/>
               </a:rPr>
               <a:t>Where the work went in 2026.</a:t>
             </a:r>
@@ -51920,8 +50258,6 @@
                   <a:srgbClr val="EC2326"/>
                 </a:solidFill>
                 <a:latin typeface="League Spartan SemiBold"/>
-                <a:ea typeface="League Spartan SemiBold"/>
-                <a:cs typeface="League Spartan SemiBold"/>
               </a:rPr>
               <a:t>DELIVERED</a:t>
             </a:r>
@@ -51961,8 +50297,6 @@
                   <a:srgbClr val="FFFFFF"/>
                 </a:solidFill>
                 <a:latin typeface="Poppins"/>
-                <a:ea typeface="Poppins"/>
-                <a:cs typeface="Poppins"/>
               </a:rPr>
               <a:t>235</a:t>
             </a:r>
@@ -51972,8 +50306,6 @@
                   <a:srgbClr val="EC2326"/>
                 </a:solidFill>
                 <a:latin typeface="Urbanist Medium"/>
-                <a:ea typeface="Urbanist Medium"/>
-                <a:cs typeface="Urbanist Medium"/>
               </a:rPr>
               <a:t>+</a:t>
             </a:r>
@@ -52009,8 +50341,6 @@
                   <a:srgbClr val="E7EBF0"/>
                 </a:solidFill>
                 <a:latin typeface="Urbanist"/>
-                <a:ea typeface="Urbanist"/>
-                <a:cs typeface="Urbanist"/>
               </a:rPr>
               <a:t>Projects completed since 1995</a:t>
             </a:r>
@@ -52076,8 +50406,6 @@
                   <a:srgbClr val="EC2326"/>
                 </a:solidFill>
                 <a:latin typeface="League Spartan SemiBold"/>
-                <a:ea typeface="League Spartan SemiBold"/>
-                <a:cs typeface="League Spartan SemiBold"/>
               </a:rPr>
               <a:t>BUILT</a:t>
             </a:r>
@@ -52117,8 +50445,6 @@
                   <a:srgbClr val="101A2B"/>
                 </a:solidFill>
                 <a:latin typeface="Poppins"/>
-                <a:ea typeface="Poppins"/>
-                <a:cs typeface="Poppins"/>
               </a:rPr>
               <a:t>1.5</a:t>
             </a:r>
@@ -52128,8 +50454,6 @@
                   <a:srgbClr val="EC2326"/>
                 </a:solidFill>
                 <a:latin typeface="Urbanist Medium"/>
-                <a:ea typeface="Urbanist Medium"/>
-                <a:cs typeface="Urbanist Medium"/>
               </a:rPr>
               <a:t>mil m²</a:t>
             </a:r>
@@ -52165,8 +50489,6 @@
                   <a:srgbClr val="64707A"/>
                 </a:solidFill>
                 <a:latin typeface="Urbanist"/>
-                <a:ea typeface="Urbanist"/>
-                <a:cs typeface="Urbanist"/>
               </a:rPr>
               <a:t>Cleanroom built-up area</a:t>
             </a:r>
@@ -52232,8 +50554,6 @@
                   <a:srgbClr val="EC2326"/>
                 </a:solidFill>
                 <a:latin typeface="League Spartan SemiBold"/>
-                <a:ea typeface="League Spartan SemiBold"/>
-                <a:cs typeface="League Spartan SemiBold"/>
               </a:rPr>
               <a:t>PEOPLE</a:t>
             </a:r>
@@ -52273,8 +50593,6 @@
                   <a:srgbClr val="101A2B"/>
                 </a:solidFill>
                 <a:latin typeface="Poppins"/>
-                <a:ea typeface="Poppins"/>
-                <a:cs typeface="Poppins"/>
               </a:rPr>
               <a:t>530</a:t>
             </a:r>
@@ -52284,8 +50602,6 @@
                   <a:srgbClr val="EC2326"/>
                 </a:solidFill>
                 <a:latin typeface="Urbanist Medium"/>
-                <a:ea typeface="Urbanist Medium"/>
-                <a:cs typeface="Urbanist Medium"/>
               </a:rPr>
               <a:t>+</a:t>
             </a:r>
@@ -52321,8 +50637,6 @@
                   <a:srgbClr val="64707A"/>
                 </a:solidFill>
                 <a:latin typeface="Urbanist"/>
-                <a:ea typeface="Urbanist"/>
-                <a:cs typeface="Urbanist"/>
               </a:rPr>
               <a:t>Engineers, supervisors and crew</a:t>
             </a:r>
@@ -52388,8 +50702,6 @@
                   <a:srgbClr val="EC2326"/>
                 </a:solidFill>
                 <a:latin typeface="League Spartan SemiBold"/>
-                <a:ea typeface="League Spartan SemiBold"/>
-                <a:cs typeface="League Spartan SemiBold"/>
               </a:rPr>
               <a:t>REACH</a:t>
             </a:r>
@@ -52425,8 +50737,6 @@
                   <a:srgbClr val="101A2B"/>
                 </a:solidFill>
                 <a:latin typeface="Poppins"/>
-                <a:ea typeface="Poppins"/>
-                <a:cs typeface="Poppins"/>
               </a:rPr>
               <a:t>7</a:t>
             </a:r>
@@ -52462,8 +50772,6 @@
                   <a:srgbClr val="64707A"/>
                 </a:solidFill>
                 <a:latin typeface="Urbanist"/>
-                <a:ea typeface="Urbanist"/>
-                <a:cs typeface="Urbanist"/>
               </a:rPr>
               <a:t>Offices across three continents</a:t>
             </a:r>
@@ -52499,8 +50807,6 @@
                   <a:srgbClr val="64707A"/>
                 </a:solidFill>
                 <a:latin typeface="League Spartan Medium"/>
-                <a:ea typeface="League Spartan Medium"/>
-                <a:cs typeface="League Spartan Medium"/>
               </a:rPr>
               <a:t>07</a:t>
             </a:r>
@@ -52536,8 +50842,6 @@
                   <a:srgbClr val="64707A"/>
                 </a:solidFill>
                 <a:latin typeface="League Spartan"/>
-                <a:ea typeface="League Spartan"/>
-                <a:cs typeface="League Spartan"/>
               </a:rPr>
               <a:t>HIGHLIGHTS</a:t>
             </a:r>
@@ -52651,8 +50955,6 @@
                   <a:srgbClr val="FFFFFF"/>
                 </a:solidFill>
                 <a:latin typeface="League Spartan SemiBold"/>
-                <a:ea typeface="League Spartan SemiBold"/>
-                <a:cs typeface="League Spartan SemiBold"/>
               </a:rPr>
               <a:t>04</a:t>
             </a:r>
@@ -52688,8 +50990,6 @@
                   <a:srgbClr val="101A2B"/>
                 </a:solidFill>
                 <a:latin typeface="League Spartan SemiBold"/>
-                <a:ea typeface="League Spartan SemiBold"/>
-                <a:cs typeface="League Spartan SemiBold"/>
               </a:rPr>
               <a:t>SECTION NAME</a:t>
             </a:r>
@@ -52779,8 +51079,6 @@
                   <a:srgbClr val="64707A"/>
                 </a:solidFill>
                 <a:latin typeface="Poppins SemiBold"/>
-                <a:ea typeface="Poppins SemiBold"/>
-                <a:cs typeface="Poppins SemiBold"/>
               </a:rPr>
               <a:t>Page title</a:t>
             </a:r>
@@ -52816,8 +51114,6 @@
                   <a:srgbClr val="64707A"/>
                 </a:solidFill>
                 <a:latin typeface="Urbanist"/>
-                <a:ea typeface="Urbanist"/>
-                <a:cs typeface="Urbanist"/>
               </a:rPr>
               <a:t>One line under it saying what the page is for.</a:t>
             </a:r>
@@ -52883,8 +51179,6 @@
                   <a:srgbClr val="64707A"/>
                 </a:solidFill>
                 <a:latin typeface="League Spartan SemiBold"/>
-                <a:ea typeface="League Spartan SemiBold"/>
-                <a:cs typeface="League Spartan SemiBold"/>
               </a:rPr>
               <a:t>LABEL</a:t>
             </a:r>
@@ -52924,8 +51218,6 @@
                   <a:srgbClr val="FFFFFF"/>
                 </a:solidFill>
                 <a:latin typeface="Poppins"/>
-                <a:ea typeface="Poppins"/>
-                <a:cs typeface="Poppins"/>
               </a:rPr>
               <a:t>00</a:t>
             </a:r>
@@ -52935,8 +51227,6 @@
                   <a:srgbClr val="64707A"/>
                 </a:solidFill>
                 <a:latin typeface="Urbanist Medium"/>
-                <a:ea typeface="Urbanist Medium"/>
-                <a:cs typeface="Urbanist Medium"/>
               </a:rPr>
               <a:t>+</a:t>
             </a:r>
@@ -52972,8 +51262,6 @@
                   <a:srgbClr val="64707A"/>
                 </a:solidFill>
                 <a:latin typeface="Urbanist"/>
-                <a:ea typeface="Urbanist"/>
-                <a:cs typeface="Urbanist"/>
               </a:rPr>
               <a:t>What the figure counts, one line</a:t>
             </a:r>
@@ -53039,8 +51327,6 @@
                   <a:srgbClr val="64707A"/>
                 </a:solidFill>
                 <a:latin typeface="League Spartan SemiBold"/>
-                <a:ea typeface="League Spartan SemiBold"/>
-                <a:cs typeface="League Spartan SemiBold"/>
               </a:rPr>
               <a:t>LABEL</a:t>
             </a:r>
@@ -53080,8 +51366,6 @@
                   <a:srgbClr val="101A2B"/>
                 </a:solidFill>
                 <a:latin typeface="Poppins"/>
-                <a:ea typeface="Poppins"/>
-                <a:cs typeface="Poppins"/>
               </a:rPr>
               <a:t>00</a:t>
             </a:r>
@@ -53091,8 +51375,6 @@
                   <a:srgbClr val="64707A"/>
                 </a:solidFill>
                 <a:latin typeface="Urbanist Medium"/>
-                <a:ea typeface="Urbanist Medium"/>
-                <a:cs typeface="Urbanist Medium"/>
               </a:rPr>
               <a:t>unit</a:t>
             </a:r>
@@ -53128,8 +51410,6 @@
                   <a:srgbClr val="64707A"/>
                 </a:solidFill>
                 <a:latin typeface="Urbanist"/>
-                <a:ea typeface="Urbanist"/>
-                <a:cs typeface="Urbanist"/>
               </a:rPr>
               <a:t>What the figure counts, one line</a:t>
             </a:r>
@@ -53195,8 +51475,6 @@
                   <a:srgbClr val="64707A"/>
                 </a:solidFill>
                 <a:latin typeface="League Spartan SemiBold"/>
-                <a:ea typeface="League Spartan SemiBold"/>
-                <a:cs typeface="League Spartan SemiBold"/>
               </a:rPr>
               <a:t>LABEL</a:t>
             </a:r>
@@ -53236,8 +51514,6 @@
                   <a:srgbClr val="101A2B"/>
                 </a:solidFill>
                 <a:latin typeface="Poppins"/>
-                <a:ea typeface="Poppins"/>
-                <a:cs typeface="Poppins"/>
               </a:rPr>
               <a:t>00</a:t>
             </a:r>
@@ -53247,8 +51523,6 @@
                   <a:srgbClr val="64707A"/>
                 </a:solidFill>
                 <a:latin typeface="Urbanist Medium"/>
-                <a:ea typeface="Urbanist Medium"/>
-                <a:cs typeface="Urbanist Medium"/>
               </a:rPr>
               <a:t>%</a:t>
             </a:r>
@@ -53284,8 +51558,6 @@
                   <a:srgbClr val="64707A"/>
                 </a:solidFill>
                 <a:latin typeface="Urbanist"/>
-                <a:ea typeface="Urbanist"/>
-                <a:cs typeface="Urbanist"/>
               </a:rPr>
               <a:t>What the figure counts, one line</a:t>
             </a:r>
@@ -53351,8 +51623,6 @@
                   <a:srgbClr val="64707A"/>
                 </a:solidFill>
                 <a:latin typeface="League Spartan SemiBold"/>
-                <a:ea typeface="League Spartan SemiBold"/>
-                <a:cs typeface="League Spartan SemiBold"/>
               </a:rPr>
               <a:t>LABEL</a:t>
             </a:r>
@@ -53388,8 +51658,6 @@
                   <a:srgbClr val="101A2B"/>
                 </a:solidFill>
                 <a:latin typeface="Poppins"/>
-                <a:ea typeface="Poppins"/>
-                <a:cs typeface="Poppins"/>
               </a:rPr>
               <a:t>00</a:t>
             </a:r>
@@ -53425,8 +51693,6 @@
                   <a:srgbClr val="64707A"/>
                 </a:solidFill>
                 <a:latin typeface="Urbanist"/>
-                <a:ea typeface="Urbanist"/>
-                <a:cs typeface="Urbanist"/>
               </a:rPr>
               <a:t>What the figure counts, one line</a:t>
             </a:r>
@@ -53462,8 +51728,6 @@
                   <a:srgbClr val="64707A"/>
                 </a:solidFill>
                 <a:latin typeface="League Spartan Medium"/>
-                <a:ea typeface="League Spartan Medium"/>
-                <a:cs typeface="League Spartan Medium"/>
               </a:rPr>
               <a:t>08</a:t>
             </a:r>
@@ -53499,8 +51763,6 @@
                   <a:srgbClr val="64707A"/>
                 </a:solidFill>
                 <a:latin typeface="League Spartan"/>
-                <a:ea typeface="League Spartan"/>
-                <a:cs typeface="League Spartan"/>
               </a:rPr>
               <a:t>HIGHLIGHTS</a:t>
             </a:r>
